--- a/Mini-DDSM-CSDE2026-Presentation.pptx
+++ b/Mini-DDSM-CSDE2026-Presentation.pptx
@@ -1511,7 +1511,7 @@
           <a:p>
             <a:r>
               <a:rPr lang="en-US" dirty="0"/>
-              <a:t/>
+              <a:t>Good morning. I'm Sheikh Noor Abdullah from BAUET. Our paper asks a simple question: how good is breast-cancer classification on Mini-DDSM when we evaluate it honestly, patient by patient?</a:t>
             </a:r>
             <a:endParaRPr lang="en-US" dirty="0"/>
           </a:p>
@@ -1599,7 +1599,7 @@
           <a:p>
             <a:r>
               <a:rPr lang="en-US" dirty="0"/>
-              <a:t/>
+              <a:t>Platt scaling, fit only on inner validation, lowers Brier from 0.136 to 0.124 and ECE from 0.075 to 0.023. Decision-curve analysis shows positive net benefit from 0.05 to 0.80 in every seed — still internal evidence only.</a:t>
             </a:r>
             <a:endParaRPr lang="en-US" dirty="0"/>
           </a:p>
@@ -1687,7 +1687,7 @@
           <a:p>
             <a:r>
               <a:rPr lang="en-US" dirty="0"/>
-              <a:t/>
+              <a:t>Grad-CAM gives a qualitative look. For true positives, attention concentrates on the lesion; for false negatives it's near the lesion but too weak. We present this as a transparency aid, not validated localisation.</a:t>
             </a:r>
             <a:endParaRPr lang="en-US" dirty="0"/>
           </a:p>
@@ -1775,7 +1775,7 @@
           <a:p>
             <a:r>
               <a:rPr lang="en-US" dirty="0"/>
-              <a:t/>
+              <a:t>Limitations: one dataset, three folds, eight-image identifiers kept as conservative groups, and Grad-CAM is qualitative. Next we'll apply the same protocol to CBIS-DDSM and INbreast with radiologist review.</a:t>
             </a:r>
             <a:endParaRPr lang="en-US" dirty="0"/>
           </a:p>
@@ -1863,7 +1863,7 @@
           <a:p>
             <a:r>
               <a:rPr lang="en-US" dirty="0"/>
-              <a:t/>
+              <a:t>To summarise: audit first, a simple ensemble wins, thresholds matter, and we're honest about the limits. Everything — code, splits and audit files — is public. Scan the QR code to try the live demo on your own phone. Thank you; happy to take questions.</a:t>
             </a:r>
             <a:endParaRPr lang="en-US" dirty="0"/>
           </a:p>
@@ -1951,7 +1951,7 @@
           <a:p>
             <a:r>
               <a:rPr lang="en-US" dirty="0"/>
-              <a:t/>
+              <a:t>That's the talk. I'm glad to take questions — on the patient-grouping protocol, the ensemble, the thresholds, or what we'd do differently on a second dataset.</a:t>
             </a:r>
             <a:endParaRPr lang="en-US" dirty="0"/>
           </a:p>
@@ -2039,7 +2039,7 @@
           <a:p>
             <a:r>
               <a:rPr lang="en-US" dirty="0"/>
-              <a:t/>
+              <a:t>Breast cancer is the most diagnosed cancer in women — 2.43 million new cases in GLOBOCAN 2024. Deep learning can help screening, but reported accuracy depends heavily on how the data are split.</a:t>
             </a:r>
             <a:endParaRPr lang="en-US" dirty="0"/>
           </a:p>
@@ -2127,7 +2127,7 @@
           <a:p>
             <a:r>
               <a:rPr lang="en-US" dirty="0"/>
-              <a:t/>
+              <a:t>Here's the catch. Mini-DDSM has several views per patient. If a patient's CC and MLO images fall on both sides of the split, the model is partly tested on someone it has already seen. Several prior papers report 0.87 to 0.99 accuracy without saying whether they grouped by patient.</a:t>
             </a:r>
             <a:endParaRPr lang="en-US" dirty="0"/>
           </a:p>
@@ -2215,7 +2215,7 @@
           <a:p>
             <a:r>
               <a:rPr lang="en-US" dirty="0"/>
-              <a:t/>
+              <a:t>So before building any fold, we audited every identifier. Three raw IDs appear in both Benign and Cancer folders — we key groups by class folder plus ID. Four eight-image blocks are kept intact. Fourteen exact duplicate pairs, none crossing groups. Result: 2,417 patient groups and zero leakage on all nine splits.</a:t>
             </a:r>
             <a:endParaRPr lang="en-US" dirty="0"/>
           </a:p>
@@ -2303,7 +2303,7 @@
           <a:p>
             <a:r>
               <a:rPr lang="en-US" dirty="0"/>
-              <a:t/>
+              <a:t>The pipeline is deliberately simple. Otsu crop to 512, four-view test-time augmentation, two ImageNet backbones, average to a patient score, then a fixed 50/50 ensemble — no weights tuned on test data.</a:t>
             </a:r>
             <a:endParaRPr lang="en-US" dirty="0"/>
           </a:p>
@@ -2391,7 +2391,7 @@
           <a:p>
             <a:r>
               <a:rPr lang="en-US" dirty="0"/>
-              <a:t/>
+              <a:t>Evaluation is nested. Each outer training fold is split into inner train and inner validation by patient. Checkpoints, Youden thresholds and Platt scaling come only from inner validation, then are frozen. The outer test fold is untouched until the end. We repeat everything with three seeds.</a:t>
             </a:r>
             <a:endParaRPr lang="en-US" dirty="0"/>
           </a:p>
@@ -2479,7 +2479,7 @@
           <a:p>
             <a:r>
               <a:rPr lang="en-US" dirty="0"/>
-              <a:t/>
+              <a:t>Across three seeds, the ensemble reaches ROC-AUC 0.891 plus-minus 0.008 and PR-AUC 0.830. That beats EfficientNet-B4 at 0.882, ConvNeXtV2 at 0.857 and the fold-selected single best at 0.878.</a:t>
             </a:r>
             <a:endParaRPr lang="en-US" dirty="0"/>
           </a:p>
@@ -2567,7 +2567,7 @@
           <a:p>
             <a:r>
               <a:rPr lang="en-US" dirty="0"/>
-              <a:t/>
+              <a:t>The ablation shows the fixed average wins on five of six metrics. EfficientNet alone stays more sensitive at 0.5 — so the ensemble improves discrimination but doesn't dominate every operating point.</a:t>
             </a:r>
             <a:endParaRPr lang="en-US" dirty="0"/>
           </a:p>
@@ -2655,7 +2655,7 @@
           <a:p>
             <a:r>
               <a:rPr lang="en-US" dirty="0"/>
-              <a:t/>
+              <a:t>Ranking isn't the whole story. At 0.5 the model is specific — 92.6% — but misses many cancers. Using the Youden threshold chosen on training-side validation raises sensitivity from 0.62 to 0.79 and cuts missed cancers from about 343 to 191 per seed.</a:t>
             </a:r>
             <a:endParaRPr lang="en-US" dirty="0"/>
           </a:p>
@@ -3069,7 +3069,7 @@
       </p:sp>
       <p:sp>
         <p:nvSpPr>
-          <p:cNvPr id="3" name="Shape 1"/>
+          <p:cNvPr id="4" name="Shape 1"/>
           <p:cNvSpPr/>
           <p:nvPr/>
         </p:nvSpPr>
@@ -3096,7 +3096,7 @@
       </p:sp>
       <p:sp>
         <p:nvSpPr>
-          <p:cNvPr id="4" name="Text 2"/>
+          <p:cNvPr id="5" name="Text 2"/>
           <p:cNvSpPr/>
           <p:nvPr/>
         </p:nvSpPr>
@@ -3135,7 +3135,7 @@
       </p:sp>
       <p:sp>
         <p:nvSpPr>
-          <p:cNvPr id="5" name="Text 3"/>
+          <p:cNvPr id="6" name="Text 3"/>
           <p:cNvSpPr/>
           <p:nvPr/>
         </p:nvSpPr>
@@ -3211,7 +3211,7 @@
       </p:sp>
       <p:sp>
         <p:nvSpPr>
-          <p:cNvPr id="6" name="Text 4"/>
+          <p:cNvPr id="7" name="Text 4"/>
           <p:cNvSpPr/>
           <p:nvPr/>
         </p:nvSpPr>
@@ -3250,7 +3250,7 @@
       </p:sp>
       <p:sp>
         <p:nvSpPr>
-          <p:cNvPr id="7" name="Text 5"/>
+          <p:cNvPr id="8" name="Text 5"/>
           <p:cNvSpPr/>
           <p:nvPr/>
         </p:nvSpPr>
@@ -3289,7 +3289,7 @@
       </p:sp>
       <p:sp>
         <p:nvSpPr>
-          <p:cNvPr id="8" name="Shape 6"/>
+          <p:cNvPr id="9" name="Shape 6"/>
           <p:cNvSpPr/>
           <p:nvPr/>
         </p:nvSpPr>
@@ -3316,7 +3316,7 @@
       </p:sp>
       <p:sp>
         <p:nvSpPr>
-          <p:cNvPr id="9" name="Text 7"/>
+          <p:cNvPr id="10" name="Text 7"/>
           <p:cNvSpPr/>
           <p:nvPr/>
         </p:nvSpPr>
@@ -3355,7 +3355,7 @@
       </p:sp>
       <p:sp>
         <p:nvSpPr>
-          <p:cNvPr id="10" name="Text 8"/>
+          <p:cNvPr id="11" name="Text 8"/>
           <p:cNvSpPr/>
           <p:nvPr/>
         </p:nvSpPr>
@@ -3394,7 +3394,7 @@
       </p:sp>
       <p:sp>
         <p:nvSpPr>
-          <p:cNvPr id="11" name="Shape 9"/>
+          <p:cNvPr id="12" name="Shape 9"/>
           <p:cNvSpPr/>
           <p:nvPr/>
         </p:nvSpPr>
@@ -3421,7 +3421,7 @@
       </p:sp>
       <p:sp>
         <p:nvSpPr>
-          <p:cNvPr id="12" name="Text 10"/>
+          <p:cNvPr id="13" name="Text 10"/>
           <p:cNvSpPr/>
           <p:nvPr/>
         </p:nvSpPr>
@@ -3460,7 +3460,7 @@
       </p:sp>
       <p:sp>
         <p:nvSpPr>
-          <p:cNvPr id="13" name="Text 11"/>
+          <p:cNvPr id="14" name="Text 11"/>
           <p:cNvSpPr/>
           <p:nvPr/>
         </p:nvSpPr>
@@ -3499,7 +3499,7 @@
       </p:sp>
       <p:sp>
         <p:nvSpPr>
-          <p:cNvPr id="14" name="Shape 12"/>
+          <p:cNvPr id="15" name="Shape 12"/>
           <p:cNvSpPr/>
           <p:nvPr/>
         </p:nvSpPr>
@@ -3526,7 +3526,7 @@
       </p:sp>
       <p:sp>
         <p:nvSpPr>
-          <p:cNvPr id="15" name="Text 13"/>
+          <p:cNvPr id="16" name="Text 13"/>
           <p:cNvSpPr/>
           <p:nvPr/>
         </p:nvSpPr>
@@ -3565,7 +3565,7 @@
       </p:sp>
       <p:sp>
         <p:nvSpPr>
-          <p:cNvPr id="16" name="Text 14"/>
+          <p:cNvPr id="17" name="Text 14"/>
           <p:cNvSpPr/>
           <p:nvPr/>
         </p:nvSpPr>
@@ -3675,7 +3675,7 @@
       </p:sp>
       <p:sp>
         <p:nvSpPr>
-          <p:cNvPr id="3" name="Shape 1"/>
+          <p:cNvPr id="4" name="Shape 1"/>
           <p:cNvSpPr/>
           <p:nvPr/>
         </p:nvSpPr>
@@ -3698,7 +3698,7 @@
       </p:sp>
       <p:sp>
         <p:nvSpPr>
-          <p:cNvPr id="4" name="Text 2"/>
+          <p:cNvPr id="5" name="Text 2"/>
           <p:cNvSpPr/>
           <p:nvPr/>
         </p:nvSpPr>
@@ -3737,7 +3737,7 @@
       </p:sp>
       <p:sp>
         <p:nvSpPr>
-          <p:cNvPr id="5" name="Text 3"/>
+          <p:cNvPr id="6" name="Text 3"/>
           <p:cNvSpPr/>
           <p:nvPr/>
         </p:nvSpPr>
@@ -3779,7 +3779,7 @@
       </p:sp>
       <p:sp>
         <p:nvSpPr>
-          <p:cNvPr id="6" name="Shape 4"/>
+          <p:cNvPr id="7" name="Shape 4"/>
           <p:cNvSpPr/>
           <p:nvPr/>
         </p:nvSpPr>
@@ -3806,7 +3806,7 @@
       </p:sp>
       <p:sp>
         <p:nvSpPr>
-          <p:cNvPr id="7" name="Text 5"/>
+          <p:cNvPr id="8" name="Text 5"/>
           <p:cNvSpPr/>
           <p:nvPr/>
         </p:nvSpPr>
@@ -3845,7 +3845,7 @@
       </p:sp>
       <p:sp>
         <p:nvSpPr>
-          <p:cNvPr id="8" name="Text 6"/>
+          <p:cNvPr id="9" name="Text 6"/>
           <p:cNvSpPr/>
           <p:nvPr/>
         </p:nvSpPr>
@@ -3884,7 +3884,7 @@
       </p:sp>
       <p:sp>
         <p:nvSpPr>
-          <p:cNvPr id="9" name="Shape 7"/>
+          <p:cNvPr id="10" name="Shape 7"/>
           <p:cNvSpPr/>
           <p:nvPr/>
         </p:nvSpPr>
@@ -3911,7 +3911,7 @@
       </p:sp>
       <p:sp>
         <p:nvSpPr>
-          <p:cNvPr id="10" name="Text 8"/>
+          <p:cNvPr id="11" name="Text 8"/>
           <p:cNvSpPr/>
           <p:nvPr/>
         </p:nvSpPr>
@@ -3950,7 +3950,7 @@
       </p:sp>
       <p:sp>
         <p:nvSpPr>
-          <p:cNvPr id="11" name="Text 9"/>
+          <p:cNvPr id="12" name="Text 9"/>
           <p:cNvSpPr/>
           <p:nvPr/>
         </p:nvSpPr>
@@ -3989,7 +3989,7 @@
       </p:sp>
       <p:sp>
         <p:nvSpPr>
-          <p:cNvPr id="12" name="Shape 10"/>
+          <p:cNvPr id="13" name="Shape 10"/>
           <p:cNvSpPr/>
           <p:nvPr/>
         </p:nvSpPr>
@@ -4016,7 +4016,7 @@
       </p:sp>
       <p:sp>
         <p:nvSpPr>
-          <p:cNvPr id="13" name="Text 11"/>
+          <p:cNvPr id="14" name="Text 11"/>
           <p:cNvSpPr/>
           <p:nvPr/>
         </p:nvSpPr>
@@ -4055,7 +4055,7 @@
       </p:sp>
       <p:sp>
         <p:nvSpPr>
-          <p:cNvPr id="14" name="Text 12"/>
+          <p:cNvPr id="15" name="Text 12"/>
           <p:cNvSpPr/>
           <p:nvPr/>
         </p:nvSpPr>
@@ -4094,7 +4094,7 @@
       </p:sp>
       <p:sp>
         <p:nvSpPr>
-          <p:cNvPr id="15" name="Text 13"/>
+          <p:cNvPr id="16" name="Text 13"/>
           <p:cNvSpPr/>
           <p:nvPr/>
         </p:nvSpPr>
@@ -4204,7 +4204,7 @@
       </p:sp>
       <p:sp>
         <p:nvSpPr>
-          <p:cNvPr id="3" name="Shape 1"/>
+          <p:cNvPr id="4" name="Shape 1"/>
           <p:cNvSpPr/>
           <p:nvPr/>
         </p:nvSpPr>
@@ -4227,7 +4227,7 @@
       </p:sp>
       <p:sp>
         <p:nvSpPr>
-          <p:cNvPr id="4" name="Text 2"/>
+          <p:cNvPr id="5" name="Text 2"/>
           <p:cNvSpPr/>
           <p:nvPr/>
         </p:nvSpPr>
@@ -4266,7 +4266,7 @@
       </p:sp>
       <p:sp>
         <p:nvSpPr>
-          <p:cNvPr id="5" name="Text 3"/>
+          <p:cNvPr id="6" name="Text 3"/>
           <p:cNvSpPr/>
           <p:nvPr/>
         </p:nvSpPr>
@@ -4308,7 +4308,7 @@
       </p:sp>
       <p:pic>
         <p:nvPicPr>
-          <p:cNvPr id="6" name="Image 0" descr="preencoded.png">    </p:cNvPr>
+          <p:cNvPr id="7" name="Image 0" descr="preencoded.png">    </p:cNvPr>
           <p:cNvPicPr>
             <a:picLocks noChangeAspect="1"/>
           </p:cNvPicPr>
@@ -4331,7 +4331,7 @@
       </p:pic>
       <p:sp>
         <p:nvSpPr>
-          <p:cNvPr id="7" name="Text 4"/>
+          <p:cNvPr id="8" name="Text 4"/>
           <p:cNvSpPr/>
           <p:nvPr/>
         </p:nvSpPr>
@@ -4370,7 +4370,7 @@
       </p:sp>
       <p:pic>
         <p:nvPicPr>
-          <p:cNvPr id="8" name="Image 1" descr="preencoded.png">    </p:cNvPr>
+          <p:cNvPr id="9" name="Image 1" descr="preencoded.png">    </p:cNvPr>
           <p:cNvPicPr>
             <a:picLocks noChangeAspect="1"/>
           </p:cNvPicPr>
@@ -4393,7 +4393,7 @@
       </p:pic>
       <p:sp>
         <p:nvSpPr>
-          <p:cNvPr id="9" name="Text 5"/>
+          <p:cNvPr id="10" name="Text 5"/>
           <p:cNvSpPr/>
           <p:nvPr/>
         </p:nvSpPr>
@@ -4432,7 +4432,7 @@
       </p:sp>
       <p:pic>
         <p:nvPicPr>
-          <p:cNvPr id="10" name="Image 2" descr="preencoded.png">    </p:cNvPr>
+          <p:cNvPr id="11" name="Image 2" descr="preencoded.png">    </p:cNvPr>
           <p:cNvPicPr>
             <a:picLocks noChangeAspect="1"/>
           </p:cNvPicPr>
@@ -4455,7 +4455,7 @@
       </p:pic>
       <p:sp>
         <p:nvSpPr>
-          <p:cNvPr id="11" name="Text 6"/>
+          <p:cNvPr id="12" name="Text 6"/>
           <p:cNvSpPr/>
           <p:nvPr/>
         </p:nvSpPr>
@@ -4494,7 +4494,7 @@
       </p:sp>
       <p:pic>
         <p:nvPicPr>
-          <p:cNvPr id="12" name="Image 3" descr="preencoded.png">    </p:cNvPr>
+          <p:cNvPr id="13" name="Image 3" descr="preencoded.png">    </p:cNvPr>
           <p:cNvPicPr>
             <a:picLocks noChangeAspect="1"/>
           </p:cNvPicPr>
@@ -4517,7 +4517,7 @@
       </p:pic>
       <p:sp>
         <p:nvSpPr>
-          <p:cNvPr id="13" name="Text 7"/>
+          <p:cNvPr id="14" name="Text 7"/>
           <p:cNvSpPr/>
           <p:nvPr/>
         </p:nvSpPr>
@@ -4627,7 +4627,7 @@
       </p:sp>
       <p:sp>
         <p:nvSpPr>
-          <p:cNvPr id="3" name="Shape 1"/>
+          <p:cNvPr id="4" name="Shape 1"/>
           <p:cNvSpPr/>
           <p:nvPr/>
         </p:nvSpPr>
@@ -4650,7 +4650,7 @@
       </p:sp>
       <p:sp>
         <p:nvSpPr>
-          <p:cNvPr id="4" name="Text 2"/>
+          <p:cNvPr id="5" name="Text 2"/>
           <p:cNvSpPr/>
           <p:nvPr/>
         </p:nvSpPr>
@@ -4689,7 +4689,7 @@
       </p:sp>
       <p:sp>
         <p:nvSpPr>
-          <p:cNvPr id="5" name="Text 3"/>
+          <p:cNvPr id="6" name="Text 3"/>
           <p:cNvSpPr/>
           <p:nvPr/>
         </p:nvSpPr>
@@ -4731,7 +4731,7 @@
       </p:sp>
       <p:sp>
         <p:nvSpPr>
-          <p:cNvPr id="6" name="Shape 4"/>
+          <p:cNvPr id="7" name="Shape 4"/>
           <p:cNvSpPr/>
           <p:nvPr/>
         </p:nvSpPr>
@@ -4758,7 +4758,7 @@
       </p:sp>
       <p:sp>
         <p:nvSpPr>
-          <p:cNvPr id="7" name="Text 5"/>
+          <p:cNvPr id="8" name="Text 5"/>
           <p:cNvSpPr/>
           <p:nvPr/>
         </p:nvSpPr>
@@ -4797,7 +4797,7 @@
       </p:sp>
       <p:sp>
         <p:nvSpPr>
-          <p:cNvPr id="8" name="Text 6"/>
+          <p:cNvPr id="9" name="Text 6"/>
           <p:cNvSpPr/>
           <p:nvPr/>
         </p:nvSpPr>
@@ -4836,7 +4836,7 @@
       </p:sp>
       <p:sp>
         <p:nvSpPr>
-          <p:cNvPr id="9" name="Shape 7"/>
+          <p:cNvPr id="10" name="Shape 7"/>
           <p:cNvSpPr/>
           <p:nvPr/>
         </p:nvSpPr>
@@ -4863,7 +4863,7 @@
       </p:sp>
       <p:sp>
         <p:nvSpPr>
-          <p:cNvPr id="10" name="Text 8"/>
+          <p:cNvPr id="11" name="Text 8"/>
           <p:cNvSpPr/>
           <p:nvPr/>
         </p:nvSpPr>
@@ -4902,7 +4902,7 @@
       </p:sp>
       <p:sp>
         <p:nvSpPr>
-          <p:cNvPr id="11" name="Text 9"/>
+          <p:cNvPr id="12" name="Text 9"/>
           <p:cNvSpPr/>
           <p:nvPr/>
         </p:nvSpPr>
@@ -4941,7 +4941,7 @@
       </p:sp>
       <p:sp>
         <p:nvSpPr>
-          <p:cNvPr id="12" name="Shape 10"/>
+          <p:cNvPr id="13" name="Shape 10"/>
           <p:cNvSpPr/>
           <p:nvPr/>
         </p:nvSpPr>
@@ -4968,7 +4968,7 @@
       </p:sp>
       <p:sp>
         <p:nvSpPr>
-          <p:cNvPr id="13" name="Text 11"/>
+          <p:cNvPr id="14" name="Text 11"/>
           <p:cNvSpPr/>
           <p:nvPr/>
         </p:nvSpPr>
@@ -5007,7 +5007,7 @@
       </p:sp>
       <p:sp>
         <p:nvSpPr>
-          <p:cNvPr id="14" name="Text 12"/>
+          <p:cNvPr id="15" name="Text 12"/>
           <p:cNvSpPr/>
           <p:nvPr/>
         </p:nvSpPr>
@@ -5046,7 +5046,7 @@
       </p:sp>
       <p:sp>
         <p:nvSpPr>
-          <p:cNvPr id="15" name="Shape 13"/>
+          <p:cNvPr id="16" name="Shape 13"/>
           <p:cNvSpPr/>
           <p:nvPr/>
         </p:nvSpPr>
@@ -5073,7 +5073,7 @@
       </p:sp>
       <p:sp>
         <p:nvSpPr>
-          <p:cNvPr id="16" name="Text 14"/>
+          <p:cNvPr id="17" name="Text 14"/>
           <p:cNvSpPr/>
           <p:nvPr/>
         </p:nvSpPr>
@@ -5112,7 +5112,7 @@
       </p:sp>
       <p:sp>
         <p:nvSpPr>
-          <p:cNvPr id="17" name="Text 15"/>
+          <p:cNvPr id="18" name="Text 15"/>
           <p:cNvSpPr/>
           <p:nvPr/>
         </p:nvSpPr>
@@ -5151,7 +5151,7 @@
       </p:sp>
       <p:sp>
         <p:nvSpPr>
-          <p:cNvPr id="18" name="Text 16"/>
+          <p:cNvPr id="19" name="Text 16"/>
           <p:cNvSpPr/>
           <p:nvPr/>
         </p:nvSpPr>
@@ -5261,7 +5261,7 @@
       </p:sp>
       <p:sp>
         <p:nvSpPr>
-          <p:cNvPr id="3" name="Shape 1"/>
+          <p:cNvPr id="4" name="Shape 1"/>
           <p:cNvSpPr/>
           <p:nvPr/>
         </p:nvSpPr>
@@ -5284,7 +5284,7 @@
       </p:sp>
       <p:sp>
         <p:nvSpPr>
-          <p:cNvPr id="4" name="Text 2"/>
+          <p:cNvPr id="5" name="Text 2"/>
           <p:cNvSpPr/>
           <p:nvPr/>
         </p:nvSpPr>
@@ -5323,7 +5323,7 @@
       </p:sp>
       <p:sp>
         <p:nvSpPr>
-          <p:cNvPr id="5" name="Shape 3"/>
+          <p:cNvPr id="6" name="Shape 3"/>
           <p:cNvSpPr/>
           <p:nvPr/>
         </p:nvSpPr>
@@ -5350,7 +5350,7 @@
       </p:sp>
       <p:sp>
         <p:nvSpPr>
-          <p:cNvPr id="6" name="Text 4"/>
+          <p:cNvPr id="7" name="Text 4"/>
           <p:cNvSpPr/>
           <p:nvPr/>
         </p:nvSpPr>
@@ -5391,7 +5391,7 @@
       </p:sp>
       <p:sp>
         <p:nvSpPr>
-          <p:cNvPr id="7" name="Text 5"/>
+          <p:cNvPr id="8" name="Text 5"/>
           <p:cNvSpPr/>
           <p:nvPr/>
         </p:nvSpPr>
@@ -5430,7 +5430,7 @@
       </p:sp>
       <p:sp>
         <p:nvSpPr>
-          <p:cNvPr id="8" name="Text 6"/>
+          <p:cNvPr id="9" name="Text 6"/>
           <p:cNvSpPr/>
           <p:nvPr/>
         </p:nvSpPr>
@@ -5469,7 +5469,7 @@
       </p:sp>
       <p:sp>
         <p:nvSpPr>
-          <p:cNvPr id="9" name="Shape 7"/>
+          <p:cNvPr id="10" name="Shape 7"/>
           <p:cNvSpPr/>
           <p:nvPr/>
         </p:nvSpPr>
@@ -5496,7 +5496,7 @@
       </p:sp>
       <p:sp>
         <p:nvSpPr>
-          <p:cNvPr id="10" name="Text 8"/>
+          <p:cNvPr id="11" name="Text 8"/>
           <p:cNvSpPr/>
           <p:nvPr/>
         </p:nvSpPr>
@@ -5537,7 +5537,7 @@
       </p:sp>
       <p:sp>
         <p:nvSpPr>
-          <p:cNvPr id="11" name="Text 9"/>
+          <p:cNvPr id="12" name="Text 9"/>
           <p:cNvSpPr/>
           <p:nvPr/>
         </p:nvSpPr>
@@ -5576,7 +5576,7 @@
       </p:sp>
       <p:sp>
         <p:nvSpPr>
-          <p:cNvPr id="12" name="Text 10"/>
+          <p:cNvPr id="13" name="Text 10"/>
           <p:cNvSpPr/>
           <p:nvPr/>
         </p:nvSpPr>
@@ -5615,7 +5615,7 @@
       </p:sp>
       <p:sp>
         <p:nvSpPr>
-          <p:cNvPr id="13" name="Shape 11"/>
+          <p:cNvPr id="14" name="Shape 11"/>
           <p:cNvSpPr/>
           <p:nvPr/>
         </p:nvSpPr>
@@ -5642,7 +5642,7 @@
       </p:sp>
       <p:sp>
         <p:nvSpPr>
-          <p:cNvPr id="14" name="Text 12"/>
+          <p:cNvPr id="15" name="Text 12"/>
           <p:cNvSpPr/>
           <p:nvPr/>
         </p:nvSpPr>
@@ -5683,7 +5683,7 @@
       </p:sp>
       <p:sp>
         <p:nvSpPr>
-          <p:cNvPr id="15" name="Text 13"/>
+          <p:cNvPr id="16" name="Text 13"/>
           <p:cNvSpPr/>
           <p:nvPr/>
         </p:nvSpPr>
@@ -5722,7 +5722,7 @@
       </p:sp>
       <p:sp>
         <p:nvSpPr>
-          <p:cNvPr id="16" name="Text 14"/>
+          <p:cNvPr id="17" name="Text 14"/>
           <p:cNvSpPr/>
           <p:nvPr/>
         </p:nvSpPr>
@@ -5761,7 +5761,7 @@
       </p:sp>
       <p:sp>
         <p:nvSpPr>
-          <p:cNvPr id="17" name="Shape 15"/>
+          <p:cNvPr id="18" name="Shape 15"/>
           <p:cNvSpPr/>
           <p:nvPr/>
         </p:nvSpPr>
@@ -5788,7 +5788,7 @@
       </p:sp>
       <p:sp>
         <p:nvSpPr>
-          <p:cNvPr id="18" name="Text 16"/>
+          <p:cNvPr id="19" name="Text 16"/>
           <p:cNvSpPr/>
           <p:nvPr/>
         </p:nvSpPr>
@@ -5829,7 +5829,7 @@
       </p:sp>
       <p:sp>
         <p:nvSpPr>
-          <p:cNvPr id="19" name="Text 17"/>
+          <p:cNvPr id="20" name="Text 17"/>
           <p:cNvSpPr/>
           <p:nvPr/>
         </p:nvSpPr>
@@ -5868,7 +5868,7 @@
       </p:sp>
       <p:sp>
         <p:nvSpPr>
-          <p:cNvPr id="20" name="Text 18"/>
+          <p:cNvPr id="21" name="Text 18"/>
           <p:cNvSpPr/>
           <p:nvPr/>
         </p:nvSpPr>
@@ -5907,7 +5907,7 @@
       </p:sp>
       <p:sp>
         <p:nvSpPr>
-          <p:cNvPr id="21" name="Text 19"/>
+          <p:cNvPr id="22" name="Text 19"/>
           <p:cNvSpPr/>
           <p:nvPr/>
         </p:nvSpPr>
@@ -5946,7 +5946,7 @@
       </p:sp>
       <p:sp>
         <p:nvSpPr>
-          <p:cNvPr id="22" name="Text 20"/>
+          <p:cNvPr id="23" name="Text 20"/>
           <p:cNvSpPr/>
           <p:nvPr/>
         </p:nvSpPr>
@@ -6006,7 +6006,7 @@
       </p:sp>
       <p:sp>
         <p:nvSpPr>
-          <p:cNvPr id="23" name="Shape 21"/>
+          <p:cNvPr id="24" name="Shape 21"/>
           <p:cNvSpPr/>
           <p:nvPr/>
         </p:nvSpPr>
@@ -6033,7 +6033,7 @@
       </p:sp>
       <p:sp>
         <p:nvSpPr>
-          <p:cNvPr id="24" name="Text 22"/>
+          <p:cNvPr id="25" name="Text 22"/>
           <p:cNvSpPr/>
           <p:nvPr/>
         </p:nvSpPr>
@@ -6072,7 +6072,7 @@
       </p:sp>
       <p:pic>
         <p:nvPicPr>
-          <p:cNvPr id="25" name="Image 0" descr="preencoded.png">    </p:cNvPr>
+          <p:cNvPr id="26" name="Image 0" descr="preencoded.png">    </p:cNvPr>
           <p:cNvPicPr>
             <a:picLocks noChangeAspect="1"/>
           </p:cNvPicPr>
@@ -6096,7 +6096,7 @@
       </p:pic>
       <p:sp>
         <p:nvSpPr>
-          <p:cNvPr id="26" name="Text 23"/>
+          <p:cNvPr id="27" name="Text 23"/>
           <p:cNvSpPr/>
           <p:nvPr/>
         </p:nvSpPr>
@@ -6135,7 +6135,7 @@
       </p:sp>
       <p:sp>
         <p:nvSpPr>
-          <p:cNvPr id="27" name="Text 24"/>
+          <p:cNvPr id="28" name="Text 24"/>
           <p:cNvSpPr/>
           <p:nvPr/>
         </p:nvSpPr>
@@ -6245,7 +6245,7 @@
       </p:sp>
       <p:sp>
         <p:nvSpPr>
-          <p:cNvPr id="3" name="Text 1"/>
+          <p:cNvPr id="4" name="Text 1"/>
           <p:cNvSpPr/>
           <p:nvPr/>
         </p:nvSpPr>
@@ -6286,7 +6286,7 @@
       </p:sp>
       <p:sp>
         <p:nvSpPr>
-          <p:cNvPr id="4" name="Shape 2"/>
+          <p:cNvPr id="5" name="Shape 2"/>
           <p:cNvSpPr/>
           <p:nvPr/>
         </p:nvSpPr>
@@ -6309,7 +6309,7 @@
       </p:sp>
       <p:sp>
         <p:nvSpPr>
-          <p:cNvPr id="5" name="Text 3"/>
+          <p:cNvPr id="6" name="Text 3"/>
           <p:cNvSpPr/>
           <p:nvPr/>
         </p:nvSpPr>
@@ -6348,7 +6348,7 @@
       </p:sp>
       <p:sp>
         <p:nvSpPr>
-          <p:cNvPr id="6" name="Text 4"/>
+          <p:cNvPr id="7" name="Text 4"/>
           <p:cNvSpPr/>
           <p:nvPr/>
         </p:nvSpPr>
@@ -6415,7 +6415,7 @@
       </p:sp>
       <p:sp>
         <p:nvSpPr>
-          <p:cNvPr id="7" name="Text 5"/>
+          <p:cNvPr id="8" name="Text 5"/>
           <p:cNvSpPr/>
           <p:nvPr/>
         </p:nvSpPr>
@@ -6457,7 +6457,7 @@
       </p:sp>
       <p:sp>
         <p:nvSpPr>
-          <p:cNvPr id="8" name="Shape 6"/>
+          <p:cNvPr id="9" name="Shape 6"/>
           <p:cNvSpPr/>
           <p:nvPr/>
         </p:nvSpPr>
@@ -6484,7 +6484,7 @@
       </p:sp>
       <p:sp>
         <p:nvSpPr>
-          <p:cNvPr id="9" name="Text 7"/>
+          <p:cNvPr id="10" name="Text 7"/>
           <p:cNvSpPr/>
           <p:nvPr/>
         </p:nvSpPr>
@@ -6523,7 +6523,7 @@
       </p:sp>
       <p:sp>
         <p:nvSpPr>
-          <p:cNvPr id="10" name="Text 8"/>
+          <p:cNvPr id="11" name="Text 8"/>
           <p:cNvSpPr/>
           <p:nvPr/>
         </p:nvSpPr>
@@ -6562,7 +6562,7 @@
       </p:sp>
       <p:sp>
         <p:nvSpPr>
-          <p:cNvPr id="11" name="Shape 9"/>
+          <p:cNvPr id="12" name="Shape 9"/>
           <p:cNvSpPr/>
           <p:nvPr/>
         </p:nvSpPr>
@@ -6589,7 +6589,7 @@
       </p:sp>
       <p:sp>
         <p:nvSpPr>
-          <p:cNvPr id="12" name="Text 10"/>
+          <p:cNvPr id="13" name="Text 10"/>
           <p:cNvSpPr/>
           <p:nvPr/>
         </p:nvSpPr>
@@ -6628,7 +6628,7 @@
       </p:sp>
       <p:sp>
         <p:nvSpPr>
-          <p:cNvPr id="13" name="Text 11"/>
+          <p:cNvPr id="14" name="Text 11"/>
           <p:cNvSpPr/>
           <p:nvPr/>
         </p:nvSpPr>
@@ -6667,7 +6667,7 @@
       </p:sp>
       <p:sp>
         <p:nvSpPr>
-          <p:cNvPr id="14" name="Shape 12"/>
+          <p:cNvPr id="15" name="Shape 12"/>
           <p:cNvSpPr/>
           <p:nvPr/>
         </p:nvSpPr>
@@ -6694,7 +6694,7 @@
       </p:sp>
       <p:sp>
         <p:nvSpPr>
-          <p:cNvPr id="15" name="Text 13"/>
+          <p:cNvPr id="16" name="Text 13"/>
           <p:cNvSpPr/>
           <p:nvPr/>
         </p:nvSpPr>
@@ -6733,7 +6733,7 @@
       </p:sp>
       <p:sp>
         <p:nvSpPr>
-          <p:cNvPr id="16" name="Text 14"/>
+          <p:cNvPr id="17" name="Text 14"/>
           <p:cNvSpPr/>
           <p:nvPr/>
         </p:nvSpPr>
@@ -6843,7 +6843,7 @@
       </p:sp>
       <p:sp>
         <p:nvSpPr>
-          <p:cNvPr id="3" name="Shape 1"/>
+          <p:cNvPr id="4" name="Shape 1"/>
           <p:cNvSpPr/>
           <p:nvPr/>
         </p:nvSpPr>
@@ -6866,7 +6866,7 @@
       </p:sp>
       <p:sp>
         <p:nvSpPr>
-          <p:cNvPr id="4" name="Text 2"/>
+          <p:cNvPr id="5" name="Text 2"/>
           <p:cNvSpPr/>
           <p:nvPr/>
         </p:nvSpPr>
@@ -6905,7 +6905,7 @@
       </p:sp>
       <p:sp>
         <p:nvSpPr>
-          <p:cNvPr id="5" name="Text 3"/>
+          <p:cNvPr id="6" name="Text 3"/>
           <p:cNvSpPr/>
           <p:nvPr/>
         </p:nvSpPr>
@@ -6947,7 +6947,7 @@
       </p:sp>
       <p:sp>
         <p:nvSpPr>
-          <p:cNvPr id="6" name="Text 4"/>
+          <p:cNvPr id="7" name="Text 4"/>
           <p:cNvSpPr/>
           <p:nvPr/>
         </p:nvSpPr>
@@ -6989,7 +6989,7 @@
       </p:sp>
       <p:graphicFrame>
         <p:nvGraphicFramePr>
-          <p:cNvPr id="7" name="Chart 0" descr=""/>
+          <p:cNvPr id="8" name="Chart 0" descr=""/>
           <p:cNvGraphicFramePr/>
           <p:nvPr/>
         </p:nvGraphicFramePr>
@@ -7076,7 +7076,7 @@
       </p:sp>
       <p:sp>
         <p:nvSpPr>
-          <p:cNvPr id="3" name="Shape 1"/>
+          <p:cNvPr id="4" name="Shape 1"/>
           <p:cNvSpPr/>
           <p:nvPr/>
         </p:nvSpPr>
@@ -7099,7 +7099,7 @@
       </p:sp>
       <p:sp>
         <p:nvSpPr>
-          <p:cNvPr id="4" name="Text 2"/>
+          <p:cNvPr id="5" name="Text 2"/>
           <p:cNvSpPr/>
           <p:nvPr/>
         </p:nvSpPr>
@@ -7138,7 +7138,7 @@
       </p:sp>
       <p:sp>
         <p:nvSpPr>
-          <p:cNvPr id="5" name="Text 3"/>
+          <p:cNvPr id="6" name="Text 3"/>
           <p:cNvSpPr/>
           <p:nvPr/>
         </p:nvSpPr>
@@ -7180,7 +7180,7 @@
       </p:sp>
       <p:sp>
         <p:nvSpPr>
-          <p:cNvPr id="6" name="Shape 4"/>
+          <p:cNvPr id="7" name="Shape 4"/>
           <p:cNvSpPr/>
           <p:nvPr/>
         </p:nvSpPr>
@@ -7207,7 +7207,7 @@
       </p:sp>
       <p:sp>
         <p:nvSpPr>
-          <p:cNvPr id="7" name="Text 5"/>
+          <p:cNvPr id="8" name="Text 5"/>
           <p:cNvSpPr/>
           <p:nvPr/>
         </p:nvSpPr>
@@ -7246,7 +7246,7 @@
       </p:sp>
       <p:sp>
         <p:nvSpPr>
-          <p:cNvPr id="8" name="Text 6"/>
+          <p:cNvPr id="9" name="Text 6"/>
           <p:cNvSpPr/>
           <p:nvPr/>
         </p:nvSpPr>
@@ -7285,7 +7285,7 @@
       </p:sp>
       <p:sp>
         <p:nvSpPr>
-          <p:cNvPr id="9" name="Shape 7"/>
+          <p:cNvPr id="10" name="Shape 7"/>
           <p:cNvSpPr/>
           <p:nvPr/>
         </p:nvSpPr>
@@ -7307,7 +7307,7 @@
       </p:sp>
       <p:sp>
         <p:nvSpPr>
-          <p:cNvPr id="10" name="Shape 8"/>
+          <p:cNvPr id="11" name="Shape 8"/>
           <p:cNvSpPr/>
           <p:nvPr/>
         </p:nvSpPr>
@@ -7329,7 +7329,7 @@
       </p:sp>
       <p:sp>
         <p:nvSpPr>
-          <p:cNvPr id="11" name="Shape 9"/>
+          <p:cNvPr id="12" name="Shape 9"/>
           <p:cNvSpPr/>
           <p:nvPr/>
         </p:nvSpPr>
@@ -7351,7 +7351,7 @@
       </p:sp>
       <p:sp>
         <p:nvSpPr>
-          <p:cNvPr id="12" name="Shape 10"/>
+          <p:cNvPr id="13" name="Shape 10"/>
           <p:cNvSpPr/>
           <p:nvPr/>
         </p:nvSpPr>
@@ -7373,7 +7373,7 @@
       </p:sp>
       <p:sp>
         <p:nvSpPr>
-          <p:cNvPr id="13" name="Shape 11"/>
+          <p:cNvPr id="14" name="Shape 11"/>
           <p:cNvSpPr/>
           <p:nvPr/>
         </p:nvSpPr>
@@ -7395,7 +7395,7 @@
       </p:sp>
       <p:sp>
         <p:nvSpPr>
-          <p:cNvPr id="14" name="Shape 12"/>
+          <p:cNvPr id="15" name="Shape 12"/>
           <p:cNvSpPr/>
           <p:nvPr/>
         </p:nvSpPr>
@@ -7417,7 +7417,7 @@
       </p:sp>
       <p:sp>
         <p:nvSpPr>
-          <p:cNvPr id="15" name="Shape 13"/>
+          <p:cNvPr id="16" name="Shape 13"/>
           <p:cNvSpPr/>
           <p:nvPr/>
         </p:nvSpPr>
@@ -7439,7 +7439,7 @@
       </p:sp>
       <p:sp>
         <p:nvSpPr>
-          <p:cNvPr id="16" name="Shape 14"/>
+          <p:cNvPr id="17" name="Shape 14"/>
           <p:cNvSpPr/>
           <p:nvPr/>
         </p:nvSpPr>
@@ -7461,7 +7461,7 @@
       </p:sp>
       <p:sp>
         <p:nvSpPr>
-          <p:cNvPr id="17" name="Text 15"/>
+          <p:cNvPr id="18" name="Text 15"/>
           <p:cNvSpPr/>
           <p:nvPr/>
         </p:nvSpPr>
@@ -7500,7 +7500,7 @@
       </p:sp>
       <p:sp>
         <p:nvSpPr>
-          <p:cNvPr id="18" name="Shape 16"/>
+          <p:cNvPr id="19" name="Shape 16"/>
           <p:cNvSpPr/>
           <p:nvPr/>
         </p:nvSpPr>
@@ -7522,7 +7522,7 @@
       </p:sp>
       <p:sp>
         <p:nvSpPr>
-          <p:cNvPr id="19" name="Shape 17"/>
+          <p:cNvPr id="20" name="Shape 17"/>
           <p:cNvSpPr/>
           <p:nvPr/>
         </p:nvSpPr>
@@ -7544,7 +7544,7 @@
       </p:sp>
       <p:sp>
         <p:nvSpPr>
-          <p:cNvPr id="20" name="Shape 18"/>
+          <p:cNvPr id="21" name="Shape 18"/>
           <p:cNvSpPr/>
           <p:nvPr/>
         </p:nvSpPr>
@@ -7566,7 +7566,7 @@
       </p:sp>
       <p:sp>
         <p:nvSpPr>
-          <p:cNvPr id="21" name="Shape 19"/>
+          <p:cNvPr id="22" name="Shape 19"/>
           <p:cNvSpPr/>
           <p:nvPr/>
         </p:nvSpPr>
@@ -7588,7 +7588,7 @@
       </p:sp>
       <p:sp>
         <p:nvSpPr>
-          <p:cNvPr id="22" name="Shape 20"/>
+          <p:cNvPr id="23" name="Shape 20"/>
           <p:cNvSpPr/>
           <p:nvPr/>
         </p:nvSpPr>
@@ -7610,7 +7610,7 @@
       </p:sp>
       <p:sp>
         <p:nvSpPr>
-          <p:cNvPr id="23" name="Shape 21"/>
+          <p:cNvPr id="24" name="Shape 21"/>
           <p:cNvSpPr/>
           <p:nvPr/>
         </p:nvSpPr>
@@ -7632,7 +7632,7 @@
       </p:sp>
       <p:sp>
         <p:nvSpPr>
-          <p:cNvPr id="24" name="Shape 22"/>
+          <p:cNvPr id="25" name="Shape 22"/>
           <p:cNvSpPr/>
           <p:nvPr/>
         </p:nvSpPr>
@@ -7654,7 +7654,7 @@
       </p:sp>
       <p:sp>
         <p:nvSpPr>
-          <p:cNvPr id="25" name="Shape 23"/>
+          <p:cNvPr id="26" name="Shape 23"/>
           <p:cNvSpPr/>
           <p:nvPr/>
         </p:nvSpPr>
@@ -7676,7 +7676,7 @@
       </p:sp>
       <p:sp>
         <p:nvSpPr>
-          <p:cNvPr id="26" name="Text 24"/>
+          <p:cNvPr id="27" name="Text 24"/>
           <p:cNvSpPr/>
           <p:nvPr/>
         </p:nvSpPr>
@@ -7715,7 +7715,7 @@
       </p:sp>
       <p:sp>
         <p:nvSpPr>
-          <p:cNvPr id="27" name="Shape 25"/>
+          <p:cNvPr id="28" name="Shape 25"/>
           <p:cNvSpPr/>
           <p:nvPr/>
         </p:nvSpPr>
@@ -7742,7 +7742,7 @@
       </p:sp>
       <p:sp>
         <p:nvSpPr>
-          <p:cNvPr id="28" name="Text 26"/>
+          <p:cNvPr id="29" name="Text 26"/>
           <p:cNvSpPr/>
           <p:nvPr/>
         </p:nvSpPr>
@@ -7781,7 +7781,7 @@
       </p:sp>
       <p:sp>
         <p:nvSpPr>
-          <p:cNvPr id="29" name="Text 27"/>
+          <p:cNvPr id="30" name="Text 27"/>
           <p:cNvSpPr/>
           <p:nvPr/>
         </p:nvSpPr>
@@ -7820,7 +7820,7 @@
       </p:sp>
       <p:sp>
         <p:nvSpPr>
-          <p:cNvPr id="30" name="Shape 28"/>
+          <p:cNvPr id="31" name="Shape 28"/>
           <p:cNvSpPr/>
           <p:nvPr/>
         </p:nvSpPr>
@@ -7842,7 +7842,7 @@
       </p:sp>
       <p:sp>
         <p:nvSpPr>
-          <p:cNvPr id="31" name="Shape 29"/>
+          <p:cNvPr id="32" name="Shape 29"/>
           <p:cNvSpPr/>
           <p:nvPr/>
         </p:nvSpPr>
@@ -7864,7 +7864,7 @@
       </p:sp>
       <p:sp>
         <p:nvSpPr>
-          <p:cNvPr id="32" name="Shape 30"/>
+          <p:cNvPr id="33" name="Shape 30"/>
           <p:cNvSpPr/>
           <p:nvPr/>
         </p:nvSpPr>
@@ -7886,7 +7886,7 @@
       </p:sp>
       <p:sp>
         <p:nvSpPr>
-          <p:cNvPr id="33" name="Shape 31"/>
+          <p:cNvPr id="34" name="Shape 31"/>
           <p:cNvSpPr/>
           <p:nvPr/>
         </p:nvSpPr>
@@ -7908,7 +7908,7 @@
       </p:sp>
       <p:sp>
         <p:nvSpPr>
-          <p:cNvPr id="34" name="Shape 32"/>
+          <p:cNvPr id="35" name="Shape 32"/>
           <p:cNvSpPr/>
           <p:nvPr/>
         </p:nvSpPr>
@@ -7930,7 +7930,7 @@
       </p:sp>
       <p:sp>
         <p:nvSpPr>
-          <p:cNvPr id="35" name="Shape 33"/>
+          <p:cNvPr id="36" name="Shape 33"/>
           <p:cNvSpPr/>
           <p:nvPr/>
         </p:nvSpPr>
@@ -7952,7 +7952,7 @@
       </p:sp>
       <p:sp>
         <p:nvSpPr>
-          <p:cNvPr id="36" name="Shape 34"/>
+          <p:cNvPr id="37" name="Shape 34"/>
           <p:cNvSpPr/>
           <p:nvPr/>
         </p:nvSpPr>
@@ -7974,7 +7974,7 @@
       </p:sp>
       <p:sp>
         <p:nvSpPr>
-          <p:cNvPr id="37" name="Shape 35"/>
+          <p:cNvPr id="38" name="Shape 35"/>
           <p:cNvSpPr/>
           <p:nvPr/>
         </p:nvSpPr>
@@ -7996,7 +7996,7 @@
       </p:sp>
       <p:sp>
         <p:nvSpPr>
-          <p:cNvPr id="38" name="Text 36"/>
+          <p:cNvPr id="39" name="Text 36"/>
           <p:cNvSpPr/>
           <p:nvPr/>
         </p:nvSpPr>
@@ -8035,7 +8035,7 @@
       </p:sp>
       <p:sp>
         <p:nvSpPr>
-          <p:cNvPr id="39" name="Shape 37"/>
+          <p:cNvPr id="40" name="Shape 37"/>
           <p:cNvSpPr/>
           <p:nvPr/>
         </p:nvSpPr>
@@ -8057,7 +8057,7 @@
       </p:sp>
       <p:sp>
         <p:nvSpPr>
-          <p:cNvPr id="40" name="Shape 38"/>
+          <p:cNvPr id="41" name="Shape 38"/>
           <p:cNvSpPr/>
           <p:nvPr/>
         </p:nvSpPr>
@@ -8079,7 +8079,7 @@
       </p:sp>
       <p:sp>
         <p:nvSpPr>
-          <p:cNvPr id="41" name="Shape 39"/>
+          <p:cNvPr id="42" name="Shape 39"/>
           <p:cNvSpPr/>
           <p:nvPr/>
         </p:nvSpPr>
@@ -8101,7 +8101,7 @@
       </p:sp>
       <p:sp>
         <p:nvSpPr>
-          <p:cNvPr id="42" name="Shape 40"/>
+          <p:cNvPr id="43" name="Shape 40"/>
           <p:cNvSpPr/>
           <p:nvPr/>
         </p:nvSpPr>
@@ -8123,7 +8123,7 @@
       </p:sp>
       <p:sp>
         <p:nvSpPr>
-          <p:cNvPr id="43" name="Shape 41"/>
+          <p:cNvPr id="44" name="Shape 41"/>
           <p:cNvSpPr/>
           <p:nvPr/>
         </p:nvSpPr>
@@ -8145,7 +8145,7 @@
       </p:sp>
       <p:sp>
         <p:nvSpPr>
-          <p:cNvPr id="44" name="Shape 42"/>
+          <p:cNvPr id="45" name="Shape 42"/>
           <p:cNvSpPr/>
           <p:nvPr/>
         </p:nvSpPr>
@@ -8167,7 +8167,7 @@
       </p:sp>
       <p:sp>
         <p:nvSpPr>
-          <p:cNvPr id="45" name="Shape 43"/>
+          <p:cNvPr id="46" name="Shape 43"/>
           <p:cNvSpPr/>
           <p:nvPr/>
         </p:nvSpPr>
@@ -8189,7 +8189,7 @@
       </p:sp>
       <p:sp>
         <p:nvSpPr>
-          <p:cNvPr id="46" name="Shape 44"/>
+          <p:cNvPr id="47" name="Shape 44"/>
           <p:cNvSpPr/>
           <p:nvPr/>
         </p:nvSpPr>
@@ -8211,7 +8211,7 @@
       </p:sp>
       <p:sp>
         <p:nvSpPr>
-          <p:cNvPr id="47" name="Text 45"/>
+          <p:cNvPr id="48" name="Text 45"/>
           <p:cNvSpPr/>
           <p:nvPr/>
         </p:nvSpPr>
@@ -8321,7 +8321,7 @@
       </p:sp>
       <p:sp>
         <p:nvSpPr>
-          <p:cNvPr id="3" name="Shape 1"/>
+          <p:cNvPr id="4" name="Shape 1"/>
           <p:cNvSpPr/>
           <p:nvPr/>
         </p:nvSpPr>
@@ -8344,7 +8344,7 @@
       </p:sp>
       <p:sp>
         <p:nvSpPr>
-          <p:cNvPr id="4" name="Text 2"/>
+          <p:cNvPr id="5" name="Text 2"/>
           <p:cNvSpPr/>
           <p:nvPr/>
         </p:nvSpPr>
@@ -8383,7 +8383,7 @@
       </p:sp>
       <p:sp>
         <p:nvSpPr>
-          <p:cNvPr id="5" name="Text 3"/>
+          <p:cNvPr id="6" name="Text 3"/>
           <p:cNvSpPr/>
           <p:nvPr/>
         </p:nvSpPr>
@@ -8425,7 +8425,7 @@
       </p:sp>
       <p:sp>
         <p:nvSpPr>
-          <p:cNvPr id="6" name="Shape 4"/>
+          <p:cNvPr id="7" name="Shape 4"/>
           <p:cNvSpPr/>
           <p:nvPr/>
         </p:nvSpPr>
@@ -8452,7 +8452,7 @@
       </p:sp>
       <p:sp>
         <p:nvSpPr>
-          <p:cNvPr id="7" name="Text 5"/>
+          <p:cNvPr id="8" name="Text 5"/>
           <p:cNvSpPr/>
           <p:nvPr/>
         </p:nvSpPr>
@@ -8491,7 +8491,7 @@
       </p:sp>
       <p:sp>
         <p:nvSpPr>
-          <p:cNvPr id="8" name="Text 6"/>
+          <p:cNvPr id="9" name="Text 6"/>
           <p:cNvSpPr/>
           <p:nvPr/>
         </p:nvSpPr>
@@ -8530,7 +8530,7 @@
       </p:sp>
       <p:sp>
         <p:nvSpPr>
-          <p:cNvPr id="9" name="Text 7"/>
+          <p:cNvPr id="10" name="Text 7"/>
           <p:cNvSpPr/>
           <p:nvPr/>
         </p:nvSpPr>
@@ -8569,7 +8569,7 @@
       </p:sp>
       <p:sp>
         <p:nvSpPr>
-          <p:cNvPr id="10" name="Shape 8"/>
+          <p:cNvPr id="11" name="Shape 8"/>
           <p:cNvSpPr/>
           <p:nvPr/>
         </p:nvSpPr>
@@ -8596,7 +8596,7 @@
       </p:sp>
       <p:sp>
         <p:nvSpPr>
-          <p:cNvPr id="11" name="Text 9"/>
+          <p:cNvPr id="12" name="Text 9"/>
           <p:cNvSpPr/>
           <p:nvPr/>
         </p:nvSpPr>
@@ -8635,7 +8635,7 @@
       </p:sp>
       <p:sp>
         <p:nvSpPr>
-          <p:cNvPr id="12" name="Text 10"/>
+          <p:cNvPr id="13" name="Text 10"/>
           <p:cNvSpPr/>
           <p:nvPr/>
         </p:nvSpPr>
@@ -8674,7 +8674,7 @@
       </p:sp>
       <p:sp>
         <p:nvSpPr>
-          <p:cNvPr id="13" name="Text 11"/>
+          <p:cNvPr id="14" name="Text 11"/>
           <p:cNvSpPr/>
           <p:nvPr/>
         </p:nvSpPr>
@@ -8713,7 +8713,7 @@
       </p:sp>
       <p:sp>
         <p:nvSpPr>
-          <p:cNvPr id="14" name="Shape 12"/>
+          <p:cNvPr id="15" name="Shape 12"/>
           <p:cNvSpPr/>
           <p:nvPr/>
         </p:nvSpPr>
@@ -8740,7 +8740,7 @@
       </p:sp>
       <p:sp>
         <p:nvSpPr>
-          <p:cNvPr id="15" name="Text 13"/>
+          <p:cNvPr id="16" name="Text 13"/>
           <p:cNvSpPr/>
           <p:nvPr/>
         </p:nvSpPr>
@@ -8779,7 +8779,7 @@
       </p:sp>
       <p:sp>
         <p:nvSpPr>
-          <p:cNvPr id="16" name="Text 14"/>
+          <p:cNvPr id="17" name="Text 14"/>
           <p:cNvSpPr/>
           <p:nvPr/>
         </p:nvSpPr>
@@ -8818,7 +8818,7 @@
       </p:sp>
       <p:sp>
         <p:nvSpPr>
-          <p:cNvPr id="17" name="Text 15"/>
+          <p:cNvPr id="18" name="Text 15"/>
           <p:cNvSpPr/>
           <p:nvPr/>
         </p:nvSpPr>
@@ -8857,7 +8857,7 @@
       </p:sp>
       <p:sp>
         <p:nvSpPr>
-          <p:cNvPr id="18" name="Shape 16"/>
+          <p:cNvPr id="19" name="Shape 16"/>
           <p:cNvSpPr/>
           <p:nvPr/>
         </p:nvSpPr>
@@ -8884,7 +8884,7 @@
       </p:sp>
       <p:sp>
         <p:nvSpPr>
-          <p:cNvPr id="19" name="Text 17"/>
+          <p:cNvPr id="20" name="Text 17"/>
           <p:cNvSpPr/>
           <p:nvPr/>
         </p:nvSpPr>
@@ -8923,7 +8923,7 @@
       </p:sp>
       <p:sp>
         <p:nvSpPr>
-          <p:cNvPr id="20" name="Text 18"/>
+          <p:cNvPr id="21" name="Text 18"/>
           <p:cNvSpPr/>
           <p:nvPr/>
         </p:nvSpPr>
@@ -8962,7 +8962,7 @@
       </p:sp>
       <p:sp>
         <p:nvSpPr>
-          <p:cNvPr id="21" name="Text 19"/>
+          <p:cNvPr id="22" name="Text 19"/>
           <p:cNvSpPr/>
           <p:nvPr/>
         </p:nvSpPr>
@@ -9001,7 +9001,7 @@
       </p:sp>
       <p:sp>
         <p:nvSpPr>
-          <p:cNvPr id="22" name="Shape 20"/>
+          <p:cNvPr id="23" name="Shape 20"/>
           <p:cNvSpPr/>
           <p:nvPr/>
         </p:nvSpPr>
@@ -9028,7 +9028,7 @@
       </p:sp>
       <p:sp>
         <p:nvSpPr>
-          <p:cNvPr id="23" name="Text 21"/>
+          <p:cNvPr id="24" name="Text 21"/>
           <p:cNvSpPr/>
           <p:nvPr/>
         </p:nvSpPr>
@@ -9067,7 +9067,7 @@
       </p:sp>
       <p:sp>
         <p:nvSpPr>
-          <p:cNvPr id="24" name="Text 22"/>
+          <p:cNvPr id="25" name="Text 22"/>
           <p:cNvSpPr/>
           <p:nvPr/>
         </p:nvSpPr>
@@ -9106,7 +9106,7 @@
       </p:sp>
       <p:sp>
         <p:nvSpPr>
-          <p:cNvPr id="25" name="Text 23"/>
+          <p:cNvPr id="26" name="Text 23"/>
           <p:cNvSpPr/>
           <p:nvPr/>
         </p:nvSpPr>
@@ -9145,7 +9145,7 @@
       </p:sp>
       <p:sp>
         <p:nvSpPr>
-          <p:cNvPr id="26" name="Shape 24"/>
+          <p:cNvPr id="27" name="Shape 24"/>
           <p:cNvSpPr/>
           <p:nvPr/>
         </p:nvSpPr>
@@ -9172,7 +9172,7 @@
       </p:sp>
       <p:sp>
         <p:nvSpPr>
-          <p:cNvPr id="27" name="Text 25"/>
+          <p:cNvPr id="28" name="Text 25"/>
           <p:cNvSpPr/>
           <p:nvPr/>
         </p:nvSpPr>
@@ -9211,7 +9211,7 @@
       </p:sp>
       <p:sp>
         <p:nvSpPr>
-          <p:cNvPr id="28" name="Text 26"/>
+          <p:cNvPr id="29" name="Text 26"/>
           <p:cNvSpPr/>
           <p:nvPr/>
         </p:nvSpPr>
@@ -9250,7 +9250,7 @@
       </p:sp>
       <p:sp>
         <p:nvSpPr>
-          <p:cNvPr id="29" name="Text 27"/>
+          <p:cNvPr id="30" name="Text 27"/>
           <p:cNvSpPr/>
           <p:nvPr/>
         </p:nvSpPr>
@@ -9360,7 +9360,7 @@
       </p:sp>
       <p:sp>
         <p:nvSpPr>
-          <p:cNvPr id="3" name="Shape 1"/>
+          <p:cNvPr id="4" name="Shape 1"/>
           <p:cNvSpPr/>
           <p:nvPr/>
         </p:nvSpPr>
@@ -9383,7 +9383,7 @@
       </p:sp>
       <p:sp>
         <p:nvSpPr>
-          <p:cNvPr id="4" name="Text 2"/>
+          <p:cNvPr id="5" name="Text 2"/>
           <p:cNvSpPr/>
           <p:nvPr/>
         </p:nvSpPr>
@@ -9422,7 +9422,7 @@
       </p:sp>
       <p:sp>
         <p:nvSpPr>
-          <p:cNvPr id="5" name="Text 3"/>
+          <p:cNvPr id="6" name="Text 3"/>
           <p:cNvSpPr/>
           <p:nvPr/>
         </p:nvSpPr>
@@ -9464,7 +9464,7 @@
       </p:sp>
       <p:pic>
         <p:nvPicPr>
-          <p:cNvPr id="6" name="Image 0" descr="preencoded.png">    </p:cNvPr>
+          <p:cNvPr id="7" name="Image 0" descr="preencoded.png">    </p:cNvPr>
           <p:cNvPicPr>
             <a:picLocks noChangeAspect="1"/>
           </p:cNvPicPr>
@@ -9558,7 +9558,7 @@
       </p:sp>
       <p:sp>
         <p:nvSpPr>
-          <p:cNvPr id="3" name="Shape 1"/>
+          <p:cNvPr id="4" name="Shape 1"/>
           <p:cNvSpPr/>
           <p:nvPr/>
         </p:nvSpPr>
@@ -9581,7 +9581,7 @@
       </p:sp>
       <p:sp>
         <p:nvSpPr>
-          <p:cNvPr id="4" name="Text 2"/>
+          <p:cNvPr id="5" name="Text 2"/>
           <p:cNvSpPr/>
           <p:nvPr/>
         </p:nvSpPr>
@@ -9620,7 +9620,7 @@
       </p:sp>
       <p:sp>
         <p:nvSpPr>
-          <p:cNvPr id="5" name="Text 3"/>
+          <p:cNvPr id="6" name="Text 3"/>
           <p:cNvSpPr/>
           <p:nvPr/>
         </p:nvSpPr>
@@ -9662,7 +9662,7 @@
       </p:sp>
       <p:sp>
         <p:nvSpPr>
-          <p:cNvPr id="6" name="Shape 4"/>
+          <p:cNvPr id="7" name="Shape 4"/>
           <p:cNvSpPr/>
           <p:nvPr/>
         </p:nvSpPr>
@@ -9689,7 +9689,7 @@
       </p:sp>
       <p:sp>
         <p:nvSpPr>
-          <p:cNvPr id="7" name="Text 5"/>
+          <p:cNvPr id="8" name="Text 5"/>
           <p:cNvSpPr/>
           <p:nvPr/>
         </p:nvSpPr>
@@ -9728,7 +9728,7 @@
       </p:sp>
       <p:sp>
         <p:nvSpPr>
-          <p:cNvPr id="8" name="Text 6"/>
+          <p:cNvPr id="9" name="Text 6"/>
           <p:cNvSpPr/>
           <p:nvPr/>
         </p:nvSpPr>
@@ -9784,7 +9784,7 @@
       </p:sp>
       <p:sp>
         <p:nvSpPr>
-          <p:cNvPr id="9" name="Text 7"/>
+          <p:cNvPr id="10" name="Text 7"/>
           <p:cNvSpPr/>
           <p:nvPr/>
         </p:nvSpPr>
@@ -9840,7 +9840,7 @@
       </p:sp>
       <p:sp>
         <p:nvSpPr>
-          <p:cNvPr id="10" name="Text 8"/>
+          <p:cNvPr id="11" name="Text 8"/>
           <p:cNvSpPr/>
           <p:nvPr/>
         </p:nvSpPr>
@@ -9879,7 +9879,7 @@
       </p:sp>
       <p:sp>
         <p:nvSpPr>
-          <p:cNvPr id="11" name="Shape 9"/>
+          <p:cNvPr id="12" name="Shape 9"/>
           <p:cNvSpPr/>
           <p:nvPr/>
         </p:nvSpPr>
@@ -9906,7 +9906,7 @@
       </p:sp>
       <p:sp>
         <p:nvSpPr>
-          <p:cNvPr id="12" name="Text 10"/>
+          <p:cNvPr id="13" name="Text 10"/>
           <p:cNvSpPr/>
           <p:nvPr/>
         </p:nvSpPr>
@@ -9945,7 +9945,7 @@
       </p:sp>
       <p:sp>
         <p:nvSpPr>
-          <p:cNvPr id="13" name="Text 11"/>
+          <p:cNvPr id="14" name="Text 11"/>
           <p:cNvSpPr/>
           <p:nvPr/>
         </p:nvSpPr>
@@ -10001,7 +10001,7 @@
       </p:sp>
       <p:sp>
         <p:nvSpPr>
-          <p:cNvPr id="14" name="Shape 12"/>
+          <p:cNvPr id="15" name="Shape 12"/>
           <p:cNvSpPr/>
           <p:nvPr/>
         </p:nvSpPr>
@@ -10028,7 +10028,7 @@
       </p:sp>
       <p:sp>
         <p:nvSpPr>
-          <p:cNvPr id="15" name="Text 13"/>
+          <p:cNvPr id="16" name="Text 13"/>
           <p:cNvSpPr/>
           <p:nvPr/>
         </p:nvSpPr>
@@ -10067,7 +10067,7 @@
       </p:sp>
       <p:sp>
         <p:nvSpPr>
-          <p:cNvPr id="16" name="Shape 14"/>
+          <p:cNvPr id="17" name="Shape 14"/>
           <p:cNvSpPr/>
           <p:nvPr/>
         </p:nvSpPr>
@@ -10094,7 +10094,7 @@
       </p:sp>
       <p:sp>
         <p:nvSpPr>
-          <p:cNvPr id="17" name="Text 15"/>
+          <p:cNvPr id="18" name="Text 15"/>
           <p:cNvSpPr/>
           <p:nvPr/>
         </p:nvSpPr>
@@ -10133,7 +10133,7 @@
       </p:sp>
       <p:sp>
         <p:nvSpPr>
-          <p:cNvPr id="18" name="Shape 16"/>
+          <p:cNvPr id="19" name="Shape 16"/>
           <p:cNvSpPr/>
           <p:nvPr/>
         </p:nvSpPr>
@@ -10160,7 +10160,7 @@
       </p:sp>
       <p:sp>
         <p:nvSpPr>
-          <p:cNvPr id="19" name="Text 17"/>
+          <p:cNvPr id="20" name="Text 17"/>
           <p:cNvSpPr/>
           <p:nvPr/>
         </p:nvSpPr>
@@ -10270,7 +10270,7 @@
       </p:sp>
       <p:sp>
         <p:nvSpPr>
-          <p:cNvPr id="3" name="Shape 1"/>
+          <p:cNvPr id="4" name="Shape 1"/>
           <p:cNvSpPr/>
           <p:nvPr/>
         </p:nvSpPr>
@@ -10293,7 +10293,7 @@
       </p:sp>
       <p:sp>
         <p:nvSpPr>
-          <p:cNvPr id="4" name="Text 2"/>
+          <p:cNvPr id="5" name="Text 2"/>
           <p:cNvSpPr/>
           <p:nvPr/>
         </p:nvSpPr>
@@ -10332,7 +10332,7 @@
       </p:sp>
       <p:sp>
         <p:nvSpPr>
-          <p:cNvPr id="5" name="Text 3"/>
+          <p:cNvPr id="6" name="Text 3"/>
           <p:cNvSpPr/>
           <p:nvPr/>
         </p:nvSpPr>
@@ -10374,7 +10374,7 @@
       </p:sp>
       <p:sp>
         <p:nvSpPr>
-          <p:cNvPr id="6" name="Shape 4"/>
+          <p:cNvPr id="7" name="Shape 4"/>
           <p:cNvSpPr/>
           <p:nvPr/>
         </p:nvSpPr>
@@ -10401,7 +10401,7 @@
       </p:sp>
       <p:sp>
         <p:nvSpPr>
-          <p:cNvPr id="7" name="Shape 5"/>
+          <p:cNvPr id="8" name="Shape 5"/>
           <p:cNvSpPr/>
           <p:nvPr/>
         </p:nvSpPr>
@@ -10421,7 +10421,7 @@
       </p:sp>
       <p:sp>
         <p:nvSpPr>
-          <p:cNvPr id="8" name="Text 6"/>
+          <p:cNvPr id="9" name="Text 6"/>
           <p:cNvSpPr/>
           <p:nvPr/>
         </p:nvSpPr>
@@ -10460,7 +10460,7 @@
       </p:sp>
       <p:sp>
         <p:nvSpPr>
-          <p:cNvPr id="9" name="Text 7"/>
+          <p:cNvPr id="10" name="Text 7"/>
           <p:cNvSpPr/>
           <p:nvPr/>
         </p:nvSpPr>
@@ -10499,7 +10499,7 @@
       </p:sp>
       <p:sp>
         <p:nvSpPr>
-          <p:cNvPr id="10" name="Shape 8"/>
+          <p:cNvPr id="11" name="Shape 8"/>
           <p:cNvSpPr/>
           <p:nvPr/>
         </p:nvSpPr>
@@ -10526,7 +10526,7 @@
       </p:sp>
       <p:sp>
         <p:nvSpPr>
-          <p:cNvPr id="11" name="Shape 9"/>
+          <p:cNvPr id="12" name="Shape 9"/>
           <p:cNvSpPr/>
           <p:nvPr/>
         </p:nvSpPr>
@@ -10546,7 +10546,7 @@
       </p:sp>
       <p:sp>
         <p:nvSpPr>
-          <p:cNvPr id="12" name="Text 10"/>
+          <p:cNvPr id="13" name="Text 10"/>
           <p:cNvSpPr/>
           <p:nvPr/>
         </p:nvSpPr>
@@ -10585,7 +10585,7 @@
       </p:sp>
       <p:sp>
         <p:nvSpPr>
-          <p:cNvPr id="13" name="Text 11"/>
+          <p:cNvPr id="14" name="Text 11"/>
           <p:cNvSpPr/>
           <p:nvPr/>
         </p:nvSpPr>
@@ -10624,7 +10624,7 @@
       </p:sp>
       <p:sp>
         <p:nvSpPr>
-          <p:cNvPr id="14" name="Shape 12"/>
+          <p:cNvPr id="15" name="Shape 12"/>
           <p:cNvSpPr/>
           <p:nvPr/>
         </p:nvSpPr>
@@ -10651,7 +10651,7 @@
       </p:sp>
       <p:sp>
         <p:nvSpPr>
-          <p:cNvPr id="15" name="Shape 13"/>
+          <p:cNvPr id="16" name="Shape 13"/>
           <p:cNvSpPr/>
           <p:nvPr/>
         </p:nvSpPr>
@@ -10671,7 +10671,7 @@
       </p:sp>
       <p:sp>
         <p:nvSpPr>
-          <p:cNvPr id="16" name="Text 14"/>
+          <p:cNvPr id="17" name="Text 14"/>
           <p:cNvSpPr/>
           <p:nvPr/>
         </p:nvSpPr>
@@ -10710,7 +10710,7 @@
       </p:sp>
       <p:sp>
         <p:nvSpPr>
-          <p:cNvPr id="17" name="Text 15"/>
+          <p:cNvPr id="18" name="Text 15"/>
           <p:cNvSpPr/>
           <p:nvPr/>
         </p:nvSpPr>
@@ -10749,7 +10749,7 @@
       </p:sp>
       <p:sp>
         <p:nvSpPr>
-          <p:cNvPr id="18" name="Shape 16"/>
+          <p:cNvPr id="19" name="Shape 16"/>
           <p:cNvSpPr/>
           <p:nvPr/>
         </p:nvSpPr>
@@ -10776,7 +10776,7 @@
       </p:sp>
       <p:sp>
         <p:nvSpPr>
-          <p:cNvPr id="19" name="Shape 17"/>
+          <p:cNvPr id="20" name="Shape 17"/>
           <p:cNvSpPr/>
           <p:nvPr/>
         </p:nvSpPr>
@@ -10796,7 +10796,7 @@
       </p:sp>
       <p:sp>
         <p:nvSpPr>
-          <p:cNvPr id="20" name="Text 18"/>
+          <p:cNvPr id="21" name="Text 18"/>
           <p:cNvSpPr/>
           <p:nvPr/>
         </p:nvSpPr>
@@ -10835,7 +10835,7 @@
       </p:sp>
       <p:sp>
         <p:nvSpPr>
-          <p:cNvPr id="21" name="Text 19"/>
+          <p:cNvPr id="22" name="Text 19"/>
           <p:cNvSpPr/>
           <p:nvPr/>
         </p:nvSpPr>
@@ -10874,7 +10874,7 @@
       </p:sp>
       <p:sp>
         <p:nvSpPr>
-          <p:cNvPr id="22" name="Text 20"/>
+          <p:cNvPr id="23" name="Text 20"/>
           <p:cNvSpPr/>
           <p:nvPr/>
         </p:nvSpPr>
@@ -10913,7 +10913,7 @@
       </p:sp>
       <p:graphicFrame>
         <p:nvGraphicFramePr>
-          <p:cNvPr id="23" name="Chart 0" descr=""/>
+          <p:cNvPr id="24" name="Chart 0" descr=""/>
           <p:cNvGraphicFramePr/>
           <p:nvPr/>
         </p:nvGraphicFramePr>
@@ -11000,7 +11000,7 @@
       </p:sp>
       <p:sp>
         <p:nvSpPr>
-          <p:cNvPr id="3" name="Shape 1"/>
+          <p:cNvPr id="4" name="Shape 1"/>
           <p:cNvSpPr/>
           <p:nvPr/>
         </p:nvSpPr>
@@ -11023,7 +11023,7 @@
       </p:sp>
       <p:sp>
         <p:nvSpPr>
-          <p:cNvPr id="4" name="Text 2"/>
+          <p:cNvPr id="5" name="Text 2"/>
           <p:cNvSpPr/>
           <p:nvPr/>
         </p:nvSpPr>
@@ -11062,7 +11062,7 @@
       </p:sp>
       <p:sp>
         <p:nvSpPr>
-          <p:cNvPr id="5" name="Text 3"/>
+          <p:cNvPr id="6" name="Text 3"/>
           <p:cNvSpPr/>
           <p:nvPr/>
         </p:nvSpPr>
@@ -13569,7 +13569,7 @@
       </p:sp>
       <p:sp>
         <p:nvSpPr>
-          <p:cNvPr id="3" name="Shape 1"/>
+          <p:cNvPr id="4" name="Shape 1"/>
           <p:cNvSpPr/>
           <p:nvPr/>
         </p:nvSpPr>
@@ -13592,7 +13592,7 @@
       </p:sp>
       <p:sp>
         <p:nvSpPr>
-          <p:cNvPr id="4" name="Text 2"/>
+          <p:cNvPr id="5" name="Text 2"/>
           <p:cNvSpPr/>
           <p:nvPr/>
         </p:nvSpPr>
@@ -13631,7 +13631,7 @@
       </p:sp>
       <p:sp>
         <p:nvSpPr>
-          <p:cNvPr id="5" name="Text 3"/>
+          <p:cNvPr id="6" name="Text 3"/>
           <p:cNvSpPr/>
           <p:nvPr/>
         </p:nvSpPr>
@@ -13673,7 +13673,7 @@
       </p:sp>
       <p:sp>
         <p:nvSpPr>
-          <p:cNvPr id="6" name="Shape 4"/>
+          <p:cNvPr id="7" name="Shape 4"/>
           <p:cNvSpPr/>
           <p:nvPr/>
         </p:nvSpPr>
@@ -13700,7 +13700,7 @@
       </p:sp>
       <p:sp>
         <p:nvSpPr>
-          <p:cNvPr id="7" name="Text 5"/>
+          <p:cNvPr id="8" name="Text 5"/>
           <p:cNvSpPr/>
           <p:nvPr/>
         </p:nvSpPr>
@@ -13739,7 +13739,7 @@
       </p:sp>
       <p:sp>
         <p:nvSpPr>
-          <p:cNvPr id="8" name="Text 6"/>
+          <p:cNvPr id="9" name="Text 6"/>
           <p:cNvSpPr/>
           <p:nvPr/>
         </p:nvSpPr>
@@ -13778,7 +13778,7 @@
       </p:sp>
       <p:sp>
         <p:nvSpPr>
-          <p:cNvPr id="9" name="Text 7"/>
+          <p:cNvPr id="10" name="Text 7"/>
           <p:cNvSpPr/>
           <p:nvPr/>
         </p:nvSpPr>
@@ -13817,7 +13817,7 @@
       </p:sp>
       <p:sp>
         <p:nvSpPr>
-          <p:cNvPr id="10" name="Text 8"/>
+          <p:cNvPr id="11" name="Text 8"/>
           <p:cNvSpPr/>
           <p:nvPr/>
         </p:nvSpPr>
@@ -13856,7 +13856,7 @@
       </p:sp>
       <p:sp>
         <p:nvSpPr>
-          <p:cNvPr id="11" name="Text 9"/>
+          <p:cNvPr id="12" name="Text 9"/>
           <p:cNvSpPr/>
           <p:nvPr/>
         </p:nvSpPr>
@@ -13895,7 +13895,7 @@
       </p:sp>
       <p:sp>
         <p:nvSpPr>
-          <p:cNvPr id="12" name="Text 10"/>
+          <p:cNvPr id="13" name="Text 10"/>
           <p:cNvSpPr/>
           <p:nvPr/>
         </p:nvSpPr>
@@ -13934,7 +13934,7 @@
       </p:sp>
       <p:sp>
         <p:nvSpPr>
-          <p:cNvPr id="13" name="Text 11"/>
+          <p:cNvPr id="14" name="Text 11"/>
           <p:cNvSpPr/>
           <p:nvPr/>
         </p:nvSpPr>
@@ -13973,7 +13973,7 @@
       </p:sp>
       <p:sp>
         <p:nvSpPr>
-          <p:cNvPr id="14" name="Text 12"/>
+          <p:cNvPr id="15" name="Text 12"/>
           <p:cNvSpPr/>
           <p:nvPr/>
         </p:nvSpPr>
@@ -14026,7 +14026,7 @@
       </p:sp>
       <p:sp>
         <p:nvSpPr>
-          <p:cNvPr id="15" name="Shape 13"/>
+          <p:cNvPr id="16" name="Shape 13"/>
           <p:cNvSpPr/>
           <p:nvPr/>
         </p:nvSpPr>
@@ -14053,7 +14053,7 @@
       </p:sp>
       <p:sp>
         <p:nvSpPr>
-          <p:cNvPr id="16" name="Text 14"/>
+          <p:cNvPr id="17" name="Text 14"/>
           <p:cNvSpPr/>
           <p:nvPr/>
         </p:nvSpPr>
@@ -14092,7 +14092,7 @@
       </p:sp>
       <p:sp>
         <p:nvSpPr>
-          <p:cNvPr id="17" name="Text 15"/>
+          <p:cNvPr id="18" name="Text 15"/>
           <p:cNvSpPr/>
           <p:nvPr/>
         </p:nvSpPr>
@@ -14131,7 +14131,7 @@
       </p:sp>
       <p:sp>
         <p:nvSpPr>
-          <p:cNvPr id="18" name="Text 16"/>
+          <p:cNvPr id="19" name="Text 16"/>
           <p:cNvSpPr/>
           <p:nvPr/>
         </p:nvSpPr>
@@ -14170,7 +14170,7 @@
       </p:sp>
       <p:sp>
         <p:nvSpPr>
-          <p:cNvPr id="19" name="Text 17"/>
+          <p:cNvPr id="20" name="Text 17"/>
           <p:cNvSpPr/>
           <p:nvPr/>
         </p:nvSpPr>
@@ -14209,7 +14209,7 @@
       </p:sp>
       <p:sp>
         <p:nvSpPr>
-          <p:cNvPr id="20" name="Text 18"/>
+          <p:cNvPr id="21" name="Text 18"/>
           <p:cNvSpPr/>
           <p:nvPr/>
         </p:nvSpPr>
@@ -14248,7 +14248,7 @@
       </p:sp>
       <p:sp>
         <p:nvSpPr>
-          <p:cNvPr id="21" name="Text 19"/>
+          <p:cNvPr id="22" name="Text 19"/>
           <p:cNvSpPr/>
           <p:nvPr/>
         </p:nvSpPr>
@@ -14287,7 +14287,7 @@
       </p:sp>
       <p:sp>
         <p:nvSpPr>
-          <p:cNvPr id="22" name="Text 20"/>
+          <p:cNvPr id="23" name="Text 20"/>
           <p:cNvSpPr/>
           <p:nvPr/>
         </p:nvSpPr>
@@ -14326,7 +14326,7 @@
       </p:sp>
       <p:sp>
         <p:nvSpPr>
-          <p:cNvPr id="23" name="Text 21"/>
+          <p:cNvPr id="24" name="Text 21"/>
           <p:cNvSpPr/>
           <p:nvPr/>
         </p:nvSpPr>

--- a/Mini-DDSM-CSDE2026-Presentation.pptx
+++ b/Mini-DDSM-CSDE2026-Presentation.pptx
@@ -154,7 +154,7 @@
           </c:spPr>
           <c:invertIfNegative val="0"/>
           <c:dLbls>
-            <c:numFmt formatCode="#,##0" sourceLinked="0"/>
+            <c:numFmt formatCode="0.00" sourceLinked="0"/>
             <c:txPr>
               <a:bodyPr/>
               <a:lstStyle/>
@@ -249,7 +249,7 @@
           </c:val>
         </c:ser>
         <c:dLbls>
-          <c:numFmt formatCode="#,##0" sourceLinked="0"/>
+          <c:numFmt formatCode="0.00" sourceLinked="0"/>
           <c:txPr>
             <a:bodyPr/>
             <a:lstStyle/>
@@ -3343,9 +3343,9 @@
                 <a:solidFill>
                   <a:srgbClr val="1F2A52"/>
                 </a:solidFill>
-                <a:latin typeface="Consolas" pitchFamily="34" charset="0"/>
-                <a:ea typeface="Consolas" pitchFamily="34" charset="-122"/>
-                <a:cs typeface="Consolas" pitchFamily="34" charset="-120"/>
+                <a:latin typeface="Courier New" pitchFamily="34" charset="0"/>
+                <a:ea typeface="Courier New" pitchFamily="34" charset="-122"/>
+                <a:cs typeface="Courier New" pitchFamily="34" charset="-120"/>
               </a:rPr>
               <a:t>0.891</a:t>
             </a:r>
@@ -3448,9 +3448,9 @@
                 <a:solidFill>
                   <a:srgbClr val="1F2A52"/>
                 </a:solidFill>
-                <a:latin typeface="Consolas" pitchFamily="34" charset="0"/>
-                <a:ea typeface="Consolas" pitchFamily="34" charset="-122"/>
-                <a:cs typeface="Consolas" pitchFamily="34" charset="-120"/>
+                <a:latin typeface="Courier New" pitchFamily="34" charset="0"/>
+                <a:ea typeface="Courier New" pitchFamily="34" charset="-122"/>
+                <a:cs typeface="Courier New" pitchFamily="34" charset="-120"/>
               </a:rPr>
               <a:t>2,417</a:t>
             </a:r>
@@ -3553,9 +3553,9 @@
                 <a:solidFill>
                   <a:srgbClr val="1F2A52"/>
                 </a:solidFill>
-                <a:latin typeface="Consolas" pitchFamily="34" charset="0"/>
-                <a:ea typeface="Consolas" pitchFamily="34" charset="-122"/>
-                <a:cs typeface="Consolas" pitchFamily="34" charset="-120"/>
+                <a:latin typeface="Courier New" pitchFamily="34" charset="0"/>
+                <a:ea typeface="Courier New" pitchFamily="34" charset="-122"/>
+                <a:cs typeface="Courier New" pitchFamily="34" charset="-120"/>
               </a:rPr>
               <a:t>0</a:t>
             </a:r>
@@ -6141,8 +6141,8 @@
         </p:nvSpPr>
         <p:spPr>
           <a:xfrm>
-            <a:off x="9784080" y="3246120"/>
-            <a:ext cx="1645920" cy="228600"/>
+            <a:off x="9692640" y="3246120"/>
+            <a:ext cx="1828800" cy="228600"/>
           </a:xfrm>
           <a:prstGeom prst="rect">
             <a:avLst/>
@@ -6158,17 +6158,17 @@
               <a:buNone/>
             </a:pPr>
             <a:r>
-              <a:rPr lang="en-US" sz="750" dirty="0">
+              <a:rPr lang="en-US" sz="700" dirty="0">
                 <a:solidFill>
                   <a:srgbClr val="3D4873"/>
                 </a:solidFill>
-                <a:latin typeface="Consolas" pitchFamily="34" charset="0"/>
-                <a:ea typeface="Consolas" pitchFamily="34" charset="-122"/>
-                <a:cs typeface="Consolas" pitchFamily="34" charset="-120"/>
+                <a:latin typeface="Courier New" pitchFamily="34" charset="0"/>
+                <a:ea typeface="Courier New" pitchFamily="34" charset="-122"/>
+                <a:cs typeface="Courier New" pitchFamily="34" charset="-120"/>
               </a:rPr>
               <a:t>mini-ddsm-csde2026.vercel.app</a:t>
             </a:r>
-            <a:endParaRPr lang="en-US" sz="750" dirty="0"/>
+            <a:endParaRPr lang="en-US" sz="700" dirty="0"/>
           </a:p>
         </p:txBody>
       </p:sp>
@@ -6529,8 +6529,8 @@
         </p:nvSpPr>
         <p:spPr>
           <a:xfrm>
-            <a:off x="914400" y="4315968"/>
-            <a:ext cx="2834640" cy="411480"/>
+            <a:off x="822960" y="4315968"/>
+            <a:ext cx="3017520" cy="411480"/>
           </a:xfrm>
           <a:prstGeom prst="rect">
             <a:avLst/>
@@ -6546,17 +6546,17 @@
               <a:buNone/>
             </a:pPr>
             <a:r>
-              <a:rPr lang="en-US" sz="1100" dirty="0">
+              <a:rPr lang="en-US" sz="1000" dirty="0">
                 <a:solidFill>
                   <a:srgbClr val="3D4873"/>
                 </a:solidFill>
-                <a:latin typeface="Consolas" pitchFamily="34" charset="0"/>
-                <a:ea typeface="Consolas" pitchFamily="34" charset="-122"/>
-                <a:cs typeface="Consolas" pitchFamily="34" charset="-120"/>
+                <a:latin typeface="Courier New" pitchFamily="34" charset="0"/>
+                <a:ea typeface="Courier New" pitchFamily="34" charset="-122"/>
+                <a:cs typeface="Courier New" pitchFamily="34" charset="-120"/>
               </a:rPr>
               <a:t>sheikhnoorabdullah02@gmail.com</a:t>
             </a:r>
-            <a:endParaRPr lang="en-US" sz="1100" dirty="0"/>
+            <a:endParaRPr lang="en-US" sz="1000" dirty="0"/>
           </a:p>
         </p:txBody>
       </p:sp>
@@ -6634,8 +6634,8 @@
         </p:nvSpPr>
         <p:spPr>
           <a:xfrm>
-            <a:off x="4480560" y="4315968"/>
-            <a:ext cx="2834640" cy="411480"/>
+            <a:off x="4389120" y="4315968"/>
+            <a:ext cx="3017520" cy="411480"/>
           </a:xfrm>
           <a:prstGeom prst="rect">
             <a:avLst/>
@@ -6651,17 +6651,17 @@
               <a:buNone/>
             </a:pPr>
             <a:r>
-              <a:rPr lang="en-US" sz="1100" dirty="0">
+              <a:rPr lang="en-US" sz="1000" dirty="0">
                 <a:solidFill>
                   <a:srgbClr val="3D4873"/>
                 </a:solidFill>
-                <a:latin typeface="Consolas" pitchFamily="34" charset="0"/>
-                <a:ea typeface="Consolas" pitchFamily="34" charset="-122"/>
-                <a:cs typeface="Consolas" pitchFamily="34" charset="-120"/>
+                <a:latin typeface="Courier New" pitchFamily="34" charset="0"/>
+                <a:ea typeface="Courier New" pitchFamily="34" charset="-122"/>
+                <a:cs typeface="Courier New" pitchFamily="34" charset="-120"/>
               </a:rPr>
               <a:t>github.com/NoorAbdullah02/MINI_DDSM</a:t>
             </a:r>
-            <a:endParaRPr lang="en-US" sz="1100" dirty="0"/>
+            <a:endParaRPr lang="en-US" sz="1000" dirty="0"/>
           </a:p>
         </p:txBody>
       </p:sp>
@@ -6739,8 +6739,8 @@
         </p:nvSpPr>
         <p:spPr>
           <a:xfrm>
-            <a:off x="8046720" y="4315968"/>
-            <a:ext cx="2834640" cy="411480"/>
+            <a:off x="7955280" y="4315968"/>
+            <a:ext cx="3017520" cy="411480"/>
           </a:xfrm>
           <a:prstGeom prst="rect">
             <a:avLst/>
@@ -6756,17 +6756,17 @@
               <a:buNone/>
             </a:pPr>
             <a:r>
-              <a:rPr lang="en-US" sz="1100" dirty="0">
+              <a:rPr lang="en-US" sz="1000" dirty="0">
                 <a:solidFill>
                   <a:srgbClr val="3D4873"/>
                 </a:solidFill>
-                <a:latin typeface="Consolas" pitchFamily="34" charset="0"/>
-                <a:ea typeface="Consolas" pitchFamily="34" charset="-122"/>
-                <a:cs typeface="Consolas" pitchFamily="34" charset="-120"/>
+                <a:latin typeface="Courier New" pitchFamily="34" charset="0"/>
+                <a:ea typeface="Courier New" pitchFamily="34" charset="-122"/>
+                <a:cs typeface="Courier New" pitchFamily="34" charset="-120"/>
               </a:rPr>
               <a:t>mini-ddsm-csde2026.vercel.app</a:t>
             </a:r>
-            <a:endParaRPr lang="en-US" sz="1100" dirty="0"/>
+            <a:endParaRPr lang="en-US" sz="1000" dirty="0"/>
           </a:p>
         </p:txBody>
       </p:sp>
@@ -7307,7 +7307,46 @@
       </p:sp>
       <p:sp>
         <p:nvSpPr>
-          <p:cNvPr id="11" name="Shape 8"/>
+          <p:cNvPr id="11" name="Text 8"/>
+          <p:cNvSpPr/>
+          <p:nvPr/>
+        </p:nvSpPr>
+        <p:spPr>
+          <a:xfrm>
+            <a:off x="960120" y="3337560"/>
+            <a:ext cx="329184" cy="329184"/>
+          </a:xfrm>
+          <a:prstGeom prst="rect">
+            <a:avLst/>
+          </a:prstGeom>
+          <a:noFill/>
+          <a:ln/>
+        </p:spPr>
+        <p:txBody>
+          <a:bodyPr wrap="square" rtlCol="0" anchor="ctr"/>
+          <a:lstStyle/>
+          <a:p>
+            <a:pPr algn="ctr" indent="0" marL="0">
+              <a:buNone/>
+            </a:pPr>
+            <a:r>
+              <a:rPr lang="en-US" sz="800" b="1" dirty="0">
+                <a:solidFill>
+                  <a:srgbClr val="FFFFFF"/>
+                </a:solidFill>
+                <a:latin typeface="Calibri" pitchFamily="34" charset="0"/>
+                <a:ea typeface="Calibri" pitchFamily="34" charset="-122"/>
+                <a:cs typeface="Calibri" pitchFamily="34" charset="-120"/>
+              </a:rPr>
+              <a:t>P1</a:t>
+            </a:r>
+            <a:endParaRPr lang="en-US" sz="800" dirty="0"/>
+          </a:p>
+        </p:txBody>
+      </p:sp>
+      <p:sp>
+        <p:nvSpPr>
+          <p:cNvPr id="12" name="Shape 9"/>
           <p:cNvSpPr/>
           <p:nvPr/>
         </p:nvSpPr>
@@ -7329,7 +7368,46 @@
       </p:sp>
       <p:sp>
         <p:nvSpPr>
-          <p:cNvPr id="12" name="Shape 9"/>
+          <p:cNvPr id="13" name="Text 10"/>
+          <p:cNvSpPr/>
+          <p:nvPr/>
+        </p:nvSpPr>
+        <p:spPr>
+          <a:xfrm>
+            <a:off x="1344168" y="3337560"/>
+            <a:ext cx="329184" cy="329184"/>
+          </a:xfrm>
+          <a:prstGeom prst="rect">
+            <a:avLst/>
+          </a:prstGeom>
+          <a:noFill/>
+          <a:ln/>
+        </p:spPr>
+        <p:txBody>
+          <a:bodyPr wrap="square" rtlCol="0" anchor="ctr"/>
+          <a:lstStyle/>
+          <a:p>
+            <a:pPr algn="ctr" indent="0" marL="0">
+              <a:buNone/>
+            </a:pPr>
+            <a:r>
+              <a:rPr lang="en-US" sz="800" b="1" dirty="0">
+                <a:solidFill>
+                  <a:srgbClr val="FFFFFF"/>
+                </a:solidFill>
+                <a:latin typeface="Calibri" pitchFamily="34" charset="0"/>
+                <a:ea typeface="Calibri" pitchFamily="34" charset="-122"/>
+                <a:cs typeface="Calibri" pitchFamily="34" charset="-120"/>
+              </a:rPr>
+              <a:t>P2</a:t>
+            </a:r>
+            <a:endParaRPr lang="en-US" sz="800" dirty="0"/>
+          </a:p>
+        </p:txBody>
+      </p:sp>
+      <p:sp>
+        <p:nvSpPr>
+          <p:cNvPr id="14" name="Shape 11"/>
           <p:cNvSpPr/>
           <p:nvPr/>
         </p:nvSpPr>
@@ -7351,7 +7429,46 @@
       </p:sp>
       <p:sp>
         <p:nvSpPr>
-          <p:cNvPr id="13" name="Shape 10"/>
+          <p:cNvPr id="15" name="Text 12"/>
+          <p:cNvSpPr/>
+          <p:nvPr/>
+        </p:nvSpPr>
+        <p:spPr>
+          <a:xfrm>
+            <a:off x="1728216" y="3337560"/>
+            <a:ext cx="329184" cy="329184"/>
+          </a:xfrm>
+          <a:prstGeom prst="rect">
+            <a:avLst/>
+          </a:prstGeom>
+          <a:noFill/>
+          <a:ln/>
+        </p:spPr>
+        <p:txBody>
+          <a:bodyPr wrap="square" rtlCol="0" anchor="ctr"/>
+          <a:lstStyle/>
+          <a:p>
+            <a:pPr algn="ctr" indent="0" marL="0">
+              <a:buNone/>
+            </a:pPr>
+            <a:r>
+              <a:rPr lang="en-US" sz="800" b="1" dirty="0">
+                <a:solidFill>
+                  <a:srgbClr val="FFFFFF"/>
+                </a:solidFill>
+                <a:latin typeface="Calibri" pitchFamily="34" charset="0"/>
+                <a:ea typeface="Calibri" pitchFamily="34" charset="-122"/>
+                <a:cs typeface="Calibri" pitchFamily="34" charset="-120"/>
+              </a:rPr>
+              <a:t>P1</a:t>
+            </a:r>
+            <a:endParaRPr lang="en-US" sz="800" dirty="0"/>
+          </a:p>
+        </p:txBody>
+      </p:sp>
+      <p:sp>
+        <p:nvSpPr>
+          <p:cNvPr id="16" name="Shape 13"/>
           <p:cNvSpPr/>
           <p:nvPr/>
         </p:nvSpPr>
@@ -7373,7 +7490,46 @@
       </p:sp>
       <p:sp>
         <p:nvSpPr>
-          <p:cNvPr id="14" name="Shape 11"/>
+          <p:cNvPr id="17" name="Text 14"/>
+          <p:cNvSpPr/>
+          <p:nvPr/>
+        </p:nvSpPr>
+        <p:spPr>
+          <a:xfrm>
+            <a:off x="2112264" y="3337560"/>
+            <a:ext cx="329184" cy="329184"/>
+          </a:xfrm>
+          <a:prstGeom prst="rect">
+            <a:avLst/>
+          </a:prstGeom>
+          <a:noFill/>
+          <a:ln/>
+        </p:spPr>
+        <p:txBody>
+          <a:bodyPr wrap="square" rtlCol="0" anchor="ctr"/>
+          <a:lstStyle/>
+          <a:p>
+            <a:pPr algn="ctr" indent="0" marL="0">
+              <a:buNone/>
+            </a:pPr>
+            <a:r>
+              <a:rPr lang="en-US" sz="800" b="1" dirty="0">
+                <a:solidFill>
+                  <a:srgbClr val="FFFFFF"/>
+                </a:solidFill>
+                <a:latin typeface="Calibri" pitchFamily="34" charset="0"/>
+                <a:ea typeface="Calibri" pitchFamily="34" charset="-122"/>
+                <a:cs typeface="Calibri" pitchFamily="34" charset="-120"/>
+              </a:rPr>
+              <a:t>P3</a:t>
+            </a:r>
+            <a:endParaRPr lang="en-US" sz="800" dirty="0"/>
+          </a:p>
+        </p:txBody>
+      </p:sp>
+      <p:sp>
+        <p:nvSpPr>
+          <p:cNvPr id="18" name="Shape 15"/>
           <p:cNvSpPr/>
           <p:nvPr/>
         </p:nvSpPr>
@@ -7395,7 +7551,46 @@
       </p:sp>
       <p:sp>
         <p:nvSpPr>
-          <p:cNvPr id="15" name="Shape 12"/>
+          <p:cNvPr id="19" name="Text 16"/>
+          <p:cNvSpPr/>
+          <p:nvPr/>
+        </p:nvSpPr>
+        <p:spPr>
+          <a:xfrm>
+            <a:off x="960120" y="3721608"/>
+            <a:ext cx="329184" cy="329184"/>
+          </a:xfrm>
+          <a:prstGeom prst="rect">
+            <a:avLst/>
+          </a:prstGeom>
+          <a:noFill/>
+          <a:ln/>
+        </p:spPr>
+        <p:txBody>
+          <a:bodyPr wrap="square" rtlCol="0" anchor="ctr"/>
+          <a:lstStyle/>
+          <a:p>
+            <a:pPr algn="ctr" indent="0" marL="0">
+              <a:buNone/>
+            </a:pPr>
+            <a:r>
+              <a:rPr lang="en-US" sz="800" b="1" dirty="0">
+                <a:solidFill>
+                  <a:srgbClr val="FFFFFF"/>
+                </a:solidFill>
+                <a:latin typeface="Calibri" pitchFamily="34" charset="0"/>
+                <a:ea typeface="Calibri" pitchFamily="34" charset="-122"/>
+                <a:cs typeface="Calibri" pitchFamily="34" charset="-120"/>
+              </a:rPr>
+              <a:t>P2</a:t>
+            </a:r>
+            <a:endParaRPr lang="en-US" sz="800" dirty="0"/>
+          </a:p>
+        </p:txBody>
+      </p:sp>
+      <p:sp>
+        <p:nvSpPr>
+          <p:cNvPr id="20" name="Shape 17"/>
           <p:cNvSpPr/>
           <p:nvPr/>
         </p:nvSpPr>
@@ -7417,7 +7612,46 @@
       </p:sp>
       <p:sp>
         <p:nvSpPr>
-          <p:cNvPr id="16" name="Shape 13"/>
+          <p:cNvPr id="21" name="Text 18"/>
+          <p:cNvSpPr/>
+          <p:nvPr/>
+        </p:nvSpPr>
+        <p:spPr>
+          <a:xfrm>
+            <a:off x="1344168" y="3721608"/>
+            <a:ext cx="329184" cy="329184"/>
+          </a:xfrm>
+          <a:prstGeom prst="rect">
+            <a:avLst/>
+          </a:prstGeom>
+          <a:noFill/>
+          <a:ln/>
+        </p:spPr>
+        <p:txBody>
+          <a:bodyPr wrap="square" rtlCol="0" anchor="ctr"/>
+          <a:lstStyle/>
+          <a:p>
+            <a:pPr algn="ctr" indent="0" marL="0">
+              <a:buNone/>
+            </a:pPr>
+            <a:r>
+              <a:rPr lang="en-US" sz="800" b="1" dirty="0">
+                <a:solidFill>
+                  <a:srgbClr val="FFFFFF"/>
+                </a:solidFill>
+                <a:latin typeface="Calibri" pitchFamily="34" charset="0"/>
+                <a:ea typeface="Calibri" pitchFamily="34" charset="-122"/>
+                <a:cs typeface="Calibri" pitchFamily="34" charset="-120"/>
+              </a:rPr>
+              <a:t>P4</a:t>
+            </a:r>
+            <a:endParaRPr lang="en-US" sz="800" dirty="0"/>
+          </a:p>
+        </p:txBody>
+      </p:sp>
+      <p:sp>
+        <p:nvSpPr>
+          <p:cNvPr id="22" name="Shape 19"/>
           <p:cNvSpPr/>
           <p:nvPr/>
         </p:nvSpPr>
@@ -7439,7 +7673,46 @@
       </p:sp>
       <p:sp>
         <p:nvSpPr>
-          <p:cNvPr id="17" name="Shape 14"/>
+          <p:cNvPr id="23" name="Text 20"/>
+          <p:cNvSpPr/>
+          <p:nvPr/>
+        </p:nvSpPr>
+        <p:spPr>
+          <a:xfrm>
+            <a:off x="1728216" y="3721608"/>
+            <a:ext cx="329184" cy="329184"/>
+          </a:xfrm>
+          <a:prstGeom prst="rect">
+            <a:avLst/>
+          </a:prstGeom>
+          <a:noFill/>
+          <a:ln/>
+        </p:spPr>
+        <p:txBody>
+          <a:bodyPr wrap="square" rtlCol="0" anchor="ctr"/>
+          <a:lstStyle/>
+          <a:p>
+            <a:pPr algn="ctr" indent="0" marL="0">
+              <a:buNone/>
+            </a:pPr>
+            <a:r>
+              <a:rPr lang="en-US" sz="800" b="1" dirty="0">
+                <a:solidFill>
+                  <a:srgbClr val="FFFFFF"/>
+                </a:solidFill>
+                <a:latin typeface="Calibri" pitchFamily="34" charset="0"/>
+                <a:ea typeface="Calibri" pitchFamily="34" charset="-122"/>
+                <a:cs typeface="Calibri" pitchFamily="34" charset="-120"/>
+              </a:rPr>
+              <a:t>P1</a:t>
+            </a:r>
+            <a:endParaRPr lang="en-US" sz="800" dirty="0"/>
+          </a:p>
+        </p:txBody>
+      </p:sp>
+      <p:sp>
+        <p:nvSpPr>
+          <p:cNvPr id="24" name="Shape 21"/>
           <p:cNvSpPr/>
           <p:nvPr/>
         </p:nvSpPr>
@@ -7461,37 +7734,76 @@
       </p:sp>
       <p:sp>
         <p:nvSpPr>
-          <p:cNvPr id="18" name="Text 15"/>
-          <p:cNvSpPr/>
-          <p:nvPr/>
-        </p:nvSpPr>
-        <p:spPr>
-          <a:xfrm>
-            <a:off x="3505124" y="3063240"/>
-            <a:ext cx="1828800" cy="228600"/>
-          </a:xfrm>
-          <a:prstGeom prst="rect">
-            <a:avLst/>
-          </a:prstGeom>
-          <a:noFill/>
-          <a:ln/>
-        </p:spPr>
-        <p:txBody>
-          <a:bodyPr wrap="square" rtlCol="0" anchor="ctr"/>
-          <a:lstStyle/>
-          <a:p>
-            <a:pPr indent="0" marL="0">
-              <a:buNone/>
-            </a:pPr>
-            <a:r>
-              <a:rPr lang="en-US" sz="900" b="1" spc="100" kern="0" dirty="0">
-                <a:solidFill>
-                  <a:srgbClr val="6B7394"/>
+          <p:cNvPr id="25" name="Text 22"/>
+          <p:cNvSpPr/>
+          <p:nvPr/>
+        </p:nvSpPr>
+        <p:spPr>
+          <a:xfrm>
+            <a:off x="2112264" y="3721608"/>
+            <a:ext cx="329184" cy="329184"/>
+          </a:xfrm>
+          <a:prstGeom prst="rect">
+            <a:avLst/>
+          </a:prstGeom>
+          <a:noFill/>
+          <a:ln/>
+        </p:spPr>
+        <p:txBody>
+          <a:bodyPr wrap="square" rtlCol="0" anchor="ctr"/>
+          <a:lstStyle/>
+          <a:p>
+            <a:pPr algn="ctr" indent="0" marL="0">
+              <a:buNone/>
+            </a:pPr>
+            <a:r>
+              <a:rPr lang="en-US" sz="800" b="1" dirty="0">
+                <a:solidFill>
+                  <a:srgbClr val="FFFFFF"/>
                 </a:solidFill>
                 <a:latin typeface="Calibri" pitchFamily="34" charset="0"/>
                 <a:ea typeface="Calibri" pitchFamily="34" charset="-122"/>
                 <a:cs typeface="Calibri" pitchFamily="34" charset="-120"/>
               </a:rPr>
+              <a:t>P3</a:t>
+            </a:r>
+            <a:endParaRPr lang="en-US" sz="800" dirty="0"/>
+          </a:p>
+        </p:txBody>
+      </p:sp>
+      <p:sp>
+        <p:nvSpPr>
+          <p:cNvPr id="26" name="Text 23"/>
+          <p:cNvSpPr/>
+          <p:nvPr/>
+        </p:nvSpPr>
+        <p:spPr>
+          <a:xfrm>
+            <a:off x="3505124" y="3063240"/>
+            <a:ext cx="1828800" cy="228600"/>
+          </a:xfrm>
+          <a:prstGeom prst="rect">
+            <a:avLst/>
+          </a:prstGeom>
+          <a:noFill/>
+          <a:ln/>
+        </p:spPr>
+        <p:txBody>
+          <a:bodyPr wrap="square" rtlCol="0" anchor="ctr"/>
+          <a:lstStyle/>
+          <a:p>
+            <a:pPr indent="0" marL="0">
+              <a:buNone/>
+            </a:pPr>
+            <a:r>
+              <a:rPr lang="en-US" sz="900" b="1" spc="100" kern="0" dirty="0">
+                <a:solidFill>
+                  <a:srgbClr val="6B7394"/>
+                </a:solidFill>
+                <a:latin typeface="Calibri" pitchFamily="34" charset="0"/>
+                <a:ea typeface="Calibri" pitchFamily="34" charset="-122"/>
+                <a:cs typeface="Calibri" pitchFamily="34" charset="-120"/>
+              </a:rPr>
               <a:t>Test</a:t>
             </a:r>
             <a:endParaRPr lang="en-US" sz="900" dirty="0"/>
@@ -7500,7 +7812,7 @@
       </p:sp>
       <p:sp>
         <p:nvSpPr>
-          <p:cNvPr id="19" name="Shape 16"/>
+          <p:cNvPr id="27" name="Shape 24"/>
           <p:cNvSpPr/>
           <p:nvPr/>
         </p:nvSpPr>
@@ -7522,7 +7834,46 @@
       </p:sp>
       <p:sp>
         <p:nvSpPr>
-          <p:cNvPr id="20" name="Shape 17"/>
+          <p:cNvPr id="28" name="Text 25"/>
+          <p:cNvSpPr/>
+          <p:nvPr/>
+        </p:nvSpPr>
+        <p:spPr>
+          <a:xfrm>
+            <a:off x="3505124" y="3337560"/>
+            <a:ext cx="329184" cy="329184"/>
+          </a:xfrm>
+          <a:prstGeom prst="rect">
+            <a:avLst/>
+          </a:prstGeom>
+          <a:noFill/>
+          <a:ln/>
+        </p:spPr>
+        <p:txBody>
+          <a:bodyPr wrap="square" rtlCol="0" anchor="ctr"/>
+          <a:lstStyle/>
+          <a:p>
+            <a:pPr algn="ctr" indent="0" marL="0">
+              <a:buNone/>
+            </a:pPr>
+            <a:r>
+              <a:rPr lang="en-US" sz="800" b="1" dirty="0">
+                <a:solidFill>
+                  <a:srgbClr val="FFFFFF"/>
+                </a:solidFill>
+                <a:latin typeface="Calibri" pitchFamily="34" charset="0"/>
+                <a:ea typeface="Calibri" pitchFamily="34" charset="-122"/>
+                <a:cs typeface="Calibri" pitchFamily="34" charset="-120"/>
+              </a:rPr>
+              <a:t>P3</a:t>
+            </a:r>
+            <a:endParaRPr lang="en-US" sz="800" dirty="0"/>
+          </a:p>
+        </p:txBody>
+      </p:sp>
+      <p:sp>
+        <p:nvSpPr>
+          <p:cNvPr id="29" name="Shape 26"/>
           <p:cNvSpPr/>
           <p:nvPr/>
         </p:nvSpPr>
@@ -7544,7 +7895,46 @@
       </p:sp>
       <p:sp>
         <p:nvSpPr>
-          <p:cNvPr id="21" name="Shape 18"/>
+          <p:cNvPr id="30" name="Text 27"/>
+          <p:cNvSpPr/>
+          <p:nvPr/>
+        </p:nvSpPr>
+        <p:spPr>
+          <a:xfrm>
+            <a:off x="3889172" y="3337560"/>
+            <a:ext cx="329184" cy="329184"/>
+          </a:xfrm>
+          <a:prstGeom prst="rect">
+            <a:avLst/>
+          </a:prstGeom>
+          <a:noFill/>
+          <a:ln/>
+        </p:spPr>
+        <p:txBody>
+          <a:bodyPr wrap="square" rtlCol="0" anchor="ctr"/>
+          <a:lstStyle/>
+          <a:p>
+            <a:pPr algn="ctr" indent="0" marL="0">
+              <a:buNone/>
+            </a:pPr>
+            <a:r>
+              <a:rPr lang="en-US" sz="800" b="1" dirty="0">
+                <a:solidFill>
+                  <a:srgbClr val="FFFFFF"/>
+                </a:solidFill>
+                <a:latin typeface="Calibri" pitchFamily="34" charset="0"/>
+                <a:ea typeface="Calibri" pitchFamily="34" charset="-122"/>
+                <a:cs typeface="Calibri" pitchFamily="34" charset="-120"/>
+              </a:rPr>
+              <a:t>P1</a:t>
+            </a:r>
+            <a:endParaRPr lang="en-US" sz="800" dirty="0"/>
+          </a:p>
+        </p:txBody>
+      </p:sp>
+      <p:sp>
+        <p:nvSpPr>
+          <p:cNvPr id="31" name="Shape 28"/>
           <p:cNvSpPr/>
           <p:nvPr/>
         </p:nvSpPr>
@@ -7566,7 +7956,46 @@
       </p:sp>
       <p:sp>
         <p:nvSpPr>
-          <p:cNvPr id="22" name="Shape 19"/>
+          <p:cNvPr id="32" name="Text 29"/>
+          <p:cNvSpPr/>
+          <p:nvPr/>
+        </p:nvSpPr>
+        <p:spPr>
+          <a:xfrm>
+            <a:off x="4273220" y="3337560"/>
+            <a:ext cx="329184" cy="329184"/>
+          </a:xfrm>
+          <a:prstGeom prst="rect">
+            <a:avLst/>
+          </a:prstGeom>
+          <a:noFill/>
+          <a:ln/>
+        </p:spPr>
+        <p:txBody>
+          <a:bodyPr wrap="square" rtlCol="0" anchor="ctr"/>
+          <a:lstStyle/>
+          <a:p>
+            <a:pPr algn="ctr" indent="0" marL="0">
+              <a:buNone/>
+            </a:pPr>
+            <a:r>
+              <a:rPr lang="en-US" sz="800" b="1" dirty="0">
+                <a:solidFill>
+                  <a:srgbClr val="FFFFFF"/>
+                </a:solidFill>
+                <a:latin typeface="Calibri" pitchFamily="34" charset="0"/>
+                <a:ea typeface="Calibri" pitchFamily="34" charset="-122"/>
+                <a:cs typeface="Calibri" pitchFamily="34" charset="-120"/>
+              </a:rPr>
+              <a:t>P2</a:t>
+            </a:r>
+            <a:endParaRPr lang="en-US" sz="800" dirty="0"/>
+          </a:p>
+        </p:txBody>
+      </p:sp>
+      <p:sp>
+        <p:nvSpPr>
+          <p:cNvPr id="33" name="Shape 30"/>
           <p:cNvSpPr/>
           <p:nvPr/>
         </p:nvSpPr>
@@ -7588,7 +8017,46 @@
       </p:sp>
       <p:sp>
         <p:nvSpPr>
-          <p:cNvPr id="23" name="Shape 20"/>
+          <p:cNvPr id="34" name="Text 31"/>
+          <p:cNvSpPr/>
+          <p:nvPr/>
+        </p:nvSpPr>
+        <p:spPr>
+          <a:xfrm>
+            <a:off x="4657268" y="3337560"/>
+            <a:ext cx="329184" cy="329184"/>
+          </a:xfrm>
+          <a:prstGeom prst="rect">
+            <a:avLst/>
+          </a:prstGeom>
+          <a:noFill/>
+          <a:ln/>
+        </p:spPr>
+        <p:txBody>
+          <a:bodyPr wrap="square" rtlCol="0" anchor="ctr"/>
+          <a:lstStyle/>
+          <a:p>
+            <a:pPr algn="ctr" indent="0" marL="0">
+              <a:buNone/>
+            </a:pPr>
+            <a:r>
+              <a:rPr lang="en-US" sz="800" b="1" dirty="0">
+                <a:solidFill>
+                  <a:srgbClr val="FFFFFF"/>
+                </a:solidFill>
+                <a:latin typeface="Calibri" pitchFamily="34" charset="0"/>
+                <a:ea typeface="Calibri" pitchFamily="34" charset="-122"/>
+                <a:cs typeface="Calibri" pitchFamily="34" charset="-120"/>
+              </a:rPr>
+              <a:t>P1</a:t>
+            </a:r>
+            <a:endParaRPr lang="en-US" sz="800" dirty="0"/>
+          </a:p>
+        </p:txBody>
+      </p:sp>
+      <p:sp>
+        <p:nvSpPr>
+          <p:cNvPr id="35" name="Shape 32"/>
           <p:cNvSpPr/>
           <p:nvPr/>
         </p:nvSpPr>
@@ -7610,7 +8078,46 @@
       </p:sp>
       <p:sp>
         <p:nvSpPr>
-          <p:cNvPr id="24" name="Shape 21"/>
+          <p:cNvPr id="36" name="Text 33"/>
+          <p:cNvSpPr/>
+          <p:nvPr/>
+        </p:nvSpPr>
+        <p:spPr>
+          <a:xfrm>
+            <a:off x="3505124" y="3721608"/>
+            <a:ext cx="329184" cy="329184"/>
+          </a:xfrm>
+          <a:prstGeom prst="rect">
+            <a:avLst/>
+          </a:prstGeom>
+          <a:noFill/>
+          <a:ln/>
+        </p:spPr>
+        <p:txBody>
+          <a:bodyPr wrap="square" rtlCol="0" anchor="ctr"/>
+          <a:lstStyle/>
+          <a:p>
+            <a:pPr algn="ctr" indent="0" marL="0">
+              <a:buNone/>
+            </a:pPr>
+            <a:r>
+              <a:rPr lang="en-US" sz="800" b="1" dirty="0">
+                <a:solidFill>
+                  <a:srgbClr val="FFFFFF"/>
+                </a:solidFill>
+                <a:latin typeface="Calibri" pitchFamily="34" charset="0"/>
+                <a:ea typeface="Calibri" pitchFamily="34" charset="-122"/>
+                <a:cs typeface="Calibri" pitchFamily="34" charset="-120"/>
+              </a:rPr>
+              <a:t>P1</a:t>
+            </a:r>
+            <a:endParaRPr lang="en-US" sz="800" dirty="0"/>
+          </a:p>
+        </p:txBody>
+      </p:sp>
+      <p:sp>
+        <p:nvSpPr>
+          <p:cNvPr id="37" name="Shape 34"/>
           <p:cNvSpPr/>
           <p:nvPr/>
         </p:nvSpPr>
@@ -7632,7 +8139,46 @@
       </p:sp>
       <p:sp>
         <p:nvSpPr>
-          <p:cNvPr id="25" name="Shape 22"/>
+          <p:cNvPr id="38" name="Text 35"/>
+          <p:cNvSpPr/>
+          <p:nvPr/>
+        </p:nvSpPr>
+        <p:spPr>
+          <a:xfrm>
+            <a:off x="3889172" y="3721608"/>
+            <a:ext cx="329184" cy="329184"/>
+          </a:xfrm>
+          <a:prstGeom prst="rect">
+            <a:avLst/>
+          </a:prstGeom>
+          <a:noFill/>
+          <a:ln/>
+        </p:spPr>
+        <p:txBody>
+          <a:bodyPr wrap="square" rtlCol="0" anchor="ctr"/>
+          <a:lstStyle/>
+          <a:p>
+            <a:pPr algn="ctr" indent="0" marL="0">
+              <a:buNone/>
+            </a:pPr>
+            <a:r>
+              <a:rPr lang="en-US" sz="800" b="1" dirty="0">
+                <a:solidFill>
+                  <a:srgbClr val="FFFFFF"/>
+                </a:solidFill>
+                <a:latin typeface="Calibri" pitchFamily="34" charset="0"/>
+                <a:ea typeface="Calibri" pitchFamily="34" charset="-122"/>
+                <a:cs typeface="Calibri" pitchFamily="34" charset="-120"/>
+              </a:rPr>
+              <a:t>P2</a:t>
+            </a:r>
+            <a:endParaRPr lang="en-US" sz="800" dirty="0"/>
+          </a:p>
+        </p:txBody>
+      </p:sp>
+      <p:sp>
+        <p:nvSpPr>
+          <p:cNvPr id="39" name="Shape 36"/>
           <p:cNvSpPr/>
           <p:nvPr/>
         </p:nvSpPr>
@@ -7654,7 +8200,46 @@
       </p:sp>
       <p:sp>
         <p:nvSpPr>
-          <p:cNvPr id="26" name="Shape 23"/>
+          <p:cNvPr id="40" name="Text 37"/>
+          <p:cNvSpPr/>
+          <p:nvPr/>
+        </p:nvSpPr>
+        <p:spPr>
+          <a:xfrm>
+            <a:off x="4273220" y="3721608"/>
+            <a:ext cx="329184" cy="329184"/>
+          </a:xfrm>
+          <a:prstGeom prst="rect">
+            <a:avLst/>
+          </a:prstGeom>
+          <a:noFill/>
+          <a:ln/>
+        </p:spPr>
+        <p:txBody>
+          <a:bodyPr wrap="square" rtlCol="0" anchor="ctr"/>
+          <a:lstStyle/>
+          <a:p>
+            <a:pPr algn="ctr" indent="0" marL="0">
+              <a:buNone/>
+            </a:pPr>
+            <a:r>
+              <a:rPr lang="en-US" sz="800" b="1" dirty="0">
+                <a:solidFill>
+                  <a:srgbClr val="FFFFFF"/>
+                </a:solidFill>
+                <a:latin typeface="Calibri" pitchFamily="34" charset="0"/>
+                <a:ea typeface="Calibri" pitchFamily="34" charset="-122"/>
+                <a:cs typeface="Calibri" pitchFamily="34" charset="-120"/>
+              </a:rPr>
+              <a:t>P3</a:t>
+            </a:r>
+            <a:endParaRPr lang="en-US" sz="800" dirty="0"/>
+          </a:p>
+        </p:txBody>
+      </p:sp>
+      <p:sp>
+        <p:nvSpPr>
+          <p:cNvPr id="41" name="Shape 38"/>
           <p:cNvSpPr/>
           <p:nvPr/>
         </p:nvSpPr>
@@ -7676,37 +8261,76 @@
       </p:sp>
       <p:sp>
         <p:nvSpPr>
-          <p:cNvPr id="27" name="Text 24"/>
-          <p:cNvSpPr/>
-          <p:nvPr/>
-        </p:nvSpPr>
-        <p:spPr>
-          <a:xfrm>
-            <a:off x="960120" y="5029200"/>
-            <a:ext cx="4724248" cy="365760"/>
-          </a:xfrm>
-          <a:prstGeom prst="rect">
-            <a:avLst/>
-          </a:prstGeom>
-          <a:noFill/>
-          <a:ln/>
-        </p:spPr>
-        <p:txBody>
-          <a:bodyPr wrap="square" rtlCol="0" anchor="ctr"/>
-          <a:lstStyle/>
-          <a:p>
-            <a:pPr indent="0" marL="0">
-              <a:buNone/>
-            </a:pPr>
-            <a:r>
-              <a:rPr lang="en-US" sz="1100" dirty="0">
-                <a:solidFill>
-                  <a:srgbClr val="3D4873"/>
+          <p:cNvPr id="42" name="Text 39"/>
+          <p:cNvSpPr/>
+          <p:nvPr/>
+        </p:nvSpPr>
+        <p:spPr>
+          <a:xfrm>
+            <a:off x="4657268" y="3721608"/>
+            <a:ext cx="329184" cy="329184"/>
+          </a:xfrm>
+          <a:prstGeom prst="rect">
+            <a:avLst/>
+          </a:prstGeom>
+          <a:noFill/>
+          <a:ln/>
+        </p:spPr>
+        <p:txBody>
+          <a:bodyPr wrap="square" rtlCol="0" anchor="ctr"/>
+          <a:lstStyle/>
+          <a:p>
+            <a:pPr algn="ctr" indent="0" marL="0">
+              <a:buNone/>
+            </a:pPr>
+            <a:r>
+              <a:rPr lang="en-US" sz="800" b="1" dirty="0">
+                <a:solidFill>
+                  <a:srgbClr val="FFFFFF"/>
                 </a:solidFill>
                 <a:latin typeface="Calibri" pitchFamily="34" charset="0"/>
                 <a:ea typeface="Calibri" pitchFamily="34" charset="-122"/>
                 <a:cs typeface="Calibri" pitchFamily="34" charset="-120"/>
               </a:rPr>
+              <a:t>P1</a:t>
+            </a:r>
+            <a:endParaRPr lang="en-US" sz="800" dirty="0"/>
+          </a:p>
+        </p:txBody>
+      </p:sp>
+      <p:sp>
+        <p:nvSpPr>
+          <p:cNvPr id="43" name="Text 40"/>
+          <p:cNvSpPr/>
+          <p:nvPr/>
+        </p:nvSpPr>
+        <p:spPr>
+          <a:xfrm>
+            <a:off x="960120" y="5029200"/>
+            <a:ext cx="4724248" cy="365760"/>
+          </a:xfrm>
+          <a:prstGeom prst="rect">
+            <a:avLst/>
+          </a:prstGeom>
+          <a:noFill/>
+          <a:ln/>
+        </p:spPr>
+        <p:txBody>
+          <a:bodyPr wrap="square" rtlCol="0" anchor="ctr"/>
+          <a:lstStyle/>
+          <a:p>
+            <a:pPr indent="0" marL="0">
+              <a:buNone/>
+            </a:pPr>
+            <a:r>
+              <a:rPr lang="en-US" sz="1100" dirty="0">
+                <a:solidFill>
+                  <a:srgbClr val="3D4873"/>
+                </a:solidFill>
+                <a:latin typeface="Calibri" pitchFamily="34" charset="0"/>
+                <a:ea typeface="Calibri" pitchFamily="34" charset="-122"/>
+                <a:cs typeface="Calibri" pitchFamily="34" charset="-120"/>
+              </a:rPr>
               <a:t>P1, P2, P3 leak into the test set.</a:t>
             </a:r>
             <a:endParaRPr lang="en-US" sz="1100" dirty="0"/>
@@ -7715,7 +8339,7 @@
       </p:sp>
       <p:sp>
         <p:nvSpPr>
-          <p:cNvPr id="28" name="Shape 25"/>
+          <p:cNvPr id="44" name="Shape 41"/>
           <p:cNvSpPr/>
           <p:nvPr/>
         </p:nvSpPr>
@@ -7742,7 +8366,7 @@
       </p:sp>
       <p:sp>
         <p:nvSpPr>
-          <p:cNvPr id="29" name="Text 26"/>
+          <p:cNvPr id="45" name="Text 42"/>
           <p:cNvSpPr/>
           <p:nvPr/>
         </p:nvSpPr>
@@ -7781,7 +8405,7 @@
       </p:sp>
       <p:sp>
         <p:nvSpPr>
-          <p:cNvPr id="30" name="Text 27"/>
+          <p:cNvPr id="46" name="Text 43"/>
           <p:cNvSpPr/>
           <p:nvPr/>
         </p:nvSpPr>
@@ -7820,7 +8444,7 @@
       </p:sp>
       <p:sp>
         <p:nvSpPr>
-          <p:cNvPr id="31" name="Shape 28"/>
+          <p:cNvPr id="47" name="Shape 44"/>
           <p:cNvSpPr/>
           <p:nvPr/>
         </p:nvSpPr>
@@ -7842,7 +8466,46 @@
       </p:sp>
       <p:sp>
         <p:nvSpPr>
-          <p:cNvPr id="32" name="Shape 29"/>
+          <p:cNvPr id="48" name="Text 45"/>
+          <p:cNvSpPr/>
+          <p:nvPr/>
+        </p:nvSpPr>
+        <p:spPr>
+          <a:xfrm>
+            <a:off x="6644488" y="3337560"/>
+            <a:ext cx="329184" cy="329184"/>
+          </a:xfrm>
+          <a:prstGeom prst="rect">
+            <a:avLst/>
+          </a:prstGeom>
+          <a:noFill/>
+          <a:ln/>
+        </p:spPr>
+        <p:txBody>
+          <a:bodyPr wrap="square" rtlCol="0" anchor="ctr"/>
+          <a:lstStyle/>
+          <a:p>
+            <a:pPr algn="ctr" indent="0" marL="0">
+              <a:buNone/>
+            </a:pPr>
+            <a:r>
+              <a:rPr lang="en-US" sz="800" b="1" dirty="0">
+                <a:solidFill>
+                  <a:srgbClr val="FFFFFF"/>
+                </a:solidFill>
+                <a:latin typeface="Calibri" pitchFamily="34" charset="0"/>
+                <a:ea typeface="Calibri" pitchFamily="34" charset="-122"/>
+                <a:cs typeface="Calibri" pitchFamily="34" charset="-120"/>
+              </a:rPr>
+              <a:t>P1</a:t>
+            </a:r>
+            <a:endParaRPr lang="en-US" sz="800" dirty="0"/>
+          </a:p>
+        </p:txBody>
+      </p:sp>
+      <p:sp>
+        <p:nvSpPr>
+          <p:cNvPr id="49" name="Shape 46"/>
           <p:cNvSpPr/>
           <p:nvPr/>
         </p:nvSpPr>
@@ -7864,7 +8527,46 @@
       </p:sp>
       <p:sp>
         <p:nvSpPr>
-          <p:cNvPr id="33" name="Shape 30"/>
+          <p:cNvPr id="50" name="Text 47"/>
+          <p:cNvSpPr/>
+          <p:nvPr/>
+        </p:nvSpPr>
+        <p:spPr>
+          <a:xfrm>
+            <a:off x="7028536" y="3337560"/>
+            <a:ext cx="329184" cy="329184"/>
+          </a:xfrm>
+          <a:prstGeom prst="rect">
+            <a:avLst/>
+          </a:prstGeom>
+          <a:noFill/>
+          <a:ln/>
+        </p:spPr>
+        <p:txBody>
+          <a:bodyPr wrap="square" rtlCol="0" anchor="ctr"/>
+          <a:lstStyle/>
+          <a:p>
+            <a:pPr algn="ctr" indent="0" marL="0">
+              <a:buNone/>
+            </a:pPr>
+            <a:r>
+              <a:rPr lang="en-US" sz="800" b="1" dirty="0">
+                <a:solidFill>
+                  <a:srgbClr val="FFFFFF"/>
+                </a:solidFill>
+                <a:latin typeface="Calibri" pitchFamily="34" charset="0"/>
+                <a:ea typeface="Calibri" pitchFamily="34" charset="-122"/>
+                <a:cs typeface="Calibri" pitchFamily="34" charset="-120"/>
+              </a:rPr>
+              <a:t>P1</a:t>
+            </a:r>
+            <a:endParaRPr lang="en-US" sz="800" dirty="0"/>
+          </a:p>
+        </p:txBody>
+      </p:sp>
+      <p:sp>
+        <p:nvSpPr>
+          <p:cNvPr id="51" name="Shape 48"/>
           <p:cNvSpPr/>
           <p:nvPr/>
         </p:nvSpPr>
@@ -7886,7 +8588,46 @@
       </p:sp>
       <p:sp>
         <p:nvSpPr>
-          <p:cNvPr id="34" name="Shape 31"/>
+          <p:cNvPr id="52" name="Text 49"/>
+          <p:cNvSpPr/>
+          <p:nvPr/>
+        </p:nvSpPr>
+        <p:spPr>
+          <a:xfrm>
+            <a:off x="7412584" y="3337560"/>
+            <a:ext cx="329184" cy="329184"/>
+          </a:xfrm>
+          <a:prstGeom prst="rect">
+            <a:avLst/>
+          </a:prstGeom>
+          <a:noFill/>
+          <a:ln/>
+        </p:spPr>
+        <p:txBody>
+          <a:bodyPr wrap="square" rtlCol="0" anchor="ctr"/>
+          <a:lstStyle/>
+          <a:p>
+            <a:pPr algn="ctr" indent="0" marL="0">
+              <a:buNone/>
+            </a:pPr>
+            <a:r>
+              <a:rPr lang="en-US" sz="800" b="1" dirty="0">
+                <a:solidFill>
+                  <a:srgbClr val="FFFFFF"/>
+                </a:solidFill>
+                <a:latin typeface="Calibri" pitchFamily="34" charset="0"/>
+                <a:ea typeface="Calibri" pitchFamily="34" charset="-122"/>
+                <a:cs typeface="Calibri" pitchFamily="34" charset="-120"/>
+              </a:rPr>
+              <a:t>P1</a:t>
+            </a:r>
+            <a:endParaRPr lang="en-US" sz="800" dirty="0"/>
+          </a:p>
+        </p:txBody>
+      </p:sp>
+      <p:sp>
+        <p:nvSpPr>
+          <p:cNvPr id="53" name="Shape 50"/>
           <p:cNvSpPr/>
           <p:nvPr/>
         </p:nvSpPr>
@@ -7908,7 +8649,46 @@
       </p:sp>
       <p:sp>
         <p:nvSpPr>
-          <p:cNvPr id="35" name="Shape 32"/>
+          <p:cNvPr id="54" name="Text 51"/>
+          <p:cNvSpPr/>
+          <p:nvPr/>
+        </p:nvSpPr>
+        <p:spPr>
+          <a:xfrm>
+            <a:off x="7796632" y="3337560"/>
+            <a:ext cx="329184" cy="329184"/>
+          </a:xfrm>
+          <a:prstGeom prst="rect">
+            <a:avLst/>
+          </a:prstGeom>
+          <a:noFill/>
+          <a:ln/>
+        </p:spPr>
+        <p:txBody>
+          <a:bodyPr wrap="square" rtlCol="0" anchor="ctr"/>
+          <a:lstStyle/>
+          <a:p>
+            <a:pPr algn="ctr" indent="0" marL="0">
+              <a:buNone/>
+            </a:pPr>
+            <a:r>
+              <a:rPr lang="en-US" sz="800" b="1" dirty="0">
+                <a:solidFill>
+                  <a:srgbClr val="FFFFFF"/>
+                </a:solidFill>
+                <a:latin typeface="Calibri" pitchFamily="34" charset="0"/>
+                <a:ea typeface="Calibri" pitchFamily="34" charset="-122"/>
+                <a:cs typeface="Calibri" pitchFamily="34" charset="-120"/>
+              </a:rPr>
+              <a:t>P1</a:t>
+            </a:r>
+            <a:endParaRPr lang="en-US" sz="800" dirty="0"/>
+          </a:p>
+        </p:txBody>
+      </p:sp>
+      <p:sp>
+        <p:nvSpPr>
+          <p:cNvPr id="55" name="Shape 52"/>
           <p:cNvSpPr/>
           <p:nvPr/>
         </p:nvSpPr>
@@ -7930,7 +8710,46 @@
       </p:sp>
       <p:sp>
         <p:nvSpPr>
-          <p:cNvPr id="36" name="Shape 33"/>
+          <p:cNvPr id="56" name="Text 53"/>
+          <p:cNvSpPr/>
+          <p:nvPr/>
+        </p:nvSpPr>
+        <p:spPr>
+          <a:xfrm>
+            <a:off x="6644488" y="3721608"/>
+            <a:ext cx="329184" cy="329184"/>
+          </a:xfrm>
+          <a:prstGeom prst="rect">
+            <a:avLst/>
+          </a:prstGeom>
+          <a:noFill/>
+          <a:ln/>
+        </p:spPr>
+        <p:txBody>
+          <a:bodyPr wrap="square" rtlCol="0" anchor="ctr"/>
+          <a:lstStyle/>
+          <a:p>
+            <a:pPr algn="ctr" indent="0" marL="0">
+              <a:buNone/>
+            </a:pPr>
+            <a:r>
+              <a:rPr lang="en-US" sz="800" b="1" dirty="0">
+                <a:solidFill>
+                  <a:srgbClr val="FFFFFF"/>
+                </a:solidFill>
+                <a:latin typeface="Calibri" pitchFamily="34" charset="0"/>
+                <a:ea typeface="Calibri" pitchFamily="34" charset="-122"/>
+                <a:cs typeface="Calibri" pitchFamily="34" charset="-120"/>
+              </a:rPr>
+              <a:t>P2</a:t>
+            </a:r>
+            <a:endParaRPr lang="en-US" sz="800" dirty="0"/>
+          </a:p>
+        </p:txBody>
+      </p:sp>
+      <p:sp>
+        <p:nvSpPr>
+          <p:cNvPr id="57" name="Shape 54"/>
           <p:cNvSpPr/>
           <p:nvPr/>
         </p:nvSpPr>
@@ -7952,7 +8771,46 @@
       </p:sp>
       <p:sp>
         <p:nvSpPr>
-          <p:cNvPr id="37" name="Shape 34"/>
+          <p:cNvPr id="58" name="Text 55"/>
+          <p:cNvSpPr/>
+          <p:nvPr/>
+        </p:nvSpPr>
+        <p:spPr>
+          <a:xfrm>
+            <a:off x="7028536" y="3721608"/>
+            <a:ext cx="329184" cy="329184"/>
+          </a:xfrm>
+          <a:prstGeom prst="rect">
+            <a:avLst/>
+          </a:prstGeom>
+          <a:noFill/>
+          <a:ln/>
+        </p:spPr>
+        <p:txBody>
+          <a:bodyPr wrap="square" rtlCol="0" anchor="ctr"/>
+          <a:lstStyle/>
+          <a:p>
+            <a:pPr algn="ctr" indent="0" marL="0">
+              <a:buNone/>
+            </a:pPr>
+            <a:r>
+              <a:rPr lang="en-US" sz="800" b="1" dirty="0">
+                <a:solidFill>
+                  <a:srgbClr val="FFFFFF"/>
+                </a:solidFill>
+                <a:latin typeface="Calibri" pitchFamily="34" charset="0"/>
+                <a:ea typeface="Calibri" pitchFamily="34" charset="-122"/>
+                <a:cs typeface="Calibri" pitchFamily="34" charset="-120"/>
+              </a:rPr>
+              <a:t>P2</a:t>
+            </a:r>
+            <a:endParaRPr lang="en-US" sz="800" dirty="0"/>
+          </a:p>
+        </p:txBody>
+      </p:sp>
+      <p:sp>
+        <p:nvSpPr>
+          <p:cNvPr id="59" name="Shape 56"/>
           <p:cNvSpPr/>
           <p:nvPr/>
         </p:nvSpPr>
@@ -7974,7 +8832,46 @@
       </p:sp>
       <p:sp>
         <p:nvSpPr>
-          <p:cNvPr id="38" name="Shape 35"/>
+          <p:cNvPr id="60" name="Text 57"/>
+          <p:cNvSpPr/>
+          <p:nvPr/>
+        </p:nvSpPr>
+        <p:spPr>
+          <a:xfrm>
+            <a:off x="7412584" y="3721608"/>
+            <a:ext cx="329184" cy="329184"/>
+          </a:xfrm>
+          <a:prstGeom prst="rect">
+            <a:avLst/>
+          </a:prstGeom>
+          <a:noFill/>
+          <a:ln/>
+        </p:spPr>
+        <p:txBody>
+          <a:bodyPr wrap="square" rtlCol="0" anchor="ctr"/>
+          <a:lstStyle/>
+          <a:p>
+            <a:pPr algn="ctr" indent="0" marL="0">
+              <a:buNone/>
+            </a:pPr>
+            <a:r>
+              <a:rPr lang="en-US" sz="800" b="1" dirty="0">
+                <a:solidFill>
+                  <a:srgbClr val="FFFFFF"/>
+                </a:solidFill>
+                <a:latin typeface="Calibri" pitchFamily="34" charset="0"/>
+                <a:ea typeface="Calibri" pitchFamily="34" charset="-122"/>
+                <a:cs typeface="Calibri" pitchFamily="34" charset="-120"/>
+              </a:rPr>
+              <a:t>P2</a:t>
+            </a:r>
+            <a:endParaRPr lang="en-US" sz="800" dirty="0"/>
+          </a:p>
+        </p:txBody>
+      </p:sp>
+      <p:sp>
+        <p:nvSpPr>
+          <p:cNvPr id="61" name="Shape 58"/>
           <p:cNvSpPr/>
           <p:nvPr/>
         </p:nvSpPr>
@@ -7996,37 +8893,76 @@
       </p:sp>
       <p:sp>
         <p:nvSpPr>
-          <p:cNvPr id="39" name="Text 36"/>
-          <p:cNvSpPr/>
-          <p:nvPr/>
-        </p:nvSpPr>
-        <p:spPr>
-          <a:xfrm>
-            <a:off x="9189491" y="3063240"/>
-            <a:ext cx="1828800" cy="228600"/>
-          </a:xfrm>
-          <a:prstGeom prst="rect">
-            <a:avLst/>
-          </a:prstGeom>
-          <a:noFill/>
-          <a:ln/>
-        </p:spPr>
-        <p:txBody>
-          <a:bodyPr wrap="square" rtlCol="0" anchor="ctr"/>
-          <a:lstStyle/>
-          <a:p>
-            <a:pPr indent="0" marL="0">
-              <a:buNone/>
-            </a:pPr>
-            <a:r>
-              <a:rPr lang="en-US" sz="900" b="1" spc="100" kern="0" dirty="0">
-                <a:solidFill>
-                  <a:srgbClr val="6B7394"/>
+          <p:cNvPr id="62" name="Text 59"/>
+          <p:cNvSpPr/>
+          <p:nvPr/>
+        </p:nvSpPr>
+        <p:spPr>
+          <a:xfrm>
+            <a:off x="7796632" y="3721608"/>
+            <a:ext cx="329184" cy="329184"/>
+          </a:xfrm>
+          <a:prstGeom prst="rect">
+            <a:avLst/>
+          </a:prstGeom>
+          <a:noFill/>
+          <a:ln/>
+        </p:spPr>
+        <p:txBody>
+          <a:bodyPr wrap="square" rtlCol="0" anchor="ctr"/>
+          <a:lstStyle/>
+          <a:p>
+            <a:pPr algn="ctr" indent="0" marL="0">
+              <a:buNone/>
+            </a:pPr>
+            <a:r>
+              <a:rPr lang="en-US" sz="800" b="1" dirty="0">
+                <a:solidFill>
+                  <a:srgbClr val="FFFFFF"/>
                 </a:solidFill>
                 <a:latin typeface="Calibri" pitchFamily="34" charset="0"/>
                 <a:ea typeface="Calibri" pitchFamily="34" charset="-122"/>
                 <a:cs typeface="Calibri" pitchFamily="34" charset="-120"/>
               </a:rPr>
+              <a:t>P2</a:t>
+            </a:r>
+            <a:endParaRPr lang="en-US" sz="800" dirty="0"/>
+          </a:p>
+        </p:txBody>
+      </p:sp>
+      <p:sp>
+        <p:nvSpPr>
+          <p:cNvPr id="63" name="Text 60"/>
+          <p:cNvSpPr/>
+          <p:nvPr/>
+        </p:nvSpPr>
+        <p:spPr>
+          <a:xfrm>
+            <a:off x="9189491" y="3063240"/>
+            <a:ext cx="1828800" cy="228600"/>
+          </a:xfrm>
+          <a:prstGeom prst="rect">
+            <a:avLst/>
+          </a:prstGeom>
+          <a:noFill/>
+          <a:ln/>
+        </p:spPr>
+        <p:txBody>
+          <a:bodyPr wrap="square" rtlCol="0" anchor="ctr"/>
+          <a:lstStyle/>
+          <a:p>
+            <a:pPr indent="0" marL="0">
+              <a:buNone/>
+            </a:pPr>
+            <a:r>
+              <a:rPr lang="en-US" sz="900" b="1" spc="100" kern="0" dirty="0">
+                <a:solidFill>
+                  <a:srgbClr val="6B7394"/>
+                </a:solidFill>
+                <a:latin typeface="Calibri" pitchFamily="34" charset="0"/>
+                <a:ea typeface="Calibri" pitchFamily="34" charset="-122"/>
+                <a:cs typeface="Calibri" pitchFamily="34" charset="-120"/>
+              </a:rPr>
               <a:t>Test</a:t>
             </a:r>
             <a:endParaRPr lang="en-US" sz="900" dirty="0"/>
@@ -8035,7 +8971,7 @@
       </p:sp>
       <p:sp>
         <p:nvSpPr>
-          <p:cNvPr id="40" name="Shape 37"/>
+          <p:cNvPr id="64" name="Shape 61"/>
           <p:cNvSpPr/>
           <p:nvPr/>
         </p:nvSpPr>
@@ -8057,7 +8993,46 @@
       </p:sp>
       <p:sp>
         <p:nvSpPr>
-          <p:cNvPr id="41" name="Shape 38"/>
+          <p:cNvPr id="65" name="Text 62"/>
+          <p:cNvSpPr/>
+          <p:nvPr/>
+        </p:nvSpPr>
+        <p:spPr>
+          <a:xfrm>
+            <a:off x="9189491" y="3337560"/>
+            <a:ext cx="329184" cy="329184"/>
+          </a:xfrm>
+          <a:prstGeom prst="rect">
+            <a:avLst/>
+          </a:prstGeom>
+          <a:noFill/>
+          <a:ln/>
+        </p:spPr>
+        <p:txBody>
+          <a:bodyPr wrap="square" rtlCol="0" anchor="ctr"/>
+          <a:lstStyle/>
+          <a:p>
+            <a:pPr algn="ctr" indent="0" marL="0">
+              <a:buNone/>
+            </a:pPr>
+            <a:r>
+              <a:rPr lang="en-US" sz="800" b="1" dirty="0">
+                <a:solidFill>
+                  <a:srgbClr val="FFFFFF"/>
+                </a:solidFill>
+                <a:latin typeface="Calibri" pitchFamily="34" charset="0"/>
+                <a:ea typeface="Calibri" pitchFamily="34" charset="-122"/>
+                <a:cs typeface="Calibri" pitchFamily="34" charset="-120"/>
+              </a:rPr>
+              <a:t>P3</a:t>
+            </a:r>
+            <a:endParaRPr lang="en-US" sz="800" dirty="0"/>
+          </a:p>
+        </p:txBody>
+      </p:sp>
+      <p:sp>
+        <p:nvSpPr>
+          <p:cNvPr id="66" name="Shape 63"/>
           <p:cNvSpPr/>
           <p:nvPr/>
         </p:nvSpPr>
@@ -8079,7 +9054,46 @@
       </p:sp>
       <p:sp>
         <p:nvSpPr>
-          <p:cNvPr id="42" name="Shape 39"/>
+          <p:cNvPr id="67" name="Text 64"/>
+          <p:cNvSpPr/>
+          <p:nvPr/>
+        </p:nvSpPr>
+        <p:spPr>
+          <a:xfrm>
+            <a:off x="9573539" y="3337560"/>
+            <a:ext cx="329184" cy="329184"/>
+          </a:xfrm>
+          <a:prstGeom prst="rect">
+            <a:avLst/>
+          </a:prstGeom>
+          <a:noFill/>
+          <a:ln/>
+        </p:spPr>
+        <p:txBody>
+          <a:bodyPr wrap="square" rtlCol="0" anchor="ctr"/>
+          <a:lstStyle/>
+          <a:p>
+            <a:pPr algn="ctr" indent="0" marL="0">
+              <a:buNone/>
+            </a:pPr>
+            <a:r>
+              <a:rPr lang="en-US" sz="800" b="1" dirty="0">
+                <a:solidFill>
+                  <a:srgbClr val="FFFFFF"/>
+                </a:solidFill>
+                <a:latin typeface="Calibri" pitchFamily="34" charset="0"/>
+                <a:ea typeface="Calibri" pitchFamily="34" charset="-122"/>
+                <a:cs typeface="Calibri" pitchFamily="34" charset="-120"/>
+              </a:rPr>
+              <a:t>P3</a:t>
+            </a:r>
+            <a:endParaRPr lang="en-US" sz="800" dirty="0"/>
+          </a:p>
+        </p:txBody>
+      </p:sp>
+      <p:sp>
+        <p:nvSpPr>
+          <p:cNvPr id="68" name="Shape 65"/>
           <p:cNvSpPr/>
           <p:nvPr/>
         </p:nvSpPr>
@@ -8101,7 +9115,46 @@
       </p:sp>
       <p:sp>
         <p:nvSpPr>
-          <p:cNvPr id="43" name="Shape 40"/>
+          <p:cNvPr id="69" name="Text 66"/>
+          <p:cNvSpPr/>
+          <p:nvPr/>
+        </p:nvSpPr>
+        <p:spPr>
+          <a:xfrm>
+            <a:off x="9957587" y="3337560"/>
+            <a:ext cx="329184" cy="329184"/>
+          </a:xfrm>
+          <a:prstGeom prst="rect">
+            <a:avLst/>
+          </a:prstGeom>
+          <a:noFill/>
+          <a:ln/>
+        </p:spPr>
+        <p:txBody>
+          <a:bodyPr wrap="square" rtlCol="0" anchor="ctr"/>
+          <a:lstStyle/>
+          <a:p>
+            <a:pPr algn="ctr" indent="0" marL="0">
+              <a:buNone/>
+            </a:pPr>
+            <a:r>
+              <a:rPr lang="en-US" sz="800" b="1" dirty="0">
+                <a:solidFill>
+                  <a:srgbClr val="FFFFFF"/>
+                </a:solidFill>
+                <a:latin typeface="Calibri" pitchFamily="34" charset="0"/>
+                <a:ea typeface="Calibri" pitchFamily="34" charset="-122"/>
+                <a:cs typeface="Calibri" pitchFamily="34" charset="-120"/>
+              </a:rPr>
+              <a:t>P3</a:t>
+            </a:r>
+            <a:endParaRPr lang="en-US" sz="800" dirty="0"/>
+          </a:p>
+        </p:txBody>
+      </p:sp>
+      <p:sp>
+        <p:nvSpPr>
+          <p:cNvPr id="70" name="Shape 67"/>
           <p:cNvSpPr/>
           <p:nvPr/>
         </p:nvSpPr>
@@ -8123,7 +9176,46 @@
       </p:sp>
       <p:sp>
         <p:nvSpPr>
-          <p:cNvPr id="44" name="Shape 41"/>
+          <p:cNvPr id="71" name="Text 68"/>
+          <p:cNvSpPr/>
+          <p:nvPr/>
+        </p:nvSpPr>
+        <p:spPr>
+          <a:xfrm>
+            <a:off x="10341635" y="3337560"/>
+            <a:ext cx="329184" cy="329184"/>
+          </a:xfrm>
+          <a:prstGeom prst="rect">
+            <a:avLst/>
+          </a:prstGeom>
+          <a:noFill/>
+          <a:ln/>
+        </p:spPr>
+        <p:txBody>
+          <a:bodyPr wrap="square" rtlCol="0" anchor="ctr"/>
+          <a:lstStyle/>
+          <a:p>
+            <a:pPr algn="ctr" indent="0" marL="0">
+              <a:buNone/>
+            </a:pPr>
+            <a:r>
+              <a:rPr lang="en-US" sz="800" b="1" dirty="0">
+                <a:solidFill>
+                  <a:srgbClr val="FFFFFF"/>
+                </a:solidFill>
+                <a:latin typeface="Calibri" pitchFamily="34" charset="0"/>
+                <a:ea typeface="Calibri" pitchFamily="34" charset="-122"/>
+                <a:cs typeface="Calibri" pitchFamily="34" charset="-120"/>
+              </a:rPr>
+              <a:t>P3</a:t>
+            </a:r>
+            <a:endParaRPr lang="en-US" sz="800" dirty="0"/>
+          </a:p>
+        </p:txBody>
+      </p:sp>
+      <p:sp>
+        <p:nvSpPr>
+          <p:cNvPr id="72" name="Shape 69"/>
           <p:cNvSpPr/>
           <p:nvPr/>
         </p:nvSpPr>
@@ -8145,7 +9237,46 @@
       </p:sp>
       <p:sp>
         <p:nvSpPr>
-          <p:cNvPr id="45" name="Shape 42"/>
+          <p:cNvPr id="73" name="Text 70"/>
+          <p:cNvSpPr/>
+          <p:nvPr/>
+        </p:nvSpPr>
+        <p:spPr>
+          <a:xfrm>
+            <a:off x="9189491" y="3721608"/>
+            <a:ext cx="329184" cy="329184"/>
+          </a:xfrm>
+          <a:prstGeom prst="rect">
+            <a:avLst/>
+          </a:prstGeom>
+          <a:noFill/>
+          <a:ln/>
+        </p:spPr>
+        <p:txBody>
+          <a:bodyPr wrap="square" rtlCol="0" anchor="ctr"/>
+          <a:lstStyle/>
+          <a:p>
+            <a:pPr algn="ctr" indent="0" marL="0">
+              <a:buNone/>
+            </a:pPr>
+            <a:r>
+              <a:rPr lang="en-US" sz="800" b="1" dirty="0">
+                <a:solidFill>
+                  <a:srgbClr val="FFFFFF"/>
+                </a:solidFill>
+                <a:latin typeface="Calibri" pitchFamily="34" charset="0"/>
+                <a:ea typeface="Calibri" pitchFamily="34" charset="-122"/>
+                <a:cs typeface="Calibri" pitchFamily="34" charset="-120"/>
+              </a:rPr>
+              <a:t>P4</a:t>
+            </a:r>
+            <a:endParaRPr lang="en-US" sz="800" dirty="0"/>
+          </a:p>
+        </p:txBody>
+      </p:sp>
+      <p:sp>
+        <p:nvSpPr>
+          <p:cNvPr id="74" name="Shape 71"/>
           <p:cNvSpPr/>
           <p:nvPr/>
         </p:nvSpPr>
@@ -8167,7 +9298,46 @@
       </p:sp>
       <p:sp>
         <p:nvSpPr>
-          <p:cNvPr id="46" name="Shape 43"/>
+          <p:cNvPr id="75" name="Text 72"/>
+          <p:cNvSpPr/>
+          <p:nvPr/>
+        </p:nvSpPr>
+        <p:spPr>
+          <a:xfrm>
+            <a:off x="9573539" y="3721608"/>
+            <a:ext cx="329184" cy="329184"/>
+          </a:xfrm>
+          <a:prstGeom prst="rect">
+            <a:avLst/>
+          </a:prstGeom>
+          <a:noFill/>
+          <a:ln/>
+        </p:spPr>
+        <p:txBody>
+          <a:bodyPr wrap="square" rtlCol="0" anchor="ctr"/>
+          <a:lstStyle/>
+          <a:p>
+            <a:pPr algn="ctr" indent="0" marL="0">
+              <a:buNone/>
+            </a:pPr>
+            <a:r>
+              <a:rPr lang="en-US" sz="800" b="1" dirty="0">
+                <a:solidFill>
+                  <a:srgbClr val="FFFFFF"/>
+                </a:solidFill>
+                <a:latin typeface="Calibri" pitchFamily="34" charset="0"/>
+                <a:ea typeface="Calibri" pitchFamily="34" charset="-122"/>
+                <a:cs typeface="Calibri" pitchFamily="34" charset="-120"/>
+              </a:rPr>
+              <a:t>P4</a:t>
+            </a:r>
+            <a:endParaRPr lang="en-US" sz="800" dirty="0"/>
+          </a:p>
+        </p:txBody>
+      </p:sp>
+      <p:sp>
+        <p:nvSpPr>
+          <p:cNvPr id="76" name="Shape 73"/>
           <p:cNvSpPr/>
           <p:nvPr/>
         </p:nvSpPr>
@@ -8189,7 +9359,46 @@
       </p:sp>
       <p:sp>
         <p:nvSpPr>
-          <p:cNvPr id="47" name="Shape 44"/>
+          <p:cNvPr id="77" name="Text 74"/>
+          <p:cNvSpPr/>
+          <p:nvPr/>
+        </p:nvSpPr>
+        <p:spPr>
+          <a:xfrm>
+            <a:off x="9957587" y="3721608"/>
+            <a:ext cx="329184" cy="329184"/>
+          </a:xfrm>
+          <a:prstGeom prst="rect">
+            <a:avLst/>
+          </a:prstGeom>
+          <a:noFill/>
+          <a:ln/>
+        </p:spPr>
+        <p:txBody>
+          <a:bodyPr wrap="square" rtlCol="0" anchor="ctr"/>
+          <a:lstStyle/>
+          <a:p>
+            <a:pPr algn="ctr" indent="0" marL="0">
+              <a:buNone/>
+            </a:pPr>
+            <a:r>
+              <a:rPr lang="en-US" sz="800" b="1" dirty="0">
+                <a:solidFill>
+                  <a:srgbClr val="FFFFFF"/>
+                </a:solidFill>
+                <a:latin typeface="Calibri" pitchFamily="34" charset="0"/>
+                <a:ea typeface="Calibri" pitchFamily="34" charset="-122"/>
+                <a:cs typeface="Calibri" pitchFamily="34" charset="-120"/>
+              </a:rPr>
+              <a:t>P4</a:t>
+            </a:r>
+            <a:endParaRPr lang="en-US" sz="800" dirty="0"/>
+          </a:p>
+        </p:txBody>
+      </p:sp>
+      <p:sp>
+        <p:nvSpPr>
+          <p:cNvPr id="78" name="Shape 75"/>
           <p:cNvSpPr/>
           <p:nvPr/>
         </p:nvSpPr>
@@ -8211,7 +9420,46 @@
       </p:sp>
       <p:sp>
         <p:nvSpPr>
-          <p:cNvPr id="48" name="Text 45"/>
+          <p:cNvPr id="79" name="Text 76"/>
+          <p:cNvSpPr/>
+          <p:nvPr/>
+        </p:nvSpPr>
+        <p:spPr>
+          <a:xfrm>
+            <a:off x="10341635" y="3721608"/>
+            <a:ext cx="329184" cy="329184"/>
+          </a:xfrm>
+          <a:prstGeom prst="rect">
+            <a:avLst/>
+          </a:prstGeom>
+          <a:noFill/>
+          <a:ln/>
+        </p:spPr>
+        <p:txBody>
+          <a:bodyPr wrap="square" rtlCol="0" anchor="ctr"/>
+          <a:lstStyle/>
+          <a:p>
+            <a:pPr algn="ctr" indent="0" marL="0">
+              <a:buNone/>
+            </a:pPr>
+            <a:r>
+              <a:rPr lang="en-US" sz="800" b="1" dirty="0">
+                <a:solidFill>
+                  <a:srgbClr val="FFFFFF"/>
+                </a:solidFill>
+                <a:latin typeface="Calibri" pitchFamily="34" charset="0"/>
+                <a:ea typeface="Calibri" pitchFamily="34" charset="-122"/>
+                <a:cs typeface="Calibri" pitchFamily="34" charset="-120"/>
+              </a:rPr>
+              <a:t>P4</a:t>
+            </a:r>
+            <a:endParaRPr lang="en-US" sz="800" dirty="0"/>
+          </a:p>
+        </p:txBody>
+      </p:sp>
+      <p:sp>
+        <p:nvSpPr>
+          <p:cNvPr id="80" name="Text 77"/>
           <p:cNvSpPr/>
           <p:nvPr/>
         </p:nvSpPr>
@@ -10487,9 +11735,9 @@
                 <a:solidFill>
                   <a:srgbClr val="1F2A52"/>
                 </a:solidFill>
-                <a:latin typeface="Consolas" pitchFamily="34" charset="0"/>
-                <a:ea typeface="Consolas" pitchFamily="34" charset="-122"/>
-                <a:cs typeface="Consolas" pitchFamily="34" charset="-120"/>
+                <a:latin typeface="Courier New" pitchFamily="34" charset="0"/>
+                <a:ea typeface="Courier New" pitchFamily="34" charset="-122"/>
+                <a:cs typeface="Courier New" pitchFamily="34" charset="-120"/>
               </a:rPr>
               <a:t>0.891</a:t>
             </a:r>
@@ -10612,9 +11860,9 @@
                 <a:solidFill>
                   <a:srgbClr val="1F2A52"/>
                 </a:solidFill>
-                <a:latin typeface="Consolas" pitchFamily="34" charset="0"/>
-                <a:ea typeface="Consolas" pitchFamily="34" charset="-122"/>
-                <a:cs typeface="Consolas" pitchFamily="34" charset="-120"/>
+                <a:latin typeface="Courier New" pitchFamily="34" charset="0"/>
+                <a:ea typeface="Courier New" pitchFamily="34" charset="-122"/>
+                <a:cs typeface="Courier New" pitchFamily="34" charset="-120"/>
               </a:rPr>
               <a:t>0.882</a:t>
             </a:r>
@@ -10737,9 +11985,9 @@
                 <a:solidFill>
                   <a:srgbClr val="1F2A52"/>
                 </a:solidFill>
-                <a:latin typeface="Consolas" pitchFamily="34" charset="0"/>
-                <a:ea typeface="Consolas" pitchFamily="34" charset="-122"/>
-                <a:cs typeface="Consolas" pitchFamily="34" charset="-120"/>
+                <a:latin typeface="Courier New" pitchFamily="34" charset="0"/>
+                <a:ea typeface="Courier New" pitchFamily="34" charset="-122"/>
+                <a:cs typeface="Courier New" pitchFamily="34" charset="-120"/>
               </a:rPr>
               <a:t>0.878</a:t>
             </a:r>
@@ -10862,9 +12110,9 @@
                 <a:solidFill>
                   <a:srgbClr val="1F2A52"/>
                 </a:solidFill>
-                <a:latin typeface="Consolas" pitchFamily="34" charset="0"/>
-                <a:ea typeface="Consolas" pitchFamily="34" charset="-122"/>
-                <a:cs typeface="Consolas" pitchFamily="34" charset="-120"/>
+                <a:latin typeface="Courier New" pitchFamily="34" charset="0"/>
+                <a:ea typeface="Courier New" pitchFamily="34" charset="-122"/>
+                <a:cs typeface="Courier New" pitchFamily="34" charset="-120"/>
               </a:rPr>
               <a:t>0.857</a:t>
             </a:r>
@@ -11537,16 +12785,16 @@
                           <a:solidFill>
                             <a:srgbClr val="6B7394"/>
                           </a:solidFill>
-                          <a:latin typeface="Consolas" pitchFamily="34" charset="0"/>
-                          <a:ea typeface="Consolas" pitchFamily="34" charset="-122"/>
-                          <a:cs typeface="Consolas" pitchFamily="34" charset="-120"/>
+                          <a:latin typeface="Courier New" pitchFamily="34" charset="0"/>
+                          <a:ea typeface="Courier New" pitchFamily="34" charset="-122"/>
+                          <a:cs typeface="Courier New" pitchFamily="34" charset="-120"/>
                         </a:rPr>
                         <a:t>0.8820</a:t>
                       </a:r>
                       <a:endParaRPr lang="en-US" sz="1200" dirty="0">
-                        <a:latin typeface="Consolas" charset="0"/>
-                        <a:ea typeface="Consolas" charset="0"/>
-                        <a:cs typeface="Consolas" charset="0"/>
+                        <a:latin typeface="Courier New" charset="0"/>
+                        <a:ea typeface="Courier New" charset="0"/>
+                        <a:cs typeface="Courier New" charset="0"/>
                       </a:endParaRPr>
                     </a:p>
                   </a:txBody>
@@ -11605,16 +12853,16 @@
                           <a:solidFill>
                             <a:srgbClr val="6B7394"/>
                           </a:solidFill>
-                          <a:latin typeface="Consolas" pitchFamily="34" charset="0"/>
-                          <a:ea typeface="Consolas" pitchFamily="34" charset="-122"/>
-                          <a:cs typeface="Consolas" pitchFamily="34" charset="-120"/>
+                          <a:latin typeface="Courier New" pitchFamily="34" charset="0"/>
+                          <a:ea typeface="Courier New" pitchFamily="34" charset="-122"/>
+                          <a:cs typeface="Courier New" pitchFamily="34" charset="-120"/>
                         </a:rPr>
                         <a:t>0.8572</a:t>
                       </a:r>
                       <a:endParaRPr lang="en-US" sz="1200" dirty="0">
-                        <a:latin typeface="Consolas" charset="0"/>
-                        <a:ea typeface="Consolas" charset="0"/>
-                        <a:cs typeface="Consolas" charset="0"/>
+                        <a:latin typeface="Courier New" charset="0"/>
+                        <a:ea typeface="Courier New" charset="0"/>
+                        <a:cs typeface="Courier New" charset="0"/>
                       </a:endParaRPr>
                     </a:p>
                   </a:txBody>
@@ -11673,16 +12921,16 @@
                           <a:solidFill>
                             <a:srgbClr val="6B7394"/>
                           </a:solidFill>
-                          <a:latin typeface="Consolas" pitchFamily="34" charset="0"/>
-                          <a:ea typeface="Consolas" pitchFamily="34" charset="-122"/>
-                          <a:cs typeface="Consolas" pitchFamily="34" charset="-120"/>
+                          <a:latin typeface="Courier New" pitchFamily="34" charset="0"/>
+                          <a:ea typeface="Courier New" pitchFamily="34" charset="-122"/>
+                          <a:cs typeface="Courier New" pitchFamily="34" charset="-120"/>
                         </a:rPr>
                         <a:t>0.8775</a:t>
                       </a:r>
                       <a:endParaRPr lang="en-US" sz="1200" dirty="0">
-                        <a:latin typeface="Consolas" charset="0"/>
-                        <a:ea typeface="Consolas" charset="0"/>
-                        <a:cs typeface="Consolas" charset="0"/>
+                        <a:latin typeface="Courier New" charset="0"/>
+                        <a:ea typeface="Courier New" charset="0"/>
+                        <a:cs typeface="Courier New" charset="0"/>
                       </a:endParaRPr>
                     </a:p>
                   </a:txBody>
@@ -11741,16 +12989,16 @@
                           <a:solidFill>
                             <a:srgbClr val="1F2A52"/>
                           </a:solidFill>
-                          <a:latin typeface="Consolas" pitchFamily="34" charset="0"/>
-                          <a:ea typeface="Consolas" pitchFamily="34" charset="-122"/>
-                          <a:cs typeface="Consolas" pitchFamily="34" charset="-120"/>
+                          <a:latin typeface="Courier New" pitchFamily="34" charset="0"/>
+                          <a:ea typeface="Courier New" pitchFamily="34" charset="-122"/>
+                          <a:cs typeface="Courier New" pitchFamily="34" charset="-120"/>
                         </a:rPr>
                         <a:t>0.8912</a:t>
                       </a:r>
                       <a:endParaRPr lang="en-US" sz="1200" dirty="0">
-                        <a:latin typeface="Consolas" charset="0"/>
-                        <a:ea typeface="Consolas" charset="0"/>
-                        <a:cs typeface="Consolas" charset="0"/>
+                        <a:latin typeface="Courier New" charset="0"/>
+                        <a:ea typeface="Courier New" charset="0"/>
+                        <a:cs typeface="Courier New" charset="0"/>
                       </a:endParaRPr>
                     </a:p>
                   </a:txBody>
@@ -11876,16 +13124,16 @@
                           <a:solidFill>
                             <a:srgbClr val="6B7394"/>
                           </a:solidFill>
-                          <a:latin typeface="Consolas" pitchFamily="34" charset="0"/>
-                          <a:ea typeface="Consolas" pitchFamily="34" charset="-122"/>
-                          <a:cs typeface="Consolas" pitchFamily="34" charset="-120"/>
+                          <a:latin typeface="Courier New" pitchFamily="34" charset="0"/>
+                          <a:ea typeface="Courier New" pitchFamily="34" charset="-122"/>
+                          <a:cs typeface="Courier New" pitchFamily="34" charset="-120"/>
                         </a:rPr>
                         <a:t>0.8198</a:t>
                       </a:r>
                       <a:endParaRPr lang="en-US" sz="1200" dirty="0">
-                        <a:latin typeface="Consolas" charset="0"/>
-                        <a:ea typeface="Consolas" charset="0"/>
-                        <a:cs typeface="Consolas" charset="0"/>
+                        <a:latin typeface="Courier New" charset="0"/>
+                        <a:ea typeface="Courier New" charset="0"/>
+                        <a:cs typeface="Courier New" charset="0"/>
                       </a:endParaRPr>
                     </a:p>
                   </a:txBody>
@@ -11944,16 +13192,16 @@
                           <a:solidFill>
                             <a:srgbClr val="6B7394"/>
                           </a:solidFill>
-                          <a:latin typeface="Consolas" pitchFamily="34" charset="0"/>
-                          <a:ea typeface="Consolas" pitchFamily="34" charset="-122"/>
-                          <a:cs typeface="Consolas" pitchFamily="34" charset="-120"/>
+                          <a:latin typeface="Courier New" pitchFamily="34" charset="0"/>
+                          <a:ea typeface="Courier New" pitchFamily="34" charset="-122"/>
+                          <a:cs typeface="Courier New" pitchFamily="34" charset="-120"/>
                         </a:rPr>
                         <a:t>0.7821</a:t>
                       </a:r>
                       <a:endParaRPr lang="en-US" sz="1200" dirty="0">
-                        <a:latin typeface="Consolas" charset="0"/>
-                        <a:ea typeface="Consolas" charset="0"/>
-                        <a:cs typeface="Consolas" charset="0"/>
+                        <a:latin typeface="Courier New" charset="0"/>
+                        <a:ea typeface="Courier New" charset="0"/>
+                        <a:cs typeface="Courier New" charset="0"/>
                       </a:endParaRPr>
                     </a:p>
                   </a:txBody>
@@ -12012,16 +13260,16 @@
                           <a:solidFill>
                             <a:srgbClr val="6B7394"/>
                           </a:solidFill>
-                          <a:latin typeface="Consolas" pitchFamily="34" charset="0"/>
-                          <a:ea typeface="Consolas" pitchFamily="34" charset="-122"/>
-                          <a:cs typeface="Consolas" pitchFamily="34" charset="-120"/>
+                          <a:latin typeface="Courier New" pitchFamily="34" charset="0"/>
+                          <a:ea typeface="Courier New" pitchFamily="34" charset="-122"/>
+                          <a:cs typeface="Courier New" pitchFamily="34" charset="-120"/>
                         </a:rPr>
                         <a:t>0.8078</a:t>
                       </a:r>
                       <a:endParaRPr lang="en-US" sz="1200" dirty="0">
-                        <a:latin typeface="Consolas" charset="0"/>
-                        <a:ea typeface="Consolas" charset="0"/>
-                        <a:cs typeface="Consolas" charset="0"/>
+                        <a:latin typeface="Courier New" charset="0"/>
+                        <a:ea typeface="Courier New" charset="0"/>
+                        <a:cs typeface="Courier New" charset="0"/>
                       </a:endParaRPr>
                     </a:p>
                   </a:txBody>
@@ -12080,16 +13328,16 @@
                           <a:solidFill>
                             <a:srgbClr val="1F2A52"/>
                           </a:solidFill>
-                          <a:latin typeface="Consolas" pitchFamily="34" charset="0"/>
-                          <a:ea typeface="Consolas" pitchFamily="34" charset="-122"/>
-                          <a:cs typeface="Consolas" pitchFamily="34" charset="-120"/>
+                          <a:latin typeface="Courier New" pitchFamily="34" charset="0"/>
+                          <a:ea typeface="Courier New" pitchFamily="34" charset="-122"/>
+                          <a:cs typeface="Courier New" pitchFamily="34" charset="-120"/>
                         </a:rPr>
                         <a:t>0.8304</a:t>
                       </a:r>
                       <a:endParaRPr lang="en-US" sz="1200" dirty="0">
-                        <a:latin typeface="Consolas" charset="0"/>
-                        <a:ea typeface="Consolas" charset="0"/>
-                        <a:cs typeface="Consolas" charset="0"/>
+                        <a:latin typeface="Courier New" charset="0"/>
+                        <a:ea typeface="Courier New" charset="0"/>
+                        <a:cs typeface="Courier New" charset="0"/>
                       </a:endParaRPr>
                     </a:p>
                   </a:txBody>
@@ -12215,16 +13463,16 @@
                           <a:solidFill>
                             <a:srgbClr val="6B7394"/>
                           </a:solidFill>
-                          <a:latin typeface="Consolas" pitchFamily="34" charset="0"/>
-                          <a:ea typeface="Consolas" pitchFamily="34" charset="-122"/>
-                          <a:cs typeface="Consolas" pitchFamily="34" charset="-120"/>
+                          <a:latin typeface="Courier New" pitchFamily="34" charset="0"/>
+                          <a:ea typeface="Courier New" pitchFamily="34" charset="-122"/>
+                          <a:cs typeface="Courier New" pitchFamily="34" charset="-120"/>
                         </a:rPr>
                         <a:t>0.8071</a:t>
                       </a:r>
                       <a:endParaRPr lang="en-US" sz="1200" dirty="0">
-                        <a:latin typeface="Consolas" charset="0"/>
-                        <a:ea typeface="Consolas" charset="0"/>
-                        <a:cs typeface="Consolas" charset="0"/>
+                        <a:latin typeface="Courier New" charset="0"/>
+                        <a:ea typeface="Courier New" charset="0"/>
+                        <a:cs typeface="Courier New" charset="0"/>
                       </a:endParaRPr>
                     </a:p>
                   </a:txBody>
@@ -12283,16 +13531,16 @@
                           <a:solidFill>
                             <a:srgbClr val="6B7394"/>
                           </a:solidFill>
-                          <a:latin typeface="Consolas" pitchFamily="34" charset="0"/>
-                          <a:ea typeface="Consolas" pitchFamily="34" charset="-122"/>
-                          <a:cs typeface="Consolas" pitchFamily="34" charset="-120"/>
+                          <a:latin typeface="Courier New" pitchFamily="34" charset="0"/>
+                          <a:ea typeface="Courier New" pitchFamily="34" charset="-122"/>
+                          <a:cs typeface="Courier New" pitchFamily="34" charset="-120"/>
                         </a:rPr>
                         <a:t>0.7777</a:t>
                       </a:r>
                       <a:endParaRPr lang="en-US" sz="1200" dirty="0">
-                        <a:latin typeface="Consolas" charset="0"/>
-                        <a:ea typeface="Consolas" charset="0"/>
-                        <a:cs typeface="Consolas" charset="0"/>
+                        <a:latin typeface="Courier New" charset="0"/>
+                        <a:ea typeface="Courier New" charset="0"/>
+                        <a:cs typeface="Courier New" charset="0"/>
                       </a:endParaRPr>
                     </a:p>
                   </a:txBody>
@@ -12351,16 +13599,16 @@
                           <a:solidFill>
                             <a:srgbClr val="6B7394"/>
                           </a:solidFill>
-                          <a:latin typeface="Consolas" pitchFamily="34" charset="0"/>
-                          <a:ea typeface="Consolas" pitchFamily="34" charset="-122"/>
-                          <a:cs typeface="Consolas" pitchFamily="34" charset="-120"/>
+                          <a:latin typeface="Courier New" pitchFamily="34" charset="0"/>
+                          <a:ea typeface="Courier New" pitchFamily="34" charset="-122"/>
+                          <a:cs typeface="Courier New" pitchFamily="34" charset="-120"/>
                         </a:rPr>
                         <a:t>0.7931</a:t>
                       </a:r>
                       <a:endParaRPr lang="en-US" sz="1200" dirty="0">
-                        <a:latin typeface="Consolas" charset="0"/>
-                        <a:ea typeface="Consolas" charset="0"/>
-                        <a:cs typeface="Consolas" charset="0"/>
+                        <a:latin typeface="Courier New" charset="0"/>
+                        <a:ea typeface="Courier New" charset="0"/>
+                        <a:cs typeface="Courier New" charset="0"/>
                       </a:endParaRPr>
                     </a:p>
                   </a:txBody>
@@ -12419,16 +13667,16 @@
                           <a:solidFill>
                             <a:srgbClr val="1F2A52"/>
                           </a:solidFill>
-                          <a:latin typeface="Consolas" pitchFamily="34" charset="0"/>
-                          <a:ea typeface="Consolas" pitchFamily="34" charset="-122"/>
-                          <a:cs typeface="Consolas" pitchFamily="34" charset="-120"/>
+                          <a:latin typeface="Courier New" pitchFamily="34" charset="0"/>
+                          <a:ea typeface="Courier New" pitchFamily="34" charset="-122"/>
+                          <a:cs typeface="Courier New" pitchFamily="34" charset="-120"/>
                         </a:rPr>
                         <a:t>0.8120</a:t>
                       </a:r>
                       <a:endParaRPr lang="en-US" sz="1200" dirty="0">
-                        <a:latin typeface="Consolas" charset="0"/>
-                        <a:ea typeface="Consolas" charset="0"/>
-                        <a:cs typeface="Consolas" charset="0"/>
+                        <a:latin typeface="Courier New" charset="0"/>
+                        <a:ea typeface="Courier New" charset="0"/>
+                        <a:cs typeface="Courier New" charset="0"/>
                       </a:endParaRPr>
                     </a:p>
                   </a:txBody>
@@ -12554,16 +13802,16 @@
                           <a:solidFill>
                             <a:srgbClr val="1F2A52"/>
                           </a:solidFill>
-                          <a:latin typeface="Consolas" pitchFamily="34" charset="0"/>
-                          <a:ea typeface="Consolas" pitchFamily="34" charset="-122"/>
-                          <a:cs typeface="Consolas" pitchFamily="34" charset="-120"/>
+                          <a:latin typeface="Courier New" pitchFamily="34" charset="0"/>
+                          <a:ea typeface="Courier New" pitchFamily="34" charset="-122"/>
+                          <a:cs typeface="Courier New" pitchFamily="34" charset="-120"/>
                         </a:rPr>
                         <a:t>0.6515</a:t>
                       </a:r>
                       <a:endParaRPr lang="en-US" sz="1200" dirty="0">
-                        <a:latin typeface="Consolas" charset="0"/>
-                        <a:ea typeface="Consolas" charset="0"/>
-                        <a:cs typeface="Consolas" charset="0"/>
+                        <a:latin typeface="Courier New" charset="0"/>
+                        <a:ea typeface="Courier New" charset="0"/>
+                        <a:cs typeface="Courier New" charset="0"/>
                       </a:endParaRPr>
                     </a:p>
                   </a:txBody>
@@ -12622,16 +13870,16 @@
                           <a:solidFill>
                             <a:srgbClr val="6B7394"/>
                           </a:solidFill>
-                          <a:latin typeface="Consolas" pitchFamily="34" charset="0"/>
-                          <a:ea typeface="Consolas" pitchFamily="34" charset="-122"/>
-                          <a:cs typeface="Consolas" pitchFamily="34" charset="-120"/>
+                          <a:latin typeface="Courier New" pitchFamily="34" charset="0"/>
+                          <a:ea typeface="Courier New" pitchFamily="34" charset="-122"/>
+                          <a:cs typeface="Courier New" pitchFamily="34" charset="-120"/>
                         </a:rPr>
                         <a:t>0.5517</a:t>
                       </a:r>
                       <a:endParaRPr lang="en-US" sz="1200" dirty="0">
-                        <a:latin typeface="Consolas" charset="0"/>
-                        <a:ea typeface="Consolas" charset="0"/>
-                        <a:cs typeface="Consolas" charset="0"/>
+                        <a:latin typeface="Courier New" charset="0"/>
+                        <a:ea typeface="Courier New" charset="0"/>
+                        <a:cs typeface="Courier New" charset="0"/>
                       </a:endParaRPr>
                     </a:p>
                   </a:txBody>
@@ -12690,16 +13938,16 @@
                           <a:solidFill>
                             <a:srgbClr val="6B7394"/>
                           </a:solidFill>
-                          <a:latin typeface="Consolas" pitchFamily="34" charset="0"/>
-                          <a:ea typeface="Consolas" pitchFamily="34" charset="-122"/>
-                          <a:cs typeface="Consolas" pitchFamily="34" charset="-120"/>
+                          <a:latin typeface="Courier New" pitchFamily="34" charset="0"/>
+                          <a:ea typeface="Courier New" pitchFamily="34" charset="-122"/>
+                          <a:cs typeface="Courier New" pitchFamily="34" charset="-120"/>
                         </a:rPr>
                         <a:t>0.5832</a:t>
                       </a:r>
                       <a:endParaRPr lang="en-US" sz="1200" dirty="0">
-                        <a:latin typeface="Consolas" charset="0"/>
-                        <a:ea typeface="Consolas" charset="0"/>
-                        <a:cs typeface="Consolas" charset="0"/>
+                        <a:latin typeface="Courier New" charset="0"/>
+                        <a:ea typeface="Courier New" charset="0"/>
+                        <a:cs typeface="Courier New" charset="0"/>
                       </a:endParaRPr>
                     </a:p>
                   </a:txBody>
@@ -12758,16 +14006,16 @@
                           <a:solidFill>
                             <a:srgbClr val="6B7394"/>
                           </a:solidFill>
-                          <a:latin typeface="Consolas" pitchFamily="34" charset="0"/>
-                          <a:ea typeface="Consolas" pitchFamily="34" charset="-122"/>
-                          <a:cs typeface="Consolas" pitchFamily="34" charset="-120"/>
+                          <a:latin typeface="Courier New" pitchFamily="34" charset="0"/>
+                          <a:ea typeface="Courier New" pitchFamily="34" charset="-122"/>
+                          <a:cs typeface="Courier New" pitchFamily="34" charset="-120"/>
                         </a:rPr>
                         <a:t>0.6188</a:t>
                       </a:r>
                       <a:endParaRPr lang="en-US" sz="1200" dirty="0">
-                        <a:latin typeface="Consolas" charset="0"/>
-                        <a:ea typeface="Consolas" charset="0"/>
-                        <a:cs typeface="Consolas" charset="0"/>
+                        <a:latin typeface="Courier New" charset="0"/>
+                        <a:ea typeface="Courier New" charset="0"/>
+                        <a:cs typeface="Courier New" charset="0"/>
                       </a:endParaRPr>
                     </a:p>
                   </a:txBody>
@@ -12893,16 +14141,16 @@
                           <a:solidFill>
                             <a:srgbClr val="6B7394"/>
                           </a:solidFill>
-                          <a:latin typeface="Consolas" pitchFamily="34" charset="0"/>
-                          <a:ea typeface="Consolas" pitchFamily="34" charset="-122"/>
-                          <a:cs typeface="Consolas" pitchFamily="34" charset="-120"/>
+                          <a:latin typeface="Courier New" pitchFamily="34" charset="0"/>
+                          <a:ea typeface="Courier New" pitchFamily="34" charset="-122"/>
+                          <a:cs typeface="Courier New" pitchFamily="34" charset="-120"/>
                         </a:rPr>
                         <a:t>0.8992</a:t>
                       </a:r>
                       <a:endParaRPr lang="en-US" sz="1200" dirty="0">
-                        <a:latin typeface="Consolas" charset="0"/>
-                        <a:ea typeface="Consolas" charset="0"/>
-                        <a:cs typeface="Consolas" charset="0"/>
+                        <a:latin typeface="Courier New" charset="0"/>
+                        <a:ea typeface="Courier New" charset="0"/>
+                        <a:cs typeface="Courier New" charset="0"/>
                       </a:endParaRPr>
                     </a:p>
                   </a:txBody>
@@ -12961,16 +14209,16 @@
                           <a:solidFill>
                             <a:srgbClr val="6B7394"/>
                           </a:solidFill>
-                          <a:latin typeface="Consolas" pitchFamily="34" charset="0"/>
-                          <a:ea typeface="Consolas" pitchFamily="34" charset="-122"/>
-                          <a:cs typeface="Consolas" pitchFamily="34" charset="-120"/>
+                          <a:latin typeface="Courier New" pitchFamily="34" charset="0"/>
+                          <a:ea typeface="Courier New" pitchFamily="34" charset="-122"/>
+                          <a:cs typeface="Courier New" pitchFamily="34" charset="-120"/>
                         </a:rPr>
                         <a:t>0.9115</a:t>
                       </a:r>
                       <a:endParaRPr lang="en-US" sz="1200" dirty="0">
-                        <a:latin typeface="Consolas" charset="0"/>
-                        <a:ea typeface="Consolas" charset="0"/>
-                        <a:cs typeface="Consolas" charset="0"/>
+                        <a:latin typeface="Courier New" charset="0"/>
+                        <a:ea typeface="Courier New" charset="0"/>
+                        <a:cs typeface="Courier New" charset="0"/>
                       </a:endParaRPr>
                     </a:p>
                   </a:txBody>
@@ -13029,16 +14277,16 @@
                           <a:solidFill>
                             <a:srgbClr val="6B7394"/>
                           </a:solidFill>
-                          <a:latin typeface="Consolas" pitchFamily="34" charset="0"/>
-                          <a:ea typeface="Consolas" pitchFamily="34" charset="-122"/>
-                          <a:cs typeface="Consolas" pitchFamily="34" charset="-120"/>
+                          <a:latin typeface="Courier New" pitchFamily="34" charset="0"/>
+                          <a:ea typeface="Courier New" pitchFamily="34" charset="-122"/>
+                          <a:cs typeface="Courier New" pitchFamily="34" charset="-120"/>
                         </a:rPr>
                         <a:t>0.9174</a:t>
                       </a:r>
                       <a:endParaRPr lang="en-US" sz="1200" dirty="0">
-                        <a:latin typeface="Consolas" charset="0"/>
-                        <a:ea typeface="Consolas" charset="0"/>
-                        <a:cs typeface="Consolas" charset="0"/>
+                        <a:latin typeface="Courier New" charset="0"/>
+                        <a:ea typeface="Courier New" charset="0"/>
+                        <a:cs typeface="Courier New" charset="0"/>
                       </a:endParaRPr>
                     </a:p>
                   </a:txBody>
@@ -13097,16 +14345,16 @@
                           <a:solidFill>
                             <a:srgbClr val="1F2A52"/>
                           </a:solidFill>
-                          <a:latin typeface="Consolas" pitchFamily="34" charset="0"/>
-                          <a:ea typeface="Consolas" pitchFamily="34" charset="-122"/>
-                          <a:cs typeface="Consolas" pitchFamily="34" charset="-120"/>
+                          <a:latin typeface="Courier New" pitchFamily="34" charset="0"/>
+                          <a:ea typeface="Courier New" pitchFamily="34" charset="-122"/>
+                          <a:cs typeface="Courier New" pitchFamily="34" charset="-120"/>
                         </a:rPr>
                         <a:t>0.9264</a:t>
                       </a:r>
                       <a:endParaRPr lang="en-US" sz="1200" dirty="0">
-                        <a:latin typeface="Consolas" charset="0"/>
-                        <a:ea typeface="Consolas" charset="0"/>
-                        <a:cs typeface="Consolas" charset="0"/>
+                        <a:latin typeface="Courier New" charset="0"/>
+                        <a:ea typeface="Courier New" charset="0"/>
+                        <a:cs typeface="Courier New" charset="0"/>
                       </a:endParaRPr>
                     </a:p>
                   </a:txBody>
@@ -13232,16 +14480,16 @@
                           <a:solidFill>
                             <a:srgbClr val="6B7394"/>
                           </a:solidFill>
-                          <a:latin typeface="Consolas" pitchFamily="34" charset="0"/>
-                          <a:ea typeface="Consolas" pitchFamily="34" charset="-122"/>
-                          <a:cs typeface="Consolas" pitchFamily="34" charset="-120"/>
+                          <a:latin typeface="Courier New" pitchFamily="34" charset="0"/>
+                          <a:ea typeface="Courier New" pitchFamily="34" charset="-122"/>
+                          <a:cs typeface="Courier New" pitchFamily="34" charset="-120"/>
                         </a:rPr>
                         <a:t>0.7938</a:t>
                       </a:r>
                       <a:endParaRPr lang="en-US" sz="1200" dirty="0">
-                        <a:latin typeface="Consolas" charset="0"/>
-                        <a:ea typeface="Consolas" charset="0"/>
-                        <a:cs typeface="Consolas" charset="0"/>
+                        <a:latin typeface="Courier New" charset="0"/>
+                        <a:ea typeface="Courier New" charset="0"/>
+                        <a:cs typeface="Courier New" charset="0"/>
                       </a:endParaRPr>
                     </a:p>
                   </a:txBody>
@@ -13300,16 +14548,16 @@
                           <a:solidFill>
                             <a:srgbClr val="6B7394"/>
                           </a:solidFill>
-                          <a:latin typeface="Consolas" pitchFamily="34" charset="0"/>
-                          <a:ea typeface="Consolas" pitchFamily="34" charset="-122"/>
-                          <a:cs typeface="Consolas" pitchFamily="34" charset="-120"/>
+                          <a:latin typeface="Courier New" pitchFamily="34" charset="0"/>
+                          <a:ea typeface="Courier New" pitchFamily="34" charset="-122"/>
+                          <a:cs typeface="Courier New" pitchFamily="34" charset="-120"/>
                         </a:rPr>
                         <a:t>0.7900</a:t>
                       </a:r>
                       <a:endParaRPr lang="en-US" sz="1200" dirty="0">
-                        <a:latin typeface="Consolas" charset="0"/>
-                        <a:ea typeface="Consolas" charset="0"/>
-                        <a:cs typeface="Consolas" charset="0"/>
+                        <a:latin typeface="Courier New" charset="0"/>
+                        <a:ea typeface="Courier New" charset="0"/>
+                        <a:cs typeface="Courier New" charset="0"/>
                       </a:endParaRPr>
                     </a:p>
                   </a:txBody>
@@ -13368,16 +14616,16 @@
                           <a:solidFill>
                             <a:srgbClr val="6B7394"/>
                           </a:solidFill>
-                          <a:latin typeface="Consolas" pitchFamily="34" charset="0"/>
-                          <a:ea typeface="Consolas" pitchFamily="34" charset="-122"/>
-                          <a:cs typeface="Consolas" pitchFamily="34" charset="-120"/>
+                          <a:latin typeface="Courier New" pitchFamily="34" charset="0"/>
+                          <a:ea typeface="Courier New" pitchFamily="34" charset="-122"/>
+                          <a:cs typeface="Courier New" pitchFamily="34" charset="-120"/>
                         </a:rPr>
                         <a:t>0.8071</a:t>
                       </a:r>
                       <a:endParaRPr lang="en-US" sz="1200" dirty="0">
-                        <a:latin typeface="Consolas" charset="0"/>
-                        <a:ea typeface="Consolas" charset="0"/>
-                        <a:cs typeface="Consolas" charset="0"/>
+                        <a:latin typeface="Courier New" charset="0"/>
+                        <a:ea typeface="Courier New" charset="0"/>
+                        <a:cs typeface="Courier New" charset="0"/>
                       </a:endParaRPr>
                     </a:p>
                   </a:txBody>
@@ -13436,16 +14684,16 @@
                           <a:solidFill>
                             <a:srgbClr val="1F2A52"/>
                           </a:solidFill>
-                          <a:latin typeface="Consolas" pitchFamily="34" charset="0"/>
-                          <a:ea typeface="Consolas" pitchFamily="34" charset="-122"/>
-                          <a:cs typeface="Consolas" pitchFamily="34" charset="-120"/>
+                          <a:latin typeface="Courier New" pitchFamily="34" charset="0"/>
+                          <a:ea typeface="Courier New" pitchFamily="34" charset="-122"/>
+                          <a:cs typeface="Courier New" pitchFamily="34" charset="-120"/>
                         </a:rPr>
                         <a:t>0.8335</a:t>
                       </a:r>
                       <a:endParaRPr lang="en-US" sz="1200" dirty="0">
-                        <a:latin typeface="Consolas" charset="0"/>
-                        <a:ea typeface="Consolas" charset="0"/>
-                        <a:cs typeface="Consolas" charset="0"/>
+                        <a:latin typeface="Courier New" charset="0"/>
+                        <a:ea typeface="Courier New" charset="0"/>
+                        <a:cs typeface="Courier New" charset="0"/>
                       </a:endParaRPr>
                     </a:p>
                   </a:txBody>
@@ -14014,9 +15262,9 @@
                 <a:solidFill>
                   <a:srgbClr val="9E2453"/>
                 </a:solidFill>
-                <a:latin typeface="Consolas" pitchFamily="34" charset="0"/>
-                <a:ea typeface="Consolas" pitchFamily="34" charset="-122"/>
-                <a:cs typeface="Consolas" pitchFamily="34" charset="-120"/>
+                <a:latin typeface="Courier New" pitchFamily="34" charset="0"/>
+                <a:ea typeface="Courier New" pitchFamily="34" charset="-122"/>
+                <a:cs typeface="Courier New" pitchFamily="34" charset="-120"/>
               </a:rPr>
               <a:t>327 · 343 · 358</a:t>
             </a:r>
@@ -14367,9 +15615,9 @@
                 <a:solidFill>
                   <a:srgbClr val="9E2453"/>
                 </a:solidFill>
-                <a:latin typeface="Consolas" pitchFamily="34" charset="0"/>
-                <a:ea typeface="Consolas" pitchFamily="34" charset="-122"/>
-                <a:cs typeface="Consolas" pitchFamily="34" charset="-120"/>
+                <a:latin typeface="Courier New" pitchFamily="34" charset="0"/>
+                <a:ea typeface="Courier New" pitchFamily="34" charset="-122"/>
+                <a:cs typeface="Courier New" pitchFamily="34" charset="-120"/>
               </a:rPr>
               <a:t>181 · 187 · 205</a:t>
             </a:r>

--- a/Mini-DDSM-CSDE2026-Presentation.pptx
+++ b/Mini-DDSM-CSDE2026-Presentation.pptx
@@ -150,7 +150,7 @@
           </c:tx>
           <c:spPr>
             <a:solidFill>
-              <a:srgbClr val="3D4873"/>
+              <a:srgbClr val="0B2545"/>
             </a:solidFill>
             <a:effectLst/>
           </c:spPr>
@@ -164,7 +164,7 @@
                 <a:pPr>
                   <a:defRPr b="0" i="0" strike="noStrike" sz="1100" u="none">
                     <a:solidFill>
-                      <a:srgbClr val="1F2A52"/>
+                      <a:srgbClr val="1A2433"/>
                     </a:solidFill>
                     <a:latin typeface="Arial"/>
                   </a:defRPr>
@@ -185,7 +185,7 @@
             <c:bubble3D val="0"/>
             <c:spPr>
               <a:solidFill>
-                <a:srgbClr val="3D4873"/>
+                <a:srgbClr val="0B2545"/>
               </a:solidFill>
               <a:effectLst/>
             </c:spPr>
@@ -196,7 +196,7 @@
             <c:bubble3D val="0"/>
             <c:spPr>
               <a:solidFill>
-                <a:srgbClr val="3D4873"/>
+                <a:srgbClr val="0B2545"/>
               </a:solidFill>
               <a:effectLst/>
             </c:spPr>
@@ -207,7 +207,7 @@
             <c:bubble3D val="0"/>
             <c:spPr>
               <a:solidFill>
-                <a:srgbClr val="C23A6B"/>
+                <a:srgbClr val="D1495B"/>
               </a:solidFill>
               <a:effectLst/>
             </c:spPr>
@@ -259,7 +259,7 @@
               <a:pPr>
                 <a:defRPr b="0" i="0" strike="noStrike" sz="1100" u="none">
                   <a:solidFill>
-                    <a:srgbClr val="1F2A52"/>
+                    <a:srgbClr val="1A2433"/>
                   </a:solidFill>
                   <a:latin typeface="Arial"/>
                 </a:defRPr>
@@ -307,7 +307,7 @@
             <a:pPr>
               <a:defRPr sz="1000" b="0" i="0" u="none" strike="noStrike">
                 <a:solidFill>
-                  <a:srgbClr val="6B7394"/>
+                  <a:srgbClr val="5C6B7A"/>
                 </a:solidFill>
                 <a:latin typeface="Arial"/>
               </a:defRPr>
@@ -412,11 +412,11 @@
           </c:tx>
           <c:spPr>
             <a:solidFill>
-              <a:srgbClr val="C23A6B"/>
+              <a:srgbClr val="D1495B"/>
             </a:solidFill>
             <a:ln w="31750" cap="flat">
               <a:solidFill>
-                <a:srgbClr val="C23A6B"/>
+                <a:srgbClr val="D1495B"/>
               </a:solidFill>
               <a:prstDash val="solid"/>
               <a:round/>
@@ -453,11 +453,11 @@
             <c:size val="6"/>
             <c:spPr>
               <a:solidFill>
-                <a:srgbClr val="C23A6B"/>
+                <a:srgbClr val="D1495B"/>
               </a:solidFill>
               <a:ln w="9525" cap="flat">
                 <a:solidFill>
-                  <a:srgbClr val="C23A6B"/>
+                  <a:srgbClr val="D1495B"/>
                 </a:solidFill>
                 <a:prstDash val="solid"/>
                 <a:round/>
@@ -580,11 +580,11 @@
           </c:tx>
           <c:spPr>
             <a:solidFill>
-              <a:srgbClr val="B8913F"/>
+              <a:srgbClr val="F2A900"/>
             </a:solidFill>
             <a:ln w="31750" cap="flat">
               <a:solidFill>
-                <a:srgbClr val="B8913F"/>
+                <a:srgbClr val="F2A900"/>
               </a:solidFill>
               <a:prstDash val="solid"/>
               <a:round/>
@@ -621,11 +621,11 @@
             <c:size val="6"/>
             <c:spPr>
               <a:solidFill>
-                <a:srgbClr val="B8913F"/>
+                <a:srgbClr val="F2A900"/>
               </a:solidFill>
               <a:ln w="9525" cap="flat">
                 <a:solidFill>
-                  <a:srgbClr val="B8913F"/>
+                  <a:srgbClr val="F2A900"/>
                 </a:solidFill>
                 <a:prstDash val="solid"/>
                 <a:round/>
@@ -748,11 +748,11 @@
           </c:tx>
           <c:spPr>
             <a:solidFill>
-              <a:srgbClr val="4B5BD6"/>
+              <a:srgbClr val="3E7CB1"/>
             </a:solidFill>
             <a:ln w="31750" cap="flat">
               <a:solidFill>
-                <a:srgbClr val="4B5BD6"/>
+                <a:srgbClr val="3E7CB1"/>
               </a:solidFill>
               <a:prstDash val="solid"/>
               <a:round/>
@@ -789,11 +789,11 @@
             <c:size val="6"/>
             <c:spPr>
               <a:solidFill>
-                <a:srgbClr val="4B5BD6"/>
+                <a:srgbClr val="3E7CB1"/>
               </a:solidFill>
               <a:ln w="9525" cap="flat">
                 <a:solidFill>
-                  <a:srgbClr val="4B5BD6"/>
+                  <a:srgbClr val="3E7CB1"/>
                 </a:solidFill>
                 <a:prstDash val="solid"/>
                 <a:round/>
@@ -985,7 +985,7 @@
             <a:pPr>
               <a:defRPr sz="800" b="0" i="0" u="none" strike="noStrike">
                 <a:solidFill>
-                  <a:srgbClr val="6B7394"/>
+                  <a:srgbClr val="5C6B7A"/>
                 </a:solidFill>
                 <a:latin typeface="Arial"/>
               </a:defRPr>
@@ -1068,7 +1068,7 @@
             <a:pPr>
               <a:defRPr sz="800" b="0" i="0" u="none" strike="noStrike">
                 <a:solidFill>
-                  <a:srgbClr val="6B7394"/>
+                  <a:srgbClr val="5C6B7A"/>
                 </a:solidFill>
                 <a:latin typeface="Arial"/>
               </a:defRPr>
@@ -3188,7 +3188,7 @@
     <p:bg>
       <p:bgPr>
         <a:solidFill>
-          <a:srgbClr val="FBFAF7"/>
+          <a:srgbClr val="FFFFFF"/>
         </a:solidFill>
       </p:bgPr>
     </p:bg>
@@ -3233,7 +3233,7 @@
             <a:r>
               <a:rPr lang="en-US" sz="900" dirty="0">
                 <a:solidFill>
-                  <a:srgbClr val="9AA0B8"/>
+                  <a:srgbClr val="8DA9C4"/>
                 </a:solidFill>
                 <a:latin typeface="Calibri" pitchFamily="34" charset="0"/>
                 <a:ea typeface="Calibri" pitchFamily="34" charset="-122"/>
@@ -3245,15 +3245,39 @@
           </a:p>
         </p:txBody>
       </p:sp>
-      <p:sp>
-        <p:nvSpPr>
-          <p:cNvPr id="4" name="Shape 1"/>
-          <p:cNvSpPr/>
-          <p:nvPr/>
-        </p:nvSpPr>
-        <p:spPr>
-          <a:xfrm>
-            <a:off x="685800" y="502920"/>
+      <p:pic>
+        <p:nvPicPr>
+          <p:cNvPr id="4" name="Image 0" descr="preencoded.png">    </p:cNvPr>
+          <p:cNvPicPr>
+            <a:picLocks noChangeAspect="1"/>
+          </p:cNvPicPr>
+          <p:nvPr/>
+        </p:nvPicPr>
+        <p:blipFill>
+          <a:blip r:embed="rId1"/>
+          <a:stretch>
+            <a:fillRect/>
+          </a:stretch>
+        </p:blipFill>
+        <p:spPr>
+          <a:xfrm>
+            <a:off x="685800" y="457200"/>
+            <a:ext cx="640080" cy="640080"/>
+          </a:xfrm>
+          <a:prstGeom prst="rect">
+            <a:avLst/>
+          </a:prstGeom>
+        </p:spPr>
+      </p:pic>
+      <p:sp>
+        <p:nvSpPr>
+          <p:cNvPr id="5" name="Shape 1"/>
+          <p:cNvSpPr/>
+          <p:nvPr/>
+        </p:nvSpPr>
+        <p:spPr>
+          <a:xfrm>
+            <a:off x="1508760" y="594360"/>
             <a:ext cx="4846320" cy="384048"/>
           </a:xfrm>
           <a:prstGeom prst="roundRect">
@@ -3262,11 +3286,11 @@
             </a:avLst>
           </a:prstGeom>
           <a:solidFill>
-            <a:srgbClr val="F7F0DE"/>
+            <a:srgbClr val="FDF1D9"/>
           </a:solidFill>
           <a:ln w="9525">
             <a:solidFill>
-              <a:srgbClr val="B8913F"/>
+              <a:srgbClr val="F2A900"/>
             </a:solidFill>
             <a:prstDash val="solid"/>
           </a:ln>
@@ -3274,13 +3298,13 @@
       </p:sp>
       <p:sp>
         <p:nvSpPr>
-          <p:cNvPr id="5" name="Text 2"/>
-          <p:cNvSpPr/>
-          <p:nvPr/>
-        </p:nvSpPr>
-        <p:spPr>
-          <a:xfrm>
-            <a:off x="822960" y="502920"/>
+          <p:cNvPr id="6" name="Text 2"/>
+          <p:cNvSpPr/>
+          <p:nvPr/>
+        </p:nvSpPr>
+        <p:spPr>
+          <a:xfrm>
+            <a:off x="1645920" y="594360"/>
             <a:ext cx="4572000" cy="384048"/>
           </a:xfrm>
           <a:prstGeom prst="rect">
@@ -3299,7 +3323,7 @@
             <a:r>
               <a:rPr lang="en-US" sz="1100" b="1" dirty="0">
                 <a:solidFill>
-                  <a:srgbClr val="B8913F"/>
+                  <a:srgbClr val="F2A900"/>
                 </a:solidFill>
                 <a:latin typeface="Calibri" pitchFamily="34" charset="0"/>
                 <a:ea typeface="Calibri" pitchFamily="34" charset="-122"/>
@@ -3313,7 +3337,7 @@
       </p:sp>
       <p:sp>
         <p:nvSpPr>
-          <p:cNvPr id="6" name="Text 3"/>
+          <p:cNvPr id="7" name="Text 3"/>
           <p:cNvSpPr/>
           <p:nvPr/>
         </p:nvSpPr>
@@ -3341,11 +3365,11 @@
             <a:r>
               <a:rPr lang="en-US" sz="3800" dirty="0">
                 <a:solidFill>
-                  <a:srgbClr val="1F2A52"/>
-                </a:solidFill>
-                <a:latin typeface="Georgia" pitchFamily="34" charset="0"/>
-                <a:ea typeface="Georgia" pitchFamily="34" charset="-122"/>
-                <a:cs typeface="Georgia" pitchFamily="34" charset="-120"/>
+                  <a:srgbClr val="1A2433"/>
+                </a:solidFill>
+                <a:latin typeface="Cambria" pitchFamily="34" charset="0"/>
+                <a:ea typeface="Cambria" pitchFamily="34" charset="-122"/>
+                <a:cs typeface="Cambria" pitchFamily="34" charset="-120"/>
               </a:rPr>
               <a:t>Multi-Backbone Ensemble Learning for </a:t>
             </a:r>
@@ -3358,11 +3382,11 @@
             <a:r>
               <a:rPr lang="en-US" sz="3800" i="1" dirty="0">
                 <a:solidFill>
-                  <a:srgbClr val="C23A6B"/>
-                </a:solidFill>
-                <a:latin typeface="Georgia" pitchFamily="34" charset="0"/>
-                <a:ea typeface="Georgia" pitchFamily="34" charset="-122"/>
-                <a:cs typeface="Georgia" pitchFamily="34" charset="-120"/>
+                  <a:srgbClr val="D1495B"/>
+                </a:solidFill>
+                <a:latin typeface="Cambria" pitchFamily="34" charset="0"/>
+                <a:ea typeface="Cambria" pitchFamily="34" charset="-122"/>
+                <a:cs typeface="Cambria" pitchFamily="34" charset="-120"/>
               </a:rPr>
               <a:t>Robust</a:t>
             </a:r>
@@ -3375,11 +3399,11 @@
             <a:r>
               <a:rPr lang="en-US" sz="3800" dirty="0">
                 <a:solidFill>
-                  <a:srgbClr val="1F2A52"/>
-                </a:solidFill>
-                <a:latin typeface="Georgia" pitchFamily="34" charset="0"/>
-                <a:ea typeface="Georgia" pitchFamily="34" charset="-122"/>
-                <a:cs typeface="Georgia" pitchFamily="34" charset="-120"/>
+                  <a:srgbClr val="1A2433"/>
+                </a:solidFill>
+                <a:latin typeface="Cambria" pitchFamily="34" charset="0"/>
+                <a:ea typeface="Cambria" pitchFamily="34" charset="-122"/>
+                <a:cs typeface="Cambria" pitchFamily="34" charset="-120"/>
               </a:rPr>
               <a:t> Breast Cancer Classification on Mini-DDSM</a:t>
             </a:r>
@@ -3389,7 +3413,7 @@
       </p:sp>
       <p:sp>
         <p:nvSpPr>
-          <p:cNvPr id="7" name="Text 4"/>
+          <p:cNvPr id="8" name="Text 4"/>
           <p:cNvSpPr/>
           <p:nvPr/>
         </p:nvSpPr>
@@ -3414,7 +3438,7 @@
             <a:r>
               <a:rPr lang="en-US" sz="1500" dirty="0">
                 <a:solidFill>
-                  <a:srgbClr val="3D4873"/>
+                  <a:srgbClr val="0B2545"/>
                 </a:solidFill>
                 <a:latin typeface="Calibri" pitchFamily="34" charset="0"/>
                 <a:ea typeface="Calibri" pitchFamily="34" charset="-122"/>
@@ -3428,7 +3452,7 @@
       </p:sp>
       <p:sp>
         <p:nvSpPr>
-          <p:cNvPr id="8" name="Text 5"/>
+          <p:cNvPr id="9" name="Text 5"/>
           <p:cNvSpPr/>
           <p:nvPr/>
         </p:nvSpPr>
@@ -3453,7 +3477,7 @@
             <a:r>
               <a:rPr lang="en-US" sz="1200" dirty="0">
                 <a:solidFill>
-                  <a:srgbClr val="6B7394"/>
+                  <a:srgbClr val="5C6B7A"/>
                 </a:solidFill>
                 <a:latin typeface="Calibri" pitchFamily="34" charset="0"/>
                 <a:ea typeface="Calibri" pitchFamily="34" charset="-122"/>
@@ -3467,7 +3491,7 @@
       </p:sp>
       <p:sp>
         <p:nvSpPr>
-          <p:cNvPr id="9" name="Shape 6"/>
+          <p:cNvPr id="10" name="Shape 6"/>
           <p:cNvSpPr/>
           <p:nvPr/>
         </p:nvSpPr>
@@ -3486,7 +3510,7 @@
           </a:solidFill>
           <a:ln w="9525">
             <a:solidFill>
-              <a:srgbClr val="E8E3D8"/>
+              <a:srgbClr val="DCE6F0"/>
             </a:solidFill>
             <a:prstDash val="solid"/>
           </a:ln>
@@ -3494,7 +3518,7 @@
       </p:sp>
       <p:sp>
         <p:nvSpPr>
-          <p:cNvPr id="10" name="Text 7"/>
+          <p:cNvPr id="11" name="Text 7"/>
           <p:cNvSpPr/>
           <p:nvPr/>
         </p:nvSpPr>
@@ -3519,7 +3543,7 @@
             <a:r>
               <a:rPr lang="en-US" sz="2000" b="1" dirty="0">
                 <a:solidFill>
-                  <a:srgbClr val="1F2A52"/>
+                  <a:srgbClr val="1A2433"/>
                 </a:solidFill>
                 <a:latin typeface="Courier New" pitchFamily="34" charset="0"/>
                 <a:ea typeface="Courier New" pitchFamily="34" charset="-122"/>
@@ -3533,7 +3557,7 @@
       </p:sp>
       <p:sp>
         <p:nvSpPr>
-          <p:cNvPr id="11" name="Text 8"/>
+          <p:cNvPr id="12" name="Text 8"/>
           <p:cNvSpPr/>
           <p:nvPr/>
         </p:nvSpPr>
@@ -3558,7 +3582,7 @@
             <a:r>
               <a:rPr lang="en-US" sz="1000" dirty="0">
                 <a:solidFill>
-                  <a:srgbClr val="6B7394"/>
+                  <a:srgbClr val="5C6B7A"/>
                 </a:solidFill>
                 <a:latin typeface="Calibri" pitchFamily="34" charset="0"/>
                 <a:ea typeface="Calibri" pitchFamily="34" charset="-122"/>
@@ -3572,7 +3596,7 @@
       </p:sp>
       <p:sp>
         <p:nvSpPr>
-          <p:cNvPr id="12" name="Shape 9"/>
+          <p:cNvPr id="13" name="Shape 9"/>
           <p:cNvSpPr/>
           <p:nvPr/>
         </p:nvSpPr>
@@ -3591,7 +3615,7 @@
           </a:solidFill>
           <a:ln w="9525">
             <a:solidFill>
-              <a:srgbClr val="E8E3D8"/>
+              <a:srgbClr val="DCE6F0"/>
             </a:solidFill>
             <a:prstDash val="solid"/>
           </a:ln>
@@ -3599,7 +3623,7 @@
       </p:sp>
       <p:sp>
         <p:nvSpPr>
-          <p:cNvPr id="13" name="Text 10"/>
+          <p:cNvPr id="14" name="Text 10"/>
           <p:cNvSpPr/>
           <p:nvPr/>
         </p:nvSpPr>
@@ -3624,7 +3648,7 @@
             <a:r>
               <a:rPr lang="en-US" sz="2000" b="1" dirty="0">
                 <a:solidFill>
-                  <a:srgbClr val="1F2A52"/>
+                  <a:srgbClr val="1A2433"/>
                 </a:solidFill>
                 <a:latin typeface="Courier New" pitchFamily="34" charset="0"/>
                 <a:ea typeface="Courier New" pitchFamily="34" charset="-122"/>
@@ -3638,7 +3662,7 @@
       </p:sp>
       <p:sp>
         <p:nvSpPr>
-          <p:cNvPr id="14" name="Text 11"/>
+          <p:cNvPr id="15" name="Text 11"/>
           <p:cNvSpPr/>
           <p:nvPr/>
         </p:nvSpPr>
@@ -3663,7 +3687,7 @@
             <a:r>
               <a:rPr lang="en-US" sz="1000" dirty="0">
                 <a:solidFill>
-                  <a:srgbClr val="6B7394"/>
+                  <a:srgbClr val="5C6B7A"/>
                 </a:solidFill>
                 <a:latin typeface="Calibri" pitchFamily="34" charset="0"/>
                 <a:ea typeface="Calibri" pitchFamily="34" charset="-122"/>
@@ -3677,7 +3701,7 @@
       </p:sp>
       <p:sp>
         <p:nvSpPr>
-          <p:cNvPr id="15" name="Shape 12"/>
+          <p:cNvPr id="16" name="Shape 12"/>
           <p:cNvSpPr/>
           <p:nvPr/>
         </p:nvSpPr>
@@ -3696,7 +3720,7 @@
           </a:solidFill>
           <a:ln w="9525">
             <a:solidFill>
-              <a:srgbClr val="E8E3D8"/>
+              <a:srgbClr val="DCE6F0"/>
             </a:solidFill>
             <a:prstDash val="solid"/>
           </a:ln>
@@ -3704,7 +3728,7 @@
       </p:sp>
       <p:sp>
         <p:nvSpPr>
-          <p:cNvPr id="16" name="Text 13"/>
+          <p:cNvPr id="17" name="Text 13"/>
           <p:cNvSpPr/>
           <p:nvPr/>
         </p:nvSpPr>
@@ -3729,7 +3753,7 @@
             <a:r>
               <a:rPr lang="en-US" sz="2000" b="1" dirty="0">
                 <a:solidFill>
-                  <a:srgbClr val="1F2A52"/>
+                  <a:srgbClr val="1A2433"/>
                 </a:solidFill>
                 <a:latin typeface="Courier New" pitchFamily="34" charset="0"/>
                 <a:ea typeface="Courier New" pitchFamily="34" charset="-122"/>
@@ -3743,7 +3767,7 @@
       </p:sp>
       <p:sp>
         <p:nvSpPr>
-          <p:cNvPr id="17" name="Text 14"/>
+          <p:cNvPr id="18" name="Text 14"/>
           <p:cNvSpPr/>
           <p:nvPr/>
         </p:nvSpPr>
@@ -3768,7 +3792,7 @@
             <a:r>
               <a:rPr lang="en-US" sz="1000" dirty="0">
                 <a:solidFill>
-                  <a:srgbClr val="6B7394"/>
+                  <a:srgbClr val="5C6B7A"/>
                 </a:solidFill>
                 <a:latin typeface="Calibri" pitchFamily="34" charset="0"/>
                 <a:ea typeface="Calibri" pitchFamily="34" charset="-122"/>
@@ -3794,7 +3818,7 @@
     <p:bg>
       <p:bgPr>
         <a:solidFill>
-          <a:srgbClr val="FBFAF7"/>
+          <a:srgbClr val="FFFFFF"/>
         </a:solidFill>
       </p:bgPr>
     </p:bg>
@@ -3839,7 +3863,7 @@
             <a:r>
               <a:rPr lang="en-US" sz="900" dirty="0">
                 <a:solidFill>
-                  <a:srgbClr val="9AA0B8"/>
+                  <a:srgbClr val="8DA9C4"/>
                 </a:solidFill>
                 <a:latin typeface="Calibri" pitchFamily="34" charset="0"/>
                 <a:ea typeface="Calibri" pitchFamily="34" charset="-122"/>
@@ -3868,7 +3892,7 @@
           <a:noFill/>
           <a:ln w="19050">
             <a:solidFill>
-              <a:srgbClr val="C23A6B"/>
+              <a:srgbClr val="D1495B"/>
             </a:solidFill>
             <a:prstDash val="solid"/>
           </a:ln>
@@ -3901,7 +3925,7 @@
             <a:r>
               <a:rPr lang="en-US" sz="1200" b="1" spc="200" kern="0" dirty="0">
                 <a:solidFill>
-                  <a:srgbClr val="C23A6B"/>
+                  <a:srgbClr val="D1495B"/>
                 </a:solidFill>
                 <a:latin typeface="Calibri" pitchFamily="34" charset="0"/>
                 <a:ea typeface="Calibri" pitchFamily="34" charset="-122"/>
@@ -3943,11 +3967,11 @@
             <a:r>
               <a:rPr lang="en-US" sz="2700" dirty="0">
                 <a:solidFill>
-                  <a:srgbClr val="1F2A52"/>
-                </a:solidFill>
-                <a:latin typeface="Georgia" pitchFamily="34" charset="0"/>
-                <a:ea typeface="Georgia" pitchFamily="34" charset="-122"/>
-                <a:cs typeface="Georgia" pitchFamily="34" charset="-120"/>
+                  <a:srgbClr val="1A2433"/>
+                </a:solidFill>
+                <a:latin typeface="Cambria" pitchFamily="34" charset="0"/>
+                <a:ea typeface="Cambria" pitchFamily="34" charset="-122"/>
+                <a:cs typeface="Cambria" pitchFamily="34" charset="-120"/>
               </a:rPr>
               <a:t>Youden threshold: sensitivity 0.62 → 0.79</a:t>
             </a:r>
@@ -3976,7 +4000,7 @@
           </a:solidFill>
           <a:ln w="9525">
             <a:solidFill>
-              <a:srgbClr val="E8E3D8"/>
+              <a:srgbClr val="DCE6F0"/>
             </a:solidFill>
             <a:prstDash val="solid"/>
           </a:ln>
@@ -4009,7 +4033,7 @@
             <a:r>
               <a:rPr lang="en-US" sz="1400" b="1" dirty="0">
                 <a:solidFill>
-                  <a:srgbClr val="1F2A52"/>
+                  <a:srgbClr val="1A2433"/>
                 </a:solidFill>
                 <a:latin typeface="Calibri" pitchFamily="34" charset="0"/>
                 <a:ea typeface="Calibri" pitchFamily="34" charset="-122"/>
@@ -4048,11 +4072,11 @@
             <a:r>
               <a:rPr lang="en-US" sz="2200" dirty="0">
                 <a:solidFill>
-                  <a:srgbClr val="1F2A52"/>
-                </a:solidFill>
-                <a:latin typeface="Georgia" pitchFamily="34" charset="0"/>
-                <a:ea typeface="Georgia" pitchFamily="34" charset="-122"/>
-                <a:cs typeface="Georgia" pitchFamily="34" charset="-120"/>
+                  <a:srgbClr val="1A2433"/>
+                </a:solidFill>
+                <a:latin typeface="Cambria" pitchFamily="34" charset="0"/>
+                <a:ea typeface="Cambria" pitchFamily="34" charset="-122"/>
+                <a:cs typeface="Cambria" pitchFamily="34" charset="-120"/>
               </a:rPr>
               <a:t>0.619</a:t>
             </a:r>
@@ -4087,7 +4111,7 @@
             <a:r>
               <a:rPr lang="en-US" sz="950" dirty="0">
                 <a:solidFill>
-                  <a:srgbClr val="6B7394"/>
+                  <a:srgbClr val="5C6B7A"/>
                 </a:solidFill>
                 <a:latin typeface="Calibri" pitchFamily="34" charset="0"/>
                 <a:ea typeface="Calibri" pitchFamily="34" charset="-122"/>
@@ -4126,11 +4150,11 @@
             <a:r>
               <a:rPr lang="en-US" sz="2200" dirty="0">
                 <a:solidFill>
-                  <a:srgbClr val="1F2A52"/>
-                </a:solidFill>
-                <a:latin typeface="Georgia" pitchFamily="34" charset="0"/>
-                <a:ea typeface="Georgia" pitchFamily="34" charset="-122"/>
-                <a:cs typeface="Georgia" pitchFamily="34" charset="-120"/>
+                  <a:srgbClr val="1A2433"/>
+                </a:solidFill>
+                <a:latin typeface="Cambria" pitchFamily="34" charset="0"/>
+                <a:ea typeface="Cambria" pitchFamily="34" charset="-122"/>
+                <a:cs typeface="Cambria" pitchFamily="34" charset="-120"/>
               </a:rPr>
               <a:t>0.926</a:t>
             </a:r>
@@ -4165,7 +4189,7 @@
             <a:r>
               <a:rPr lang="en-US" sz="950" dirty="0">
                 <a:solidFill>
-                  <a:srgbClr val="6B7394"/>
+                  <a:srgbClr val="5C6B7A"/>
                 </a:solidFill>
                 <a:latin typeface="Calibri" pitchFamily="34" charset="0"/>
                 <a:ea typeface="Calibri" pitchFamily="34" charset="-122"/>
@@ -4204,11 +4228,11 @@
             <a:r>
               <a:rPr lang="en-US" sz="2200" dirty="0">
                 <a:solidFill>
-                  <a:srgbClr val="1F2A52"/>
-                </a:solidFill>
-                <a:latin typeface="Georgia" pitchFamily="34" charset="0"/>
-                <a:ea typeface="Georgia" pitchFamily="34" charset="-122"/>
-                <a:cs typeface="Georgia" pitchFamily="34" charset="-120"/>
+                  <a:srgbClr val="1A2433"/>
+                </a:solidFill>
+                <a:latin typeface="Cambria" pitchFamily="34" charset="0"/>
+                <a:ea typeface="Cambria" pitchFamily="34" charset="-122"/>
+                <a:cs typeface="Cambria" pitchFamily="34" charset="-120"/>
               </a:rPr>
               <a:t>0.812</a:t>
             </a:r>
@@ -4243,7 +4267,7 @@
             <a:r>
               <a:rPr lang="en-US" sz="950" dirty="0">
                 <a:solidFill>
-                  <a:srgbClr val="6B7394"/>
+                  <a:srgbClr val="5C6B7A"/>
                 </a:solidFill>
                 <a:latin typeface="Calibri" pitchFamily="34" charset="0"/>
                 <a:ea typeface="Calibri" pitchFamily="34" charset="-122"/>
@@ -4282,7 +4306,7 @@
             <a:r>
               <a:rPr lang="en-US" sz="1200" dirty="0">
                 <a:solidFill>
-                  <a:srgbClr val="9E2453"/>
+                  <a:srgbClr val="A83349"/>
                 </a:solidFill>
                 <a:latin typeface="Calibri" pitchFamily="34" charset="0"/>
                 <a:ea typeface="Calibri" pitchFamily="34" charset="-122"/>
@@ -4296,7 +4320,7 @@
             <a:r>
               <a:rPr lang="en-US" sz="1200" b="1" dirty="0">
                 <a:solidFill>
-                  <a:srgbClr val="9E2453"/>
+                  <a:srgbClr val="A83349"/>
                 </a:solidFill>
                 <a:latin typeface="Courier New" pitchFamily="34" charset="0"/>
                 <a:ea typeface="Courier New" pitchFamily="34" charset="-122"/>
@@ -4325,11 +4349,11 @@
             </a:avLst>
           </a:prstGeom>
           <a:solidFill>
-            <a:srgbClr val="FBE9EF"/>
+            <a:srgbClr val="FBE8EA"/>
           </a:solidFill>
           <a:ln w="9525">
             <a:solidFill>
-              <a:srgbClr val="C23A6B"/>
+              <a:srgbClr val="D1495B"/>
             </a:solidFill>
             <a:prstDash val="solid"/>
           </a:ln>
@@ -4362,7 +4386,7 @@
             <a:r>
               <a:rPr lang="en-US" sz="1400" b="1" dirty="0">
                 <a:solidFill>
-                  <a:srgbClr val="1F2A52"/>
+                  <a:srgbClr val="1A2433"/>
                 </a:solidFill>
                 <a:latin typeface="Calibri" pitchFamily="34" charset="0"/>
                 <a:ea typeface="Calibri" pitchFamily="34" charset="-122"/>
@@ -4401,11 +4425,11 @@
             <a:r>
               <a:rPr lang="en-US" sz="2200" dirty="0">
                 <a:solidFill>
-                  <a:srgbClr val="1F2A52"/>
-                </a:solidFill>
-                <a:latin typeface="Georgia" pitchFamily="34" charset="0"/>
-                <a:ea typeface="Georgia" pitchFamily="34" charset="-122"/>
-                <a:cs typeface="Georgia" pitchFamily="34" charset="-120"/>
+                  <a:srgbClr val="1A2433"/>
+                </a:solidFill>
+                <a:latin typeface="Cambria" pitchFamily="34" charset="0"/>
+                <a:ea typeface="Cambria" pitchFamily="34" charset="-122"/>
+                <a:cs typeface="Cambria" pitchFamily="34" charset="-120"/>
               </a:rPr>
               <a:t>0.788</a:t>
             </a:r>
@@ -4440,7 +4464,7 @@
             <a:r>
               <a:rPr lang="en-US" sz="950" dirty="0">
                 <a:solidFill>
-                  <a:srgbClr val="6B7394"/>
+                  <a:srgbClr val="5C6B7A"/>
                 </a:solidFill>
                 <a:latin typeface="Calibri" pitchFamily="34" charset="0"/>
                 <a:ea typeface="Calibri" pitchFamily="34" charset="-122"/>
@@ -4479,11 +4503,11 @@
             <a:r>
               <a:rPr lang="en-US" sz="2200" dirty="0">
                 <a:solidFill>
-                  <a:srgbClr val="1F2A52"/>
-                </a:solidFill>
-                <a:latin typeface="Georgia" pitchFamily="34" charset="0"/>
-                <a:ea typeface="Georgia" pitchFamily="34" charset="-122"/>
-                <a:cs typeface="Georgia" pitchFamily="34" charset="-120"/>
+                  <a:srgbClr val="1A2433"/>
+                </a:solidFill>
+                <a:latin typeface="Cambria" pitchFamily="34" charset="0"/>
+                <a:ea typeface="Cambria" pitchFamily="34" charset="-122"/>
+                <a:cs typeface="Cambria" pitchFamily="34" charset="-120"/>
               </a:rPr>
               <a:t>0.839</a:t>
             </a:r>
@@ -4518,7 +4542,7 @@
             <a:r>
               <a:rPr lang="en-US" sz="950" dirty="0">
                 <a:solidFill>
-                  <a:srgbClr val="6B7394"/>
+                  <a:srgbClr val="5C6B7A"/>
                 </a:solidFill>
                 <a:latin typeface="Calibri" pitchFamily="34" charset="0"/>
                 <a:ea typeface="Calibri" pitchFamily="34" charset="-122"/>
@@ -4557,11 +4581,11 @@
             <a:r>
               <a:rPr lang="en-US" sz="2200" dirty="0">
                 <a:solidFill>
-                  <a:srgbClr val="1F2A52"/>
-                </a:solidFill>
-                <a:latin typeface="Georgia" pitchFamily="34" charset="0"/>
-                <a:ea typeface="Georgia" pitchFamily="34" charset="-122"/>
-                <a:cs typeface="Georgia" pitchFamily="34" charset="-120"/>
+                  <a:srgbClr val="1A2433"/>
+                </a:solidFill>
+                <a:latin typeface="Cambria" pitchFamily="34" charset="0"/>
+                <a:ea typeface="Cambria" pitchFamily="34" charset="-122"/>
+                <a:cs typeface="Cambria" pitchFamily="34" charset="-120"/>
               </a:rPr>
               <a:t>0.820</a:t>
             </a:r>
@@ -4596,7 +4620,7 @@
             <a:r>
               <a:rPr lang="en-US" sz="950" dirty="0">
                 <a:solidFill>
-                  <a:srgbClr val="6B7394"/>
+                  <a:srgbClr val="5C6B7A"/>
                 </a:solidFill>
                 <a:latin typeface="Calibri" pitchFamily="34" charset="0"/>
                 <a:ea typeface="Calibri" pitchFamily="34" charset="-122"/>
@@ -4635,7 +4659,7 @@
             <a:r>
               <a:rPr lang="en-US" sz="1200" dirty="0">
                 <a:solidFill>
-                  <a:srgbClr val="9E2453"/>
+                  <a:srgbClr val="A83349"/>
                 </a:solidFill>
                 <a:latin typeface="Calibri" pitchFamily="34" charset="0"/>
                 <a:ea typeface="Calibri" pitchFamily="34" charset="-122"/>
@@ -4649,7 +4673,7 @@
             <a:r>
               <a:rPr lang="en-US" sz="1200" b="1" dirty="0">
                 <a:solidFill>
-                  <a:srgbClr val="9E2453"/>
+                  <a:srgbClr val="A83349"/>
                 </a:solidFill>
                 <a:latin typeface="Courier New" pitchFamily="34" charset="0"/>
                 <a:ea typeface="Courier New" pitchFamily="34" charset="-122"/>
@@ -4675,7 +4699,7 @@
     <p:bg>
       <p:bgPr>
         <a:solidFill>
-          <a:srgbClr val="FBFAF7"/>
+          <a:srgbClr val="FFFFFF"/>
         </a:solidFill>
       </p:bgPr>
     </p:bg>
@@ -4720,7 +4744,7 @@
             <a:r>
               <a:rPr lang="en-US" sz="900" dirty="0">
                 <a:solidFill>
-                  <a:srgbClr val="9AA0B8"/>
+                  <a:srgbClr val="8DA9C4"/>
                 </a:solidFill>
                 <a:latin typeface="Calibri" pitchFamily="34" charset="0"/>
                 <a:ea typeface="Calibri" pitchFamily="34" charset="-122"/>
@@ -4749,7 +4773,7 @@
           <a:noFill/>
           <a:ln w="19050">
             <a:solidFill>
-              <a:srgbClr val="C23A6B"/>
+              <a:srgbClr val="D1495B"/>
             </a:solidFill>
             <a:prstDash val="solid"/>
           </a:ln>
@@ -4782,7 +4806,7 @@
             <a:r>
               <a:rPr lang="en-US" sz="1200" b="1" spc="200" kern="0" dirty="0">
                 <a:solidFill>
-                  <a:srgbClr val="C23A6B"/>
+                  <a:srgbClr val="D1495B"/>
                 </a:solidFill>
                 <a:latin typeface="Calibri" pitchFamily="34" charset="0"/>
                 <a:ea typeface="Calibri" pitchFamily="34" charset="-122"/>
@@ -4824,11 +4848,11 @@
             <a:r>
               <a:rPr lang="en-US" sz="2700" dirty="0">
                 <a:solidFill>
-                  <a:srgbClr val="1F2A52"/>
-                </a:solidFill>
-                <a:latin typeface="Georgia" pitchFamily="34" charset="0"/>
-                <a:ea typeface="Georgia" pitchFamily="34" charset="-122"/>
-                <a:cs typeface="Georgia" pitchFamily="34" charset="-120"/>
+                  <a:srgbClr val="1A2433"/>
+                </a:solidFill>
+                <a:latin typeface="Cambria" pitchFamily="34" charset="0"/>
+                <a:ea typeface="Cambria" pitchFamily="34" charset="-122"/>
+                <a:cs typeface="Cambria" pitchFamily="34" charset="-120"/>
               </a:rPr>
               <a:t>Calibrated probabilities and positive net benefit.</a:t>
             </a:r>
@@ -4857,7 +4881,7 @@
           </a:solidFill>
           <a:ln w="9525">
             <a:solidFill>
-              <a:srgbClr val="E8E3D8"/>
+              <a:srgbClr val="DCE6F0"/>
             </a:solidFill>
             <a:prstDash val="solid"/>
           </a:ln>
@@ -4890,11 +4914,11 @@
             <a:r>
               <a:rPr lang="en-US" sz="2600" dirty="0">
                 <a:solidFill>
-                  <a:srgbClr val="2F8F83"/>
-                </a:solidFill>
-                <a:latin typeface="Georgia" pitchFamily="34" charset="0"/>
-                <a:ea typeface="Georgia" pitchFamily="34" charset="-122"/>
-                <a:cs typeface="Georgia" pitchFamily="34" charset="-120"/>
+                  <a:srgbClr val="1C7293"/>
+                </a:solidFill>
+                <a:latin typeface="Cambria" pitchFamily="34" charset="0"/>
+                <a:ea typeface="Cambria" pitchFamily="34" charset="-122"/>
+                <a:cs typeface="Cambria" pitchFamily="34" charset="-120"/>
               </a:rPr>
               <a:t>0.136 → 0.124</a:t>
             </a:r>
@@ -4929,7 +4953,7 @@
             <a:r>
               <a:rPr lang="en-US" sz="1200" b="1" dirty="0">
                 <a:solidFill>
-                  <a:srgbClr val="3D4873"/>
+                  <a:srgbClr val="0B2545"/>
                 </a:solidFill>
                 <a:latin typeface="Calibri" pitchFamily="34" charset="0"/>
                 <a:ea typeface="Calibri" pitchFamily="34" charset="-122"/>
@@ -4962,7 +4986,7 @@
           </a:solidFill>
           <a:ln w="9525">
             <a:solidFill>
-              <a:srgbClr val="E8E3D8"/>
+              <a:srgbClr val="DCE6F0"/>
             </a:solidFill>
             <a:prstDash val="solid"/>
           </a:ln>
@@ -4995,11 +5019,11 @@
             <a:r>
               <a:rPr lang="en-US" sz="2600" dirty="0">
                 <a:solidFill>
-                  <a:srgbClr val="2F8F83"/>
-                </a:solidFill>
-                <a:latin typeface="Georgia" pitchFamily="34" charset="0"/>
-                <a:ea typeface="Georgia" pitchFamily="34" charset="-122"/>
-                <a:cs typeface="Georgia" pitchFamily="34" charset="-120"/>
+                  <a:srgbClr val="1C7293"/>
+                </a:solidFill>
+                <a:latin typeface="Cambria" pitchFamily="34" charset="0"/>
+                <a:ea typeface="Cambria" pitchFamily="34" charset="-122"/>
+                <a:cs typeface="Cambria" pitchFamily="34" charset="-120"/>
               </a:rPr>
               <a:t>0.075 → 0.023</a:t>
             </a:r>
@@ -5034,7 +5058,7 @@
             <a:r>
               <a:rPr lang="en-US" sz="1200" b="1" dirty="0">
                 <a:solidFill>
-                  <a:srgbClr val="3D4873"/>
+                  <a:srgbClr val="0B2545"/>
                 </a:solidFill>
                 <a:latin typeface="Calibri" pitchFamily="34" charset="0"/>
                 <a:ea typeface="Calibri" pitchFamily="34" charset="-122"/>
@@ -5067,7 +5091,7 @@
           </a:solidFill>
           <a:ln w="9525">
             <a:solidFill>
-              <a:srgbClr val="E8E3D8"/>
+              <a:srgbClr val="DCE6F0"/>
             </a:solidFill>
             <a:prstDash val="solid"/>
           </a:ln>
@@ -5100,11 +5124,11 @@
             <a:r>
               <a:rPr lang="en-US" sz="2600" dirty="0">
                 <a:solidFill>
-                  <a:srgbClr val="1F2A52"/>
-                </a:solidFill>
-                <a:latin typeface="Georgia" pitchFamily="34" charset="0"/>
-                <a:ea typeface="Georgia" pitchFamily="34" charset="-122"/>
-                <a:cs typeface="Georgia" pitchFamily="34" charset="-120"/>
+                  <a:srgbClr val="1A2433"/>
+                </a:solidFill>
+                <a:latin typeface="Cambria" pitchFamily="34" charset="0"/>
+                <a:ea typeface="Cambria" pitchFamily="34" charset="-122"/>
+                <a:cs typeface="Cambria" pitchFamily="34" charset="-120"/>
               </a:rPr>
               <a:t>0.05–0.80</a:t>
             </a:r>
@@ -5139,7 +5163,7 @@
             <a:r>
               <a:rPr lang="en-US" sz="1200" b="1" dirty="0">
                 <a:solidFill>
-                  <a:srgbClr val="3D4873"/>
+                  <a:srgbClr val="0B2545"/>
                 </a:solidFill>
                 <a:latin typeface="Calibri" pitchFamily="34" charset="0"/>
                 <a:ea typeface="Calibri" pitchFamily="34" charset="-122"/>
@@ -5178,7 +5202,7 @@
             <a:r>
               <a:rPr lang="en-US" sz="1300" dirty="0">
                 <a:solidFill>
-                  <a:srgbClr val="6B7394"/>
+                  <a:srgbClr val="5C6B7A"/>
                 </a:solidFill>
                 <a:latin typeface="Calibri" pitchFamily="34" charset="0"/>
                 <a:ea typeface="Calibri" pitchFamily="34" charset="-122"/>
@@ -5204,7 +5228,7 @@
     <p:bg>
       <p:bgPr>
         <a:solidFill>
-          <a:srgbClr val="FBFAF7"/>
+          <a:srgbClr val="FFFFFF"/>
         </a:solidFill>
       </p:bgPr>
     </p:bg>
@@ -5249,7 +5273,7 @@
             <a:r>
               <a:rPr lang="en-US" sz="900" dirty="0">
                 <a:solidFill>
-                  <a:srgbClr val="9AA0B8"/>
+                  <a:srgbClr val="8DA9C4"/>
                 </a:solidFill>
                 <a:latin typeface="Calibri" pitchFamily="34" charset="0"/>
                 <a:ea typeface="Calibri" pitchFamily="34" charset="-122"/>
@@ -5278,7 +5302,7 @@
           <a:noFill/>
           <a:ln w="19050">
             <a:solidFill>
-              <a:srgbClr val="C23A6B"/>
+              <a:srgbClr val="D1495B"/>
             </a:solidFill>
             <a:prstDash val="solid"/>
           </a:ln>
@@ -5311,7 +5335,7 @@
             <a:r>
               <a:rPr lang="en-US" sz="1200" b="1" spc="200" kern="0" dirty="0">
                 <a:solidFill>
-                  <a:srgbClr val="C23A6B"/>
+                  <a:srgbClr val="D1495B"/>
                 </a:solidFill>
                 <a:latin typeface="Calibri" pitchFamily="34" charset="0"/>
                 <a:ea typeface="Calibri" pitchFamily="34" charset="-122"/>
@@ -5353,11 +5377,11 @@
             <a:r>
               <a:rPr lang="en-US" sz="2700" dirty="0">
                 <a:solidFill>
-                  <a:srgbClr val="1F2A52"/>
-                </a:solidFill>
-                <a:latin typeface="Georgia" pitchFamily="34" charset="0"/>
-                <a:ea typeface="Georgia" pitchFamily="34" charset="-122"/>
-                <a:cs typeface="Georgia" pitchFamily="34" charset="-120"/>
+                  <a:srgbClr val="1A2433"/>
+                </a:solidFill>
+                <a:latin typeface="Cambria" pitchFamily="34" charset="0"/>
+                <a:ea typeface="Cambria" pitchFamily="34" charset="-122"/>
+                <a:cs typeface="Cambria" pitchFamily="34" charset="-120"/>
               </a:rPr>
               <a:t>Where the network looks — qualitatively.</a:t>
             </a:r>
@@ -5415,7 +5439,7 @@
             <a:r>
               <a:rPr lang="en-US" sz="1100" dirty="0">
                 <a:solidFill>
-                  <a:srgbClr val="3D4873"/>
+                  <a:srgbClr val="0B2545"/>
                 </a:solidFill>
                 <a:latin typeface="Calibri" pitchFamily="34" charset="0"/>
                 <a:ea typeface="Calibri" pitchFamily="34" charset="-122"/>
@@ -5477,7 +5501,7 @@
             <a:r>
               <a:rPr lang="en-US" sz="1100" dirty="0">
                 <a:solidFill>
-                  <a:srgbClr val="3D4873"/>
+                  <a:srgbClr val="0B2545"/>
                 </a:solidFill>
                 <a:latin typeface="Calibri" pitchFamily="34" charset="0"/>
                 <a:ea typeface="Calibri" pitchFamily="34" charset="-122"/>
@@ -5539,7 +5563,7 @@
             <a:r>
               <a:rPr lang="en-US" sz="1100" dirty="0">
                 <a:solidFill>
-                  <a:srgbClr val="3D4873"/>
+                  <a:srgbClr val="0B2545"/>
                 </a:solidFill>
                 <a:latin typeface="Calibri" pitchFamily="34" charset="0"/>
                 <a:ea typeface="Calibri" pitchFamily="34" charset="-122"/>
@@ -5601,7 +5625,7 @@
             <a:r>
               <a:rPr lang="en-US" sz="1100" dirty="0">
                 <a:solidFill>
-                  <a:srgbClr val="3D4873"/>
+                  <a:srgbClr val="0B2545"/>
                 </a:solidFill>
                 <a:latin typeface="Calibri" pitchFamily="34" charset="0"/>
                 <a:ea typeface="Calibri" pitchFamily="34" charset="-122"/>
@@ -5627,7 +5651,7 @@
     <p:bg>
       <p:bgPr>
         <a:solidFill>
-          <a:srgbClr val="FBFAF7"/>
+          <a:srgbClr val="FFFFFF"/>
         </a:solidFill>
       </p:bgPr>
     </p:bg>
@@ -5672,7 +5696,7 @@
             <a:r>
               <a:rPr lang="en-US" sz="900" dirty="0">
                 <a:solidFill>
-                  <a:srgbClr val="9AA0B8"/>
+                  <a:srgbClr val="8DA9C4"/>
                 </a:solidFill>
                 <a:latin typeface="Calibri" pitchFamily="34" charset="0"/>
                 <a:ea typeface="Calibri" pitchFamily="34" charset="-122"/>
@@ -5701,7 +5725,7 @@
           <a:noFill/>
           <a:ln w="19050">
             <a:solidFill>
-              <a:srgbClr val="C23A6B"/>
+              <a:srgbClr val="D1495B"/>
             </a:solidFill>
             <a:prstDash val="solid"/>
           </a:ln>
@@ -5734,7 +5758,7 @@
             <a:r>
               <a:rPr lang="en-US" sz="1200" b="1" spc="200" kern="0" dirty="0">
                 <a:solidFill>
-                  <a:srgbClr val="C23A6B"/>
+                  <a:srgbClr val="D1495B"/>
                 </a:solidFill>
                 <a:latin typeface="Calibri" pitchFamily="34" charset="0"/>
                 <a:ea typeface="Calibri" pitchFamily="34" charset="-122"/>
@@ -5776,11 +5800,11 @@
             <a:r>
               <a:rPr lang="en-US" sz="2700" dirty="0">
                 <a:solidFill>
-                  <a:srgbClr val="1F2A52"/>
-                </a:solidFill>
-                <a:latin typeface="Georgia" pitchFamily="34" charset="0"/>
-                <a:ea typeface="Georgia" pitchFamily="34" charset="-122"/>
-                <a:cs typeface="Georgia" pitchFamily="34" charset="-120"/>
+                  <a:srgbClr val="1A2433"/>
+                </a:solidFill>
+                <a:latin typeface="Cambria" pitchFamily="34" charset="0"/>
+                <a:ea typeface="Cambria" pitchFamily="34" charset="-122"/>
+                <a:cs typeface="Cambria" pitchFamily="34" charset="-120"/>
               </a:rPr>
               <a:t>What this study does not claim.</a:t>
             </a:r>
@@ -5809,7 +5833,7 @@
           </a:solidFill>
           <a:ln w="9525">
             <a:solidFill>
-              <a:srgbClr val="E8E3D8"/>
+              <a:srgbClr val="DCE6F0"/>
             </a:solidFill>
             <a:prstDash val="solid"/>
           </a:ln>
@@ -5842,7 +5866,7 @@
             <a:r>
               <a:rPr lang="en-US" sz="1300" b="1" dirty="0">
                 <a:solidFill>
-                  <a:srgbClr val="1F2A52"/>
+                  <a:srgbClr val="1A2433"/>
                 </a:solidFill>
                 <a:latin typeface="Calibri" pitchFamily="34" charset="0"/>
                 <a:ea typeface="Calibri" pitchFamily="34" charset="-122"/>
@@ -5881,7 +5905,7 @@
             <a:r>
               <a:rPr lang="en-US" sz="1050" dirty="0">
                 <a:solidFill>
-                  <a:srgbClr val="6B7394"/>
+                  <a:srgbClr val="5C6B7A"/>
                 </a:solidFill>
                 <a:latin typeface="Calibri" pitchFamily="34" charset="0"/>
                 <a:ea typeface="Calibri" pitchFamily="34" charset="-122"/>
@@ -5914,7 +5938,7 @@
           </a:solidFill>
           <a:ln w="9525">
             <a:solidFill>
-              <a:srgbClr val="E8E3D8"/>
+              <a:srgbClr val="DCE6F0"/>
             </a:solidFill>
             <a:prstDash val="solid"/>
           </a:ln>
@@ -5947,7 +5971,7 @@
             <a:r>
               <a:rPr lang="en-US" sz="1300" b="1" dirty="0">
                 <a:solidFill>
-                  <a:srgbClr val="1F2A52"/>
+                  <a:srgbClr val="1A2433"/>
                 </a:solidFill>
                 <a:latin typeface="Calibri" pitchFamily="34" charset="0"/>
                 <a:ea typeface="Calibri" pitchFamily="34" charset="-122"/>
@@ -5986,7 +6010,7 @@
             <a:r>
               <a:rPr lang="en-US" sz="1050" dirty="0">
                 <a:solidFill>
-                  <a:srgbClr val="6B7394"/>
+                  <a:srgbClr val="5C6B7A"/>
                 </a:solidFill>
                 <a:latin typeface="Calibri" pitchFamily="34" charset="0"/>
                 <a:ea typeface="Calibri" pitchFamily="34" charset="-122"/>
@@ -6019,7 +6043,7 @@
           </a:solidFill>
           <a:ln w="9525">
             <a:solidFill>
-              <a:srgbClr val="E8E3D8"/>
+              <a:srgbClr val="DCE6F0"/>
             </a:solidFill>
             <a:prstDash val="solid"/>
           </a:ln>
@@ -6052,7 +6076,7 @@
             <a:r>
               <a:rPr lang="en-US" sz="1300" b="1" dirty="0">
                 <a:solidFill>
-                  <a:srgbClr val="1F2A52"/>
+                  <a:srgbClr val="1A2433"/>
                 </a:solidFill>
                 <a:latin typeface="Calibri" pitchFamily="34" charset="0"/>
                 <a:ea typeface="Calibri" pitchFamily="34" charset="-122"/>
@@ -6091,7 +6115,7 @@
             <a:r>
               <a:rPr lang="en-US" sz="1050" dirty="0">
                 <a:solidFill>
-                  <a:srgbClr val="6B7394"/>
+                  <a:srgbClr val="5C6B7A"/>
                 </a:solidFill>
                 <a:latin typeface="Calibri" pitchFamily="34" charset="0"/>
                 <a:ea typeface="Calibri" pitchFamily="34" charset="-122"/>
@@ -6124,7 +6148,7 @@
           </a:solidFill>
           <a:ln w="9525">
             <a:solidFill>
-              <a:srgbClr val="E8E3D8"/>
+              <a:srgbClr val="DCE6F0"/>
             </a:solidFill>
             <a:prstDash val="solid"/>
           </a:ln>
@@ -6157,7 +6181,7 @@
             <a:r>
               <a:rPr lang="en-US" sz="1300" b="1" dirty="0">
                 <a:solidFill>
-                  <a:srgbClr val="1F2A52"/>
+                  <a:srgbClr val="1A2433"/>
                 </a:solidFill>
                 <a:latin typeface="Calibri" pitchFamily="34" charset="0"/>
                 <a:ea typeface="Calibri" pitchFamily="34" charset="-122"/>
@@ -6196,7 +6220,7 @@
             <a:r>
               <a:rPr lang="en-US" sz="1050" dirty="0">
                 <a:solidFill>
-                  <a:srgbClr val="6B7394"/>
+                  <a:srgbClr val="5C6B7A"/>
                 </a:solidFill>
                 <a:latin typeface="Calibri" pitchFamily="34" charset="0"/>
                 <a:ea typeface="Calibri" pitchFamily="34" charset="-122"/>
@@ -6235,7 +6259,7 @@
             <a:r>
               <a:rPr lang="en-US" sz="1300" dirty="0">
                 <a:solidFill>
-                  <a:srgbClr val="3D4873"/>
+                  <a:srgbClr val="0B2545"/>
                 </a:solidFill>
                 <a:latin typeface="Calibri" pitchFamily="34" charset="0"/>
                 <a:ea typeface="Calibri" pitchFamily="34" charset="-122"/>
@@ -6261,7 +6285,7 @@
     <p:bg>
       <p:bgPr>
         <a:solidFill>
-          <a:srgbClr val="FBFAF7"/>
+          <a:srgbClr val="FFFFFF"/>
         </a:solidFill>
       </p:bgPr>
     </p:bg>
@@ -6306,7 +6330,7 @@
             <a:r>
               <a:rPr lang="en-US" sz="900" dirty="0">
                 <a:solidFill>
-                  <a:srgbClr val="9AA0B8"/>
+                  <a:srgbClr val="8DA9C4"/>
                 </a:solidFill>
                 <a:latin typeface="Calibri" pitchFamily="34" charset="0"/>
                 <a:ea typeface="Calibri" pitchFamily="34" charset="-122"/>
@@ -6335,7 +6359,7 @@
           <a:noFill/>
           <a:ln w="19050">
             <a:solidFill>
-              <a:srgbClr val="C23A6B"/>
+              <a:srgbClr val="D1495B"/>
             </a:solidFill>
             <a:prstDash val="solid"/>
           </a:ln>
@@ -6368,7 +6392,7 @@
             <a:r>
               <a:rPr lang="en-US" sz="1200" b="1" spc="200" kern="0" dirty="0">
                 <a:solidFill>
-                  <a:srgbClr val="C23A6B"/>
+                  <a:srgbClr val="D1495B"/>
                 </a:solidFill>
                 <a:latin typeface="Calibri" pitchFamily="34" charset="0"/>
                 <a:ea typeface="Calibri" pitchFamily="34" charset="-122"/>
@@ -6410,11 +6434,11 @@
             <a:r>
               <a:rPr lang="en-US" sz="2800" dirty="0">
                 <a:solidFill>
-                  <a:srgbClr val="1F2A52"/>
-                </a:solidFill>
-                <a:latin typeface="Georgia" pitchFamily="34" charset="0"/>
-                <a:ea typeface="Georgia" pitchFamily="34" charset="-122"/>
-                <a:cs typeface="Georgia" pitchFamily="34" charset="-120"/>
+                  <a:srgbClr val="1A2433"/>
+                </a:solidFill>
+                <a:latin typeface="Cambria" pitchFamily="34" charset="0"/>
+                <a:ea typeface="Cambria" pitchFamily="34" charset="-122"/>
+                <a:cs typeface="Cambria" pitchFamily="34" charset="-120"/>
               </a:rPr>
               <a:t>References.</a:t>
             </a:r>
@@ -6443,7 +6467,7 @@
           </a:solidFill>
           <a:ln w="9525">
             <a:solidFill>
-              <a:srgbClr val="E8E3D8"/>
+              <a:srgbClr val="DCE6F0"/>
             </a:solidFill>
             <a:prstDash val="solid"/>
           </a:ln>
@@ -6476,7 +6500,7 @@
             <a:r>
               <a:rPr lang="en-US" sz="1050" dirty="0">
                 <a:solidFill>
-                  <a:srgbClr val="3D4873"/>
+                  <a:srgbClr val="0B2545"/>
                 </a:solidFill>
                 <a:latin typeface="Calibri" pitchFamily="34" charset="0"/>
                 <a:ea typeface="Calibri" pitchFamily="34" charset="-122"/>
@@ -6515,7 +6539,7 @@
             <a:r>
               <a:rPr lang="en-US" sz="1050" dirty="0">
                 <a:solidFill>
-                  <a:srgbClr val="3D4873"/>
+                  <a:srgbClr val="0B2545"/>
                 </a:solidFill>
                 <a:latin typeface="Calibri" pitchFamily="34" charset="0"/>
                 <a:ea typeface="Calibri" pitchFamily="34" charset="-122"/>
@@ -6554,7 +6578,7 @@
             <a:r>
               <a:rPr lang="en-US" sz="1050" dirty="0">
                 <a:solidFill>
-                  <a:srgbClr val="3D4873"/>
+                  <a:srgbClr val="0B2545"/>
                 </a:solidFill>
                 <a:latin typeface="Calibri" pitchFamily="34" charset="0"/>
                 <a:ea typeface="Calibri" pitchFamily="34" charset="-122"/>
@@ -6593,7 +6617,7 @@
             <a:r>
               <a:rPr lang="en-US" sz="1050" dirty="0">
                 <a:solidFill>
-                  <a:srgbClr val="3D4873"/>
+                  <a:srgbClr val="0B2545"/>
                 </a:solidFill>
                 <a:latin typeface="Calibri" pitchFamily="34" charset="0"/>
                 <a:ea typeface="Calibri" pitchFamily="34" charset="-122"/>
@@ -6632,7 +6656,7 @@
             <a:r>
               <a:rPr lang="en-US" sz="1050" dirty="0">
                 <a:solidFill>
-                  <a:srgbClr val="3D4873"/>
+                  <a:srgbClr val="0B2545"/>
                 </a:solidFill>
                 <a:latin typeface="Calibri" pitchFamily="34" charset="0"/>
                 <a:ea typeface="Calibri" pitchFamily="34" charset="-122"/>
@@ -6671,7 +6695,7 @@
             <a:r>
               <a:rPr lang="en-US" sz="1050" dirty="0">
                 <a:solidFill>
-                  <a:srgbClr val="3D4873"/>
+                  <a:srgbClr val="0B2545"/>
                 </a:solidFill>
                 <a:latin typeface="Calibri" pitchFamily="34" charset="0"/>
                 <a:ea typeface="Calibri" pitchFamily="34" charset="-122"/>
@@ -6710,7 +6734,7 @@
             <a:r>
               <a:rPr lang="en-US" sz="1050" dirty="0">
                 <a:solidFill>
-                  <a:srgbClr val="3D4873"/>
+                  <a:srgbClr val="0B2545"/>
                 </a:solidFill>
                 <a:latin typeface="Calibri" pitchFamily="34" charset="0"/>
                 <a:ea typeface="Calibri" pitchFamily="34" charset="-122"/>
@@ -6749,7 +6773,7 @@
             <a:r>
               <a:rPr lang="en-US" sz="1050" dirty="0">
                 <a:solidFill>
-                  <a:srgbClr val="3D4873"/>
+                  <a:srgbClr val="0B2545"/>
                 </a:solidFill>
                 <a:latin typeface="Calibri" pitchFamily="34" charset="0"/>
                 <a:ea typeface="Calibri" pitchFamily="34" charset="-122"/>
@@ -6788,7 +6812,7 @@
             <a:r>
               <a:rPr lang="en-US" sz="1050" dirty="0">
                 <a:solidFill>
-                  <a:srgbClr val="3D4873"/>
+                  <a:srgbClr val="0B2545"/>
                 </a:solidFill>
                 <a:latin typeface="Calibri" pitchFamily="34" charset="0"/>
                 <a:ea typeface="Calibri" pitchFamily="34" charset="-122"/>
@@ -6827,7 +6851,7 @@
             <a:r>
               <a:rPr lang="en-US" sz="1050" dirty="0">
                 <a:solidFill>
-                  <a:srgbClr val="3D4873"/>
+                  <a:srgbClr val="0B2545"/>
                 </a:solidFill>
                 <a:latin typeface="Calibri" pitchFamily="34" charset="0"/>
                 <a:ea typeface="Calibri" pitchFamily="34" charset="-122"/>
@@ -6853,7 +6877,7 @@
     <p:bg>
       <p:bgPr>
         <a:solidFill>
-          <a:srgbClr val="FBFAF7"/>
+          <a:srgbClr val="FFFFFF"/>
         </a:solidFill>
       </p:bgPr>
     </p:bg>
@@ -6898,7 +6922,7 @@
             <a:r>
               <a:rPr lang="en-US" sz="900" dirty="0">
                 <a:solidFill>
-                  <a:srgbClr val="9AA0B8"/>
+                  <a:srgbClr val="8DA9C4"/>
                 </a:solidFill>
                 <a:latin typeface="Calibri" pitchFamily="34" charset="0"/>
                 <a:ea typeface="Calibri" pitchFamily="34" charset="-122"/>
@@ -6910,9 +6934,33 @@
           </a:p>
         </p:txBody>
       </p:sp>
-      <p:sp>
-        <p:nvSpPr>
-          <p:cNvPr id="4" name="Shape 1"/>
+      <p:pic>
+        <p:nvPicPr>
+          <p:cNvPr id="4" name="Image 0" descr="preencoded.png">    </p:cNvPr>
+          <p:cNvPicPr>
+            <a:picLocks noChangeAspect="1"/>
+          </p:cNvPicPr>
+          <p:nvPr/>
+        </p:nvPicPr>
+        <p:blipFill>
+          <a:blip r:embed="rId1"/>
+          <a:stretch>
+            <a:fillRect/>
+          </a:stretch>
+        </p:blipFill>
+        <p:spPr>
+          <a:xfrm>
+            <a:off x="10957255" y="365760"/>
+            <a:ext cx="548640" cy="548640"/>
+          </a:xfrm>
+          <a:prstGeom prst="rect">
+            <a:avLst/>
+          </a:prstGeom>
+        </p:spPr>
+      </p:pic>
+      <p:sp>
+        <p:nvSpPr>
+          <p:cNvPr id="5" name="Shape 1"/>
           <p:cNvSpPr/>
           <p:nvPr/>
         </p:nvSpPr>
@@ -6927,7 +6975,7 @@
           <a:noFill/>
           <a:ln w="19050">
             <a:solidFill>
-              <a:srgbClr val="C23A6B"/>
+              <a:srgbClr val="D1495B"/>
             </a:solidFill>
             <a:prstDash val="solid"/>
           </a:ln>
@@ -6935,7 +6983,7 @@
       </p:sp>
       <p:sp>
         <p:nvSpPr>
-          <p:cNvPr id="5" name="Text 2"/>
+          <p:cNvPr id="6" name="Text 2"/>
           <p:cNvSpPr/>
           <p:nvPr/>
         </p:nvSpPr>
@@ -6960,7 +7008,7 @@
             <a:r>
               <a:rPr lang="en-US" sz="1200" b="1" spc="200" kern="0" dirty="0">
                 <a:solidFill>
-                  <a:srgbClr val="C23A6B"/>
+                  <a:srgbClr val="D1495B"/>
                 </a:solidFill>
                 <a:latin typeface="Calibri" pitchFamily="34" charset="0"/>
                 <a:ea typeface="Calibri" pitchFamily="34" charset="-122"/>
@@ -6974,7 +7022,7 @@
       </p:sp>
       <p:sp>
         <p:nvSpPr>
-          <p:cNvPr id="6" name="Shape 3"/>
+          <p:cNvPr id="7" name="Shape 3"/>
           <p:cNvSpPr/>
           <p:nvPr/>
         </p:nvSpPr>
@@ -6993,7 +7041,7 @@
           </a:solidFill>
           <a:ln w="9525">
             <a:solidFill>
-              <a:srgbClr val="E8E3D8"/>
+              <a:srgbClr val="DCE6F0"/>
             </a:solidFill>
             <a:prstDash val="solid"/>
           </a:ln>
@@ -7001,7 +7049,7 @@
       </p:sp>
       <p:sp>
         <p:nvSpPr>
-          <p:cNvPr id="7" name="Text 4"/>
+          <p:cNvPr id="8" name="Text 4"/>
           <p:cNvSpPr/>
           <p:nvPr/>
         </p:nvSpPr>
@@ -7026,13 +7074,13 @@
             <a:r>
               <a:rPr lang="en-US" sz="2000" dirty="0">
                 <a:solidFill>
-                  <a:srgbClr val="C23A6B">
+                  <a:srgbClr val="D1495B">
                     <a:alpha val="45000"/>
                   </a:srgbClr>
                 </a:solidFill>
-                <a:latin typeface="Georgia" pitchFamily="34" charset="0"/>
-                <a:ea typeface="Georgia" pitchFamily="34" charset="-122"/>
-                <a:cs typeface="Georgia" pitchFamily="34" charset="-120"/>
+                <a:latin typeface="Cambria" pitchFamily="34" charset="0"/>
+                <a:ea typeface="Cambria" pitchFamily="34" charset="-122"/>
+                <a:cs typeface="Cambria" pitchFamily="34" charset="-120"/>
               </a:rPr>
               <a:t>1</a:t>
             </a:r>
@@ -7042,7 +7090,7 @@
       </p:sp>
       <p:sp>
         <p:nvSpPr>
-          <p:cNvPr id="8" name="Text 5"/>
+          <p:cNvPr id="9" name="Text 5"/>
           <p:cNvSpPr/>
           <p:nvPr/>
         </p:nvSpPr>
@@ -7067,7 +7115,7 @@
             <a:r>
               <a:rPr lang="en-US" sz="1200" b="1" dirty="0">
                 <a:solidFill>
-                  <a:srgbClr val="1F2A52"/>
+                  <a:srgbClr val="1A2433"/>
                 </a:solidFill>
                 <a:latin typeface="Calibri" pitchFamily="34" charset="0"/>
                 <a:ea typeface="Calibri" pitchFamily="34" charset="-122"/>
@@ -7081,7 +7129,7 @@
       </p:sp>
       <p:sp>
         <p:nvSpPr>
-          <p:cNvPr id="9" name="Text 6"/>
+          <p:cNvPr id="10" name="Text 6"/>
           <p:cNvSpPr/>
           <p:nvPr/>
         </p:nvSpPr>
@@ -7106,7 +7154,7 @@
             <a:r>
               <a:rPr lang="en-US" sz="1000" dirty="0">
                 <a:solidFill>
-                  <a:srgbClr val="6B7394"/>
+                  <a:srgbClr val="5C6B7A"/>
                 </a:solidFill>
                 <a:latin typeface="Calibri" pitchFamily="34" charset="0"/>
                 <a:ea typeface="Calibri" pitchFamily="34" charset="-122"/>
@@ -7120,7 +7168,7 @@
       </p:sp>
       <p:sp>
         <p:nvSpPr>
-          <p:cNvPr id="10" name="Shape 7"/>
+          <p:cNvPr id="11" name="Shape 7"/>
           <p:cNvSpPr/>
           <p:nvPr/>
         </p:nvSpPr>
@@ -7139,7 +7187,7 @@
           </a:solidFill>
           <a:ln w="9525">
             <a:solidFill>
-              <a:srgbClr val="E8E3D8"/>
+              <a:srgbClr val="DCE6F0"/>
             </a:solidFill>
             <a:prstDash val="solid"/>
           </a:ln>
@@ -7147,7 +7195,7 @@
       </p:sp>
       <p:sp>
         <p:nvSpPr>
-          <p:cNvPr id="11" name="Text 8"/>
+          <p:cNvPr id="12" name="Text 8"/>
           <p:cNvSpPr/>
           <p:nvPr/>
         </p:nvSpPr>
@@ -7172,13 +7220,13 @@
             <a:r>
               <a:rPr lang="en-US" sz="2000" dirty="0">
                 <a:solidFill>
-                  <a:srgbClr val="C23A6B">
+                  <a:srgbClr val="D1495B">
                     <a:alpha val="45000"/>
                   </a:srgbClr>
                 </a:solidFill>
-                <a:latin typeface="Georgia" pitchFamily="34" charset="0"/>
-                <a:ea typeface="Georgia" pitchFamily="34" charset="-122"/>
-                <a:cs typeface="Georgia" pitchFamily="34" charset="-120"/>
+                <a:latin typeface="Cambria" pitchFamily="34" charset="0"/>
+                <a:ea typeface="Cambria" pitchFamily="34" charset="-122"/>
+                <a:cs typeface="Cambria" pitchFamily="34" charset="-120"/>
               </a:rPr>
               <a:t>2</a:t>
             </a:r>
@@ -7188,7 +7236,7 @@
       </p:sp>
       <p:sp>
         <p:nvSpPr>
-          <p:cNvPr id="12" name="Text 9"/>
+          <p:cNvPr id="13" name="Text 9"/>
           <p:cNvSpPr/>
           <p:nvPr/>
         </p:nvSpPr>
@@ -7213,7 +7261,7 @@
             <a:r>
               <a:rPr lang="en-US" sz="1200" b="1" dirty="0">
                 <a:solidFill>
-                  <a:srgbClr val="1F2A52"/>
+                  <a:srgbClr val="1A2433"/>
                 </a:solidFill>
                 <a:latin typeface="Calibri" pitchFamily="34" charset="0"/>
                 <a:ea typeface="Calibri" pitchFamily="34" charset="-122"/>
@@ -7227,7 +7275,7 @@
       </p:sp>
       <p:sp>
         <p:nvSpPr>
-          <p:cNvPr id="13" name="Text 10"/>
+          <p:cNvPr id="14" name="Text 10"/>
           <p:cNvSpPr/>
           <p:nvPr/>
         </p:nvSpPr>
@@ -7252,7 +7300,7 @@
             <a:r>
               <a:rPr lang="en-US" sz="1000" dirty="0">
                 <a:solidFill>
-                  <a:srgbClr val="6B7394"/>
+                  <a:srgbClr val="5C6B7A"/>
                 </a:solidFill>
                 <a:latin typeface="Calibri" pitchFamily="34" charset="0"/>
                 <a:ea typeface="Calibri" pitchFamily="34" charset="-122"/>
@@ -7266,7 +7314,7 @@
       </p:sp>
       <p:sp>
         <p:nvSpPr>
-          <p:cNvPr id="14" name="Shape 11"/>
+          <p:cNvPr id="15" name="Shape 11"/>
           <p:cNvSpPr/>
           <p:nvPr/>
         </p:nvSpPr>
@@ -7285,7 +7333,7 @@
           </a:solidFill>
           <a:ln w="9525">
             <a:solidFill>
-              <a:srgbClr val="E8E3D8"/>
+              <a:srgbClr val="DCE6F0"/>
             </a:solidFill>
             <a:prstDash val="solid"/>
           </a:ln>
@@ -7293,7 +7341,7 @@
       </p:sp>
       <p:sp>
         <p:nvSpPr>
-          <p:cNvPr id="15" name="Text 12"/>
+          <p:cNvPr id="16" name="Text 12"/>
           <p:cNvSpPr/>
           <p:nvPr/>
         </p:nvSpPr>
@@ -7318,13 +7366,13 @@
             <a:r>
               <a:rPr lang="en-US" sz="2000" dirty="0">
                 <a:solidFill>
-                  <a:srgbClr val="C23A6B">
+                  <a:srgbClr val="D1495B">
                     <a:alpha val="45000"/>
                   </a:srgbClr>
                 </a:solidFill>
-                <a:latin typeface="Georgia" pitchFamily="34" charset="0"/>
-                <a:ea typeface="Georgia" pitchFamily="34" charset="-122"/>
-                <a:cs typeface="Georgia" pitchFamily="34" charset="-120"/>
+                <a:latin typeface="Cambria" pitchFamily="34" charset="0"/>
+                <a:ea typeface="Cambria" pitchFamily="34" charset="-122"/>
+                <a:cs typeface="Cambria" pitchFamily="34" charset="-120"/>
               </a:rPr>
               <a:t>3</a:t>
             </a:r>
@@ -7334,7 +7382,7 @@
       </p:sp>
       <p:sp>
         <p:nvSpPr>
-          <p:cNvPr id="16" name="Text 13"/>
+          <p:cNvPr id="17" name="Text 13"/>
           <p:cNvSpPr/>
           <p:nvPr/>
         </p:nvSpPr>
@@ -7359,7 +7407,7 @@
             <a:r>
               <a:rPr lang="en-US" sz="1200" b="1" dirty="0">
                 <a:solidFill>
-                  <a:srgbClr val="1F2A52"/>
+                  <a:srgbClr val="1A2433"/>
                 </a:solidFill>
                 <a:latin typeface="Calibri" pitchFamily="34" charset="0"/>
                 <a:ea typeface="Calibri" pitchFamily="34" charset="-122"/>
@@ -7373,7 +7421,7 @@
       </p:sp>
       <p:sp>
         <p:nvSpPr>
-          <p:cNvPr id="17" name="Text 14"/>
+          <p:cNvPr id="18" name="Text 14"/>
           <p:cNvSpPr/>
           <p:nvPr/>
         </p:nvSpPr>
@@ -7398,7 +7446,7 @@
             <a:r>
               <a:rPr lang="en-US" sz="1000" dirty="0">
                 <a:solidFill>
-                  <a:srgbClr val="6B7394"/>
+                  <a:srgbClr val="5C6B7A"/>
                 </a:solidFill>
                 <a:latin typeface="Calibri" pitchFamily="34" charset="0"/>
                 <a:ea typeface="Calibri" pitchFamily="34" charset="-122"/>
@@ -7412,7 +7460,7 @@
       </p:sp>
       <p:sp>
         <p:nvSpPr>
-          <p:cNvPr id="18" name="Shape 15"/>
+          <p:cNvPr id="19" name="Shape 15"/>
           <p:cNvSpPr/>
           <p:nvPr/>
         </p:nvSpPr>
@@ -7431,7 +7479,7 @@
           </a:solidFill>
           <a:ln w="9525">
             <a:solidFill>
-              <a:srgbClr val="E8E3D8"/>
+              <a:srgbClr val="DCE6F0"/>
             </a:solidFill>
             <a:prstDash val="solid"/>
           </a:ln>
@@ -7439,7 +7487,7 @@
       </p:sp>
       <p:sp>
         <p:nvSpPr>
-          <p:cNvPr id="19" name="Text 16"/>
+          <p:cNvPr id="20" name="Text 16"/>
           <p:cNvSpPr/>
           <p:nvPr/>
         </p:nvSpPr>
@@ -7464,13 +7512,13 @@
             <a:r>
               <a:rPr lang="en-US" sz="2000" dirty="0">
                 <a:solidFill>
-                  <a:srgbClr val="C23A6B">
+                  <a:srgbClr val="D1495B">
                     <a:alpha val="45000"/>
                   </a:srgbClr>
                 </a:solidFill>
-                <a:latin typeface="Georgia" pitchFamily="34" charset="0"/>
-                <a:ea typeface="Georgia" pitchFamily="34" charset="-122"/>
-                <a:cs typeface="Georgia" pitchFamily="34" charset="-120"/>
+                <a:latin typeface="Cambria" pitchFamily="34" charset="0"/>
+                <a:ea typeface="Cambria" pitchFamily="34" charset="-122"/>
+                <a:cs typeface="Cambria" pitchFamily="34" charset="-120"/>
               </a:rPr>
               <a:t>4</a:t>
             </a:r>
@@ -7480,7 +7528,7 @@
       </p:sp>
       <p:sp>
         <p:nvSpPr>
-          <p:cNvPr id="20" name="Text 17"/>
+          <p:cNvPr id="21" name="Text 17"/>
           <p:cNvSpPr/>
           <p:nvPr/>
         </p:nvSpPr>
@@ -7505,7 +7553,7 @@
             <a:r>
               <a:rPr lang="en-US" sz="1200" b="1" dirty="0">
                 <a:solidFill>
-                  <a:srgbClr val="1F2A52"/>
+                  <a:srgbClr val="1A2433"/>
                 </a:solidFill>
                 <a:latin typeface="Calibri" pitchFamily="34" charset="0"/>
                 <a:ea typeface="Calibri" pitchFamily="34" charset="-122"/>
@@ -7519,7 +7567,7 @@
       </p:sp>
       <p:sp>
         <p:nvSpPr>
-          <p:cNvPr id="21" name="Text 18"/>
+          <p:cNvPr id="22" name="Text 18"/>
           <p:cNvSpPr/>
           <p:nvPr/>
         </p:nvSpPr>
@@ -7544,7 +7592,7 @@
             <a:r>
               <a:rPr lang="en-US" sz="1000" dirty="0">
                 <a:solidFill>
-                  <a:srgbClr val="6B7394"/>
+                  <a:srgbClr val="5C6B7A"/>
                 </a:solidFill>
                 <a:latin typeface="Calibri" pitchFamily="34" charset="0"/>
                 <a:ea typeface="Calibri" pitchFamily="34" charset="-122"/>
@@ -7558,7 +7606,7 @@
       </p:sp>
       <p:sp>
         <p:nvSpPr>
-          <p:cNvPr id="22" name="Text 19"/>
+          <p:cNvPr id="23" name="Text 19"/>
           <p:cNvSpPr/>
           <p:nvPr/>
         </p:nvSpPr>
@@ -7583,11 +7631,11 @@
             <a:r>
               <a:rPr lang="en-US" sz="4800" dirty="0">
                 <a:solidFill>
-                  <a:srgbClr val="1F2A52"/>
-                </a:solidFill>
-                <a:latin typeface="Georgia" pitchFamily="34" charset="0"/>
-                <a:ea typeface="Georgia" pitchFamily="34" charset="-122"/>
-                <a:cs typeface="Georgia" pitchFamily="34" charset="-120"/>
+                  <a:srgbClr val="1A2433"/>
+                </a:solidFill>
+                <a:latin typeface="Cambria" pitchFamily="34" charset="0"/>
+                <a:ea typeface="Cambria" pitchFamily="34" charset="-122"/>
+                <a:cs typeface="Cambria" pitchFamily="34" charset="-120"/>
               </a:rPr>
               <a:t>Thank you.</a:t>
             </a:r>
@@ -7597,7 +7645,7 @@
       </p:sp>
       <p:sp>
         <p:nvSpPr>
-          <p:cNvPr id="23" name="Text 20"/>
+          <p:cNvPr id="24" name="Text 20"/>
           <p:cNvSpPr/>
           <p:nvPr/>
         </p:nvSpPr>
@@ -7622,7 +7670,7 @@
             <a:r>
               <a:rPr lang="en-US" sz="1300" dirty="0">
                 <a:solidFill>
-                  <a:srgbClr val="6B7394"/>
+                  <a:srgbClr val="5C6B7A"/>
                 </a:solidFill>
                 <a:latin typeface="Calibri" pitchFamily="34" charset="0"/>
                 <a:ea typeface="Calibri" pitchFamily="34" charset="-122"/>
@@ -7636,12 +7684,12 @@
             <a:r>
               <a:rPr lang="en-US" sz="1300" u="sng" dirty="0">
                 <a:solidFill>
-                  <a:srgbClr val="1F2A52"/>
+                  <a:srgbClr val="1A2433"/>
                 </a:solidFill>
                 <a:latin typeface="Calibri" pitchFamily="34" charset="0"/>
                 <a:ea typeface="Calibri" pitchFamily="34" charset="-122"/>
                 <a:cs typeface="Calibri" pitchFamily="34" charset="-120"/>
-                <a:hlinkClick r:id="rId1" invalidUrl="" action="" tgtFrame="" tooltip="" history="1" highlightClick="0" endSnd="0">
+                <a:hlinkClick r:id="rId2" invalidUrl="" action="" tgtFrame="" tooltip="" history="1" highlightClick="0" endSnd="0">
                   <a:extLst>
                     <a:ext uri="{A12FA001-AC4F-418D-AE19-62706E023703}">
                       <ahyp:hlinkClr xmlns:ahyp="http://schemas.microsoft.com/office/drawing/2018/hyperlinkcolor" val="tx"/>
@@ -7657,7 +7705,7 @@
       </p:sp>
       <p:sp>
         <p:nvSpPr>
-          <p:cNvPr id="24" name="Shape 21"/>
+          <p:cNvPr id="25" name="Shape 21"/>
           <p:cNvSpPr/>
           <p:nvPr/>
         </p:nvSpPr>
@@ -7676,7 +7724,7 @@
           </a:solidFill>
           <a:ln w="9525">
             <a:solidFill>
-              <a:srgbClr val="E8E3D8"/>
+              <a:srgbClr val="DCE6F0"/>
             </a:solidFill>
             <a:prstDash val="solid"/>
           </a:ln>
@@ -7684,7 +7732,7 @@
       </p:sp>
       <p:sp>
         <p:nvSpPr>
-          <p:cNvPr id="25" name="Text 22"/>
+          <p:cNvPr id="26" name="Text 22"/>
           <p:cNvSpPr/>
           <p:nvPr/>
         </p:nvSpPr>
@@ -7709,7 +7757,7 @@
             <a:r>
               <a:rPr lang="en-US" sz="900" b="1" spc="100" kern="0" dirty="0">
                 <a:solidFill>
-                  <a:srgbClr val="C23A6B"/>
+                  <a:srgbClr val="D1495B"/>
                 </a:solidFill>
                 <a:latin typeface="Calibri" pitchFamily="34" charset="0"/>
                 <a:ea typeface="Calibri" pitchFamily="34" charset="-122"/>
@@ -7723,14 +7771,14 @@
       </p:sp>
       <p:pic>
         <p:nvPicPr>
-          <p:cNvPr id="26" name="Image 0" descr="preencoded.png">    </p:cNvPr>
+          <p:cNvPr id="27" name="Image 1" descr="preencoded.png">    </p:cNvPr>
           <p:cNvPicPr>
             <a:picLocks noChangeAspect="1"/>
           </p:cNvPicPr>
           <p:nvPr/>
         </p:nvPicPr>
         <p:blipFill>
-          <a:blip r:embed="rId2"/>
+          <a:blip r:embed="rId3"/>
           <a:stretch>
             <a:fillRect/>
           </a:stretch>
@@ -7747,7 +7795,7 @@
       </p:pic>
       <p:sp>
         <p:nvSpPr>
-          <p:cNvPr id="27" name="Text 23"/>
+          <p:cNvPr id="28" name="Text 23"/>
           <p:cNvSpPr/>
           <p:nvPr/>
         </p:nvSpPr>
@@ -7772,7 +7820,7 @@
             <a:r>
               <a:rPr lang="en-US" sz="850" dirty="0">
                 <a:solidFill>
-                  <a:srgbClr val="6B7394"/>
+                  <a:srgbClr val="5C6B7A"/>
                 </a:solidFill>
                 <a:latin typeface="Calibri" pitchFamily="34" charset="0"/>
                 <a:ea typeface="Calibri" pitchFamily="34" charset="-122"/>
@@ -7786,7 +7834,7 @@
       </p:sp>
       <p:sp>
         <p:nvSpPr>
-          <p:cNvPr id="28" name="Text 24"/>
+          <p:cNvPr id="29" name="Text 24"/>
           <p:cNvSpPr/>
           <p:nvPr/>
         </p:nvSpPr>
@@ -7811,7 +7859,7 @@
             <a:r>
               <a:rPr lang="en-US" sz="700" dirty="0">
                 <a:solidFill>
-                  <a:srgbClr val="3D4873"/>
+                  <a:srgbClr val="0B2545"/>
                 </a:solidFill>
                 <a:latin typeface="Courier New" pitchFamily="34" charset="0"/>
                 <a:ea typeface="Courier New" pitchFamily="34" charset="-122"/>
@@ -7837,7 +7885,7 @@
     <p:bg>
       <p:bgPr>
         <a:solidFill>
-          <a:srgbClr val="FBFAF7"/>
+          <a:srgbClr val="FFFFFF"/>
         </a:solidFill>
       </p:bgPr>
     </p:bg>
@@ -7882,7 +7930,7 @@
             <a:r>
               <a:rPr lang="en-US" sz="900" dirty="0">
                 <a:solidFill>
-                  <a:srgbClr val="9AA0B8"/>
+                  <a:srgbClr val="8DA9C4"/>
                 </a:solidFill>
                 <a:latin typeface="Calibri" pitchFamily="34" charset="0"/>
                 <a:ea typeface="Calibri" pitchFamily="34" charset="-122"/>
@@ -7921,13 +7969,13 @@
             <a:r>
               <a:rPr lang="en-US" sz="42000" i="1" dirty="0">
                 <a:solidFill>
-                  <a:srgbClr val="4B5BD6">
+                  <a:srgbClr val="3E7CB1">
                     <a:alpha val="5000"/>
                   </a:srgbClr>
                 </a:solidFill>
-                <a:latin typeface="Georgia" pitchFamily="34" charset="0"/>
-                <a:ea typeface="Georgia" pitchFamily="34" charset="-122"/>
-                <a:cs typeface="Georgia" pitchFamily="34" charset="-120"/>
+                <a:latin typeface="Cambria" pitchFamily="34" charset="0"/>
+                <a:ea typeface="Cambria" pitchFamily="34" charset="-122"/>
+                <a:cs typeface="Cambria" pitchFamily="34" charset="-120"/>
               </a:rPr>
               <a:t>?</a:t>
             </a:r>
@@ -7952,7 +8000,7 @@
           <a:noFill/>
           <a:ln w="19050">
             <a:solidFill>
-              <a:srgbClr val="C23A6B"/>
+              <a:srgbClr val="D1495B"/>
             </a:solidFill>
             <a:prstDash val="solid"/>
           </a:ln>
@@ -7985,7 +8033,7 @@
             <a:r>
               <a:rPr lang="en-US" sz="1200" b="1" spc="200" kern="0" dirty="0">
                 <a:solidFill>
-                  <a:srgbClr val="C23A6B"/>
+                  <a:srgbClr val="D1495B"/>
                 </a:solidFill>
                 <a:latin typeface="Calibri" pitchFamily="34" charset="0"/>
                 <a:ea typeface="Calibri" pitchFamily="34" charset="-122"/>
@@ -8024,11 +8072,11 @@
             <a:r>
               <a:rPr lang="en-US" sz="5600" dirty="0">
                 <a:solidFill>
-                  <a:srgbClr val="1F2A52"/>
-                </a:solidFill>
-                <a:latin typeface="Georgia" pitchFamily="34" charset="0"/>
-                <a:ea typeface="Georgia" pitchFamily="34" charset="-122"/>
-                <a:cs typeface="Georgia" pitchFamily="34" charset="-120"/>
+                  <a:srgbClr val="1A2433"/>
+                </a:solidFill>
+                <a:latin typeface="Cambria" pitchFamily="34" charset="0"/>
+                <a:ea typeface="Cambria" pitchFamily="34" charset="-122"/>
+                <a:cs typeface="Cambria" pitchFamily="34" charset="-120"/>
               </a:rPr>
               <a:t>Any </a:t>
             </a:r>
@@ -8038,11 +8086,11 @@
             <a:r>
               <a:rPr lang="en-US" sz="5600" i="1" dirty="0">
                 <a:solidFill>
-                  <a:srgbClr val="C23A6B"/>
-                </a:solidFill>
-                <a:latin typeface="Georgia" pitchFamily="34" charset="0"/>
-                <a:ea typeface="Georgia" pitchFamily="34" charset="-122"/>
-                <a:cs typeface="Georgia" pitchFamily="34" charset="-120"/>
+                  <a:srgbClr val="D1495B"/>
+                </a:solidFill>
+                <a:latin typeface="Cambria" pitchFamily="34" charset="0"/>
+                <a:ea typeface="Cambria" pitchFamily="34" charset="-122"/>
+                <a:cs typeface="Cambria" pitchFamily="34" charset="-120"/>
               </a:rPr>
               <a:t>questions</a:t>
             </a:r>
@@ -8052,11 +8100,11 @@
             <a:r>
               <a:rPr lang="en-US" sz="5600" dirty="0">
                 <a:solidFill>
-                  <a:srgbClr val="1F2A52"/>
-                </a:solidFill>
-                <a:latin typeface="Georgia" pitchFamily="34" charset="0"/>
-                <a:ea typeface="Georgia" pitchFamily="34" charset="-122"/>
-                <a:cs typeface="Georgia" pitchFamily="34" charset="-120"/>
+                  <a:srgbClr val="1A2433"/>
+                </a:solidFill>
+                <a:latin typeface="Cambria" pitchFamily="34" charset="0"/>
+                <a:ea typeface="Cambria" pitchFamily="34" charset="-122"/>
+                <a:cs typeface="Cambria" pitchFamily="34" charset="-120"/>
               </a:rPr>
               <a:t>?</a:t>
             </a:r>
@@ -8094,7 +8142,7 @@
             <a:r>
               <a:rPr lang="en-US" sz="1500" dirty="0">
                 <a:solidFill>
-                  <a:srgbClr val="6B7394"/>
+                  <a:srgbClr val="5C6B7A"/>
                 </a:solidFill>
                 <a:latin typeface="Calibri" pitchFamily="34" charset="0"/>
                 <a:ea typeface="Calibri" pitchFamily="34" charset="-122"/>
@@ -8127,7 +8175,7 @@
           </a:solidFill>
           <a:ln w="9525">
             <a:solidFill>
-              <a:srgbClr val="E8E3D8"/>
+              <a:srgbClr val="DCE6F0"/>
             </a:solidFill>
             <a:prstDash val="solid"/>
           </a:ln>
@@ -8160,7 +8208,7 @@
             <a:r>
               <a:rPr lang="en-US" sz="1000" b="1" spc="100" kern="0" dirty="0">
                 <a:solidFill>
-                  <a:srgbClr val="4B5BD6"/>
+                  <a:srgbClr val="3E7CB1"/>
                 </a:solidFill>
                 <a:latin typeface="Calibri" pitchFamily="34" charset="0"/>
                 <a:ea typeface="Calibri" pitchFamily="34" charset="-122"/>
@@ -8199,7 +8247,7 @@
             <a:r>
               <a:rPr lang="en-US" sz="1000" dirty="0">
                 <a:solidFill>
-                  <a:srgbClr val="3D4873"/>
+                  <a:srgbClr val="0B2545"/>
                 </a:solidFill>
                 <a:latin typeface="Courier New" pitchFamily="34" charset="0"/>
                 <a:ea typeface="Courier New" pitchFamily="34" charset="-122"/>
@@ -8232,7 +8280,7 @@
           </a:solidFill>
           <a:ln w="9525">
             <a:solidFill>
-              <a:srgbClr val="E8E3D8"/>
+              <a:srgbClr val="DCE6F0"/>
             </a:solidFill>
             <a:prstDash val="solid"/>
           </a:ln>
@@ -8265,7 +8313,7 @@
             <a:r>
               <a:rPr lang="en-US" sz="1000" b="1" spc="100" kern="0" dirty="0">
                 <a:solidFill>
-                  <a:srgbClr val="4B5BD6"/>
+                  <a:srgbClr val="3E7CB1"/>
                 </a:solidFill>
                 <a:latin typeface="Calibri" pitchFamily="34" charset="0"/>
                 <a:ea typeface="Calibri" pitchFamily="34" charset="-122"/>
@@ -8304,7 +8352,7 @@
             <a:r>
               <a:rPr lang="en-US" sz="1000" dirty="0">
                 <a:solidFill>
-                  <a:srgbClr val="3D4873"/>
+                  <a:srgbClr val="0B2545"/>
                 </a:solidFill>
                 <a:latin typeface="Courier New" pitchFamily="34" charset="0"/>
                 <a:ea typeface="Courier New" pitchFamily="34" charset="-122"/>
@@ -8337,7 +8385,7 @@
           </a:solidFill>
           <a:ln w="9525">
             <a:solidFill>
-              <a:srgbClr val="E8E3D8"/>
+              <a:srgbClr val="DCE6F0"/>
             </a:solidFill>
             <a:prstDash val="solid"/>
           </a:ln>
@@ -8370,7 +8418,7 @@
             <a:r>
               <a:rPr lang="en-US" sz="1000" b="1" spc="100" kern="0" dirty="0">
                 <a:solidFill>
-                  <a:srgbClr val="4B5BD6"/>
+                  <a:srgbClr val="3E7CB1"/>
                 </a:solidFill>
                 <a:latin typeface="Calibri" pitchFamily="34" charset="0"/>
                 <a:ea typeface="Calibri" pitchFamily="34" charset="-122"/>
@@ -8409,7 +8457,7 @@
             <a:r>
               <a:rPr lang="en-US" sz="1000" dirty="0">
                 <a:solidFill>
-                  <a:srgbClr val="3D4873"/>
+                  <a:srgbClr val="0B2545"/>
                 </a:solidFill>
                 <a:latin typeface="Courier New" pitchFamily="34" charset="0"/>
                 <a:ea typeface="Courier New" pitchFamily="34" charset="-122"/>
@@ -8435,7 +8483,7 @@
     <p:bg>
       <p:bgPr>
         <a:solidFill>
-          <a:srgbClr val="FBFAF7"/>
+          <a:srgbClr val="FFFFFF"/>
         </a:solidFill>
       </p:bgPr>
     </p:bg>
@@ -8480,7 +8528,7 @@
             <a:r>
               <a:rPr lang="en-US" sz="900" dirty="0">
                 <a:solidFill>
-                  <a:srgbClr val="9AA0B8"/>
+                  <a:srgbClr val="8DA9C4"/>
                 </a:solidFill>
                 <a:latin typeface="Calibri" pitchFamily="34" charset="0"/>
                 <a:ea typeface="Calibri" pitchFamily="34" charset="-122"/>
@@ -8509,7 +8557,7 @@
           <a:noFill/>
           <a:ln w="19050">
             <a:solidFill>
-              <a:srgbClr val="C23A6B"/>
+              <a:srgbClr val="D1495B"/>
             </a:solidFill>
             <a:prstDash val="solid"/>
           </a:ln>
@@ -8542,7 +8590,7 @@
             <a:r>
               <a:rPr lang="en-US" sz="1200" b="1" spc="200" kern="0" dirty="0">
                 <a:solidFill>
-                  <a:srgbClr val="C23A6B"/>
+                  <a:srgbClr val="D1495B"/>
                 </a:solidFill>
                 <a:latin typeface="Calibri" pitchFamily="34" charset="0"/>
                 <a:ea typeface="Calibri" pitchFamily="34" charset="-122"/>
@@ -8584,11 +8632,11 @@
             <a:r>
               <a:rPr lang="en-US" sz="2800" dirty="0">
                 <a:solidFill>
-                  <a:srgbClr val="1F2A52"/>
-                </a:solidFill>
-                <a:latin typeface="Georgia" pitchFamily="34" charset="0"/>
-                <a:ea typeface="Georgia" pitchFamily="34" charset="-122"/>
-                <a:cs typeface="Georgia" pitchFamily="34" charset="-120"/>
+                  <a:srgbClr val="1A2433"/>
+                </a:solidFill>
+                <a:latin typeface="Cambria" pitchFamily="34" charset="0"/>
+                <a:ea typeface="Cambria" pitchFamily="34" charset="-122"/>
+                <a:cs typeface="Cambria" pitchFamily="34" charset="-120"/>
               </a:rPr>
               <a:t>What this talk covers.</a:t>
             </a:r>
@@ -8617,7 +8665,7 @@
           </a:solidFill>
           <a:ln w="9525">
             <a:solidFill>
-              <a:srgbClr val="E8E3D8"/>
+              <a:srgbClr val="DCE6F0"/>
             </a:solidFill>
             <a:prstDash val="solid"/>
           </a:ln>
@@ -8650,7 +8698,7 @@
             <a:r>
               <a:rPr lang="en-US" sz="1300" b="1" dirty="0">
                 <a:solidFill>
-                  <a:srgbClr val="4B5BD6"/>
+                  <a:srgbClr val="3E7CB1"/>
                 </a:solidFill>
                 <a:latin typeface="Courier New" pitchFamily="34" charset="0"/>
                 <a:ea typeface="Courier New" pitchFamily="34" charset="-122"/>
@@ -8689,7 +8737,7 @@
             <a:r>
               <a:rPr lang="en-US" sz="1400" b="1" dirty="0">
                 <a:solidFill>
-                  <a:srgbClr val="1F2A52"/>
+                  <a:srgbClr val="1A2433"/>
                 </a:solidFill>
                 <a:latin typeface="Calibri" pitchFamily="34" charset="0"/>
                 <a:ea typeface="Calibri" pitchFamily="34" charset="-122"/>
@@ -8728,7 +8776,7 @@
             <a:r>
               <a:rPr lang="en-US" sz="1050" dirty="0">
                 <a:solidFill>
-                  <a:srgbClr val="6B7394"/>
+                  <a:srgbClr val="5C6B7A"/>
                 </a:solidFill>
                 <a:latin typeface="Calibri" pitchFamily="34" charset="0"/>
                 <a:ea typeface="Calibri" pitchFamily="34" charset="-122"/>
@@ -8761,7 +8809,7 @@
           </a:solidFill>
           <a:ln w="9525">
             <a:solidFill>
-              <a:srgbClr val="E8E3D8"/>
+              <a:srgbClr val="DCE6F0"/>
             </a:solidFill>
             <a:prstDash val="solid"/>
           </a:ln>
@@ -8794,7 +8842,7 @@
             <a:r>
               <a:rPr lang="en-US" sz="1300" b="1" dirty="0">
                 <a:solidFill>
-                  <a:srgbClr val="4B5BD6"/>
+                  <a:srgbClr val="3E7CB1"/>
                 </a:solidFill>
                 <a:latin typeface="Courier New" pitchFamily="34" charset="0"/>
                 <a:ea typeface="Courier New" pitchFamily="34" charset="-122"/>
@@ -8833,7 +8881,7 @@
             <a:r>
               <a:rPr lang="en-US" sz="1400" b="1" dirty="0">
                 <a:solidFill>
-                  <a:srgbClr val="1F2A52"/>
+                  <a:srgbClr val="1A2433"/>
                 </a:solidFill>
                 <a:latin typeface="Calibri" pitchFamily="34" charset="0"/>
                 <a:ea typeface="Calibri" pitchFamily="34" charset="-122"/>
@@ -8872,7 +8920,7 @@
             <a:r>
               <a:rPr lang="en-US" sz="1050" dirty="0">
                 <a:solidFill>
-                  <a:srgbClr val="6B7394"/>
+                  <a:srgbClr val="5C6B7A"/>
                 </a:solidFill>
                 <a:latin typeface="Calibri" pitchFamily="34" charset="0"/>
                 <a:ea typeface="Calibri" pitchFamily="34" charset="-122"/>
@@ -8905,7 +8953,7 @@
           </a:solidFill>
           <a:ln w="9525">
             <a:solidFill>
-              <a:srgbClr val="E8E3D8"/>
+              <a:srgbClr val="DCE6F0"/>
             </a:solidFill>
             <a:prstDash val="solid"/>
           </a:ln>
@@ -8938,7 +8986,7 @@
             <a:r>
               <a:rPr lang="en-US" sz="1300" b="1" dirty="0">
                 <a:solidFill>
-                  <a:srgbClr val="4B5BD6"/>
+                  <a:srgbClr val="3E7CB1"/>
                 </a:solidFill>
                 <a:latin typeface="Courier New" pitchFamily="34" charset="0"/>
                 <a:ea typeface="Courier New" pitchFamily="34" charset="-122"/>
@@ -8977,7 +9025,7 @@
             <a:r>
               <a:rPr lang="en-US" sz="1400" b="1" dirty="0">
                 <a:solidFill>
-                  <a:srgbClr val="1F2A52"/>
+                  <a:srgbClr val="1A2433"/>
                 </a:solidFill>
                 <a:latin typeface="Calibri" pitchFamily="34" charset="0"/>
                 <a:ea typeface="Calibri" pitchFamily="34" charset="-122"/>
@@ -9016,7 +9064,7 @@
             <a:r>
               <a:rPr lang="en-US" sz="1050" dirty="0">
                 <a:solidFill>
-                  <a:srgbClr val="6B7394"/>
+                  <a:srgbClr val="5C6B7A"/>
                 </a:solidFill>
                 <a:latin typeface="Calibri" pitchFamily="34" charset="0"/>
                 <a:ea typeface="Calibri" pitchFamily="34" charset="-122"/>
@@ -9049,7 +9097,7 @@
           </a:solidFill>
           <a:ln w="9525">
             <a:solidFill>
-              <a:srgbClr val="E8E3D8"/>
+              <a:srgbClr val="DCE6F0"/>
             </a:solidFill>
             <a:prstDash val="solid"/>
           </a:ln>
@@ -9082,7 +9130,7 @@
             <a:r>
               <a:rPr lang="en-US" sz="1300" b="1" dirty="0">
                 <a:solidFill>
-                  <a:srgbClr val="4B5BD6"/>
+                  <a:srgbClr val="3E7CB1"/>
                 </a:solidFill>
                 <a:latin typeface="Courier New" pitchFamily="34" charset="0"/>
                 <a:ea typeface="Courier New" pitchFamily="34" charset="-122"/>
@@ -9121,7 +9169,7 @@
             <a:r>
               <a:rPr lang="en-US" sz="1400" b="1" dirty="0">
                 <a:solidFill>
-                  <a:srgbClr val="1F2A52"/>
+                  <a:srgbClr val="1A2433"/>
                 </a:solidFill>
                 <a:latin typeface="Calibri" pitchFamily="34" charset="0"/>
                 <a:ea typeface="Calibri" pitchFamily="34" charset="-122"/>
@@ -9160,7 +9208,7 @@
             <a:r>
               <a:rPr lang="en-US" sz="1050" dirty="0">
                 <a:solidFill>
-                  <a:srgbClr val="6B7394"/>
+                  <a:srgbClr val="5C6B7A"/>
                 </a:solidFill>
                 <a:latin typeface="Calibri" pitchFamily="34" charset="0"/>
                 <a:ea typeface="Calibri" pitchFamily="34" charset="-122"/>
@@ -9193,7 +9241,7 @@
           </a:solidFill>
           <a:ln w="9525">
             <a:solidFill>
-              <a:srgbClr val="E8E3D8"/>
+              <a:srgbClr val="DCE6F0"/>
             </a:solidFill>
             <a:prstDash val="solid"/>
           </a:ln>
@@ -9226,7 +9274,7 @@
             <a:r>
               <a:rPr lang="en-US" sz="1300" b="1" dirty="0">
                 <a:solidFill>
-                  <a:srgbClr val="4B5BD6"/>
+                  <a:srgbClr val="3E7CB1"/>
                 </a:solidFill>
                 <a:latin typeface="Courier New" pitchFamily="34" charset="0"/>
                 <a:ea typeface="Courier New" pitchFamily="34" charset="-122"/>
@@ -9265,7 +9313,7 @@
             <a:r>
               <a:rPr lang="en-US" sz="1400" b="1" dirty="0">
                 <a:solidFill>
-                  <a:srgbClr val="1F2A52"/>
+                  <a:srgbClr val="1A2433"/>
                 </a:solidFill>
                 <a:latin typeface="Calibri" pitchFamily="34" charset="0"/>
                 <a:ea typeface="Calibri" pitchFamily="34" charset="-122"/>
@@ -9304,7 +9352,7 @@
             <a:r>
               <a:rPr lang="en-US" sz="1050" dirty="0">
                 <a:solidFill>
-                  <a:srgbClr val="6B7394"/>
+                  <a:srgbClr val="5C6B7A"/>
                 </a:solidFill>
                 <a:latin typeface="Calibri" pitchFamily="34" charset="0"/>
                 <a:ea typeface="Calibri" pitchFamily="34" charset="-122"/>
@@ -9337,7 +9385,7 @@
           </a:solidFill>
           <a:ln w="9525">
             <a:solidFill>
-              <a:srgbClr val="E8E3D8"/>
+              <a:srgbClr val="DCE6F0"/>
             </a:solidFill>
             <a:prstDash val="solid"/>
           </a:ln>
@@ -9370,7 +9418,7 @@
             <a:r>
               <a:rPr lang="en-US" sz="1300" b="1" dirty="0">
                 <a:solidFill>
-                  <a:srgbClr val="4B5BD6"/>
+                  <a:srgbClr val="3E7CB1"/>
                 </a:solidFill>
                 <a:latin typeface="Courier New" pitchFamily="34" charset="0"/>
                 <a:ea typeface="Courier New" pitchFamily="34" charset="-122"/>
@@ -9409,7 +9457,7 @@
             <a:r>
               <a:rPr lang="en-US" sz="1400" b="1" dirty="0">
                 <a:solidFill>
-                  <a:srgbClr val="1F2A52"/>
+                  <a:srgbClr val="1A2433"/>
                 </a:solidFill>
                 <a:latin typeface="Calibri" pitchFamily="34" charset="0"/>
                 <a:ea typeface="Calibri" pitchFamily="34" charset="-122"/>
@@ -9448,7 +9496,7 @@
             <a:r>
               <a:rPr lang="en-US" sz="1050" dirty="0">
                 <a:solidFill>
-                  <a:srgbClr val="6B7394"/>
+                  <a:srgbClr val="5C6B7A"/>
                 </a:solidFill>
                 <a:latin typeface="Calibri" pitchFamily="34" charset="0"/>
                 <a:ea typeface="Calibri" pitchFamily="34" charset="-122"/>
@@ -9474,7 +9522,7 @@
     <p:bg>
       <p:bgPr>
         <a:solidFill>
-          <a:srgbClr val="FBFAF7"/>
+          <a:srgbClr val="FFFFFF"/>
         </a:solidFill>
       </p:bgPr>
     </p:bg>
@@ -9519,7 +9567,7 @@
             <a:r>
               <a:rPr lang="en-US" sz="900" dirty="0">
                 <a:solidFill>
-                  <a:srgbClr val="9AA0B8"/>
+                  <a:srgbClr val="8DA9C4"/>
                 </a:solidFill>
                 <a:latin typeface="Calibri" pitchFamily="34" charset="0"/>
                 <a:ea typeface="Calibri" pitchFamily="34" charset="-122"/>
@@ -9548,7 +9596,7 @@
           <a:noFill/>
           <a:ln w="19050">
             <a:solidFill>
-              <a:srgbClr val="C23A6B"/>
+              <a:srgbClr val="D1495B"/>
             </a:solidFill>
             <a:prstDash val="solid"/>
           </a:ln>
@@ -9581,7 +9629,7 @@
             <a:r>
               <a:rPr lang="en-US" sz="1200" b="1" spc="200" kern="0" dirty="0">
                 <a:solidFill>
-                  <a:srgbClr val="C23A6B"/>
+                  <a:srgbClr val="D1495B"/>
                 </a:solidFill>
                 <a:latin typeface="Calibri" pitchFamily="34" charset="0"/>
                 <a:ea typeface="Calibri" pitchFamily="34" charset="-122"/>
@@ -9623,11 +9671,11 @@
             <a:r>
               <a:rPr lang="en-US" sz="2700" dirty="0">
                 <a:solidFill>
-                  <a:srgbClr val="1F2A52"/>
-                </a:solidFill>
-                <a:latin typeface="Georgia" pitchFamily="34" charset="0"/>
-                <a:ea typeface="Georgia" pitchFamily="34" charset="-122"/>
-                <a:cs typeface="Georgia" pitchFamily="34" charset="-120"/>
+                  <a:srgbClr val="1A2433"/>
+                </a:solidFill>
+                <a:latin typeface="Cambria" pitchFamily="34" charset="0"/>
+                <a:ea typeface="Cambria" pitchFamily="34" charset="-122"/>
+                <a:cs typeface="Cambria" pitchFamily="34" charset="-120"/>
               </a:rPr>
               <a:t>2.43 million women were diagnosed with breast cancer in 2024.</a:t>
             </a:r>
@@ -9665,7 +9713,7 @@
             <a:r>
               <a:rPr lang="en-US" sz="1400" dirty="0">
                 <a:solidFill>
-                  <a:srgbClr val="6B7394"/>
+                  <a:srgbClr val="5C6B7A"/>
                 </a:solidFill>
                 <a:latin typeface="Calibri" pitchFamily="34" charset="0"/>
                 <a:ea typeface="Calibri" pitchFamily="34" charset="-122"/>
@@ -9707,7 +9755,7 @@
     <p:bg>
       <p:bgPr>
         <a:solidFill>
-          <a:srgbClr val="FBFAF7"/>
+          <a:srgbClr val="FFFFFF"/>
         </a:solidFill>
       </p:bgPr>
     </p:bg>
@@ -9752,7 +9800,7 @@
             <a:r>
               <a:rPr lang="en-US" sz="900" dirty="0">
                 <a:solidFill>
-                  <a:srgbClr val="9AA0B8"/>
+                  <a:srgbClr val="8DA9C4"/>
                 </a:solidFill>
                 <a:latin typeface="Calibri" pitchFamily="34" charset="0"/>
                 <a:ea typeface="Calibri" pitchFamily="34" charset="-122"/>
@@ -9781,7 +9829,7 @@
           <a:noFill/>
           <a:ln w="19050">
             <a:solidFill>
-              <a:srgbClr val="C23A6B"/>
+              <a:srgbClr val="D1495B"/>
             </a:solidFill>
             <a:prstDash val="solid"/>
           </a:ln>
@@ -9814,7 +9862,7 @@
             <a:r>
               <a:rPr lang="en-US" sz="1200" b="1" spc="200" kern="0" dirty="0">
                 <a:solidFill>
-                  <a:srgbClr val="C23A6B"/>
+                  <a:srgbClr val="D1495B"/>
                 </a:solidFill>
                 <a:latin typeface="Calibri" pitchFamily="34" charset="0"/>
                 <a:ea typeface="Calibri" pitchFamily="34" charset="-122"/>
@@ -9856,11 +9904,11 @@
             <a:r>
               <a:rPr lang="en-US" sz="2600" dirty="0">
                 <a:solidFill>
-                  <a:srgbClr val="1F2A52"/>
-                </a:solidFill>
-                <a:latin typeface="Georgia" pitchFamily="34" charset="0"/>
-                <a:ea typeface="Georgia" pitchFamily="34" charset="-122"/>
-                <a:cs typeface="Georgia" pitchFamily="34" charset="-120"/>
+                  <a:srgbClr val="1A2433"/>
+                </a:solidFill>
+                <a:latin typeface="Cambria" pitchFamily="34" charset="0"/>
+                <a:ea typeface="Cambria" pitchFamily="34" charset="-122"/>
+                <a:cs typeface="Cambria" pitchFamily="34" charset="-120"/>
               </a:rPr>
               <a:t>Same patient on both sides of the split → inflated scores.</a:t>
             </a:r>
@@ -9885,11 +9933,11 @@
             </a:avLst>
           </a:prstGeom>
           <a:solidFill>
-            <a:srgbClr val="FBE9EF"/>
+            <a:srgbClr val="FBE8EA"/>
           </a:solidFill>
           <a:ln w="9525">
             <a:solidFill>
-              <a:srgbClr val="C23A6B"/>
+              <a:srgbClr val="D1495B"/>
             </a:solidFill>
             <a:prstDash val="solid"/>
           </a:ln>
@@ -9922,7 +9970,7 @@
             <a:r>
               <a:rPr lang="en-US" sz="1400" b="1" dirty="0">
                 <a:solidFill>
-                  <a:srgbClr val="9E2453"/>
+                  <a:srgbClr val="A83349"/>
                 </a:solidFill>
                 <a:latin typeface="Calibri" pitchFamily="34" charset="0"/>
                 <a:ea typeface="Calibri" pitchFamily="34" charset="-122"/>
@@ -9961,7 +10009,7 @@
             <a:r>
               <a:rPr lang="en-US" sz="900" b="1" spc="100" kern="0" dirty="0">
                 <a:solidFill>
-                  <a:srgbClr val="6B7394"/>
+                  <a:srgbClr val="5C6B7A"/>
                 </a:solidFill>
                 <a:latin typeface="Calibri" pitchFamily="34" charset="0"/>
                 <a:ea typeface="Calibri" pitchFamily="34" charset="-122"/>
@@ -9990,7 +10038,7 @@
             </a:avLst>
           </a:prstGeom>
           <a:solidFill>
-            <a:srgbClr val="C23A6B"/>
+            <a:srgbClr val="D1495B"/>
           </a:solidFill>
           <a:ln/>
         </p:spPr>
@@ -10051,7 +10099,7 @@
             </a:avLst>
           </a:prstGeom>
           <a:solidFill>
-            <a:srgbClr val="4B5BD6"/>
+            <a:srgbClr val="3E7CB1"/>
           </a:solidFill>
           <a:ln/>
         </p:spPr>
@@ -10112,7 +10160,7 @@
             </a:avLst>
           </a:prstGeom>
           <a:solidFill>
-            <a:srgbClr val="C23A6B"/>
+            <a:srgbClr val="D1495B"/>
           </a:solidFill>
           <a:ln/>
         </p:spPr>
@@ -10173,7 +10221,7 @@
             </a:avLst>
           </a:prstGeom>
           <a:solidFill>
-            <a:srgbClr val="2F8F83"/>
+            <a:srgbClr val="1C7293"/>
           </a:solidFill>
           <a:ln/>
         </p:spPr>
@@ -10234,7 +10282,7 @@
             </a:avLst>
           </a:prstGeom>
           <a:solidFill>
-            <a:srgbClr val="4B5BD6"/>
+            <a:srgbClr val="3E7CB1"/>
           </a:solidFill>
           <a:ln/>
         </p:spPr>
@@ -10295,7 +10343,7 @@
             </a:avLst>
           </a:prstGeom>
           <a:solidFill>
-            <a:srgbClr val="B8913F"/>
+            <a:srgbClr val="F2A900"/>
           </a:solidFill>
           <a:ln/>
         </p:spPr>
@@ -10356,7 +10404,7 @@
             </a:avLst>
           </a:prstGeom>
           <a:solidFill>
-            <a:srgbClr val="C23A6B"/>
+            <a:srgbClr val="D1495B"/>
           </a:solidFill>
           <a:ln/>
         </p:spPr>
@@ -10417,7 +10465,7 @@
             </a:avLst>
           </a:prstGeom>
           <a:solidFill>
-            <a:srgbClr val="2F8F83"/>
+            <a:srgbClr val="1C7293"/>
           </a:solidFill>
           <a:ln/>
         </p:spPr>
@@ -10488,7 +10536,7 @@
             <a:r>
               <a:rPr lang="en-US" sz="900" b="1" spc="100" kern="0" dirty="0">
                 <a:solidFill>
-                  <a:srgbClr val="6B7394"/>
+                  <a:srgbClr val="5C6B7A"/>
                 </a:solidFill>
                 <a:latin typeface="Calibri" pitchFamily="34" charset="0"/>
                 <a:ea typeface="Calibri" pitchFamily="34" charset="-122"/>
@@ -10517,7 +10565,7 @@
             </a:avLst>
           </a:prstGeom>
           <a:solidFill>
-            <a:srgbClr val="2F8F83"/>
+            <a:srgbClr val="1C7293"/>
           </a:solidFill>
           <a:ln/>
         </p:spPr>
@@ -10578,7 +10626,7 @@
             </a:avLst>
           </a:prstGeom>
           <a:solidFill>
-            <a:srgbClr val="C23A6B"/>
+            <a:srgbClr val="D1495B"/>
           </a:solidFill>
           <a:ln/>
         </p:spPr>
@@ -10639,7 +10687,7 @@
             </a:avLst>
           </a:prstGeom>
           <a:solidFill>
-            <a:srgbClr val="4B5BD6"/>
+            <a:srgbClr val="3E7CB1"/>
           </a:solidFill>
           <a:ln/>
         </p:spPr>
@@ -10700,7 +10748,7 @@
             </a:avLst>
           </a:prstGeom>
           <a:solidFill>
-            <a:srgbClr val="C23A6B"/>
+            <a:srgbClr val="D1495B"/>
           </a:solidFill>
           <a:ln/>
         </p:spPr>
@@ -10761,7 +10809,7 @@
             </a:avLst>
           </a:prstGeom>
           <a:solidFill>
-            <a:srgbClr val="C23A6B"/>
+            <a:srgbClr val="D1495B"/>
           </a:solidFill>
           <a:ln/>
         </p:spPr>
@@ -10822,7 +10870,7 @@
             </a:avLst>
           </a:prstGeom>
           <a:solidFill>
-            <a:srgbClr val="4B5BD6"/>
+            <a:srgbClr val="3E7CB1"/>
           </a:solidFill>
           <a:ln/>
         </p:spPr>
@@ -10883,7 +10931,7 @@
             </a:avLst>
           </a:prstGeom>
           <a:solidFill>
-            <a:srgbClr val="2F8F83"/>
+            <a:srgbClr val="1C7293"/>
           </a:solidFill>
           <a:ln/>
         </p:spPr>
@@ -10944,7 +10992,7 @@
             </a:avLst>
           </a:prstGeom>
           <a:solidFill>
-            <a:srgbClr val="C23A6B"/>
+            <a:srgbClr val="D1495B"/>
           </a:solidFill>
           <a:ln/>
         </p:spPr>
@@ -11015,7 +11063,7 @@
             <a:r>
               <a:rPr lang="en-US" sz="1100" dirty="0">
                 <a:solidFill>
-                  <a:srgbClr val="3D4873"/>
+                  <a:srgbClr val="0B2545"/>
                 </a:solidFill>
                 <a:latin typeface="Calibri" pitchFamily="34" charset="0"/>
                 <a:ea typeface="Calibri" pitchFamily="34" charset="-122"/>
@@ -11044,11 +11092,11 @@
             </a:avLst>
           </a:prstGeom>
           <a:solidFill>
-            <a:srgbClr val="E3F3F0"/>
+            <a:srgbClr val="E3EEF2"/>
           </a:solidFill>
           <a:ln w="9525">
             <a:solidFill>
-              <a:srgbClr val="2F8F83"/>
+              <a:srgbClr val="1C7293"/>
             </a:solidFill>
             <a:prstDash val="solid"/>
           </a:ln>
@@ -11081,7 +11129,7 @@
             <a:r>
               <a:rPr lang="en-US" sz="1400" b="1" dirty="0">
                 <a:solidFill>
-                  <a:srgbClr val="2F8F83"/>
+                  <a:srgbClr val="1C7293"/>
                 </a:solidFill>
                 <a:latin typeface="Calibri" pitchFamily="34" charset="0"/>
                 <a:ea typeface="Calibri" pitchFamily="34" charset="-122"/>
@@ -11120,7 +11168,7 @@
             <a:r>
               <a:rPr lang="en-US" sz="900" b="1" spc="100" kern="0" dirty="0">
                 <a:solidFill>
-                  <a:srgbClr val="6B7394"/>
+                  <a:srgbClr val="5C6B7A"/>
                 </a:solidFill>
                 <a:latin typeface="Calibri" pitchFamily="34" charset="0"/>
                 <a:ea typeface="Calibri" pitchFamily="34" charset="-122"/>
@@ -11149,7 +11197,7 @@
             </a:avLst>
           </a:prstGeom>
           <a:solidFill>
-            <a:srgbClr val="C23A6B"/>
+            <a:srgbClr val="D1495B"/>
           </a:solidFill>
           <a:ln/>
         </p:spPr>
@@ -11210,7 +11258,7 @@
             </a:avLst>
           </a:prstGeom>
           <a:solidFill>
-            <a:srgbClr val="C23A6B"/>
+            <a:srgbClr val="D1495B"/>
           </a:solidFill>
           <a:ln/>
         </p:spPr>
@@ -11271,7 +11319,7 @@
             </a:avLst>
           </a:prstGeom>
           <a:solidFill>
-            <a:srgbClr val="C23A6B"/>
+            <a:srgbClr val="D1495B"/>
           </a:solidFill>
           <a:ln/>
         </p:spPr>
@@ -11332,7 +11380,7 @@
             </a:avLst>
           </a:prstGeom>
           <a:solidFill>
-            <a:srgbClr val="C23A6B"/>
+            <a:srgbClr val="D1495B"/>
           </a:solidFill>
           <a:ln/>
         </p:spPr>
@@ -11393,7 +11441,7 @@
             </a:avLst>
           </a:prstGeom>
           <a:solidFill>
-            <a:srgbClr val="4B5BD6"/>
+            <a:srgbClr val="3E7CB1"/>
           </a:solidFill>
           <a:ln/>
         </p:spPr>
@@ -11454,7 +11502,7 @@
             </a:avLst>
           </a:prstGeom>
           <a:solidFill>
-            <a:srgbClr val="4B5BD6"/>
+            <a:srgbClr val="3E7CB1"/>
           </a:solidFill>
           <a:ln/>
         </p:spPr>
@@ -11515,7 +11563,7 @@
             </a:avLst>
           </a:prstGeom>
           <a:solidFill>
-            <a:srgbClr val="4B5BD6"/>
+            <a:srgbClr val="3E7CB1"/>
           </a:solidFill>
           <a:ln/>
         </p:spPr>
@@ -11576,7 +11624,7 @@
             </a:avLst>
           </a:prstGeom>
           <a:solidFill>
-            <a:srgbClr val="4B5BD6"/>
+            <a:srgbClr val="3E7CB1"/>
           </a:solidFill>
           <a:ln/>
         </p:spPr>
@@ -11647,7 +11695,7 @@
             <a:r>
               <a:rPr lang="en-US" sz="900" b="1" spc="100" kern="0" dirty="0">
                 <a:solidFill>
-                  <a:srgbClr val="6B7394"/>
+                  <a:srgbClr val="5C6B7A"/>
                 </a:solidFill>
                 <a:latin typeface="Calibri" pitchFamily="34" charset="0"/>
                 <a:ea typeface="Calibri" pitchFamily="34" charset="-122"/>
@@ -11676,7 +11724,7 @@
             </a:avLst>
           </a:prstGeom>
           <a:solidFill>
-            <a:srgbClr val="2F8F83"/>
+            <a:srgbClr val="1C7293"/>
           </a:solidFill>
           <a:ln/>
         </p:spPr>
@@ -11737,7 +11785,7 @@
             </a:avLst>
           </a:prstGeom>
           <a:solidFill>
-            <a:srgbClr val="2F8F83"/>
+            <a:srgbClr val="1C7293"/>
           </a:solidFill>
           <a:ln/>
         </p:spPr>
@@ -11798,7 +11846,7 @@
             </a:avLst>
           </a:prstGeom>
           <a:solidFill>
-            <a:srgbClr val="2F8F83"/>
+            <a:srgbClr val="1C7293"/>
           </a:solidFill>
           <a:ln/>
         </p:spPr>
@@ -11859,7 +11907,7 @@
             </a:avLst>
           </a:prstGeom>
           <a:solidFill>
-            <a:srgbClr val="2F8F83"/>
+            <a:srgbClr val="1C7293"/>
           </a:solidFill>
           <a:ln/>
         </p:spPr>
@@ -11920,7 +11968,7 @@
             </a:avLst>
           </a:prstGeom>
           <a:solidFill>
-            <a:srgbClr val="B8913F"/>
+            <a:srgbClr val="F2A900"/>
           </a:solidFill>
           <a:ln/>
         </p:spPr>
@@ -11981,7 +12029,7 @@
             </a:avLst>
           </a:prstGeom>
           <a:solidFill>
-            <a:srgbClr val="B8913F"/>
+            <a:srgbClr val="F2A900"/>
           </a:solidFill>
           <a:ln/>
         </p:spPr>
@@ -12042,7 +12090,7 @@
             </a:avLst>
           </a:prstGeom>
           <a:solidFill>
-            <a:srgbClr val="B8913F"/>
+            <a:srgbClr val="F2A900"/>
           </a:solidFill>
           <a:ln/>
         </p:spPr>
@@ -12103,7 +12151,7 @@
             </a:avLst>
           </a:prstGeom>
           <a:solidFill>
-            <a:srgbClr val="B8913F"/>
+            <a:srgbClr val="F2A900"/>
           </a:solidFill>
           <a:ln/>
         </p:spPr>
@@ -12174,7 +12222,7 @@
             <a:r>
               <a:rPr lang="en-US" sz="1100" dirty="0">
                 <a:solidFill>
-                  <a:srgbClr val="3D4873"/>
+                  <a:srgbClr val="0B2545"/>
                 </a:solidFill>
                 <a:latin typeface="Calibri" pitchFamily="34" charset="0"/>
                 <a:ea typeface="Calibri" pitchFamily="34" charset="-122"/>
@@ -12200,7 +12248,7 @@
     <p:bg>
       <p:bgPr>
         <a:solidFill>
-          <a:srgbClr val="FBFAF7"/>
+          <a:srgbClr val="FFFFFF"/>
         </a:solidFill>
       </p:bgPr>
     </p:bg>
@@ -12245,7 +12293,7 @@
             <a:r>
               <a:rPr lang="en-US" sz="900" dirty="0">
                 <a:solidFill>
-                  <a:srgbClr val="9AA0B8"/>
+                  <a:srgbClr val="8DA9C4"/>
                 </a:solidFill>
                 <a:latin typeface="Calibri" pitchFamily="34" charset="0"/>
                 <a:ea typeface="Calibri" pitchFamily="34" charset="-122"/>
@@ -12274,7 +12322,7 @@
           <a:noFill/>
           <a:ln w="19050">
             <a:solidFill>
-              <a:srgbClr val="C23A6B"/>
+              <a:srgbClr val="D1495B"/>
             </a:solidFill>
             <a:prstDash val="solid"/>
           </a:ln>
@@ -12307,7 +12355,7 @@
             <a:r>
               <a:rPr lang="en-US" sz="1200" b="1" spc="200" kern="0" dirty="0">
                 <a:solidFill>
-                  <a:srgbClr val="C23A6B"/>
+                  <a:srgbClr val="D1495B"/>
                 </a:solidFill>
                 <a:latin typeface="Calibri" pitchFamily="34" charset="0"/>
                 <a:ea typeface="Calibri" pitchFamily="34" charset="-122"/>
@@ -12349,11 +12397,11 @@
             <a:r>
               <a:rPr lang="en-US" sz="2600" dirty="0">
                 <a:solidFill>
-                  <a:srgbClr val="1F2A52"/>
-                </a:solidFill>
-                <a:latin typeface="Georgia" pitchFamily="34" charset="0"/>
-                <a:ea typeface="Georgia" pitchFamily="34" charset="-122"/>
-                <a:cs typeface="Georgia" pitchFamily="34" charset="-120"/>
+                  <a:srgbClr val="1A2433"/>
+                </a:solidFill>
+                <a:latin typeface="Cambria" pitchFamily="34" charset="0"/>
+                <a:ea typeface="Cambria" pitchFamily="34" charset="-122"/>
+                <a:cs typeface="Cambria" pitchFamily="34" charset="-120"/>
               </a:rPr>
               <a:t>Every identifier audited before a single fold is built.</a:t>
             </a:r>
@@ -12382,7 +12430,7 @@
           </a:solidFill>
           <a:ln w="9525">
             <a:solidFill>
-              <a:srgbClr val="E8E3D8"/>
+              <a:srgbClr val="DCE6F0"/>
             </a:solidFill>
             <a:prstDash val="solid"/>
           </a:ln>
@@ -12415,11 +12463,11 @@
             <a:r>
               <a:rPr lang="en-US" sz="2600" dirty="0">
                 <a:solidFill>
-                  <a:srgbClr val="1F2A52"/>
-                </a:solidFill>
-                <a:latin typeface="Georgia" pitchFamily="34" charset="0"/>
-                <a:ea typeface="Georgia" pitchFamily="34" charset="-122"/>
-                <a:cs typeface="Georgia" pitchFamily="34" charset="-120"/>
+                  <a:srgbClr val="1A2433"/>
+                </a:solidFill>
+                <a:latin typeface="Cambria" pitchFamily="34" charset="0"/>
+                <a:ea typeface="Cambria" pitchFamily="34" charset="-122"/>
+                <a:cs typeface="Cambria" pitchFamily="34" charset="-120"/>
               </a:rPr>
               <a:t>9,684</a:t>
             </a:r>
@@ -12454,7 +12502,7 @@
             <a:r>
               <a:rPr lang="en-US" sz="1200" b="1" dirty="0">
                 <a:solidFill>
-                  <a:srgbClr val="3D4873"/>
+                  <a:srgbClr val="0B2545"/>
                 </a:solidFill>
                 <a:latin typeface="Calibri" pitchFamily="34" charset="0"/>
                 <a:ea typeface="Calibri" pitchFamily="34" charset="-122"/>
@@ -12493,7 +12541,7 @@
             <a:r>
               <a:rPr lang="en-US" sz="950" dirty="0">
                 <a:solidFill>
-                  <a:srgbClr val="6B7394"/>
+                  <a:srgbClr val="5C6B7A"/>
                 </a:solidFill>
                 <a:latin typeface="Calibri" pitchFamily="34" charset="0"/>
                 <a:ea typeface="Calibri" pitchFamily="34" charset="-122"/>
@@ -12526,7 +12574,7 @@
           </a:solidFill>
           <a:ln w="9525">
             <a:solidFill>
-              <a:srgbClr val="E8E3D8"/>
+              <a:srgbClr val="DCE6F0"/>
             </a:solidFill>
             <a:prstDash val="solid"/>
           </a:ln>
@@ -12559,11 +12607,11 @@
             <a:r>
               <a:rPr lang="en-US" sz="2600" dirty="0">
                 <a:solidFill>
-                  <a:srgbClr val="1F2A52"/>
-                </a:solidFill>
-                <a:latin typeface="Georgia" pitchFamily="34" charset="0"/>
-                <a:ea typeface="Georgia" pitchFamily="34" charset="-122"/>
-                <a:cs typeface="Georgia" pitchFamily="34" charset="-120"/>
+                  <a:srgbClr val="1A2433"/>
+                </a:solidFill>
+                <a:latin typeface="Cambria" pitchFamily="34" charset="0"/>
+                <a:ea typeface="Cambria" pitchFamily="34" charset="-122"/>
+                <a:cs typeface="Cambria" pitchFamily="34" charset="-120"/>
               </a:rPr>
               <a:t>2,417</a:t>
             </a:r>
@@ -12598,7 +12646,7 @@
             <a:r>
               <a:rPr lang="en-US" sz="1200" b="1" dirty="0">
                 <a:solidFill>
-                  <a:srgbClr val="3D4873"/>
+                  <a:srgbClr val="0B2545"/>
                 </a:solidFill>
                 <a:latin typeface="Calibri" pitchFamily="34" charset="0"/>
                 <a:ea typeface="Calibri" pitchFamily="34" charset="-122"/>
@@ -12637,7 +12685,7 @@
             <a:r>
               <a:rPr lang="en-US" sz="950" dirty="0">
                 <a:solidFill>
-                  <a:srgbClr val="6B7394"/>
+                  <a:srgbClr val="5C6B7A"/>
                 </a:solidFill>
                 <a:latin typeface="Calibri" pitchFamily="34" charset="0"/>
                 <a:ea typeface="Calibri" pitchFamily="34" charset="-122"/>
@@ -12670,7 +12718,7 @@
           </a:solidFill>
           <a:ln w="9525">
             <a:solidFill>
-              <a:srgbClr val="E8E3D8"/>
+              <a:srgbClr val="DCE6F0"/>
             </a:solidFill>
             <a:prstDash val="solid"/>
           </a:ln>
@@ -12703,11 +12751,11 @@
             <a:r>
               <a:rPr lang="en-US" sz="2600" dirty="0">
                 <a:solidFill>
-                  <a:srgbClr val="1F2A52"/>
-                </a:solidFill>
-                <a:latin typeface="Georgia" pitchFamily="34" charset="0"/>
-                <a:ea typeface="Georgia" pitchFamily="34" charset="-122"/>
-                <a:cs typeface="Georgia" pitchFamily="34" charset="-120"/>
+                  <a:srgbClr val="1A2433"/>
+                </a:solidFill>
+                <a:latin typeface="Cambria" pitchFamily="34" charset="0"/>
+                <a:ea typeface="Cambria" pitchFamily="34" charset="-122"/>
+                <a:cs typeface="Cambria" pitchFamily="34" charset="-120"/>
               </a:rPr>
               <a:t>3</a:t>
             </a:r>
@@ -12742,7 +12790,7 @@
             <a:r>
               <a:rPr lang="en-US" sz="1200" b="1" dirty="0">
                 <a:solidFill>
-                  <a:srgbClr val="3D4873"/>
+                  <a:srgbClr val="0B2545"/>
                 </a:solidFill>
                 <a:latin typeface="Calibri" pitchFamily="34" charset="0"/>
                 <a:ea typeface="Calibri" pitchFamily="34" charset="-122"/>
@@ -12781,7 +12829,7 @@
             <a:r>
               <a:rPr lang="en-US" sz="950" dirty="0">
                 <a:solidFill>
-                  <a:srgbClr val="6B7394"/>
+                  <a:srgbClr val="5C6B7A"/>
                 </a:solidFill>
                 <a:latin typeface="Calibri" pitchFamily="34" charset="0"/>
                 <a:ea typeface="Calibri" pitchFamily="34" charset="-122"/>
@@ -12814,7 +12862,7 @@
           </a:solidFill>
           <a:ln w="9525">
             <a:solidFill>
-              <a:srgbClr val="E8E3D8"/>
+              <a:srgbClr val="DCE6F0"/>
             </a:solidFill>
             <a:prstDash val="solid"/>
           </a:ln>
@@ -12847,11 +12895,11 @@
             <a:r>
               <a:rPr lang="en-US" sz="2600" dirty="0">
                 <a:solidFill>
-                  <a:srgbClr val="1F2A52"/>
-                </a:solidFill>
-                <a:latin typeface="Georgia" pitchFamily="34" charset="0"/>
-                <a:ea typeface="Georgia" pitchFamily="34" charset="-122"/>
-                <a:cs typeface="Georgia" pitchFamily="34" charset="-120"/>
+                  <a:srgbClr val="1A2433"/>
+                </a:solidFill>
+                <a:latin typeface="Cambria" pitchFamily="34" charset="0"/>
+                <a:ea typeface="Cambria" pitchFamily="34" charset="-122"/>
+                <a:cs typeface="Cambria" pitchFamily="34" charset="-120"/>
               </a:rPr>
               <a:t>4</a:t>
             </a:r>
@@ -12886,7 +12934,7 @@
             <a:r>
               <a:rPr lang="en-US" sz="1200" b="1" dirty="0">
                 <a:solidFill>
-                  <a:srgbClr val="3D4873"/>
+                  <a:srgbClr val="0B2545"/>
                 </a:solidFill>
                 <a:latin typeface="Calibri" pitchFamily="34" charset="0"/>
                 <a:ea typeface="Calibri" pitchFamily="34" charset="-122"/>
@@ -12925,7 +12973,7 @@
             <a:r>
               <a:rPr lang="en-US" sz="950" dirty="0">
                 <a:solidFill>
-                  <a:srgbClr val="6B7394"/>
+                  <a:srgbClr val="5C6B7A"/>
                 </a:solidFill>
                 <a:latin typeface="Calibri" pitchFamily="34" charset="0"/>
                 <a:ea typeface="Calibri" pitchFamily="34" charset="-122"/>
@@ -12958,7 +13006,7 @@
           </a:solidFill>
           <a:ln w="9525">
             <a:solidFill>
-              <a:srgbClr val="E8E3D8"/>
+              <a:srgbClr val="DCE6F0"/>
             </a:solidFill>
             <a:prstDash val="solid"/>
           </a:ln>
@@ -12991,11 +13039,11 @@
             <a:r>
               <a:rPr lang="en-US" sz="2600" dirty="0">
                 <a:solidFill>
-                  <a:srgbClr val="1F2A52"/>
-                </a:solidFill>
-                <a:latin typeface="Georgia" pitchFamily="34" charset="0"/>
-                <a:ea typeface="Georgia" pitchFamily="34" charset="-122"/>
-                <a:cs typeface="Georgia" pitchFamily="34" charset="-120"/>
+                  <a:srgbClr val="1A2433"/>
+                </a:solidFill>
+                <a:latin typeface="Cambria" pitchFamily="34" charset="0"/>
+                <a:ea typeface="Cambria" pitchFamily="34" charset="-122"/>
+                <a:cs typeface="Cambria" pitchFamily="34" charset="-120"/>
               </a:rPr>
               <a:t>14</a:t>
             </a:r>
@@ -13030,7 +13078,7 @@
             <a:r>
               <a:rPr lang="en-US" sz="1200" b="1" dirty="0">
                 <a:solidFill>
-                  <a:srgbClr val="3D4873"/>
+                  <a:srgbClr val="0B2545"/>
                 </a:solidFill>
                 <a:latin typeface="Calibri" pitchFamily="34" charset="0"/>
                 <a:ea typeface="Calibri" pitchFamily="34" charset="-122"/>
@@ -13069,7 +13117,7 @@
             <a:r>
               <a:rPr lang="en-US" sz="950" dirty="0">
                 <a:solidFill>
-                  <a:srgbClr val="6B7394"/>
+                  <a:srgbClr val="5C6B7A"/>
                 </a:solidFill>
                 <a:latin typeface="Calibri" pitchFamily="34" charset="0"/>
                 <a:ea typeface="Calibri" pitchFamily="34" charset="-122"/>
@@ -13102,7 +13150,7 @@
           </a:solidFill>
           <a:ln w="9525">
             <a:solidFill>
-              <a:srgbClr val="E8E3D8"/>
+              <a:srgbClr val="DCE6F0"/>
             </a:solidFill>
             <a:prstDash val="solid"/>
           </a:ln>
@@ -13135,11 +13183,11 @@
             <a:r>
               <a:rPr lang="en-US" sz="2600" dirty="0">
                 <a:solidFill>
-                  <a:srgbClr val="2F8F83"/>
-                </a:solidFill>
-                <a:latin typeface="Georgia" pitchFamily="34" charset="0"/>
-                <a:ea typeface="Georgia" pitchFamily="34" charset="-122"/>
-                <a:cs typeface="Georgia" pitchFamily="34" charset="-120"/>
+                  <a:srgbClr val="1C7293"/>
+                </a:solidFill>
+                <a:latin typeface="Cambria" pitchFamily="34" charset="0"/>
+                <a:ea typeface="Cambria" pitchFamily="34" charset="-122"/>
+                <a:cs typeface="Cambria" pitchFamily="34" charset="-120"/>
               </a:rPr>
               <a:t>0</a:t>
             </a:r>
@@ -13174,7 +13222,7 @@
             <a:r>
               <a:rPr lang="en-US" sz="1200" b="1" dirty="0">
                 <a:solidFill>
-                  <a:srgbClr val="3D4873"/>
+                  <a:srgbClr val="0B2545"/>
                 </a:solidFill>
                 <a:latin typeface="Calibri" pitchFamily="34" charset="0"/>
                 <a:ea typeface="Calibri" pitchFamily="34" charset="-122"/>
@@ -13213,7 +13261,7 @@
             <a:r>
               <a:rPr lang="en-US" sz="950" dirty="0">
                 <a:solidFill>
-                  <a:srgbClr val="6B7394"/>
+                  <a:srgbClr val="5C6B7A"/>
                 </a:solidFill>
                 <a:latin typeface="Calibri" pitchFamily="34" charset="0"/>
                 <a:ea typeface="Calibri" pitchFamily="34" charset="-122"/>
@@ -13239,7 +13287,7 @@
     <p:bg>
       <p:bgPr>
         <a:solidFill>
-          <a:srgbClr val="FBFAF7"/>
+          <a:srgbClr val="FFFFFF"/>
         </a:solidFill>
       </p:bgPr>
     </p:bg>
@@ -13284,7 +13332,7 @@
             <a:r>
               <a:rPr lang="en-US" sz="900" dirty="0">
                 <a:solidFill>
-                  <a:srgbClr val="9AA0B8"/>
+                  <a:srgbClr val="8DA9C4"/>
                 </a:solidFill>
                 <a:latin typeface="Calibri" pitchFamily="34" charset="0"/>
                 <a:ea typeface="Calibri" pitchFamily="34" charset="-122"/>
@@ -13313,7 +13361,7 @@
           <a:noFill/>
           <a:ln w="19050">
             <a:solidFill>
-              <a:srgbClr val="C23A6B"/>
+              <a:srgbClr val="D1495B"/>
             </a:solidFill>
             <a:prstDash val="solid"/>
           </a:ln>
@@ -13346,7 +13394,7 @@
             <a:r>
               <a:rPr lang="en-US" sz="1200" b="1" spc="200" kern="0" dirty="0">
                 <a:solidFill>
-                  <a:srgbClr val="C23A6B"/>
+                  <a:srgbClr val="D1495B"/>
                 </a:solidFill>
                 <a:latin typeface="Calibri" pitchFamily="34" charset="0"/>
                 <a:ea typeface="Calibri" pitchFamily="34" charset="-122"/>
@@ -13388,11 +13436,11 @@
             <a:r>
               <a:rPr lang="en-US" sz="2600" dirty="0">
                 <a:solidFill>
-                  <a:srgbClr val="1F2A52"/>
-                </a:solidFill>
-                <a:latin typeface="Georgia" pitchFamily="34" charset="0"/>
-                <a:ea typeface="Georgia" pitchFamily="34" charset="-122"/>
-                <a:cs typeface="Georgia" pitchFamily="34" charset="-120"/>
+                  <a:srgbClr val="1A2433"/>
+                </a:solidFill>
+                <a:latin typeface="Cambria" pitchFamily="34" charset="0"/>
+                <a:ea typeface="Cambria" pitchFamily="34" charset="-122"/>
+                <a:cs typeface="Cambria" pitchFamily="34" charset="-120"/>
               </a:rPr>
               <a:t>Simple pipeline. Fixed 50/50 ensemble. No test-set tuning.</a:t>
             </a:r>
@@ -13437,7 +13485,7 @@
     <p:bg>
       <p:bgPr>
         <a:solidFill>
-          <a:srgbClr val="FBFAF7"/>
+          <a:srgbClr val="FFFFFF"/>
         </a:solidFill>
       </p:bgPr>
     </p:bg>
@@ -13482,7 +13530,7 @@
             <a:r>
               <a:rPr lang="en-US" sz="900" dirty="0">
                 <a:solidFill>
-                  <a:srgbClr val="9AA0B8"/>
+                  <a:srgbClr val="8DA9C4"/>
                 </a:solidFill>
                 <a:latin typeface="Calibri" pitchFamily="34" charset="0"/>
                 <a:ea typeface="Calibri" pitchFamily="34" charset="-122"/>
@@ -13511,7 +13559,7 @@
           <a:noFill/>
           <a:ln w="19050">
             <a:solidFill>
-              <a:srgbClr val="C23A6B"/>
+              <a:srgbClr val="D1495B"/>
             </a:solidFill>
             <a:prstDash val="solid"/>
           </a:ln>
@@ -13544,7 +13592,7 @@
             <a:r>
               <a:rPr lang="en-US" sz="1200" b="1" spc="200" kern="0" dirty="0">
                 <a:solidFill>
-                  <a:srgbClr val="C23A6B"/>
+                  <a:srgbClr val="D1495B"/>
                 </a:solidFill>
                 <a:latin typeface="Calibri" pitchFamily="34" charset="0"/>
                 <a:ea typeface="Calibri" pitchFamily="34" charset="-122"/>
@@ -13586,11 +13634,11 @@
             <a:r>
               <a:rPr lang="en-US" sz="2600" dirty="0">
                 <a:solidFill>
-                  <a:srgbClr val="1F2A52"/>
-                </a:solidFill>
-                <a:latin typeface="Georgia" pitchFamily="34" charset="0"/>
-                <a:ea typeface="Georgia" pitchFamily="34" charset="-122"/>
-                <a:cs typeface="Georgia" pitchFamily="34" charset="-120"/>
+                  <a:srgbClr val="1A2433"/>
+                </a:solidFill>
+                <a:latin typeface="Cambria" pitchFamily="34" charset="0"/>
+                <a:ea typeface="Cambria" pitchFamily="34" charset="-122"/>
+                <a:cs typeface="Cambria" pitchFamily="34" charset="-120"/>
               </a:rPr>
               <a:t>Nested, patient-grouped, repeated three times.</a:t>
             </a:r>
@@ -13615,11 +13663,11 @@
             </a:avLst>
           </a:prstGeom>
           <a:solidFill>
-            <a:srgbClr val="EBEDFC"/>
+            <a:srgbClr val="E8F0F7"/>
           </a:solidFill>
           <a:ln w="9525">
             <a:solidFill>
-              <a:srgbClr val="4B5BD6"/>
+              <a:srgbClr val="3E7CB1"/>
             </a:solidFill>
             <a:prstDash val="solid"/>
           </a:ln>
@@ -13652,7 +13700,7 @@
             <a:r>
               <a:rPr lang="en-US" sz="1000" b="1" spc="100" kern="0" dirty="0">
                 <a:solidFill>
-                  <a:srgbClr val="4B5BD6"/>
+                  <a:srgbClr val="3E7CB1"/>
                 </a:solidFill>
                 <a:latin typeface="Calibri" pitchFamily="34" charset="0"/>
                 <a:ea typeface="Calibri" pitchFamily="34" charset="-122"/>
@@ -13693,7 +13741,7 @@
             <a:r>
               <a:rPr lang="en-US" sz="1100" b="1" dirty="0">
                 <a:solidFill>
-                  <a:srgbClr val="1F2A52"/>
+                  <a:srgbClr val="1A2433"/>
                 </a:solidFill>
                 <a:latin typeface="Calibri" pitchFamily="34" charset="0"/>
                 <a:ea typeface="Calibri" pitchFamily="34" charset="-122"/>
@@ -13708,7 +13756,7 @@
             <a:r>
               <a:rPr lang="en-US" sz="1100" dirty="0">
                 <a:solidFill>
-                  <a:srgbClr val="6B7394"/>
+                  <a:srgbClr val="5C6B7A"/>
                 </a:solidFill>
                 <a:latin typeface="Calibri" pitchFamily="34" charset="0"/>
                 <a:ea typeface="Calibri" pitchFamily="34" charset="-122"/>
@@ -13749,7 +13797,7 @@
             <a:r>
               <a:rPr lang="en-US" sz="1100" b="1" dirty="0">
                 <a:solidFill>
-                  <a:srgbClr val="1F2A52"/>
+                  <a:srgbClr val="1A2433"/>
                 </a:solidFill>
                 <a:latin typeface="Calibri" pitchFamily="34" charset="0"/>
                 <a:ea typeface="Calibri" pitchFamily="34" charset="-122"/>
@@ -13764,7 +13812,7 @@
             <a:r>
               <a:rPr lang="en-US" sz="1100" dirty="0">
                 <a:solidFill>
-                  <a:srgbClr val="6B7394"/>
+                  <a:srgbClr val="5C6B7A"/>
                 </a:solidFill>
                 <a:latin typeface="Calibri" pitchFamily="34" charset="0"/>
                 <a:ea typeface="Calibri" pitchFamily="34" charset="-122"/>
@@ -13803,7 +13851,7 @@
             <a:r>
               <a:rPr lang="en-US" sz="3000" dirty="0">
                 <a:solidFill>
-                  <a:srgbClr val="C23A6B"/>
+                  <a:srgbClr val="D1495B"/>
                 </a:solidFill>
                 <a:latin typeface="Calibri" pitchFamily="34" charset="0"/>
                 <a:ea typeface="Calibri" pitchFamily="34" charset="-122"/>
@@ -13832,11 +13880,11 @@
             </a:avLst>
           </a:prstGeom>
           <a:solidFill>
-            <a:srgbClr val="FBE9EF"/>
+            <a:srgbClr val="FBE8EA"/>
           </a:solidFill>
           <a:ln w="9525">
             <a:solidFill>
-              <a:srgbClr val="C23A6B"/>
+              <a:srgbClr val="D1495B"/>
             </a:solidFill>
             <a:prstDash val="solid"/>
           </a:ln>
@@ -13869,7 +13917,7 @@
             <a:r>
               <a:rPr lang="en-US" sz="1000" b="1" spc="100" kern="0" dirty="0">
                 <a:solidFill>
-                  <a:srgbClr val="C23A6B"/>
+                  <a:srgbClr val="D1495B"/>
                 </a:solidFill>
                 <a:latin typeface="Calibri" pitchFamily="34" charset="0"/>
                 <a:ea typeface="Calibri" pitchFamily="34" charset="-122"/>
@@ -13910,7 +13958,7 @@
             <a:r>
               <a:rPr lang="en-US" sz="1100" b="1" dirty="0">
                 <a:solidFill>
-                  <a:srgbClr val="1F2A52"/>
+                  <a:srgbClr val="1A2433"/>
                 </a:solidFill>
                 <a:latin typeface="Calibri" pitchFamily="34" charset="0"/>
                 <a:ea typeface="Calibri" pitchFamily="34" charset="-122"/>
@@ -13925,7 +13973,7 @@
             <a:r>
               <a:rPr lang="en-US" sz="1100" dirty="0">
                 <a:solidFill>
-                  <a:srgbClr val="6B7394"/>
+                  <a:srgbClr val="5C6B7A"/>
                 </a:solidFill>
                 <a:latin typeface="Calibri" pitchFamily="34" charset="0"/>
                 <a:ea typeface="Calibri" pitchFamily="34" charset="-122"/>
@@ -13958,7 +14006,7 @@
           </a:solidFill>
           <a:ln w="9525">
             <a:solidFill>
-              <a:srgbClr val="E8E3D8"/>
+              <a:srgbClr val="DCE6F0"/>
             </a:solidFill>
             <a:prstDash val="solid"/>
           </a:ln>
@@ -13991,7 +14039,7 @@
             <a:r>
               <a:rPr lang="en-US" sz="1100" dirty="0">
                 <a:solidFill>
-                  <a:srgbClr val="3D4873"/>
+                  <a:srgbClr val="0B2545"/>
                 </a:solidFill>
                 <a:latin typeface="Calibri" pitchFamily="34" charset="0"/>
                 <a:ea typeface="Calibri" pitchFamily="34" charset="-122"/>
@@ -14024,7 +14072,7 @@
           </a:solidFill>
           <a:ln w="9525">
             <a:solidFill>
-              <a:srgbClr val="E8E3D8"/>
+              <a:srgbClr val="DCE6F0"/>
             </a:solidFill>
             <a:prstDash val="solid"/>
           </a:ln>
@@ -14057,7 +14105,7 @@
             <a:r>
               <a:rPr lang="en-US" sz="1100" dirty="0">
                 <a:solidFill>
-                  <a:srgbClr val="3D4873"/>
+                  <a:srgbClr val="0B2545"/>
                 </a:solidFill>
                 <a:latin typeface="Calibri" pitchFamily="34" charset="0"/>
                 <a:ea typeface="Calibri" pitchFamily="34" charset="-122"/>
@@ -14090,7 +14138,7 @@
           </a:solidFill>
           <a:ln w="9525">
             <a:solidFill>
-              <a:srgbClr val="E8E3D8"/>
+              <a:srgbClr val="DCE6F0"/>
             </a:solidFill>
             <a:prstDash val="solid"/>
           </a:ln>
@@ -14123,7 +14171,7 @@
             <a:r>
               <a:rPr lang="en-US" sz="1100" dirty="0">
                 <a:solidFill>
-                  <a:srgbClr val="3D4873"/>
+                  <a:srgbClr val="0B2545"/>
                 </a:solidFill>
                 <a:latin typeface="Calibri" pitchFamily="34" charset="0"/>
                 <a:ea typeface="Calibri" pitchFamily="34" charset="-122"/>
@@ -14149,7 +14197,7 @@
     <p:bg>
       <p:bgPr>
         <a:solidFill>
-          <a:srgbClr val="FBFAF7"/>
+          <a:srgbClr val="FFFFFF"/>
         </a:solidFill>
       </p:bgPr>
     </p:bg>
@@ -14194,7 +14242,7 @@
             <a:r>
               <a:rPr lang="en-US" sz="900" dirty="0">
                 <a:solidFill>
-                  <a:srgbClr val="9AA0B8"/>
+                  <a:srgbClr val="8DA9C4"/>
                 </a:solidFill>
                 <a:latin typeface="Calibri" pitchFamily="34" charset="0"/>
                 <a:ea typeface="Calibri" pitchFamily="34" charset="-122"/>
@@ -14223,7 +14271,7 @@
           <a:noFill/>
           <a:ln w="19050">
             <a:solidFill>
-              <a:srgbClr val="C23A6B"/>
+              <a:srgbClr val="D1495B"/>
             </a:solidFill>
             <a:prstDash val="solid"/>
           </a:ln>
@@ -14256,7 +14304,7 @@
             <a:r>
               <a:rPr lang="en-US" sz="1200" b="1" spc="200" kern="0" dirty="0">
                 <a:solidFill>
-                  <a:srgbClr val="C23A6B"/>
+                  <a:srgbClr val="D1495B"/>
                 </a:solidFill>
                 <a:latin typeface="Calibri" pitchFamily="34" charset="0"/>
                 <a:ea typeface="Calibri" pitchFamily="34" charset="-122"/>
@@ -14298,11 +14346,11 @@
             <a:r>
               <a:rPr lang="en-US" sz="2800" dirty="0">
                 <a:solidFill>
-                  <a:srgbClr val="1F2A52"/>
-                </a:solidFill>
-                <a:latin typeface="Georgia" pitchFamily="34" charset="0"/>
-                <a:ea typeface="Georgia" pitchFamily="34" charset="-122"/>
-                <a:cs typeface="Georgia" pitchFamily="34" charset="-120"/>
+                  <a:srgbClr val="1A2433"/>
+                </a:solidFill>
+                <a:latin typeface="Cambria" pitchFamily="34" charset="0"/>
+                <a:ea typeface="Cambria" pitchFamily="34" charset="-122"/>
+                <a:cs typeface="Cambria" pitchFamily="34" charset="-120"/>
               </a:rPr>
               <a:t>Ensemble ROC-AUC 0.891 ± 0.008</a:t>
             </a:r>
@@ -14327,11 +14375,11 @@
             </a:avLst>
           </a:prstGeom>
           <a:solidFill>
-            <a:srgbClr val="FBE9EF"/>
+            <a:srgbClr val="FBE8EA"/>
           </a:solidFill>
           <a:ln w="9525">
             <a:solidFill>
-              <a:srgbClr val="C23A6B"/>
+              <a:srgbClr val="D1495B"/>
             </a:solidFill>
             <a:prstDash val="solid"/>
           </a:ln>
@@ -14352,7 +14400,7 @@
             <a:avLst/>
           </a:prstGeom>
           <a:solidFill>
-            <a:srgbClr val="C23A6B"/>
+            <a:srgbClr val="D1495B"/>
           </a:solidFill>
           <a:ln/>
         </p:spPr>
@@ -14384,7 +14432,7 @@
             <a:r>
               <a:rPr lang="en-US" sz="1250" dirty="0">
                 <a:solidFill>
-                  <a:srgbClr val="3D4873"/>
+                  <a:srgbClr val="0B2545"/>
                 </a:solidFill>
                 <a:latin typeface="Calibri" pitchFamily="34" charset="0"/>
                 <a:ea typeface="Calibri" pitchFamily="34" charset="-122"/>
@@ -14423,7 +14471,7 @@
             <a:r>
               <a:rPr lang="en-US" sz="1400" b="1" dirty="0">
                 <a:solidFill>
-                  <a:srgbClr val="1F2A52"/>
+                  <a:srgbClr val="1A2433"/>
                 </a:solidFill>
                 <a:latin typeface="Courier New" pitchFamily="34" charset="0"/>
                 <a:ea typeface="Courier New" pitchFamily="34" charset="-122"/>
@@ -14456,7 +14504,7 @@
           </a:solidFill>
           <a:ln w="9525">
             <a:solidFill>
-              <a:srgbClr val="E8E3D8"/>
+              <a:srgbClr val="DCE6F0"/>
             </a:solidFill>
             <a:prstDash val="solid"/>
           </a:ln>
@@ -14477,7 +14525,7 @@
             <a:avLst/>
           </a:prstGeom>
           <a:solidFill>
-            <a:srgbClr val="B8913F"/>
+            <a:srgbClr val="F2A900"/>
           </a:solidFill>
           <a:ln/>
         </p:spPr>
@@ -14509,7 +14557,7 @@
             <a:r>
               <a:rPr lang="en-US" sz="1250" dirty="0">
                 <a:solidFill>
-                  <a:srgbClr val="3D4873"/>
+                  <a:srgbClr val="0B2545"/>
                 </a:solidFill>
                 <a:latin typeface="Calibri" pitchFamily="34" charset="0"/>
                 <a:ea typeface="Calibri" pitchFamily="34" charset="-122"/>
@@ -14548,7 +14596,7 @@
             <a:r>
               <a:rPr lang="en-US" sz="1400" b="1" dirty="0">
                 <a:solidFill>
-                  <a:srgbClr val="1F2A52"/>
+                  <a:srgbClr val="1A2433"/>
                 </a:solidFill>
                 <a:latin typeface="Courier New" pitchFamily="34" charset="0"/>
                 <a:ea typeface="Courier New" pitchFamily="34" charset="-122"/>
@@ -14581,7 +14629,7 @@
           </a:solidFill>
           <a:ln w="9525">
             <a:solidFill>
-              <a:srgbClr val="E8E3D8"/>
+              <a:srgbClr val="DCE6F0"/>
             </a:solidFill>
             <a:prstDash val="solid"/>
           </a:ln>
@@ -14602,7 +14650,7 @@
             <a:avLst/>
           </a:prstGeom>
           <a:solidFill>
-            <a:srgbClr val="3D4873"/>
+            <a:srgbClr val="0B2545"/>
           </a:solidFill>
           <a:ln/>
         </p:spPr>
@@ -14634,7 +14682,7 @@
             <a:r>
               <a:rPr lang="en-US" sz="1250" dirty="0">
                 <a:solidFill>
-                  <a:srgbClr val="3D4873"/>
+                  <a:srgbClr val="0B2545"/>
                 </a:solidFill>
                 <a:latin typeface="Calibri" pitchFamily="34" charset="0"/>
                 <a:ea typeface="Calibri" pitchFamily="34" charset="-122"/>
@@ -14673,7 +14721,7 @@
             <a:r>
               <a:rPr lang="en-US" sz="1400" b="1" dirty="0">
                 <a:solidFill>
-                  <a:srgbClr val="1F2A52"/>
+                  <a:srgbClr val="1A2433"/>
                 </a:solidFill>
                 <a:latin typeface="Courier New" pitchFamily="34" charset="0"/>
                 <a:ea typeface="Courier New" pitchFamily="34" charset="-122"/>
@@ -14706,7 +14754,7 @@
           </a:solidFill>
           <a:ln w="9525">
             <a:solidFill>
-              <a:srgbClr val="E8E3D8"/>
+              <a:srgbClr val="DCE6F0"/>
             </a:solidFill>
             <a:prstDash val="solid"/>
           </a:ln>
@@ -14727,7 +14775,7 @@
             <a:avLst/>
           </a:prstGeom>
           <a:solidFill>
-            <a:srgbClr val="4B5BD6"/>
+            <a:srgbClr val="3E7CB1"/>
           </a:solidFill>
           <a:ln/>
         </p:spPr>
@@ -14759,7 +14807,7 @@
             <a:r>
               <a:rPr lang="en-US" sz="1250" dirty="0">
                 <a:solidFill>
-                  <a:srgbClr val="3D4873"/>
+                  <a:srgbClr val="0B2545"/>
                 </a:solidFill>
                 <a:latin typeface="Calibri" pitchFamily="34" charset="0"/>
                 <a:ea typeface="Calibri" pitchFamily="34" charset="-122"/>
@@ -14798,7 +14846,7 @@
             <a:r>
               <a:rPr lang="en-US" sz="1400" b="1" dirty="0">
                 <a:solidFill>
-                  <a:srgbClr val="1F2A52"/>
+                  <a:srgbClr val="1A2433"/>
                 </a:solidFill>
                 <a:latin typeface="Courier New" pitchFamily="34" charset="0"/>
                 <a:ea typeface="Courier New" pitchFamily="34" charset="-122"/>
@@ -14837,7 +14885,7 @@
             <a:r>
               <a:rPr lang="en-US" sz="1050" dirty="0">
                 <a:solidFill>
-                  <a:srgbClr val="6B7394"/>
+                  <a:srgbClr val="5C6B7A"/>
                 </a:solidFill>
                 <a:latin typeface="Calibri" pitchFamily="34" charset="0"/>
                 <a:ea typeface="Calibri" pitchFamily="34" charset="-122"/>
@@ -14879,7 +14927,7 @@
     <p:bg>
       <p:bgPr>
         <a:solidFill>
-          <a:srgbClr val="FBFAF7"/>
+          <a:srgbClr val="FFFFFF"/>
         </a:solidFill>
       </p:bgPr>
     </p:bg>
@@ -14924,7 +14972,7 @@
             <a:r>
               <a:rPr lang="en-US" sz="900" dirty="0">
                 <a:solidFill>
-                  <a:srgbClr val="9AA0B8"/>
+                  <a:srgbClr val="8DA9C4"/>
                 </a:solidFill>
                 <a:latin typeface="Calibri" pitchFamily="34" charset="0"/>
                 <a:ea typeface="Calibri" pitchFamily="34" charset="-122"/>
@@ -14953,7 +15001,7 @@
           <a:noFill/>
           <a:ln w="19050">
             <a:solidFill>
-              <a:srgbClr val="C23A6B"/>
+              <a:srgbClr val="D1495B"/>
             </a:solidFill>
             <a:prstDash val="solid"/>
           </a:ln>
@@ -14986,7 +15034,7 @@
             <a:r>
               <a:rPr lang="en-US" sz="1200" b="1" spc="200" kern="0" dirty="0">
                 <a:solidFill>
-                  <a:srgbClr val="C23A6B"/>
+                  <a:srgbClr val="D1495B"/>
                 </a:solidFill>
                 <a:latin typeface="Calibri" pitchFamily="34" charset="0"/>
                 <a:ea typeface="Calibri" pitchFamily="34" charset="-122"/>
@@ -15028,11 +15076,11 @@
             <a:r>
               <a:rPr lang="en-US" sz="2600" dirty="0">
                 <a:solidFill>
-                  <a:srgbClr val="1F2A52"/>
-                </a:solidFill>
-                <a:latin typeface="Georgia" pitchFamily="34" charset="0"/>
-                <a:ea typeface="Georgia" pitchFamily="34" charset="-122"/>
-                <a:cs typeface="Georgia" pitchFamily="34" charset="-120"/>
+                  <a:srgbClr val="1A2433"/>
+                </a:solidFill>
+                <a:latin typeface="Cambria" pitchFamily="34" charset="0"/>
+                <a:ea typeface="Cambria" pitchFamily="34" charset="-122"/>
+                <a:cs typeface="Cambria" pitchFamily="34" charset="-120"/>
               </a:rPr>
               <a:t>Best on 5 of 6 metrics — without learning any weights.</a:t>
             </a:r>
@@ -15081,7 +15129,7 @@
                       <a:r>
                         <a:rPr lang="en-US" sz="1050" b="1" dirty="0">
                           <a:solidFill>
-                            <a:srgbClr val="6B7394"/>
+                            <a:srgbClr val="5C6B7A"/>
                           </a:solidFill>
                           <a:latin typeface="Calibri" pitchFamily="34" charset="0"/>
                           <a:ea typeface="Calibri" pitchFamily="34" charset="-122"/>
@@ -15099,7 +15147,7 @@
                   <a:tcPr marL="91440" marR="91440" marT="45720" marB="45720" anchor="ctr">
                     <a:lnL w="6350" cap="flat" cmpd="sng" algn="ctr">
                       <a:solidFill>
-                        <a:srgbClr val="E8E3D8"/>
+                        <a:srgbClr val="DCE6F0"/>
                       </a:solidFill>
                       <a:prstDash val="solid"/>
                       <a:round/>
@@ -15108,7 +15156,7 @@
                     </a:lnL>
                     <a:lnR w="6350" cap="flat" cmpd="sng" algn="ctr">
                       <a:solidFill>
-                        <a:srgbClr val="E8E3D8"/>
+                        <a:srgbClr val="DCE6F0"/>
                       </a:solidFill>
                       <a:prstDash val="solid"/>
                       <a:round/>
@@ -15117,7 +15165,7 @@
                     </a:lnR>
                     <a:lnT w="6350" cap="flat" cmpd="sng" algn="ctr">
                       <a:solidFill>
-                        <a:srgbClr val="E8E3D8"/>
+                        <a:srgbClr val="DCE6F0"/>
                       </a:solidFill>
                       <a:prstDash val="solid"/>
                       <a:round/>
@@ -15126,7 +15174,7 @@
                     </a:lnT>
                     <a:lnB w="6350" cap="flat" cmpd="sng" algn="ctr">
                       <a:solidFill>
-                        <a:srgbClr val="E8E3D8"/>
+                        <a:srgbClr val="DCE6F0"/>
                       </a:solidFill>
                       <a:prstDash val="solid"/>
                       <a:round/>
@@ -15146,7 +15194,7 @@
                       <a:r>
                         <a:rPr lang="en-US" sz="1050" b="1" dirty="0">
                           <a:solidFill>
-                            <a:srgbClr val="6B7394"/>
+                            <a:srgbClr val="5C6B7A"/>
                           </a:solidFill>
                           <a:latin typeface="Calibri" pitchFamily="34" charset="0"/>
                           <a:ea typeface="Calibri" pitchFamily="34" charset="-122"/>
@@ -15164,7 +15212,7 @@
                   <a:tcPr marL="91440" marR="91440" marT="45720" marB="45720" anchor="ctr">
                     <a:lnL w="6350" cap="flat" cmpd="sng" algn="ctr">
                       <a:solidFill>
-                        <a:srgbClr val="E8E3D8"/>
+                        <a:srgbClr val="DCE6F0"/>
                       </a:solidFill>
                       <a:prstDash val="solid"/>
                       <a:round/>
@@ -15173,7 +15221,7 @@
                     </a:lnL>
                     <a:lnR w="6350" cap="flat" cmpd="sng" algn="ctr">
                       <a:solidFill>
-                        <a:srgbClr val="E8E3D8"/>
+                        <a:srgbClr val="DCE6F0"/>
                       </a:solidFill>
                       <a:prstDash val="solid"/>
                       <a:round/>
@@ -15182,7 +15230,7 @@
                     </a:lnR>
                     <a:lnT w="6350" cap="flat" cmpd="sng" algn="ctr">
                       <a:solidFill>
-                        <a:srgbClr val="E8E3D8"/>
+                        <a:srgbClr val="DCE6F0"/>
                       </a:solidFill>
                       <a:prstDash val="solid"/>
                       <a:round/>
@@ -15191,7 +15239,7 @@
                     </a:lnT>
                     <a:lnB w="6350" cap="flat" cmpd="sng" algn="ctr">
                       <a:solidFill>
-                        <a:srgbClr val="E8E3D8"/>
+                        <a:srgbClr val="DCE6F0"/>
                       </a:solidFill>
                       <a:prstDash val="solid"/>
                       <a:round/>
@@ -15211,7 +15259,7 @@
                       <a:r>
                         <a:rPr lang="en-US" sz="1050" b="1" dirty="0">
                           <a:solidFill>
-                            <a:srgbClr val="6B7394"/>
+                            <a:srgbClr val="5C6B7A"/>
                           </a:solidFill>
                           <a:latin typeface="Calibri" pitchFamily="34" charset="0"/>
                           <a:ea typeface="Calibri" pitchFamily="34" charset="-122"/>
@@ -15229,7 +15277,7 @@
                   <a:tcPr marL="91440" marR="91440" marT="45720" marB="45720" anchor="ctr">
                     <a:lnL w="6350" cap="flat" cmpd="sng" algn="ctr">
                       <a:solidFill>
-                        <a:srgbClr val="E8E3D8"/>
+                        <a:srgbClr val="DCE6F0"/>
                       </a:solidFill>
                       <a:prstDash val="solid"/>
                       <a:round/>
@@ -15238,7 +15286,7 @@
                     </a:lnL>
                     <a:lnR w="6350" cap="flat" cmpd="sng" algn="ctr">
                       <a:solidFill>
-                        <a:srgbClr val="E8E3D8"/>
+                        <a:srgbClr val="DCE6F0"/>
                       </a:solidFill>
                       <a:prstDash val="solid"/>
                       <a:round/>
@@ -15247,7 +15295,7 @@
                     </a:lnR>
                     <a:lnT w="6350" cap="flat" cmpd="sng" algn="ctr">
                       <a:solidFill>
-                        <a:srgbClr val="E8E3D8"/>
+                        <a:srgbClr val="DCE6F0"/>
                       </a:solidFill>
                       <a:prstDash val="solid"/>
                       <a:round/>
@@ -15256,7 +15304,7 @@
                     </a:lnT>
                     <a:lnB w="6350" cap="flat" cmpd="sng" algn="ctr">
                       <a:solidFill>
-                        <a:srgbClr val="E8E3D8"/>
+                        <a:srgbClr val="DCE6F0"/>
                       </a:solidFill>
                       <a:prstDash val="solid"/>
                       <a:round/>
@@ -15276,7 +15324,7 @@
                       <a:r>
                         <a:rPr lang="en-US" sz="1050" b="1" dirty="0">
                           <a:solidFill>
-                            <a:srgbClr val="6B7394"/>
+                            <a:srgbClr val="5C6B7A"/>
                           </a:solidFill>
                           <a:latin typeface="Calibri" pitchFamily="34" charset="0"/>
                           <a:ea typeface="Calibri" pitchFamily="34" charset="-122"/>
@@ -15294,7 +15342,7 @@
                   <a:tcPr marL="91440" marR="91440" marT="45720" marB="45720" anchor="ctr">
                     <a:lnL w="6350" cap="flat" cmpd="sng" algn="ctr">
                       <a:solidFill>
-                        <a:srgbClr val="E8E3D8"/>
+                        <a:srgbClr val="DCE6F0"/>
                       </a:solidFill>
                       <a:prstDash val="solid"/>
                       <a:round/>
@@ -15303,7 +15351,7 @@
                     </a:lnL>
                     <a:lnR w="6350" cap="flat" cmpd="sng" algn="ctr">
                       <a:solidFill>
-                        <a:srgbClr val="E8E3D8"/>
+                        <a:srgbClr val="DCE6F0"/>
                       </a:solidFill>
                       <a:prstDash val="solid"/>
                       <a:round/>
@@ -15312,7 +15360,7 @@
                     </a:lnR>
                     <a:lnT w="6350" cap="flat" cmpd="sng" algn="ctr">
                       <a:solidFill>
-                        <a:srgbClr val="E8E3D8"/>
+                        <a:srgbClr val="DCE6F0"/>
                       </a:solidFill>
                       <a:prstDash val="solid"/>
                       <a:round/>
@@ -15321,7 +15369,7 @@
                     </a:lnT>
                     <a:lnB w="6350" cap="flat" cmpd="sng" algn="ctr">
                       <a:solidFill>
-                        <a:srgbClr val="E8E3D8"/>
+                        <a:srgbClr val="DCE6F0"/>
                       </a:solidFill>
                       <a:prstDash val="solid"/>
                       <a:round/>
@@ -15341,7 +15389,7 @@
                       <a:r>
                         <a:rPr lang="en-US" sz="1050" b="1" dirty="0">
                           <a:solidFill>
-                            <a:srgbClr val="C23A6B"/>
+                            <a:srgbClr val="D1495B"/>
                           </a:solidFill>
                           <a:latin typeface="Calibri" pitchFamily="34" charset="0"/>
                           <a:ea typeface="Calibri" pitchFamily="34" charset="-122"/>
@@ -15359,7 +15407,7 @@
                   <a:tcPr marL="91440" marR="91440" marT="45720" marB="45720" anchor="ctr">
                     <a:lnL w="6350" cap="flat" cmpd="sng" algn="ctr">
                       <a:solidFill>
-                        <a:srgbClr val="E8E3D8"/>
+                        <a:srgbClr val="DCE6F0"/>
                       </a:solidFill>
                       <a:prstDash val="solid"/>
                       <a:round/>
@@ -15368,7 +15416,7 @@
                     </a:lnL>
                     <a:lnR w="6350" cap="flat" cmpd="sng" algn="ctr">
                       <a:solidFill>
-                        <a:srgbClr val="E8E3D8"/>
+                        <a:srgbClr val="DCE6F0"/>
                       </a:solidFill>
                       <a:prstDash val="solid"/>
                       <a:round/>
@@ -15377,7 +15425,7 @@
                     </a:lnR>
                     <a:lnT w="6350" cap="flat" cmpd="sng" algn="ctr">
                       <a:solidFill>
-                        <a:srgbClr val="E8E3D8"/>
+                        <a:srgbClr val="DCE6F0"/>
                       </a:solidFill>
                       <a:prstDash val="solid"/>
                       <a:round/>
@@ -15386,7 +15434,7 @@
                     </a:lnT>
                     <a:lnB w="6350" cap="flat" cmpd="sng" algn="ctr">
                       <a:solidFill>
-                        <a:srgbClr val="E8E3D8"/>
+                        <a:srgbClr val="DCE6F0"/>
                       </a:solidFill>
                       <a:prstDash val="solid"/>
                       <a:round/>
@@ -15408,7 +15456,7 @@
                       <a:r>
                         <a:rPr lang="en-US" sz="1200" dirty="0">
                           <a:solidFill>
-                            <a:srgbClr val="3D4873"/>
+                            <a:srgbClr val="0B2545"/>
                           </a:solidFill>
                           <a:latin typeface="Calibri" pitchFamily="34" charset="0"/>
                           <a:ea typeface="Calibri" pitchFamily="34" charset="-122"/>
@@ -15426,7 +15474,7 @@
                   <a:tcPr marL="91440" marR="91440" marT="45720" marB="45720" anchor="ctr">
                     <a:lnL w="6350" cap="flat" cmpd="sng" algn="ctr">
                       <a:solidFill>
-                        <a:srgbClr val="E8E3D8"/>
+                        <a:srgbClr val="DCE6F0"/>
                       </a:solidFill>
                       <a:prstDash val="solid"/>
                       <a:round/>
@@ -15435,7 +15483,7 @@
                     </a:lnL>
                     <a:lnR w="6350" cap="flat" cmpd="sng" algn="ctr">
                       <a:solidFill>
-                        <a:srgbClr val="E8E3D8"/>
+                        <a:srgbClr val="DCE6F0"/>
                       </a:solidFill>
                       <a:prstDash val="solid"/>
                       <a:round/>
@@ -15444,7 +15492,7 @@
                     </a:lnR>
                     <a:lnT w="6350" cap="flat" cmpd="sng" algn="ctr">
                       <a:solidFill>
-                        <a:srgbClr val="E8E3D8"/>
+                        <a:srgbClr val="DCE6F0"/>
                       </a:solidFill>
                       <a:prstDash val="solid"/>
                       <a:round/>
@@ -15453,7 +15501,7 @@
                     </a:lnT>
                     <a:lnB w="6350" cap="flat" cmpd="sng" algn="ctr">
                       <a:solidFill>
-                        <a:srgbClr val="E8E3D8"/>
+                        <a:srgbClr val="DCE6F0"/>
                       </a:solidFill>
                       <a:prstDash val="solid"/>
                       <a:round/>
@@ -15473,7 +15521,7 @@
                       <a:r>
                         <a:rPr lang="en-US" sz="1200" dirty="0">
                           <a:solidFill>
-                            <a:srgbClr val="6B7394"/>
+                            <a:srgbClr val="5C6B7A"/>
                           </a:solidFill>
                           <a:latin typeface="Courier New" pitchFamily="34" charset="0"/>
                           <a:ea typeface="Courier New" pitchFamily="34" charset="-122"/>
@@ -15491,7 +15539,7 @@
                   <a:tcPr marL="91440" marR="91440" marT="45720" marB="45720" anchor="ctr">
                     <a:lnL w="6350" cap="flat" cmpd="sng" algn="ctr">
                       <a:solidFill>
-                        <a:srgbClr val="E8E3D8"/>
+                        <a:srgbClr val="DCE6F0"/>
                       </a:solidFill>
                       <a:prstDash val="solid"/>
                       <a:round/>
@@ -15500,7 +15548,7 @@
                     </a:lnL>
                     <a:lnR w="6350" cap="flat" cmpd="sng" algn="ctr">
                       <a:solidFill>
-                        <a:srgbClr val="E8E3D8"/>
+                        <a:srgbClr val="DCE6F0"/>
                       </a:solidFill>
                       <a:prstDash val="solid"/>
                       <a:round/>
@@ -15509,7 +15557,7 @@
                     </a:lnR>
                     <a:lnT w="6350" cap="flat" cmpd="sng" algn="ctr">
                       <a:solidFill>
-                        <a:srgbClr val="E8E3D8"/>
+                        <a:srgbClr val="DCE6F0"/>
                       </a:solidFill>
                       <a:prstDash val="solid"/>
                       <a:round/>
@@ -15518,7 +15566,7 @@
                     </a:lnT>
                     <a:lnB w="6350" cap="flat" cmpd="sng" algn="ctr">
                       <a:solidFill>
-                        <a:srgbClr val="E8E3D8"/>
+                        <a:srgbClr val="DCE6F0"/>
                       </a:solidFill>
                       <a:prstDash val="solid"/>
                       <a:round/>
@@ -15541,7 +15589,7 @@
                       <a:r>
                         <a:rPr lang="en-US" sz="1200" dirty="0">
                           <a:solidFill>
-                            <a:srgbClr val="6B7394"/>
+                            <a:srgbClr val="5C6B7A"/>
                           </a:solidFill>
                           <a:latin typeface="Courier New" pitchFamily="34" charset="0"/>
                           <a:ea typeface="Courier New" pitchFamily="34" charset="-122"/>
@@ -15559,7 +15607,7 @@
                   <a:tcPr marL="91440" marR="91440" marT="45720" marB="45720" anchor="ctr">
                     <a:lnL w="6350" cap="flat" cmpd="sng" algn="ctr">
                       <a:solidFill>
-                        <a:srgbClr val="E8E3D8"/>
+                        <a:srgbClr val="DCE6F0"/>
                       </a:solidFill>
                       <a:prstDash val="solid"/>
                       <a:round/>
@@ -15568,7 +15616,7 @@
                     </a:lnL>
                     <a:lnR w="6350" cap="flat" cmpd="sng" algn="ctr">
                       <a:solidFill>
-                        <a:srgbClr val="E8E3D8"/>
+                        <a:srgbClr val="DCE6F0"/>
                       </a:solidFill>
                       <a:prstDash val="solid"/>
                       <a:round/>
@@ -15577,7 +15625,7 @@
                     </a:lnR>
                     <a:lnT w="6350" cap="flat" cmpd="sng" algn="ctr">
                       <a:solidFill>
-                        <a:srgbClr val="E8E3D8"/>
+                        <a:srgbClr val="DCE6F0"/>
                       </a:solidFill>
                       <a:prstDash val="solid"/>
                       <a:round/>
@@ -15586,7 +15634,7 @@
                     </a:lnT>
                     <a:lnB w="6350" cap="flat" cmpd="sng" algn="ctr">
                       <a:solidFill>
-                        <a:srgbClr val="E8E3D8"/>
+                        <a:srgbClr val="DCE6F0"/>
                       </a:solidFill>
                       <a:prstDash val="solid"/>
                       <a:round/>
@@ -15609,7 +15657,7 @@
                       <a:r>
                         <a:rPr lang="en-US" sz="1200" dirty="0">
                           <a:solidFill>
-                            <a:srgbClr val="6B7394"/>
+                            <a:srgbClr val="5C6B7A"/>
                           </a:solidFill>
                           <a:latin typeface="Courier New" pitchFamily="34" charset="0"/>
                           <a:ea typeface="Courier New" pitchFamily="34" charset="-122"/>
@@ -15627,7 +15675,7 @@
                   <a:tcPr marL="91440" marR="91440" marT="45720" marB="45720" anchor="ctr">
                     <a:lnL w="6350" cap="flat" cmpd="sng" algn="ctr">
                       <a:solidFill>
-                        <a:srgbClr val="E8E3D8"/>
+                        <a:srgbClr val="DCE6F0"/>
                       </a:solidFill>
                       <a:prstDash val="solid"/>
                       <a:round/>
@@ -15636,7 +15684,7 @@
                     </a:lnL>
                     <a:lnR w="6350" cap="flat" cmpd="sng" algn="ctr">
                       <a:solidFill>
-                        <a:srgbClr val="E8E3D8"/>
+                        <a:srgbClr val="DCE6F0"/>
                       </a:solidFill>
                       <a:prstDash val="solid"/>
                       <a:round/>
@@ -15645,7 +15693,7 @@
                     </a:lnR>
                     <a:lnT w="6350" cap="flat" cmpd="sng" algn="ctr">
                       <a:solidFill>
-                        <a:srgbClr val="E8E3D8"/>
+                        <a:srgbClr val="DCE6F0"/>
                       </a:solidFill>
                       <a:prstDash val="solid"/>
                       <a:round/>
@@ -15654,7 +15702,7 @@
                     </a:lnT>
                     <a:lnB w="6350" cap="flat" cmpd="sng" algn="ctr">
                       <a:solidFill>
-                        <a:srgbClr val="E8E3D8"/>
+                        <a:srgbClr val="DCE6F0"/>
                       </a:solidFill>
                       <a:prstDash val="solid"/>
                       <a:round/>
@@ -15677,7 +15725,7 @@
                       <a:r>
                         <a:rPr lang="en-US" sz="1200" b="1" dirty="0">
                           <a:solidFill>
-                            <a:srgbClr val="1F2A52"/>
+                            <a:srgbClr val="1A2433"/>
                           </a:solidFill>
                           <a:latin typeface="Courier New" pitchFamily="34" charset="0"/>
                           <a:ea typeface="Courier New" pitchFamily="34" charset="-122"/>
@@ -15695,7 +15743,7 @@
                   <a:tcPr marL="91440" marR="91440" marT="45720" marB="45720" anchor="ctr">
                     <a:lnL w="6350" cap="flat" cmpd="sng" algn="ctr">
                       <a:solidFill>
-                        <a:srgbClr val="E8E3D8"/>
+                        <a:srgbClr val="DCE6F0"/>
                       </a:solidFill>
                       <a:prstDash val="solid"/>
                       <a:round/>
@@ -15704,7 +15752,7 @@
                     </a:lnL>
                     <a:lnR w="6350" cap="flat" cmpd="sng" algn="ctr">
                       <a:solidFill>
-                        <a:srgbClr val="E8E3D8"/>
+                        <a:srgbClr val="DCE6F0"/>
                       </a:solidFill>
                       <a:prstDash val="solid"/>
                       <a:round/>
@@ -15713,7 +15761,7 @@
                     </a:lnR>
                     <a:lnT w="6350" cap="flat" cmpd="sng" algn="ctr">
                       <a:solidFill>
-                        <a:srgbClr val="E8E3D8"/>
+                        <a:srgbClr val="DCE6F0"/>
                       </a:solidFill>
                       <a:prstDash val="solid"/>
                       <a:round/>
@@ -15722,7 +15770,7 @@
                     </a:lnT>
                     <a:lnB w="6350" cap="flat" cmpd="sng" algn="ctr">
                       <a:solidFill>
-                        <a:srgbClr val="E8E3D8"/>
+                        <a:srgbClr val="DCE6F0"/>
                       </a:solidFill>
                       <a:prstDash val="solid"/>
                       <a:round/>
@@ -15730,7 +15778,7 @@
                       <a:tailEnd type="none" w="med" len="med"/>
                     </a:lnB>
                     <a:solidFill>
-                      <a:srgbClr val="FBE9EF"/>
+                      <a:srgbClr val="FBE8EA"/>
                     </a:solidFill>
                   </a:tcPr>
                 </a:tc>
@@ -15747,7 +15795,7 @@
                       <a:r>
                         <a:rPr lang="en-US" sz="1200" dirty="0">
                           <a:solidFill>
-                            <a:srgbClr val="3D4873"/>
+                            <a:srgbClr val="0B2545"/>
                           </a:solidFill>
                           <a:latin typeface="Calibri" pitchFamily="34" charset="0"/>
                           <a:ea typeface="Calibri" pitchFamily="34" charset="-122"/>
@@ -15765,7 +15813,7 @@
                   <a:tcPr marL="91440" marR="91440" marT="45720" marB="45720" anchor="ctr">
                     <a:lnL w="6350" cap="flat" cmpd="sng" algn="ctr">
                       <a:solidFill>
-                        <a:srgbClr val="E8E3D8"/>
+                        <a:srgbClr val="DCE6F0"/>
                       </a:solidFill>
                       <a:prstDash val="solid"/>
                       <a:round/>
@@ -15774,7 +15822,7 @@
                     </a:lnL>
                     <a:lnR w="6350" cap="flat" cmpd="sng" algn="ctr">
                       <a:solidFill>
-                        <a:srgbClr val="E8E3D8"/>
+                        <a:srgbClr val="DCE6F0"/>
                       </a:solidFill>
                       <a:prstDash val="solid"/>
                       <a:round/>
@@ -15783,7 +15831,7 @@
                     </a:lnR>
                     <a:lnT w="6350" cap="flat" cmpd="sng" algn="ctr">
                       <a:solidFill>
-                        <a:srgbClr val="E8E3D8"/>
+                        <a:srgbClr val="DCE6F0"/>
                       </a:solidFill>
                       <a:prstDash val="solid"/>
                       <a:round/>
@@ -15792,7 +15840,7 @@
                     </a:lnT>
                     <a:lnB w="6350" cap="flat" cmpd="sng" algn="ctr">
                       <a:solidFill>
-                        <a:srgbClr val="E8E3D8"/>
+                        <a:srgbClr val="DCE6F0"/>
                       </a:solidFill>
                       <a:prstDash val="solid"/>
                       <a:round/>
@@ -15812,7 +15860,7 @@
                       <a:r>
                         <a:rPr lang="en-US" sz="1200" dirty="0">
                           <a:solidFill>
-                            <a:srgbClr val="6B7394"/>
+                            <a:srgbClr val="5C6B7A"/>
                           </a:solidFill>
                           <a:latin typeface="Courier New" pitchFamily="34" charset="0"/>
                           <a:ea typeface="Courier New" pitchFamily="34" charset="-122"/>
@@ -15830,7 +15878,7 @@
                   <a:tcPr marL="91440" marR="91440" marT="45720" marB="45720" anchor="ctr">
                     <a:lnL w="6350" cap="flat" cmpd="sng" algn="ctr">
                       <a:solidFill>
-                        <a:srgbClr val="E8E3D8"/>
+                        <a:srgbClr val="DCE6F0"/>
                       </a:solidFill>
                       <a:prstDash val="solid"/>
                       <a:round/>
@@ -15839,7 +15887,7 @@
                     </a:lnL>
                     <a:lnR w="6350" cap="flat" cmpd="sng" algn="ctr">
                       <a:solidFill>
-                        <a:srgbClr val="E8E3D8"/>
+                        <a:srgbClr val="DCE6F0"/>
                       </a:solidFill>
                       <a:prstDash val="solid"/>
                       <a:round/>
@@ -15848,7 +15896,7 @@
                     </a:lnR>
                     <a:lnT w="6350" cap="flat" cmpd="sng" algn="ctr">
                       <a:solidFill>
-                        <a:srgbClr val="E8E3D8"/>
+                        <a:srgbClr val="DCE6F0"/>
                       </a:solidFill>
                       <a:prstDash val="solid"/>
                       <a:round/>
@@ -15857,7 +15905,7 @@
                     </a:lnT>
                     <a:lnB w="6350" cap="flat" cmpd="sng" algn="ctr">
                       <a:solidFill>
-                        <a:srgbClr val="E8E3D8"/>
+                        <a:srgbClr val="DCE6F0"/>
                       </a:solidFill>
                       <a:prstDash val="solid"/>
                       <a:round/>
@@ -15880,7 +15928,7 @@
                       <a:r>
                         <a:rPr lang="en-US" sz="1200" dirty="0">
                           <a:solidFill>
-                            <a:srgbClr val="6B7394"/>
+                            <a:srgbClr val="5C6B7A"/>
                           </a:solidFill>
                           <a:latin typeface="Courier New" pitchFamily="34" charset="0"/>
                           <a:ea typeface="Courier New" pitchFamily="34" charset="-122"/>
@@ -15898,7 +15946,7 @@
                   <a:tcPr marL="91440" marR="91440" marT="45720" marB="45720" anchor="ctr">
                     <a:lnL w="6350" cap="flat" cmpd="sng" algn="ctr">
                       <a:solidFill>
-                        <a:srgbClr val="E8E3D8"/>
+                        <a:srgbClr val="DCE6F0"/>
                       </a:solidFill>
                       <a:prstDash val="solid"/>
                       <a:round/>
@@ -15907,7 +15955,7 @@
                     </a:lnL>
                     <a:lnR w="6350" cap="flat" cmpd="sng" algn="ctr">
                       <a:solidFill>
-                        <a:srgbClr val="E8E3D8"/>
+                        <a:srgbClr val="DCE6F0"/>
                       </a:solidFill>
                       <a:prstDash val="solid"/>
                       <a:round/>
@@ -15916,7 +15964,7 @@
                     </a:lnR>
                     <a:lnT w="6350" cap="flat" cmpd="sng" algn="ctr">
                       <a:solidFill>
-                        <a:srgbClr val="E8E3D8"/>
+                        <a:srgbClr val="DCE6F0"/>
                       </a:solidFill>
                       <a:prstDash val="solid"/>
                       <a:round/>
@@ -15925,7 +15973,7 @@
                     </a:lnT>
                     <a:lnB w="6350" cap="flat" cmpd="sng" algn="ctr">
                       <a:solidFill>
-                        <a:srgbClr val="E8E3D8"/>
+                        <a:srgbClr val="DCE6F0"/>
                       </a:solidFill>
                       <a:prstDash val="solid"/>
                       <a:round/>
@@ -15948,7 +15996,7 @@
                       <a:r>
                         <a:rPr lang="en-US" sz="1200" dirty="0">
                           <a:solidFill>
-                            <a:srgbClr val="6B7394"/>
+                            <a:srgbClr val="5C6B7A"/>
                           </a:solidFill>
                           <a:latin typeface="Courier New" pitchFamily="34" charset="0"/>
                           <a:ea typeface="Courier New" pitchFamily="34" charset="-122"/>
@@ -15966,7 +16014,7 @@
                   <a:tcPr marL="91440" marR="91440" marT="45720" marB="45720" anchor="ctr">
                     <a:lnL w="6350" cap="flat" cmpd="sng" algn="ctr">
                       <a:solidFill>
-                        <a:srgbClr val="E8E3D8"/>
+                        <a:srgbClr val="DCE6F0"/>
                       </a:solidFill>
                       <a:prstDash val="solid"/>
                       <a:round/>
@@ -15975,7 +16023,7 @@
                     </a:lnL>
                     <a:lnR w="6350" cap="flat" cmpd="sng" algn="ctr">
                       <a:solidFill>
-                        <a:srgbClr val="E8E3D8"/>
+                        <a:srgbClr val="DCE6F0"/>
                       </a:solidFill>
                       <a:prstDash val="solid"/>
                       <a:round/>
@@ -15984,7 +16032,7 @@
                     </a:lnR>
                     <a:lnT w="6350" cap="flat" cmpd="sng" algn="ctr">
                       <a:solidFill>
-                        <a:srgbClr val="E8E3D8"/>
+                        <a:srgbClr val="DCE6F0"/>
                       </a:solidFill>
                       <a:prstDash val="solid"/>
                       <a:round/>
@@ -15993,7 +16041,7 @@
                     </a:lnT>
                     <a:lnB w="6350" cap="flat" cmpd="sng" algn="ctr">
                       <a:solidFill>
-                        <a:srgbClr val="E8E3D8"/>
+                        <a:srgbClr val="DCE6F0"/>
                       </a:solidFill>
                       <a:prstDash val="solid"/>
                       <a:round/>
@@ -16016,7 +16064,7 @@
                       <a:r>
                         <a:rPr lang="en-US" sz="1200" b="1" dirty="0">
                           <a:solidFill>
-                            <a:srgbClr val="1F2A52"/>
+                            <a:srgbClr val="1A2433"/>
                           </a:solidFill>
                           <a:latin typeface="Courier New" pitchFamily="34" charset="0"/>
                           <a:ea typeface="Courier New" pitchFamily="34" charset="-122"/>
@@ -16034,7 +16082,7 @@
                   <a:tcPr marL="91440" marR="91440" marT="45720" marB="45720" anchor="ctr">
                     <a:lnL w="6350" cap="flat" cmpd="sng" algn="ctr">
                       <a:solidFill>
-                        <a:srgbClr val="E8E3D8"/>
+                        <a:srgbClr val="DCE6F0"/>
                       </a:solidFill>
                       <a:prstDash val="solid"/>
                       <a:round/>
@@ -16043,7 +16091,7 @@
                     </a:lnL>
                     <a:lnR w="6350" cap="flat" cmpd="sng" algn="ctr">
                       <a:solidFill>
-                        <a:srgbClr val="E8E3D8"/>
+                        <a:srgbClr val="DCE6F0"/>
                       </a:solidFill>
                       <a:prstDash val="solid"/>
                       <a:round/>
@@ -16052,7 +16100,7 @@
                     </a:lnR>
                     <a:lnT w="6350" cap="flat" cmpd="sng" algn="ctr">
                       <a:solidFill>
-                        <a:srgbClr val="E8E3D8"/>
+                        <a:srgbClr val="DCE6F0"/>
                       </a:solidFill>
                       <a:prstDash val="solid"/>
                       <a:round/>
@@ -16061,7 +16109,7 @@
                     </a:lnT>
                     <a:lnB w="6350" cap="flat" cmpd="sng" algn="ctr">
                       <a:solidFill>
-                        <a:srgbClr val="E8E3D8"/>
+                        <a:srgbClr val="DCE6F0"/>
                       </a:solidFill>
                       <a:prstDash val="solid"/>
                       <a:round/>
@@ -16069,7 +16117,7 @@
                       <a:tailEnd type="none" w="med" len="med"/>
                     </a:lnB>
                     <a:solidFill>
-                      <a:srgbClr val="FBE9EF"/>
+                      <a:srgbClr val="FBE8EA"/>
                     </a:solidFill>
                   </a:tcPr>
                 </a:tc>
@@ -16086,7 +16134,7 @@
                       <a:r>
                         <a:rPr lang="en-US" sz="1200" dirty="0">
                           <a:solidFill>
-                            <a:srgbClr val="3D4873"/>
+                            <a:srgbClr val="0B2545"/>
                           </a:solidFill>
                           <a:latin typeface="Calibri" pitchFamily="34" charset="0"/>
                           <a:ea typeface="Calibri" pitchFamily="34" charset="-122"/>
@@ -16104,7 +16152,7 @@
                   <a:tcPr marL="91440" marR="91440" marT="45720" marB="45720" anchor="ctr">
                     <a:lnL w="6350" cap="flat" cmpd="sng" algn="ctr">
                       <a:solidFill>
-                        <a:srgbClr val="E8E3D8"/>
+                        <a:srgbClr val="DCE6F0"/>
                       </a:solidFill>
                       <a:prstDash val="solid"/>
                       <a:round/>
@@ -16113,7 +16161,7 @@
                     </a:lnL>
                     <a:lnR w="6350" cap="flat" cmpd="sng" algn="ctr">
                       <a:solidFill>
-                        <a:srgbClr val="E8E3D8"/>
+                        <a:srgbClr val="DCE6F0"/>
                       </a:solidFill>
                       <a:prstDash val="solid"/>
                       <a:round/>
@@ -16122,7 +16170,7 @@
                     </a:lnR>
                     <a:lnT w="6350" cap="flat" cmpd="sng" algn="ctr">
                       <a:solidFill>
-                        <a:srgbClr val="E8E3D8"/>
+                        <a:srgbClr val="DCE6F0"/>
                       </a:solidFill>
                       <a:prstDash val="solid"/>
                       <a:round/>
@@ -16131,7 +16179,7 @@
                     </a:lnT>
                     <a:lnB w="6350" cap="flat" cmpd="sng" algn="ctr">
                       <a:solidFill>
-                        <a:srgbClr val="E8E3D8"/>
+                        <a:srgbClr val="DCE6F0"/>
                       </a:solidFill>
                       <a:prstDash val="solid"/>
                       <a:round/>
@@ -16151,7 +16199,7 @@
                       <a:r>
                         <a:rPr lang="en-US" sz="1200" dirty="0">
                           <a:solidFill>
-                            <a:srgbClr val="6B7394"/>
+                            <a:srgbClr val="5C6B7A"/>
                           </a:solidFill>
                           <a:latin typeface="Courier New" pitchFamily="34" charset="0"/>
                           <a:ea typeface="Courier New" pitchFamily="34" charset="-122"/>
@@ -16169,7 +16217,7 @@
                   <a:tcPr marL="91440" marR="91440" marT="45720" marB="45720" anchor="ctr">
                     <a:lnL w="6350" cap="flat" cmpd="sng" algn="ctr">
                       <a:solidFill>
-                        <a:srgbClr val="E8E3D8"/>
+                        <a:srgbClr val="DCE6F0"/>
                       </a:solidFill>
                       <a:prstDash val="solid"/>
                       <a:round/>
@@ -16178,7 +16226,7 @@
                     </a:lnL>
                     <a:lnR w="6350" cap="flat" cmpd="sng" algn="ctr">
                       <a:solidFill>
-                        <a:srgbClr val="E8E3D8"/>
+                        <a:srgbClr val="DCE6F0"/>
                       </a:solidFill>
                       <a:prstDash val="solid"/>
                       <a:round/>
@@ -16187,7 +16235,7 @@
                     </a:lnR>
                     <a:lnT w="6350" cap="flat" cmpd="sng" algn="ctr">
                       <a:solidFill>
-                        <a:srgbClr val="E8E3D8"/>
+                        <a:srgbClr val="DCE6F0"/>
                       </a:solidFill>
                       <a:prstDash val="solid"/>
                       <a:round/>
@@ -16196,7 +16244,7 @@
                     </a:lnT>
                     <a:lnB w="6350" cap="flat" cmpd="sng" algn="ctr">
                       <a:solidFill>
-                        <a:srgbClr val="E8E3D8"/>
+                        <a:srgbClr val="DCE6F0"/>
                       </a:solidFill>
                       <a:prstDash val="solid"/>
                       <a:round/>
@@ -16219,7 +16267,7 @@
                       <a:r>
                         <a:rPr lang="en-US" sz="1200" dirty="0">
                           <a:solidFill>
-                            <a:srgbClr val="6B7394"/>
+                            <a:srgbClr val="5C6B7A"/>
                           </a:solidFill>
                           <a:latin typeface="Courier New" pitchFamily="34" charset="0"/>
                           <a:ea typeface="Courier New" pitchFamily="34" charset="-122"/>
@@ -16237,7 +16285,7 @@
                   <a:tcPr marL="91440" marR="91440" marT="45720" marB="45720" anchor="ctr">
                     <a:lnL w="6350" cap="flat" cmpd="sng" algn="ctr">
                       <a:solidFill>
-                        <a:srgbClr val="E8E3D8"/>
+                        <a:srgbClr val="DCE6F0"/>
                       </a:solidFill>
                       <a:prstDash val="solid"/>
                       <a:round/>
@@ -16246,7 +16294,7 @@
                     </a:lnL>
                     <a:lnR w="6350" cap="flat" cmpd="sng" algn="ctr">
                       <a:solidFill>
-                        <a:srgbClr val="E8E3D8"/>
+                        <a:srgbClr val="DCE6F0"/>
                       </a:solidFill>
                       <a:prstDash val="solid"/>
                       <a:round/>
@@ -16255,7 +16303,7 @@
                     </a:lnR>
                     <a:lnT w="6350" cap="flat" cmpd="sng" algn="ctr">
                       <a:solidFill>
-                        <a:srgbClr val="E8E3D8"/>
+                        <a:srgbClr val="DCE6F0"/>
                       </a:solidFill>
                       <a:prstDash val="solid"/>
                       <a:round/>
@@ -16264,7 +16312,7 @@
                     </a:lnT>
                     <a:lnB w="6350" cap="flat" cmpd="sng" algn="ctr">
                       <a:solidFill>
-                        <a:srgbClr val="E8E3D8"/>
+                        <a:srgbClr val="DCE6F0"/>
                       </a:solidFill>
                       <a:prstDash val="solid"/>
                       <a:round/>
@@ -16287,7 +16335,7 @@
                       <a:r>
                         <a:rPr lang="en-US" sz="1200" dirty="0">
                           <a:solidFill>
-                            <a:srgbClr val="6B7394"/>
+                            <a:srgbClr val="5C6B7A"/>
                           </a:solidFill>
                           <a:latin typeface="Courier New" pitchFamily="34" charset="0"/>
                           <a:ea typeface="Courier New" pitchFamily="34" charset="-122"/>
@@ -16305,7 +16353,7 @@
                   <a:tcPr marL="91440" marR="91440" marT="45720" marB="45720" anchor="ctr">
                     <a:lnL w="6350" cap="flat" cmpd="sng" algn="ctr">
                       <a:solidFill>
-                        <a:srgbClr val="E8E3D8"/>
+                        <a:srgbClr val="DCE6F0"/>
                       </a:solidFill>
                       <a:prstDash val="solid"/>
                       <a:round/>
@@ -16314,7 +16362,7 @@
                     </a:lnL>
                     <a:lnR w="6350" cap="flat" cmpd="sng" algn="ctr">
                       <a:solidFill>
-                        <a:srgbClr val="E8E3D8"/>
+                        <a:srgbClr val="DCE6F0"/>
                       </a:solidFill>
                       <a:prstDash val="solid"/>
                       <a:round/>
@@ -16323,7 +16371,7 @@
                     </a:lnR>
                     <a:lnT w="6350" cap="flat" cmpd="sng" algn="ctr">
                       <a:solidFill>
-                        <a:srgbClr val="E8E3D8"/>
+                        <a:srgbClr val="DCE6F0"/>
                       </a:solidFill>
                       <a:prstDash val="solid"/>
                       <a:round/>
@@ -16332,7 +16380,7 @@
                     </a:lnT>
                     <a:lnB w="6350" cap="flat" cmpd="sng" algn="ctr">
                       <a:solidFill>
-                        <a:srgbClr val="E8E3D8"/>
+                        <a:srgbClr val="DCE6F0"/>
                       </a:solidFill>
                       <a:prstDash val="solid"/>
                       <a:round/>
@@ -16355,7 +16403,7 @@
                       <a:r>
                         <a:rPr lang="en-US" sz="1200" b="1" dirty="0">
                           <a:solidFill>
-                            <a:srgbClr val="1F2A52"/>
+                            <a:srgbClr val="1A2433"/>
                           </a:solidFill>
                           <a:latin typeface="Courier New" pitchFamily="34" charset="0"/>
                           <a:ea typeface="Courier New" pitchFamily="34" charset="-122"/>
@@ -16373,7 +16421,7 @@
                   <a:tcPr marL="91440" marR="91440" marT="45720" marB="45720" anchor="ctr">
                     <a:lnL w="6350" cap="flat" cmpd="sng" algn="ctr">
                       <a:solidFill>
-                        <a:srgbClr val="E8E3D8"/>
+                        <a:srgbClr val="DCE6F0"/>
                       </a:solidFill>
                       <a:prstDash val="solid"/>
                       <a:round/>
@@ -16382,7 +16430,7 @@
                     </a:lnL>
                     <a:lnR w="6350" cap="flat" cmpd="sng" algn="ctr">
                       <a:solidFill>
-                        <a:srgbClr val="E8E3D8"/>
+                        <a:srgbClr val="DCE6F0"/>
                       </a:solidFill>
                       <a:prstDash val="solid"/>
                       <a:round/>
@@ -16391,7 +16439,7 @@
                     </a:lnR>
                     <a:lnT w="6350" cap="flat" cmpd="sng" algn="ctr">
                       <a:solidFill>
-                        <a:srgbClr val="E8E3D8"/>
+                        <a:srgbClr val="DCE6F0"/>
                       </a:solidFill>
                       <a:prstDash val="solid"/>
                       <a:round/>
@@ -16400,7 +16448,7 @@
                     </a:lnT>
                     <a:lnB w="6350" cap="flat" cmpd="sng" algn="ctr">
                       <a:solidFill>
-                        <a:srgbClr val="E8E3D8"/>
+                        <a:srgbClr val="DCE6F0"/>
                       </a:solidFill>
                       <a:prstDash val="solid"/>
                       <a:round/>
@@ -16408,7 +16456,7 @@
                       <a:tailEnd type="none" w="med" len="med"/>
                     </a:lnB>
                     <a:solidFill>
-                      <a:srgbClr val="FBE9EF"/>
+                      <a:srgbClr val="FBE8EA"/>
                     </a:solidFill>
                   </a:tcPr>
                 </a:tc>
@@ -16425,7 +16473,7 @@
                       <a:r>
                         <a:rPr lang="en-US" sz="1200" dirty="0">
                           <a:solidFill>
-                            <a:srgbClr val="3D4873"/>
+                            <a:srgbClr val="0B2545"/>
                           </a:solidFill>
                           <a:latin typeface="Calibri" pitchFamily="34" charset="0"/>
                           <a:ea typeface="Calibri" pitchFamily="34" charset="-122"/>
@@ -16443,7 +16491,7 @@
                   <a:tcPr marL="91440" marR="91440" marT="45720" marB="45720" anchor="ctr">
                     <a:lnL w="6350" cap="flat" cmpd="sng" algn="ctr">
                       <a:solidFill>
-                        <a:srgbClr val="E8E3D8"/>
+                        <a:srgbClr val="DCE6F0"/>
                       </a:solidFill>
                       <a:prstDash val="solid"/>
                       <a:round/>
@@ -16452,7 +16500,7 @@
                     </a:lnL>
                     <a:lnR w="6350" cap="flat" cmpd="sng" algn="ctr">
                       <a:solidFill>
-                        <a:srgbClr val="E8E3D8"/>
+                        <a:srgbClr val="DCE6F0"/>
                       </a:solidFill>
                       <a:prstDash val="solid"/>
                       <a:round/>
@@ -16461,7 +16509,7 @@
                     </a:lnR>
                     <a:lnT w="6350" cap="flat" cmpd="sng" algn="ctr">
                       <a:solidFill>
-                        <a:srgbClr val="E8E3D8"/>
+                        <a:srgbClr val="DCE6F0"/>
                       </a:solidFill>
                       <a:prstDash val="solid"/>
                       <a:round/>
@@ -16470,7 +16518,7 @@
                     </a:lnT>
                     <a:lnB w="6350" cap="flat" cmpd="sng" algn="ctr">
                       <a:solidFill>
-                        <a:srgbClr val="E8E3D8"/>
+                        <a:srgbClr val="DCE6F0"/>
                       </a:solidFill>
                       <a:prstDash val="solid"/>
                       <a:round/>
@@ -16490,7 +16538,7 @@
                       <a:r>
                         <a:rPr lang="en-US" sz="1200" b="1" dirty="0">
                           <a:solidFill>
-                            <a:srgbClr val="1F2A52"/>
+                            <a:srgbClr val="1A2433"/>
                           </a:solidFill>
                           <a:latin typeface="Courier New" pitchFamily="34" charset="0"/>
                           <a:ea typeface="Courier New" pitchFamily="34" charset="-122"/>
@@ -16508,7 +16556,7 @@
                   <a:tcPr marL="91440" marR="91440" marT="45720" marB="45720" anchor="ctr">
                     <a:lnL w="6350" cap="flat" cmpd="sng" algn="ctr">
                       <a:solidFill>
-                        <a:srgbClr val="E8E3D8"/>
+                        <a:srgbClr val="DCE6F0"/>
                       </a:solidFill>
                       <a:prstDash val="solid"/>
                       <a:round/>
@@ -16517,7 +16565,7 @@
                     </a:lnL>
                     <a:lnR w="6350" cap="flat" cmpd="sng" algn="ctr">
                       <a:solidFill>
-                        <a:srgbClr val="E8E3D8"/>
+                        <a:srgbClr val="DCE6F0"/>
                       </a:solidFill>
                       <a:prstDash val="solid"/>
                       <a:round/>
@@ -16526,7 +16574,7 @@
                     </a:lnR>
                     <a:lnT w="6350" cap="flat" cmpd="sng" algn="ctr">
                       <a:solidFill>
-                        <a:srgbClr val="E8E3D8"/>
+                        <a:srgbClr val="DCE6F0"/>
                       </a:solidFill>
                       <a:prstDash val="solid"/>
                       <a:round/>
@@ -16535,7 +16583,7 @@
                     </a:lnT>
                     <a:lnB w="6350" cap="flat" cmpd="sng" algn="ctr">
                       <a:solidFill>
-                        <a:srgbClr val="E8E3D8"/>
+                        <a:srgbClr val="DCE6F0"/>
                       </a:solidFill>
                       <a:prstDash val="solid"/>
                       <a:round/>
@@ -16558,7 +16606,7 @@
                       <a:r>
                         <a:rPr lang="en-US" sz="1200" dirty="0">
                           <a:solidFill>
-                            <a:srgbClr val="6B7394"/>
+                            <a:srgbClr val="5C6B7A"/>
                           </a:solidFill>
                           <a:latin typeface="Courier New" pitchFamily="34" charset="0"/>
                           <a:ea typeface="Courier New" pitchFamily="34" charset="-122"/>
@@ -16576,7 +16624,7 @@
                   <a:tcPr marL="91440" marR="91440" marT="45720" marB="45720" anchor="ctr">
                     <a:lnL w="6350" cap="flat" cmpd="sng" algn="ctr">
                       <a:solidFill>
-                        <a:srgbClr val="E8E3D8"/>
+                        <a:srgbClr val="DCE6F0"/>
                       </a:solidFill>
                       <a:prstDash val="solid"/>
                       <a:round/>
@@ -16585,7 +16633,7 @@
                     </a:lnL>
                     <a:lnR w="6350" cap="flat" cmpd="sng" algn="ctr">
                       <a:solidFill>
-                        <a:srgbClr val="E8E3D8"/>
+                        <a:srgbClr val="DCE6F0"/>
                       </a:solidFill>
                       <a:prstDash val="solid"/>
                       <a:round/>
@@ -16594,7 +16642,7 @@
                     </a:lnR>
                     <a:lnT w="6350" cap="flat" cmpd="sng" algn="ctr">
                       <a:solidFill>
-                        <a:srgbClr val="E8E3D8"/>
+                        <a:srgbClr val="DCE6F0"/>
                       </a:solidFill>
                       <a:prstDash val="solid"/>
                       <a:round/>
@@ -16603,7 +16651,7 @@
                     </a:lnT>
                     <a:lnB w="6350" cap="flat" cmpd="sng" algn="ctr">
                       <a:solidFill>
-                        <a:srgbClr val="E8E3D8"/>
+                        <a:srgbClr val="DCE6F0"/>
                       </a:solidFill>
                       <a:prstDash val="solid"/>
                       <a:round/>
@@ -16626,7 +16674,7 @@
                       <a:r>
                         <a:rPr lang="en-US" sz="1200" dirty="0">
                           <a:solidFill>
-                            <a:srgbClr val="6B7394"/>
+                            <a:srgbClr val="5C6B7A"/>
                           </a:solidFill>
                           <a:latin typeface="Courier New" pitchFamily="34" charset="0"/>
                           <a:ea typeface="Courier New" pitchFamily="34" charset="-122"/>
@@ -16644,7 +16692,7 @@
                   <a:tcPr marL="91440" marR="91440" marT="45720" marB="45720" anchor="ctr">
                     <a:lnL w="6350" cap="flat" cmpd="sng" algn="ctr">
                       <a:solidFill>
-                        <a:srgbClr val="E8E3D8"/>
+                        <a:srgbClr val="DCE6F0"/>
                       </a:solidFill>
                       <a:prstDash val="solid"/>
                       <a:round/>
@@ -16653,7 +16701,7 @@
                     </a:lnL>
                     <a:lnR w="6350" cap="flat" cmpd="sng" algn="ctr">
                       <a:solidFill>
-                        <a:srgbClr val="E8E3D8"/>
+                        <a:srgbClr val="DCE6F0"/>
                       </a:solidFill>
                       <a:prstDash val="solid"/>
                       <a:round/>
@@ -16662,7 +16710,7 @@
                     </a:lnR>
                     <a:lnT w="6350" cap="flat" cmpd="sng" algn="ctr">
                       <a:solidFill>
-                        <a:srgbClr val="E8E3D8"/>
+                        <a:srgbClr val="DCE6F0"/>
                       </a:solidFill>
                       <a:prstDash val="solid"/>
                       <a:round/>
@@ -16671,7 +16719,7 @@
                     </a:lnT>
                     <a:lnB w="6350" cap="flat" cmpd="sng" algn="ctr">
                       <a:solidFill>
-                        <a:srgbClr val="E8E3D8"/>
+                        <a:srgbClr val="DCE6F0"/>
                       </a:solidFill>
                       <a:prstDash val="solid"/>
                       <a:round/>
@@ -16694,7 +16742,7 @@
                       <a:r>
                         <a:rPr lang="en-US" sz="1200" dirty="0">
                           <a:solidFill>
-                            <a:srgbClr val="6B7394"/>
+                            <a:srgbClr val="5C6B7A"/>
                           </a:solidFill>
                           <a:latin typeface="Courier New" pitchFamily="34" charset="0"/>
                           <a:ea typeface="Courier New" pitchFamily="34" charset="-122"/>
@@ -16712,7 +16760,7 @@
                   <a:tcPr marL="91440" marR="91440" marT="45720" marB="45720" anchor="ctr">
                     <a:lnL w="6350" cap="flat" cmpd="sng" algn="ctr">
                       <a:solidFill>
-                        <a:srgbClr val="E8E3D8"/>
+                        <a:srgbClr val="DCE6F0"/>
                       </a:solidFill>
                       <a:prstDash val="solid"/>
                       <a:round/>
@@ -16721,7 +16769,7 @@
                     </a:lnL>
                     <a:lnR w="6350" cap="flat" cmpd="sng" algn="ctr">
                       <a:solidFill>
-                        <a:srgbClr val="E8E3D8"/>
+                        <a:srgbClr val="DCE6F0"/>
                       </a:solidFill>
                       <a:prstDash val="solid"/>
                       <a:round/>
@@ -16730,7 +16778,7 @@
                     </a:lnR>
                     <a:lnT w="6350" cap="flat" cmpd="sng" algn="ctr">
                       <a:solidFill>
-                        <a:srgbClr val="E8E3D8"/>
+                        <a:srgbClr val="DCE6F0"/>
                       </a:solidFill>
                       <a:prstDash val="solid"/>
                       <a:round/>
@@ -16739,7 +16787,7 @@
                     </a:lnT>
                     <a:lnB w="6350" cap="flat" cmpd="sng" algn="ctr">
                       <a:solidFill>
-                        <a:srgbClr val="E8E3D8"/>
+                        <a:srgbClr val="DCE6F0"/>
                       </a:solidFill>
                       <a:prstDash val="solid"/>
                       <a:round/>
@@ -16747,7 +16795,7 @@
                       <a:tailEnd type="none" w="med" len="med"/>
                     </a:lnB>
                     <a:solidFill>
-                      <a:srgbClr val="FBE9EF"/>
+                      <a:srgbClr val="FBE8EA"/>
                     </a:solidFill>
                   </a:tcPr>
                 </a:tc>
@@ -16764,7 +16812,7 @@
                       <a:r>
                         <a:rPr lang="en-US" sz="1200" dirty="0">
                           <a:solidFill>
-                            <a:srgbClr val="3D4873"/>
+                            <a:srgbClr val="0B2545"/>
                           </a:solidFill>
                           <a:latin typeface="Calibri" pitchFamily="34" charset="0"/>
                           <a:ea typeface="Calibri" pitchFamily="34" charset="-122"/>
@@ -16782,7 +16830,7 @@
                   <a:tcPr marL="91440" marR="91440" marT="45720" marB="45720" anchor="ctr">
                     <a:lnL w="6350" cap="flat" cmpd="sng" algn="ctr">
                       <a:solidFill>
-                        <a:srgbClr val="E8E3D8"/>
+                        <a:srgbClr val="DCE6F0"/>
                       </a:solidFill>
                       <a:prstDash val="solid"/>
                       <a:round/>
@@ -16791,7 +16839,7 @@
                     </a:lnL>
                     <a:lnR w="6350" cap="flat" cmpd="sng" algn="ctr">
                       <a:solidFill>
-                        <a:srgbClr val="E8E3D8"/>
+                        <a:srgbClr val="DCE6F0"/>
                       </a:solidFill>
                       <a:prstDash val="solid"/>
                       <a:round/>
@@ -16800,7 +16848,7 @@
                     </a:lnR>
                     <a:lnT w="6350" cap="flat" cmpd="sng" algn="ctr">
                       <a:solidFill>
-                        <a:srgbClr val="E8E3D8"/>
+                        <a:srgbClr val="DCE6F0"/>
                       </a:solidFill>
                       <a:prstDash val="solid"/>
                       <a:round/>
@@ -16809,7 +16857,7 @@
                     </a:lnT>
                     <a:lnB w="6350" cap="flat" cmpd="sng" algn="ctr">
                       <a:solidFill>
-                        <a:srgbClr val="E8E3D8"/>
+                        <a:srgbClr val="DCE6F0"/>
                       </a:solidFill>
                       <a:prstDash val="solid"/>
                       <a:round/>
@@ -16829,7 +16877,7 @@
                       <a:r>
                         <a:rPr lang="en-US" sz="1200" dirty="0">
                           <a:solidFill>
-                            <a:srgbClr val="6B7394"/>
+                            <a:srgbClr val="5C6B7A"/>
                           </a:solidFill>
                           <a:latin typeface="Courier New" pitchFamily="34" charset="0"/>
                           <a:ea typeface="Courier New" pitchFamily="34" charset="-122"/>
@@ -16847,7 +16895,7 @@
                   <a:tcPr marL="91440" marR="91440" marT="45720" marB="45720" anchor="ctr">
                     <a:lnL w="6350" cap="flat" cmpd="sng" algn="ctr">
                       <a:solidFill>
-                        <a:srgbClr val="E8E3D8"/>
+                        <a:srgbClr val="DCE6F0"/>
                       </a:solidFill>
                       <a:prstDash val="solid"/>
                       <a:round/>
@@ -16856,7 +16904,7 @@
                     </a:lnL>
                     <a:lnR w="6350" cap="flat" cmpd="sng" algn="ctr">
                       <a:solidFill>
-                        <a:srgbClr val="E8E3D8"/>
+                        <a:srgbClr val="DCE6F0"/>
                       </a:solidFill>
                       <a:prstDash val="solid"/>
                       <a:round/>
@@ -16865,7 +16913,7 @@
                     </a:lnR>
                     <a:lnT w="6350" cap="flat" cmpd="sng" algn="ctr">
                       <a:solidFill>
-                        <a:srgbClr val="E8E3D8"/>
+                        <a:srgbClr val="DCE6F0"/>
                       </a:solidFill>
                       <a:prstDash val="solid"/>
                       <a:round/>
@@ -16874,7 +16922,7 @@
                     </a:lnT>
                     <a:lnB w="6350" cap="flat" cmpd="sng" algn="ctr">
                       <a:solidFill>
-                        <a:srgbClr val="E8E3D8"/>
+                        <a:srgbClr val="DCE6F0"/>
                       </a:solidFill>
                       <a:prstDash val="solid"/>
                       <a:round/>
@@ -16897,7 +16945,7 @@
                       <a:r>
                         <a:rPr lang="en-US" sz="1200" dirty="0">
                           <a:solidFill>
-                            <a:srgbClr val="6B7394"/>
+                            <a:srgbClr val="5C6B7A"/>
                           </a:solidFill>
                           <a:latin typeface="Courier New" pitchFamily="34" charset="0"/>
                           <a:ea typeface="Courier New" pitchFamily="34" charset="-122"/>
@@ -16915,7 +16963,7 @@
                   <a:tcPr marL="91440" marR="91440" marT="45720" marB="45720" anchor="ctr">
                     <a:lnL w="6350" cap="flat" cmpd="sng" algn="ctr">
                       <a:solidFill>
-                        <a:srgbClr val="E8E3D8"/>
+                        <a:srgbClr val="DCE6F0"/>
                       </a:solidFill>
                       <a:prstDash val="solid"/>
                       <a:round/>
@@ -16924,7 +16972,7 @@
                     </a:lnL>
                     <a:lnR w="6350" cap="flat" cmpd="sng" algn="ctr">
                       <a:solidFill>
-                        <a:srgbClr val="E8E3D8"/>
+                        <a:srgbClr val="DCE6F0"/>
                       </a:solidFill>
                       <a:prstDash val="solid"/>
                       <a:round/>
@@ -16933,7 +16981,7 @@
                     </a:lnR>
                     <a:lnT w="6350" cap="flat" cmpd="sng" algn="ctr">
                       <a:solidFill>
-                        <a:srgbClr val="E8E3D8"/>
+                        <a:srgbClr val="DCE6F0"/>
                       </a:solidFill>
                       <a:prstDash val="solid"/>
                       <a:round/>
@@ -16942,7 +16990,7 @@
                     </a:lnT>
                     <a:lnB w="6350" cap="flat" cmpd="sng" algn="ctr">
                       <a:solidFill>
-                        <a:srgbClr val="E8E3D8"/>
+                        <a:srgbClr val="DCE6F0"/>
                       </a:solidFill>
                       <a:prstDash val="solid"/>
                       <a:round/>
@@ -16965,7 +17013,7 @@
                       <a:r>
                         <a:rPr lang="en-US" sz="1200" dirty="0">
                           <a:solidFill>
-                            <a:srgbClr val="6B7394"/>
+                            <a:srgbClr val="5C6B7A"/>
                           </a:solidFill>
                           <a:latin typeface="Courier New" pitchFamily="34" charset="0"/>
                           <a:ea typeface="Courier New" pitchFamily="34" charset="-122"/>
@@ -16983,7 +17031,7 @@
                   <a:tcPr marL="91440" marR="91440" marT="45720" marB="45720" anchor="ctr">
                     <a:lnL w="6350" cap="flat" cmpd="sng" algn="ctr">
                       <a:solidFill>
-                        <a:srgbClr val="E8E3D8"/>
+                        <a:srgbClr val="DCE6F0"/>
                       </a:solidFill>
                       <a:prstDash val="solid"/>
                       <a:round/>
@@ -16992,7 +17040,7 @@
                     </a:lnL>
                     <a:lnR w="6350" cap="flat" cmpd="sng" algn="ctr">
                       <a:solidFill>
-                        <a:srgbClr val="E8E3D8"/>
+                        <a:srgbClr val="DCE6F0"/>
                       </a:solidFill>
                       <a:prstDash val="solid"/>
                       <a:round/>
@@ -17001,7 +17049,7 @@
                     </a:lnR>
                     <a:lnT w="6350" cap="flat" cmpd="sng" algn="ctr">
                       <a:solidFill>
-                        <a:srgbClr val="E8E3D8"/>
+                        <a:srgbClr val="DCE6F0"/>
                       </a:solidFill>
                       <a:prstDash val="solid"/>
                       <a:round/>
@@ -17010,7 +17058,7 @@
                     </a:lnT>
                     <a:lnB w="6350" cap="flat" cmpd="sng" algn="ctr">
                       <a:solidFill>
-                        <a:srgbClr val="E8E3D8"/>
+                        <a:srgbClr val="DCE6F0"/>
                       </a:solidFill>
                       <a:prstDash val="solid"/>
                       <a:round/>
@@ -17033,7 +17081,7 @@
                       <a:r>
                         <a:rPr lang="en-US" sz="1200" b="1" dirty="0">
                           <a:solidFill>
-                            <a:srgbClr val="1F2A52"/>
+                            <a:srgbClr val="1A2433"/>
                           </a:solidFill>
                           <a:latin typeface="Courier New" pitchFamily="34" charset="0"/>
                           <a:ea typeface="Courier New" pitchFamily="34" charset="-122"/>
@@ -17051,7 +17099,7 @@
                   <a:tcPr marL="91440" marR="91440" marT="45720" marB="45720" anchor="ctr">
                     <a:lnL w="6350" cap="flat" cmpd="sng" algn="ctr">
                       <a:solidFill>
-                        <a:srgbClr val="E8E3D8"/>
+                        <a:srgbClr val="DCE6F0"/>
                       </a:solidFill>
                       <a:prstDash val="solid"/>
                       <a:round/>
@@ -17060,7 +17108,7 @@
                     </a:lnL>
                     <a:lnR w="6350" cap="flat" cmpd="sng" algn="ctr">
                       <a:solidFill>
-                        <a:srgbClr val="E8E3D8"/>
+                        <a:srgbClr val="DCE6F0"/>
                       </a:solidFill>
                       <a:prstDash val="solid"/>
                       <a:round/>
@@ -17069,7 +17117,7 @@
                     </a:lnR>
                     <a:lnT w="6350" cap="flat" cmpd="sng" algn="ctr">
                       <a:solidFill>
-                        <a:srgbClr val="E8E3D8"/>
+                        <a:srgbClr val="DCE6F0"/>
                       </a:solidFill>
                       <a:prstDash val="solid"/>
                       <a:round/>
@@ -17078,7 +17126,7 @@
                     </a:lnT>
                     <a:lnB w="6350" cap="flat" cmpd="sng" algn="ctr">
                       <a:solidFill>
-                        <a:srgbClr val="E8E3D8"/>
+                        <a:srgbClr val="DCE6F0"/>
                       </a:solidFill>
                       <a:prstDash val="solid"/>
                       <a:round/>
@@ -17086,7 +17134,7 @@
                       <a:tailEnd type="none" w="med" len="med"/>
                     </a:lnB>
                     <a:solidFill>
-                      <a:srgbClr val="FBE9EF"/>
+                      <a:srgbClr val="FBE8EA"/>
                     </a:solidFill>
                   </a:tcPr>
                 </a:tc>
@@ -17103,7 +17151,7 @@
                       <a:r>
                         <a:rPr lang="en-US" sz="1200" dirty="0">
                           <a:solidFill>
-                            <a:srgbClr val="3D4873"/>
+                            <a:srgbClr val="0B2545"/>
                           </a:solidFill>
                           <a:latin typeface="Calibri" pitchFamily="34" charset="0"/>
                           <a:ea typeface="Calibri" pitchFamily="34" charset="-122"/>
@@ -17121,7 +17169,7 @@
                   <a:tcPr marL="91440" marR="91440" marT="45720" marB="45720" anchor="ctr">
                     <a:lnL w="6350" cap="flat" cmpd="sng" algn="ctr">
                       <a:solidFill>
-                        <a:srgbClr val="E8E3D8"/>
+                        <a:srgbClr val="DCE6F0"/>
                       </a:solidFill>
                       <a:prstDash val="solid"/>
                       <a:round/>
@@ -17130,7 +17178,7 @@
                     </a:lnL>
                     <a:lnR w="6350" cap="flat" cmpd="sng" algn="ctr">
                       <a:solidFill>
-                        <a:srgbClr val="E8E3D8"/>
+                        <a:srgbClr val="DCE6F0"/>
                       </a:solidFill>
                       <a:prstDash val="solid"/>
                       <a:round/>
@@ -17139,7 +17187,7 @@
                     </a:lnR>
                     <a:lnT w="6350" cap="flat" cmpd="sng" algn="ctr">
                       <a:solidFill>
-                        <a:srgbClr val="E8E3D8"/>
+                        <a:srgbClr val="DCE6F0"/>
                       </a:solidFill>
                       <a:prstDash val="solid"/>
                       <a:round/>
@@ -17148,7 +17196,7 @@
                     </a:lnT>
                     <a:lnB w="6350" cap="flat" cmpd="sng" algn="ctr">
                       <a:solidFill>
-                        <a:srgbClr val="E8E3D8"/>
+                        <a:srgbClr val="DCE6F0"/>
                       </a:solidFill>
                       <a:prstDash val="solid"/>
                       <a:round/>
@@ -17168,7 +17216,7 @@
                       <a:r>
                         <a:rPr lang="en-US" sz="1200" dirty="0">
                           <a:solidFill>
-                            <a:srgbClr val="6B7394"/>
+                            <a:srgbClr val="5C6B7A"/>
                           </a:solidFill>
                           <a:latin typeface="Courier New" pitchFamily="34" charset="0"/>
                           <a:ea typeface="Courier New" pitchFamily="34" charset="-122"/>
@@ -17186,7 +17234,7 @@
                   <a:tcPr marL="91440" marR="91440" marT="45720" marB="45720" anchor="ctr">
                     <a:lnL w="6350" cap="flat" cmpd="sng" algn="ctr">
                       <a:solidFill>
-                        <a:srgbClr val="E8E3D8"/>
+                        <a:srgbClr val="DCE6F0"/>
                       </a:solidFill>
                       <a:prstDash val="solid"/>
                       <a:round/>
@@ -17195,7 +17243,7 @@
                     </a:lnL>
                     <a:lnR w="6350" cap="flat" cmpd="sng" algn="ctr">
                       <a:solidFill>
-                        <a:srgbClr val="E8E3D8"/>
+                        <a:srgbClr val="DCE6F0"/>
                       </a:solidFill>
                       <a:prstDash val="solid"/>
                       <a:round/>
@@ -17204,7 +17252,7 @@
                     </a:lnR>
                     <a:lnT w="6350" cap="flat" cmpd="sng" algn="ctr">
                       <a:solidFill>
-                        <a:srgbClr val="E8E3D8"/>
+                        <a:srgbClr val="DCE6F0"/>
                       </a:solidFill>
                       <a:prstDash val="solid"/>
                       <a:round/>
@@ -17213,7 +17261,7 @@
                     </a:lnT>
                     <a:lnB w="6350" cap="flat" cmpd="sng" algn="ctr">
                       <a:solidFill>
-                        <a:srgbClr val="E8E3D8"/>
+                        <a:srgbClr val="DCE6F0"/>
                       </a:solidFill>
                       <a:prstDash val="solid"/>
                       <a:round/>
@@ -17236,7 +17284,7 @@
                       <a:r>
                         <a:rPr lang="en-US" sz="1200" dirty="0">
                           <a:solidFill>
-                            <a:srgbClr val="6B7394"/>
+                            <a:srgbClr val="5C6B7A"/>
                           </a:solidFill>
                           <a:latin typeface="Courier New" pitchFamily="34" charset="0"/>
                           <a:ea typeface="Courier New" pitchFamily="34" charset="-122"/>
@@ -17254,7 +17302,7 @@
                   <a:tcPr marL="91440" marR="91440" marT="45720" marB="45720" anchor="ctr">
                     <a:lnL w="6350" cap="flat" cmpd="sng" algn="ctr">
                       <a:solidFill>
-                        <a:srgbClr val="E8E3D8"/>
+                        <a:srgbClr val="DCE6F0"/>
                       </a:solidFill>
                       <a:prstDash val="solid"/>
                       <a:round/>
@@ -17263,7 +17311,7 @@
                     </a:lnL>
                     <a:lnR w="6350" cap="flat" cmpd="sng" algn="ctr">
                       <a:solidFill>
-                        <a:srgbClr val="E8E3D8"/>
+                        <a:srgbClr val="DCE6F0"/>
                       </a:solidFill>
                       <a:prstDash val="solid"/>
                       <a:round/>
@@ -17272,7 +17320,7 @@
                     </a:lnR>
                     <a:lnT w="6350" cap="flat" cmpd="sng" algn="ctr">
                       <a:solidFill>
-                        <a:srgbClr val="E8E3D8"/>
+                        <a:srgbClr val="DCE6F0"/>
                       </a:solidFill>
                       <a:prstDash val="solid"/>
                       <a:round/>
@@ -17281,7 +17329,7 @@
                     </a:lnT>
                     <a:lnB w="6350" cap="flat" cmpd="sng" algn="ctr">
                       <a:solidFill>
-                        <a:srgbClr val="E8E3D8"/>
+                        <a:srgbClr val="DCE6F0"/>
                       </a:solidFill>
                       <a:prstDash val="solid"/>
                       <a:round/>
@@ -17304,7 +17352,7 @@
                       <a:r>
                         <a:rPr lang="en-US" sz="1200" dirty="0">
                           <a:solidFill>
-                            <a:srgbClr val="6B7394"/>
+                            <a:srgbClr val="5C6B7A"/>
                           </a:solidFill>
                           <a:latin typeface="Courier New" pitchFamily="34" charset="0"/>
                           <a:ea typeface="Courier New" pitchFamily="34" charset="-122"/>
@@ -17322,7 +17370,7 @@
                   <a:tcPr marL="91440" marR="91440" marT="45720" marB="45720" anchor="ctr">
                     <a:lnL w="6350" cap="flat" cmpd="sng" algn="ctr">
                       <a:solidFill>
-                        <a:srgbClr val="E8E3D8"/>
+                        <a:srgbClr val="DCE6F0"/>
                       </a:solidFill>
                       <a:prstDash val="solid"/>
                       <a:round/>
@@ -17331,7 +17379,7 @@
                     </a:lnL>
                     <a:lnR w="6350" cap="flat" cmpd="sng" algn="ctr">
                       <a:solidFill>
-                        <a:srgbClr val="E8E3D8"/>
+                        <a:srgbClr val="DCE6F0"/>
                       </a:solidFill>
                       <a:prstDash val="solid"/>
                       <a:round/>
@@ -17340,7 +17388,7 @@
                     </a:lnR>
                     <a:lnT w="6350" cap="flat" cmpd="sng" algn="ctr">
                       <a:solidFill>
-                        <a:srgbClr val="E8E3D8"/>
+                        <a:srgbClr val="DCE6F0"/>
                       </a:solidFill>
                       <a:prstDash val="solid"/>
                       <a:round/>
@@ -17349,7 +17397,7 @@
                     </a:lnT>
                     <a:lnB w="6350" cap="flat" cmpd="sng" algn="ctr">
                       <a:solidFill>
-                        <a:srgbClr val="E8E3D8"/>
+                        <a:srgbClr val="DCE6F0"/>
                       </a:solidFill>
                       <a:prstDash val="solid"/>
                       <a:round/>
@@ -17372,7 +17420,7 @@
                       <a:r>
                         <a:rPr lang="en-US" sz="1200" b="1" dirty="0">
                           <a:solidFill>
-                            <a:srgbClr val="1F2A52"/>
+                            <a:srgbClr val="1A2433"/>
                           </a:solidFill>
                           <a:latin typeface="Courier New" pitchFamily="34" charset="0"/>
                           <a:ea typeface="Courier New" pitchFamily="34" charset="-122"/>
@@ -17390,7 +17438,7 @@
                   <a:tcPr marL="91440" marR="91440" marT="45720" marB="45720" anchor="ctr">
                     <a:lnL w="6350" cap="flat" cmpd="sng" algn="ctr">
                       <a:solidFill>
-                        <a:srgbClr val="E8E3D8"/>
+                        <a:srgbClr val="DCE6F0"/>
                       </a:solidFill>
                       <a:prstDash val="solid"/>
                       <a:round/>
@@ -17399,7 +17447,7 @@
                     </a:lnL>
                     <a:lnR w="6350" cap="flat" cmpd="sng" algn="ctr">
                       <a:solidFill>
-                        <a:srgbClr val="E8E3D8"/>
+                        <a:srgbClr val="DCE6F0"/>
                       </a:solidFill>
                       <a:prstDash val="solid"/>
                       <a:round/>
@@ -17408,7 +17456,7 @@
                     </a:lnR>
                     <a:lnT w="6350" cap="flat" cmpd="sng" algn="ctr">
                       <a:solidFill>
-                        <a:srgbClr val="E8E3D8"/>
+                        <a:srgbClr val="DCE6F0"/>
                       </a:solidFill>
                       <a:prstDash val="solid"/>
                       <a:round/>
@@ -17417,7 +17465,7 @@
                     </a:lnT>
                     <a:lnB w="6350" cap="flat" cmpd="sng" algn="ctr">
                       <a:solidFill>
-                        <a:srgbClr val="E8E3D8"/>
+                        <a:srgbClr val="DCE6F0"/>
                       </a:solidFill>
                       <a:prstDash val="solid"/>
                       <a:round/>
@@ -17425,7 +17473,7 @@
                       <a:tailEnd type="none" w="med" len="med"/>
                     </a:lnB>
                     <a:solidFill>
-                      <a:srgbClr val="FBE9EF"/>
+                      <a:srgbClr val="FBE8EA"/>
                     </a:solidFill>
                   </a:tcPr>
                 </a:tc>
